--- a/docs/pitch/ima-pitch.pptx
+++ b/docs/pitch/ima-pitch.pptx
@@ -8,6 +8,10 @@
     <p:sldId id="256" r:id="rId7"/>
     <p:sldId id="257" r:id="rId8"/>
     <p:sldId id="258" r:id="rId9"/>
+    <p:sldId id="259" r:id="rId10"/>
+    <p:sldId id="260" r:id="rId11"/>
+    <p:sldId id="261" r:id="rId12"/>
+    <p:sldId id="262" r:id="rId13"/>
   </p:sldIdLst>
   <p:sldSz cx="12192000" cy="6858000" type="screen4x3"/>
   <p:notesSz cx="6858000" cy="9144000"/>
@@ -8113,6 +8117,6615 @@
 </p:sld>
 </file>
 
+<file path=ppt/slides/slide4.xml><?xml version="1.0" encoding="utf-8"?>
+<p:sld xmlns:a="http://schemas.openxmlformats.org/drawingml/2006/main" xmlns:p="http://schemas.openxmlformats.org/presentationml/2006/main" xmlns:r="http://schemas.openxmlformats.org/officeDocument/2006/relationships">
+  <p:cSld>
+    <p:bg>
+      <p:bgPr>
+        <a:solidFill>
+          <a:srgbClr val="0C0C0D"/>
+        </a:solidFill>
+        <a:effectLst/>
+      </p:bgPr>
+    </p:bg>
+    <p:spTree>
+      <p:nvGrpSpPr>
+        <p:cNvPr id="1" name=""/>
+        <p:cNvGrpSpPr/>
+        <p:nvPr/>
+      </p:nvGrpSpPr>
+      <p:grpSpPr/>
+      <p:pic>
+        <p:nvPicPr>
+          <p:cNvPr id="2" name="Picture 1" descr="img_4_5.png"/>
+          <p:cNvPicPr>
+            <a:picLocks noChangeAspect="1"/>
+          </p:cNvPicPr>
+          <p:nvPr/>
+        </p:nvPicPr>
+        <p:blipFill>
+          <a:blip r:embed="rId2"/>
+          <a:stretch>
+            <a:fillRect/>
+          </a:stretch>
+        </p:blipFill>
+        <p:spPr>
+          <a:xfrm>
+            <a:off x="10648950" y="209550"/>
+            <a:ext cx="1123950" cy="1123950"/>
+          </a:xfrm>
+          <a:prstGeom prst="rect">
+            <a:avLst/>
+          </a:prstGeom>
+        </p:spPr>
+      </p:pic>
+      <p:sp>
+        <p:nvSpPr>
+          <p:cNvPr id="3" name="Freeform 2"/>
+          <p:cNvSpPr/>
+          <p:nvPr/>
+        </p:nvSpPr>
+        <p:spPr>
+          <a:xfrm>
+            <a:off x="1828800" y="1562398"/>
+            <a:ext cx="2366962" cy="609600"/>
+          </a:xfrm>
+          <a:custGeom>
+            <a:avLst/>
+            <a:gdLst/>
+            <a:ahLst/>
+            <a:cxnLst/>
+            <a:rect l="l" t="t" r="r" b="b"/>
+            <a:pathLst>
+              <a:path w="2366962" h="609600">
+                <a:moveTo>
+                  <a:pt x="0" y="0"/>
+                </a:moveTo>
+                <a:lnTo>
+                  <a:pt x="2157412" y="0"/>
+                </a:lnTo>
+                <a:lnTo>
+                  <a:pt x="2366962" y="304800"/>
+                </a:lnTo>
+                <a:lnTo>
+                  <a:pt x="2157412" y="609600"/>
+                </a:lnTo>
+                <a:lnTo>
+                  <a:pt x="0" y="609600"/>
+                </a:lnTo>
+                <a:close/>
+              </a:path>
+            </a:pathLst>
+          </a:custGeom>
+          <a:solidFill>
+            <a:srgbClr val="1C1C1E"/>
+          </a:solidFill>
+          <a:ln>
+            <a:noFill/>
+          </a:ln>
+        </p:spPr>
+        <p:txBody>
+          <a:bodyPr rtlCol="0" anchor="ctr"/>
+          <a:lstStyle/>
+          <a:p/>
+        </p:txBody>
+      </p:sp>
+      <p:sp>
+        <p:nvSpPr>
+          <p:cNvPr id="4" name="Freeform 3"/>
+          <p:cNvSpPr/>
+          <p:nvPr/>
+        </p:nvSpPr>
+        <p:spPr>
+          <a:xfrm>
+            <a:off x="4291012" y="1562398"/>
+            <a:ext cx="2366963" cy="609600"/>
+          </a:xfrm>
+          <a:custGeom>
+            <a:avLst/>
+            <a:gdLst/>
+            <a:ahLst/>
+            <a:cxnLst/>
+            <a:rect l="l" t="t" r="r" b="b"/>
+            <a:pathLst>
+              <a:path w="2366963" h="609600">
+                <a:moveTo>
+                  <a:pt x="0" y="0"/>
+                </a:moveTo>
+                <a:lnTo>
+                  <a:pt x="2157413" y="0"/>
+                </a:lnTo>
+                <a:lnTo>
+                  <a:pt x="2366963" y="304800"/>
+                </a:lnTo>
+                <a:lnTo>
+                  <a:pt x="2157413" y="609600"/>
+                </a:lnTo>
+                <a:lnTo>
+                  <a:pt x="0" y="609600"/>
+                </a:lnTo>
+                <a:lnTo>
+                  <a:pt x="209550" y="304800"/>
+                </a:lnTo>
+                <a:close/>
+              </a:path>
+            </a:pathLst>
+          </a:custGeom>
+          <a:solidFill>
+            <a:srgbClr val="1C1C1E"/>
+          </a:solidFill>
+          <a:ln>
+            <a:noFill/>
+          </a:ln>
+        </p:spPr>
+        <p:txBody>
+          <a:bodyPr rtlCol="0" anchor="ctr"/>
+          <a:lstStyle/>
+          <a:p/>
+        </p:txBody>
+      </p:sp>
+      <p:sp>
+        <p:nvSpPr>
+          <p:cNvPr id="5" name="Freeform 4"/>
+          <p:cNvSpPr/>
+          <p:nvPr/>
+        </p:nvSpPr>
+        <p:spPr>
+          <a:xfrm>
+            <a:off x="6753225" y="1562398"/>
+            <a:ext cx="2366963" cy="609600"/>
+          </a:xfrm>
+          <a:custGeom>
+            <a:avLst/>
+            <a:gdLst/>
+            <a:ahLst/>
+            <a:cxnLst/>
+            <a:rect l="l" t="t" r="r" b="b"/>
+            <a:pathLst>
+              <a:path w="2366963" h="609600">
+                <a:moveTo>
+                  <a:pt x="0" y="0"/>
+                </a:moveTo>
+                <a:lnTo>
+                  <a:pt x="2157413" y="0"/>
+                </a:lnTo>
+                <a:lnTo>
+                  <a:pt x="2366963" y="304800"/>
+                </a:lnTo>
+                <a:lnTo>
+                  <a:pt x="2157413" y="609600"/>
+                </a:lnTo>
+                <a:lnTo>
+                  <a:pt x="0" y="609600"/>
+                </a:lnTo>
+                <a:lnTo>
+                  <a:pt x="209550" y="304800"/>
+                </a:lnTo>
+                <a:close/>
+              </a:path>
+            </a:pathLst>
+          </a:custGeom>
+          <a:solidFill>
+            <a:srgbClr val="1C1C1E"/>
+          </a:solidFill>
+          <a:ln>
+            <a:noFill/>
+          </a:ln>
+        </p:spPr>
+        <p:txBody>
+          <a:bodyPr rtlCol="0" anchor="ctr"/>
+          <a:lstStyle/>
+          <a:p/>
+        </p:txBody>
+      </p:sp>
+      <p:sp>
+        <p:nvSpPr>
+          <p:cNvPr id="6" name="Freeform 5"/>
+          <p:cNvSpPr/>
+          <p:nvPr/>
+        </p:nvSpPr>
+        <p:spPr>
+          <a:xfrm>
+            <a:off x="9215438" y="1562398"/>
+            <a:ext cx="2366962" cy="609600"/>
+          </a:xfrm>
+          <a:custGeom>
+            <a:avLst/>
+            <a:gdLst/>
+            <a:ahLst/>
+            <a:cxnLst/>
+            <a:rect l="l" t="t" r="r" b="b"/>
+            <a:pathLst>
+              <a:path w="2366962" h="609600">
+                <a:moveTo>
+                  <a:pt x="0" y="0"/>
+                </a:moveTo>
+                <a:lnTo>
+                  <a:pt x="2157412" y="0"/>
+                </a:lnTo>
+                <a:lnTo>
+                  <a:pt x="2366962" y="304800"/>
+                </a:lnTo>
+                <a:lnTo>
+                  <a:pt x="2157412" y="609600"/>
+                </a:lnTo>
+                <a:lnTo>
+                  <a:pt x="0" y="609600"/>
+                </a:lnTo>
+                <a:lnTo>
+                  <a:pt x="209550" y="304800"/>
+                </a:lnTo>
+                <a:close/>
+              </a:path>
+            </a:pathLst>
+          </a:custGeom>
+          <a:solidFill>
+            <a:srgbClr val="1C1C1E"/>
+          </a:solidFill>
+          <a:ln>
+            <a:noFill/>
+          </a:ln>
+        </p:spPr>
+        <p:txBody>
+          <a:bodyPr rtlCol="0" anchor="ctr"/>
+          <a:lstStyle/>
+          <a:p/>
+        </p:txBody>
+      </p:sp>
+      <p:cxnSp>
+        <p:nvCxnSpPr>
+          <p:cNvPr id="7" name="Connector 6"/>
+          <p:cNvCxnSpPr/>
+          <p:nvPr/>
+        </p:nvCxnSpPr>
+        <p:spPr>
+          <a:xfrm>
+            <a:off x="609600" y="2181523"/>
+            <a:ext cx="1123950" cy="0"/>
+          </a:xfrm>
+          <a:prstGeom prst="line">
+            <a:avLst/>
+          </a:prstGeom>
+          <a:ln w="19050">
+            <a:solidFill>
+              <a:srgbClr val="ECEBE6"/>
+            </a:solidFill>
+          </a:ln>
+        </p:spPr>
+      </p:cxnSp>
+      <p:cxnSp>
+        <p:nvCxnSpPr>
+          <p:cNvPr id="8" name="Connector 7"/>
+          <p:cNvCxnSpPr/>
+          <p:nvPr/>
+        </p:nvCxnSpPr>
+        <p:spPr>
+          <a:xfrm>
+            <a:off x="1828800" y="2181523"/>
+            <a:ext cx="2366962" cy="0"/>
+          </a:xfrm>
+          <a:prstGeom prst="line">
+            <a:avLst/>
+          </a:prstGeom>
+          <a:ln w="19050">
+            <a:solidFill>
+              <a:srgbClr val="ECEBE6"/>
+            </a:solidFill>
+          </a:ln>
+        </p:spPr>
+      </p:cxnSp>
+      <p:cxnSp>
+        <p:nvCxnSpPr>
+          <p:cNvPr id="9" name="Connector 8"/>
+          <p:cNvCxnSpPr/>
+          <p:nvPr/>
+        </p:nvCxnSpPr>
+        <p:spPr>
+          <a:xfrm>
+            <a:off x="4291012" y="2181523"/>
+            <a:ext cx="2366963" cy="0"/>
+          </a:xfrm>
+          <a:prstGeom prst="line">
+            <a:avLst/>
+          </a:prstGeom>
+          <a:ln w="19050">
+            <a:solidFill>
+              <a:srgbClr val="ECEBE6"/>
+            </a:solidFill>
+          </a:ln>
+        </p:spPr>
+      </p:cxnSp>
+      <p:cxnSp>
+        <p:nvCxnSpPr>
+          <p:cNvPr id="10" name="Connector 9"/>
+          <p:cNvCxnSpPr/>
+          <p:nvPr/>
+        </p:nvCxnSpPr>
+        <p:spPr>
+          <a:xfrm>
+            <a:off x="6753225" y="2181523"/>
+            <a:ext cx="2366963" cy="0"/>
+          </a:xfrm>
+          <a:prstGeom prst="line">
+            <a:avLst/>
+          </a:prstGeom>
+          <a:ln w="19050">
+            <a:solidFill>
+              <a:srgbClr val="ECEBE6"/>
+            </a:solidFill>
+          </a:ln>
+        </p:spPr>
+      </p:cxnSp>
+      <p:cxnSp>
+        <p:nvCxnSpPr>
+          <p:cNvPr id="11" name="Connector 10"/>
+          <p:cNvCxnSpPr/>
+          <p:nvPr/>
+        </p:nvCxnSpPr>
+        <p:spPr>
+          <a:xfrm>
+            <a:off x="9215438" y="2181523"/>
+            <a:ext cx="2366962" cy="0"/>
+          </a:xfrm>
+          <a:prstGeom prst="line">
+            <a:avLst/>
+          </a:prstGeom>
+          <a:ln w="19050">
+            <a:solidFill>
+              <a:srgbClr val="ECEBE6"/>
+            </a:solidFill>
+          </a:ln>
+        </p:spPr>
+      </p:cxnSp>
+      <p:cxnSp>
+        <p:nvCxnSpPr>
+          <p:cNvPr id="12" name="Connector 11"/>
+          <p:cNvCxnSpPr/>
+          <p:nvPr/>
+        </p:nvCxnSpPr>
+        <p:spPr>
+          <a:xfrm>
+            <a:off x="609600" y="3248323"/>
+            <a:ext cx="1123950" cy="0"/>
+          </a:xfrm>
+          <a:prstGeom prst="line">
+            <a:avLst/>
+          </a:prstGeom>
+          <a:ln w="9525">
+            <a:solidFill>
+              <a:srgbClr val="2A2A2E"/>
+            </a:solidFill>
+          </a:ln>
+        </p:spPr>
+      </p:cxnSp>
+      <p:cxnSp>
+        <p:nvCxnSpPr>
+          <p:cNvPr id="13" name="Connector 12"/>
+          <p:cNvCxnSpPr/>
+          <p:nvPr/>
+        </p:nvCxnSpPr>
+        <p:spPr>
+          <a:xfrm>
+            <a:off x="1828800" y="3248323"/>
+            <a:ext cx="2366962" cy="0"/>
+          </a:xfrm>
+          <a:prstGeom prst="line">
+            <a:avLst/>
+          </a:prstGeom>
+          <a:ln w="9525">
+            <a:solidFill>
+              <a:srgbClr val="2A2A2E"/>
+            </a:solidFill>
+          </a:ln>
+        </p:spPr>
+      </p:cxnSp>
+      <p:cxnSp>
+        <p:nvCxnSpPr>
+          <p:cNvPr id="14" name="Connector 13"/>
+          <p:cNvCxnSpPr/>
+          <p:nvPr/>
+        </p:nvCxnSpPr>
+        <p:spPr>
+          <a:xfrm>
+            <a:off x="4291012" y="3248323"/>
+            <a:ext cx="2366963" cy="0"/>
+          </a:xfrm>
+          <a:prstGeom prst="line">
+            <a:avLst/>
+          </a:prstGeom>
+          <a:ln w="9525">
+            <a:solidFill>
+              <a:srgbClr val="2A2A2E"/>
+            </a:solidFill>
+          </a:ln>
+        </p:spPr>
+      </p:cxnSp>
+      <p:cxnSp>
+        <p:nvCxnSpPr>
+          <p:cNvPr id="15" name="Connector 14"/>
+          <p:cNvCxnSpPr/>
+          <p:nvPr/>
+        </p:nvCxnSpPr>
+        <p:spPr>
+          <a:xfrm>
+            <a:off x="6753225" y="3248323"/>
+            <a:ext cx="2366963" cy="0"/>
+          </a:xfrm>
+          <a:prstGeom prst="line">
+            <a:avLst/>
+          </a:prstGeom>
+          <a:ln w="9525">
+            <a:solidFill>
+              <a:srgbClr val="2A2A2E"/>
+            </a:solidFill>
+          </a:ln>
+        </p:spPr>
+      </p:cxnSp>
+      <p:cxnSp>
+        <p:nvCxnSpPr>
+          <p:cNvPr id="16" name="Connector 15"/>
+          <p:cNvCxnSpPr/>
+          <p:nvPr/>
+        </p:nvCxnSpPr>
+        <p:spPr>
+          <a:xfrm>
+            <a:off x="9215438" y="3248323"/>
+            <a:ext cx="2366962" cy="0"/>
+          </a:xfrm>
+          <a:prstGeom prst="line">
+            <a:avLst/>
+          </a:prstGeom>
+          <a:ln w="9525">
+            <a:solidFill>
+              <a:srgbClr val="2A2A2E"/>
+            </a:solidFill>
+          </a:ln>
+        </p:spPr>
+      </p:cxnSp>
+      <p:cxnSp>
+        <p:nvCxnSpPr>
+          <p:cNvPr id="17" name="Connector 16"/>
+          <p:cNvCxnSpPr/>
+          <p:nvPr/>
+        </p:nvCxnSpPr>
+        <p:spPr>
+          <a:xfrm>
+            <a:off x="609600" y="4779318"/>
+            <a:ext cx="1123950" cy="0"/>
+          </a:xfrm>
+          <a:prstGeom prst="line">
+            <a:avLst/>
+          </a:prstGeom>
+          <a:ln w="9525">
+            <a:solidFill>
+              <a:srgbClr val="2A2A2E"/>
+            </a:solidFill>
+          </a:ln>
+        </p:spPr>
+      </p:cxnSp>
+      <p:cxnSp>
+        <p:nvCxnSpPr>
+          <p:cNvPr id="18" name="Connector 17"/>
+          <p:cNvCxnSpPr/>
+          <p:nvPr/>
+        </p:nvCxnSpPr>
+        <p:spPr>
+          <a:xfrm>
+            <a:off x="1828800" y="4779318"/>
+            <a:ext cx="2366962" cy="0"/>
+          </a:xfrm>
+          <a:prstGeom prst="line">
+            <a:avLst/>
+          </a:prstGeom>
+          <a:ln w="9525">
+            <a:solidFill>
+              <a:srgbClr val="2A2A2E"/>
+            </a:solidFill>
+          </a:ln>
+        </p:spPr>
+      </p:cxnSp>
+      <p:cxnSp>
+        <p:nvCxnSpPr>
+          <p:cNvPr id="19" name="Connector 18"/>
+          <p:cNvCxnSpPr/>
+          <p:nvPr/>
+        </p:nvCxnSpPr>
+        <p:spPr>
+          <a:xfrm>
+            <a:off x="4291012" y="4779318"/>
+            <a:ext cx="2366963" cy="0"/>
+          </a:xfrm>
+          <a:prstGeom prst="line">
+            <a:avLst/>
+          </a:prstGeom>
+          <a:ln w="9525">
+            <a:solidFill>
+              <a:srgbClr val="2A2A2E"/>
+            </a:solidFill>
+          </a:ln>
+        </p:spPr>
+      </p:cxnSp>
+      <p:cxnSp>
+        <p:nvCxnSpPr>
+          <p:cNvPr id="20" name="Connector 19"/>
+          <p:cNvCxnSpPr/>
+          <p:nvPr/>
+        </p:nvCxnSpPr>
+        <p:spPr>
+          <a:xfrm>
+            <a:off x="6753225" y="4779318"/>
+            <a:ext cx="2366963" cy="0"/>
+          </a:xfrm>
+          <a:prstGeom prst="line">
+            <a:avLst/>
+          </a:prstGeom>
+          <a:ln w="9525">
+            <a:solidFill>
+              <a:srgbClr val="2A2A2E"/>
+            </a:solidFill>
+          </a:ln>
+        </p:spPr>
+      </p:cxnSp>
+      <p:cxnSp>
+        <p:nvCxnSpPr>
+          <p:cNvPr id="21" name="Connector 20"/>
+          <p:cNvCxnSpPr/>
+          <p:nvPr/>
+        </p:nvCxnSpPr>
+        <p:spPr>
+          <a:xfrm>
+            <a:off x="9215438" y="4779318"/>
+            <a:ext cx="2366962" cy="0"/>
+          </a:xfrm>
+          <a:prstGeom prst="line">
+            <a:avLst/>
+          </a:prstGeom>
+          <a:ln w="9525">
+            <a:solidFill>
+              <a:srgbClr val="2A2A2E"/>
+            </a:solidFill>
+          </a:ln>
+        </p:spPr>
+      </p:cxnSp>
+      <p:sp>
+        <p:nvSpPr>
+          <p:cNvPr id="22" name="Title"/>
+          <p:cNvSpPr txBox="1"/>
+          <p:nvPr/>
+        </p:nvSpPr>
+        <p:spPr>
+          <a:xfrm>
+            <a:off x="609600" y="428625"/>
+            <a:ext cx="10024110" cy="847874"/>
+          </a:xfrm>
+          <a:prstGeom prst="rect">
+            <a:avLst/>
+          </a:prstGeom>
+          <a:noFill/>
+        </p:spPr>
+        <p:txBody>
+          <a:bodyPr wrap="none" lIns="0" rIns="0" tIns="0" bIns="0" anchor="t">
+            <a:noAutofit/>
+          </a:bodyPr>
+          <a:lstStyle/>
+          <a:p>
+            <a:pPr algn="l">
+              <a:lnSpc>
+                <a:spcPts val="3301"/>
+              </a:lnSpc>
+              <a:spcBef>
+                <a:spcPts val="0"/>
+              </a:spcBef>
+              <a:spcAft>
+                <a:spcPts val="0"/>
+              </a:spcAft>
+            </a:pPr>
+            <a:r>
+              <a:rPr sz="2300" b="1" i="0">
+                <a:solidFill>
+                  <a:srgbClr val="ECEBE6"/>
+                </a:solidFill>
+                <a:latin typeface="Yu Gothic"/>
+                <a:ea typeface="Yu Gothic"/>
+                <a:cs typeface="Yu Gothic"/>
+              </a:rPr>
+              <a:t>ユーザーは入口を選んで希望を伝え、</a:t>
+            </a:r>
+          </a:p>
+          <a:p>
+            <a:pPr algn="l">
+              <a:lnSpc>
+                <a:spcPts val="3301"/>
+              </a:lnSpc>
+              <a:spcBef>
+                <a:spcPts val="0"/>
+              </a:spcBef>
+              <a:spcAft>
+                <a:spcPts val="0"/>
+              </a:spcAft>
+            </a:pPr>
+            <a:r>
+              <a:rPr sz="2300" b="1" i="0">
+                <a:solidFill>
+                  <a:srgbClr val="ECEBE6"/>
+                </a:solidFill>
+                <a:latin typeface="Yu Gothic"/>
+                <a:ea typeface="Yu Gothic"/>
+                <a:cs typeface="Yu Gothic"/>
+              </a:rPr>
+              <a:t>届いた候補から「ここにする」で決める</a:t>
+            </a:r>
+          </a:p>
+        </p:txBody>
+      </p:sp>
+      <p:sp>
+        <p:nvSpPr>
+          <p:cNvPr id="23" name="TextBox 22"/>
+          <p:cNvSpPr txBox="1"/>
+          <p:nvPr/>
+        </p:nvSpPr>
+        <p:spPr>
+          <a:xfrm>
+            <a:off x="2000250" y="1729085"/>
+            <a:ext cx="139779" cy="276225"/>
+          </a:xfrm>
+          <a:prstGeom prst="rect">
+            <a:avLst/>
+          </a:prstGeom>
+          <a:noFill/>
+        </p:spPr>
+        <p:txBody>
+          <a:bodyPr wrap="none" lIns="0" rIns="0" tIns="0" bIns="0" anchor="t">
+            <a:noAutofit/>
+          </a:bodyPr>
+          <a:lstStyle/>
+          <a:p>
+            <a:pPr algn="l">
+              <a:lnSpc>
+                <a:spcPts val="2250"/>
+              </a:lnSpc>
+              <a:spcBef>
+                <a:spcPts val="0"/>
+              </a:spcBef>
+              <a:spcAft>
+                <a:spcPts val="0"/>
+              </a:spcAft>
+            </a:pPr>
+            <a:r>
+              <a:rPr sz="1500" b="1" i="0">
+                <a:solidFill>
+                  <a:srgbClr val="B7C97A"/>
+                </a:solidFill>
+                <a:latin typeface="Yu Gothic"/>
+                <a:ea typeface="Yu Gothic"/>
+                <a:cs typeface="Yu Gothic"/>
+              </a:rPr>
+              <a:t>1</a:t>
+            </a:r>
+          </a:p>
+        </p:txBody>
+      </p:sp>
+      <p:sp>
+        <p:nvSpPr>
+          <p:cNvPr id="24" name="TextBox 23"/>
+          <p:cNvSpPr txBox="1"/>
+          <p:nvPr/>
+        </p:nvSpPr>
+        <p:spPr>
+          <a:xfrm>
+            <a:off x="2211586" y="1743373"/>
+            <a:ext cx="910590" cy="247650"/>
+          </a:xfrm>
+          <a:prstGeom prst="rect">
+            <a:avLst/>
+          </a:prstGeom>
+          <a:noFill/>
+        </p:spPr>
+        <p:txBody>
+          <a:bodyPr wrap="none" lIns="0" rIns="0" tIns="0" bIns="0" anchor="t">
+            <a:noAutofit/>
+          </a:bodyPr>
+          <a:lstStyle/>
+          <a:p>
+            <a:pPr algn="l">
+              <a:lnSpc>
+                <a:spcPts val="2025"/>
+              </a:lnSpc>
+              <a:spcBef>
+                <a:spcPts val="0"/>
+              </a:spcBef>
+              <a:spcAft>
+                <a:spcPts val="0"/>
+              </a:spcAft>
+            </a:pPr>
+            <a:r>
+              <a:rPr sz="1350" b="1" i="0">
+                <a:solidFill>
+                  <a:srgbClr val="ECEBE6"/>
+                </a:solidFill>
+                <a:latin typeface="Yu Gothic"/>
+                <a:ea typeface="Yu Gothic"/>
+                <a:cs typeface="Yu Gothic"/>
+              </a:rPr>
+              <a:t>入口を選ぶ</a:t>
+            </a:r>
+          </a:p>
+        </p:txBody>
+      </p:sp>
+      <p:sp>
+        <p:nvSpPr>
+          <p:cNvPr id="25" name="TextBox 24"/>
+          <p:cNvSpPr txBox="1"/>
+          <p:nvPr/>
+        </p:nvSpPr>
+        <p:spPr>
+          <a:xfrm>
+            <a:off x="4614862" y="1729085"/>
+            <a:ext cx="139779" cy="276225"/>
+          </a:xfrm>
+          <a:prstGeom prst="rect">
+            <a:avLst/>
+          </a:prstGeom>
+          <a:noFill/>
+        </p:spPr>
+        <p:txBody>
+          <a:bodyPr wrap="none" lIns="0" rIns="0" tIns="0" bIns="0" anchor="t">
+            <a:noAutofit/>
+          </a:bodyPr>
+          <a:lstStyle/>
+          <a:p>
+            <a:pPr algn="l">
+              <a:lnSpc>
+                <a:spcPts val="2250"/>
+              </a:lnSpc>
+              <a:spcBef>
+                <a:spcPts val="0"/>
+              </a:spcBef>
+              <a:spcAft>
+                <a:spcPts val="0"/>
+              </a:spcAft>
+            </a:pPr>
+            <a:r>
+              <a:rPr sz="1500" b="1" i="0">
+                <a:solidFill>
+                  <a:srgbClr val="B7C97A"/>
+                </a:solidFill>
+                <a:latin typeface="Yu Gothic"/>
+                <a:ea typeface="Yu Gothic"/>
+                <a:cs typeface="Yu Gothic"/>
+              </a:rPr>
+              <a:t>2</a:t>
+            </a:r>
+          </a:p>
+        </p:txBody>
+      </p:sp>
+      <p:sp>
+        <p:nvSpPr>
+          <p:cNvPr id="26" name="TextBox 25"/>
+          <p:cNvSpPr txBox="1"/>
+          <p:nvPr/>
+        </p:nvSpPr>
+        <p:spPr>
+          <a:xfrm>
+            <a:off x="4826198" y="1743373"/>
+            <a:ext cx="1083635" cy="247650"/>
+          </a:xfrm>
+          <a:prstGeom prst="rect">
+            <a:avLst/>
+          </a:prstGeom>
+          <a:noFill/>
+        </p:spPr>
+        <p:txBody>
+          <a:bodyPr wrap="none" lIns="0" rIns="0" tIns="0" bIns="0" anchor="t">
+            <a:noAutofit/>
+          </a:bodyPr>
+          <a:lstStyle/>
+          <a:p>
+            <a:pPr algn="l">
+              <a:lnSpc>
+                <a:spcPts val="2025"/>
+              </a:lnSpc>
+              <a:spcBef>
+                <a:spcPts val="0"/>
+              </a:spcBef>
+              <a:spcAft>
+                <a:spcPts val="0"/>
+              </a:spcAft>
+            </a:pPr>
+            <a:r>
+              <a:rPr sz="1350" b="1" i="0">
+                <a:solidFill>
+                  <a:srgbClr val="ECEBE6"/>
+                </a:solidFill>
+                <a:latin typeface="Yu Gothic"/>
+                <a:ea typeface="Yu Gothic"/>
+                <a:cs typeface="Yu Gothic"/>
+              </a:rPr>
+              <a:t>希望を伝える</a:t>
+            </a:r>
+          </a:p>
+        </p:txBody>
+      </p:sp>
+      <p:sp>
+        <p:nvSpPr>
+          <p:cNvPr id="27" name="TextBox 26"/>
+          <p:cNvSpPr txBox="1"/>
+          <p:nvPr/>
+        </p:nvSpPr>
+        <p:spPr>
+          <a:xfrm>
+            <a:off x="7077075" y="1729085"/>
+            <a:ext cx="139779" cy="276225"/>
+          </a:xfrm>
+          <a:prstGeom prst="rect">
+            <a:avLst/>
+          </a:prstGeom>
+          <a:noFill/>
+        </p:spPr>
+        <p:txBody>
+          <a:bodyPr wrap="none" lIns="0" rIns="0" tIns="0" bIns="0" anchor="t">
+            <a:noAutofit/>
+          </a:bodyPr>
+          <a:lstStyle/>
+          <a:p>
+            <a:pPr algn="l">
+              <a:lnSpc>
+                <a:spcPts val="2250"/>
+              </a:lnSpc>
+              <a:spcBef>
+                <a:spcPts val="0"/>
+              </a:spcBef>
+              <a:spcAft>
+                <a:spcPts val="0"/>
+              </a:spcAft>
+            </a:pPr>
+            <a:r>
+              <a:rPr sz="1500" b="1" i="0">
+                <a:solidFill>
+                  <a:srgbClr val="B7C97A"/>
+                </a:solidFill>
+                <a:latin typeface="Yu Gothic"/>
+                <a:ea typeface="Yu Gothic"/>
+                <a:cs typeface="Yu Gothic"/>
+              </a:rPr>
+              <a:t>3</a:t>
+            </a:r>
+          </a:p>
+        </p:txBody>
+      </p:sp>
+      <p:sp>
+        <p:nvSpPr>
+          <p:cNvPr id="28" name="TextBox 27"/>
+          <p:cNvSpPr txBox="1"/>
+          <p:nvPr/>
+        </p:nvSpPr>
+        <p:spPr>
+          <a:xfrm>
+            <a:off x="7288411" y="1743373"/>
+            <a:ext cx="1267206" cy="247650"/>
+          </a:xfrm>
+          <a:prstGeom prst="rect">
+            <a:avLst/>
+          </a:prstGeom>
+          <a:noFill/>
+        </p:spPr>
+        <p:txBody>
+          <a:bodyPr wrap="none" lIns="0" rIns="0" tIns="0" bIns="0" anchor="t">
+            <a:noAutofit/>
+          </a:bodyPr>
+          <a:lstStyle/>
+          <a:p>
+            <a:pPr algn="l">
+              <a:lnSpc>
+                <a:spcPts val="2025"/>
+              </a:lnSpc>
+              <a:spcBef>
+                <a:spcPts val="0"/>
+              </a:spcBef>
+              <a:spcAft>
+                <a:spcPts val="0"/>
+              </a:spcAft>
+            </a:pPr>
+            <a:r>
+              <a:rPr sz="1350" b="1" i="0">
+                <a:solidFill>
+                  <a:srgbClr val="ECEBE6"/>
+                </a:solidFill>
+                <a:latin typeface="Yu Gothic"/>
+                <a:ea typeface="Yu Gothic"/>
+                <a:cs typeface="Yu Gothic"/>
+              </a:rPr>
+              <a:t>候補を受け取る</a:t>
+            </a:r>
+          </a:p>
+        </p:txBody>
+      </p:sp>
+      <p:sp>
+        <p:nvSpPr>
+          <p:cNvPr id="29" name="TextBox 28"/>
+          <p:cNvSpPr txBox="1"/>
+          <p:nvPr/>
+        </p:nvSpPr>
+        <p:spPr>
+          <a:xfrm>
+            <a:off x="9539288" y="1729085"/>
+            <a:ext cx="139779" cy="276225"/>
+          </a:xfrm>
+          <a:prstGeom prst="rect">
+            <a:avLst/>
+          </a:prstGeom>
+          <a:noFill/>
+        </p:spPr>
+        <p:txBody>
+          <a:bodyPr wrap="none" lIns="0" rIns="0" tIns="0" bIns="0" anchor="t">
+            <a:noAutofit/>
+          </a:bodyPr>
+          <a:lstStyle/>
+          <a:p>
+            <a:pPr algn="l">
+              <a:lnSpc>
+                <a:spcPts val="2250"/>
+              </a:lnSpc>
+              <a:spcBef>
+                <a:spcPts val="0"/>
+              </a:spcBef>
+              <a:spcAft>
+                <a:spcPts val="0"/>
+              </a:spcAft>
+            </a:pPr>
+            <a:r>
+              <a:rPr sz="1500" b="1" i="0">
+                <a:solidFill>
+                  <a:srgbClr val="B7C97A"/>
+                </a:solidFill>
+                <a:latin typeface="Yu Gothic"/>
+                <a:ea typeface="Yu Gothic"/>
+                <a:cs typeface="Yu Gothic"/>
+              </a:rPr>
+              <a:t>4</a:t>
+            </a:r>
+          </a:p>
+        </p:txBody>
+      </p:sp>
+      <p:sp>
+        <p:nvSpPr>
+          <p:cNvPr id="30" name="TextBox 29"/>
+          <p:cNvSpPr txBox="1"/>
+          <p:nvPr/>
+        </p:nvSpPr>
+        <p:spPr>
+          <a:xfrm>
+            <a:off x="9750623" y="1743373"/>
+            <a:ext cx="1088898" cy="247650"/>
+          </a:xfrm>
+          <a:prstGeom prst="rect">
+            <a:avLst/>
+          </a:prstGeom>
+          <a:noFill/>
+        </p:spPr>
+        <p:txBody>
+          <a:bodyPr wrap="none" lIns="0" rIns="0" tIns="0" bIns="0" anchor="t">
+            <a:noAutofit/>
+          </a:bodyPr>
+          <a:lstStyle/>
+          <a:p>
+            <a:pPr algn="l">
+              <a:lnSpc>
+                <a:spcPts val="2025"/>
+              </a:lnSpc>
+              <a:spcBef>
+                <a:spcPts val="0"/>
+              </a:spcBef>
+              <a:spcAft>
+                <a:spcPts val="0"/>
+              </a:spcAft>
+            </a:pPr>
+            <a:r>
+              <a:rPr sz="1350" b="1" i="0">
+                <a:solidFill>
+                  <a:srgbClr val="ECEBE6"/>
+                </a:solidFill>
+                <a:latin typeface="Yu Gothic"/>
+                <a:ea typeface="Yu Gothic"/>
+                <a:cs typeface="Yu Gothic"/>
+              </a:rPr>
+              <a:t>決めて向かう</a:t>
+            </a:r>
+          </a:p>
+        </p:txBody>
+      </p:sp>
+      <p:sp>
+        <p:nvSpPr>
+          <p:cNvPr id="31" name="TextBox 30"/>
+          <p:cNvSpPr txBox="1"/>
+          <p:nvPr/>
+        </p:nvSpPr>
+        <p:spPr>
+          <a:xfrm>
+            <a:off x="609600" y="2593479"/>
+            <a:ext cx="375666" cy="247650"/>
+          </a:xfrm>
+          <a:prstGeom prst="rect">
+            <a:avLst/>
+          </a:prstGeom>
+          <a:noFill/>
+        </p:spPr>
+        <p:txBody>
+          <a:bodyPr wrap="none" lIns="0" rIns="0" tIns="0" bIns="0" anchor="t">
+            <a:noAutofit/>
+          </a:bodyPr>
+          <a:lstStyle/>
+          <a:p>
+            <a:pPr algn="l">
+              <a:lnSpc>
+                <a:spcPts val="2025"/>
+              </a:lnSpc>
+              <a:spcBef>
+                <a:spcPts val="0"/>
+              </a:spcBef>
+              <a:spcAft>
+                <a:spcPts val="0"/>
+              </a:spcAft>
+            </a:pPr>
+            <a:r>
+              <a:rPr sz="1350" b="1" i="0">
+                <a:solidFill>
+                  <a:srgbClr val="ECEBE6"/>
+                </a:solidFill>
+                <a:latin typeface="Yu Gothic"/>
+                <a:ea typeface="Yu Gothic"/>
+                <a:cs typeface="Yu Gothic"/>
+              </a:rPr>
+              <a:t>画面</a:t>
+            </a:r>
+          </a:p>
+        </p:txBody>
+      </p:sp>
+      <p:sp>
+        <p:nvSpPr>
+          <p:cNvPr id="32" name="TextBox 31"/>
+          <p:cNvSpPr txBox="1"/>
+          <p:nvPr/>
+        </p:nvSpPr>
+        <p:spPr>
+          <a:xfrm>
+            <a:off x="1885950" y="2595414"/>
+            <a:ext cx="2238149" cy="228600"/>
+          </a:xfrm>
+          <a:prstGeom prst="rect">
+            <a:avLst/>
+          </a:prstGeom>
+          <a:noFill/>
+        </p:spPr>
+        <p:txBody>
+          <a:bodyPr wrap="none" lIns="0" rIns="0" tIns="0" bIns="0" anchor="t">
+            <a:noAutofit/>
+          </a:bodyPr>
+          <a:lstStyle/>
+          <a:p>
+            <a:pPr algn="l">
+              <a:lnSpc>
+                <a:spcPts val="1920"/>
+              </a:lnSpc>
+              <a:spcBef>
+                <a:spcPts val="0"/>
+              </a:spcBef>
+              <a:spcAft>
+                <a:spcPts val="0"/>
+              </a:spcAft>
+            </a:pPr>
+            <a:r>
+              <a:rPr sz="1200" b="0" i="0">
+                <a:solidFill>
+                  <a:srgbClr val="ECEBE6"/>
+                </a:solidFill>
+                <a:latin typeface="Yu Gothic"/>
+                <a:ea typeface="Yu Gothic"/>
+                <a:cs typeface="Yu Gothic"/>
+              </a:rPr>
+              <a:t>起動のたびに出るスプラッシュ</a:t>
+            </a:r>
+          </a:p>
+        </p:txBody>
+      </p:sp>
+      <p:sp>
+        <p:nvSpPr>
+          <p:cNvPr id="33" name="TextBox 32"/>
+          <p:cNvSpPr txBox="1"/>
+          <p:nvPr/>
+        </p:nvSpPr>
+        <p:spPr>
+          <a:xfrm>
+            <a:off x="4348162" y="2595414"/>
+            <a:ext cx="2004274" cy="228600"/>
+          </a:xfrm>
+          <a:prstGeom prst="rect">
+            <a:avLst/>
+          </a:prstGeom>
+          <a:noFill/>
+        </p:spPr>
+        <p:txBody>
+          <a:bodyPr wrap="none" lIns="0" rIns="0" tIns="0" bIns="0" anchor="t">
+            <a:noAutofit/>
+          </a:bodyPr>
+          <a:lstStyle/>
+          <a:p>
+            <a:pPr algn="l">
+              <a:lnSpc>
+                <a:spcPts val="1920"/>
+              </a:lnSpc>
+              <a:spcBef>
+                <a:spcPts val="0"/>
+              </a:spcBef>
+              <a:spcAft>
+                <a:spcPts val="0"/>
+              </a:spcAft>
+            </a:pPr>
+            <a:r>
+              <a:rPr sz="1200" b="0" i="0">
+                <a:solidFill>
+                  <a:srgbClr val="ECEBE6"/>
+                </a:solidFill>
+                <a:latin typeface="Yu Gothic"/>
+                <a:ea typeface="Yu Gothic"/>
+                <a:cs typeface="Yu Gothic"/>
+              </a:rPr>
+              <a:t>チャット、または5問の質問</a:t>
+            </a:r>
+          </a:p>
+        </p:txBody>
+      </p:sp>
+      <p:sp>
+        <p:nvSpPr>
+          <p:cNvPr id="34" name="TextBox 33"/>
+          <p:cNvSpPr txBox="1"/>
+          <p:nvPr/>
+        </p:nvSpPr>
+        <p:spPr>
+          <a:xfrm>
+            <a:off x="6810375" y="2595414"/>
+            <a:ext cx="1287173" cy="228600"/>
+          </a:xfrm>
+          <a:prstGeom prst="rect">
+            <a:avLst/>
+          </a:prstGeom>
+          <a:noFill/>
+        </p:spPr>
+        <p:txBody>
+          <a:bodyPr wrap="none" lIns="0" rIns="0" tIns="0" bIns="0" anchor="t">
+            <a:noAutofit/>
+          </a:bodyPr>
+          <a:lstStyle/>
+          <a:p>
+            <a:pPr algn="l">
+              <a:lnSpc>
+                <a:spcPts val="1920"/>
+              </a:lnSpc>
+              <a:spcBef>
+                <a:spcPts val="0"/>
+              </a:spcBef>
+              <a:spcAft>
+                <a:spcPts val="0"/>
+              </a:spcAft>
+            </a:pPr>
+            <a:r>
+              <a:rPr sz="1200" b="0" i="0">
+                <a:solidFill>
+                  <a:srgbClr val="ECEBE6"/>
+                </a:solidFill>
+                <a:latin typeface="Yu Gothic"/>
+                <a:ea typeface="Yu Gothic"/>
+                <a:cs typeface="Yu Gothic"/>
+              </a:rPr>
+              <a:t>会話と候補カード</a:t>
+            </a:r>
+          </a:p>
+        </p:txBody>
+      </p:sp>
+      <p:sp>
+        <p:nvSpPr>
+          <p:cNvPr id="35" name="TextBox 34"/>
+          <p:cNvSpPr txBox="1"/>
+          <p:nvPr/>
+        </p:nvSpPr>
+        <p:spPr>
+          <a:xfrm>
+            <a:off x="9272588" y="2595414"/>
+            <a:ext cx="653189" cy="228600"/>
+          </a:xfrm>
+          <a:prstGeom prst="rect">
+            <a:avLst/>
+          </a:prstGeom>
+          <a:noFill/>
+        </p:spPr>
+        <p:txBody>
+          <a:bodyPr wrap="none" lIns="0" rIns="0" tIns="0" bIns="0" anchor="t">
+            <a:noAutofit/>
+          </a:bodyPr>
+          <a:lstStyle/>
+          <a:p>
+            <a:pPr algn="l">
+              <a:lnSpc>
+                <a:spcPts val="1920"/>
+              </a:lnSpc>
+              <a:spcBef>
+                <a:spcPts val="0"/>
+              </a:spcBef>
+              <a:spcAft>
+                <a:spcPts val="0"/>
+              </a:spcAft>
+            </a:pPr>
+            <a:r>
+              <a:rPr sz="1200" b="0" i="0">
+                <a:solidFill>
+                  <a:srgbClr val="ECEBE6"/>
+                </a:solidFill>
+                <a:latin typeface="Yu Gothic"/>
+                <a:ea typeface="Yu Gothic"/>
+                <a:cs typeface="Yu Gothic"/>
+              </a:rPr>
+              <a:t>店舗詳細</a:t>
+            </a:r>
+          </a:p>
+        </p:txBody>
+      </p:sp>
+      <p:sp>
+        <p:nvSpPr>
+          <p:cNvPr id="36" name="TextBox 35"/>
+          <p:cNvSpPr txBox="1"/>
+          <p:nvPr/>
+        </p:nvSpPr>
+        <p:spPr>
+          <a:xfrm>
+            <a:off x="609600" y="3889921"/>
+            <a:ext cx="728722" cy="247650"/>
+          </a:xfrm>
+          <a:prstGeom prst="rect">
+            <a:avLst/>
+          </a:prstGeom>
+          <a:noFill/>
+        </p:spPr>
+        <p:txBody>
+          <a:bodyPr wrap="none" lIns="0" rIns="0" tIns="0" bIns="0" anchor="t">
+            <a:noAutofit/>
+          </a:bodyPr>
+          <a:lstStyle/>
+          <a:p>
+            <a:pPr algn="l">
+              <a:lnSpc>
+                <a:spcPts val="2025"/>
+              </a:lnSpc>
+              <a:spcBef>
+                <a:spcPts val="0"/>
+              </a:spcBef>
+              <a:spcAft>
+                <a:spcPts val="0"/>
+              </a:spcAft>
+            </a:pPr>
+            <a:r>
+              <a:rPr sz="1350" b="1" i="0">
+                <a:solidFill>
+                  <a:srgbClr val="ECEBE6"/>
+                </a:solidFill>
+                <a:latin typeface="Yu Gothic"/>
+                <a:ea typeface="Yu Gothic"/>
+                <a:cs typeface="Yu Gothic"/>
+              </a:rPr>
+              <a:t>ユーザー</a:t>
+            </a:r>
+          </a:p>
+        </p:txBody>
+      </p:sp>
+      <p:sp>
+        <p:nvSpPr>
+          <p:cNvPr id="37" name="TextBox 36"/>
+          <p:cNvSpPr txBox="1"/>
+          <p:nvPr/>
+        </p:nvSpPr>
+        <p:spPr>
+          <a:xfrm>
+            <a:off x="1885950" y="3769965"/>
+            <a:ext cx="2381631" cy="472380"/>
+          </a:xfrm>
+          <a:prstGeom prst="rect">
+            <a:avLst/>
+          </a:prstGeom>
+          <a:noFill/>
+        </p:spPr>
+        <p:txBody>
+          <a:bodyPr wrap="none" lIns="0" rIns="0" tIns="0" bIns="0" anchor="t">
+            <a:noAutofit/>
+          </a:bodyPr>
+          <a:lstStyle/>
+          <a:p>
+            <a:pPr algn="l">
+              <a:lnSpc>
+                <a:spcPts val="1920"/>
+              </a:lnSpc>
+              <a:spcBef>
+                <a:spcPts val="0"/>
+              </a:spcBef>
+              <a:spcAft>
+                <a:spcPts val="0"/>
+              </a:spcAft>
+            </a:pPr>
+            <a:r>
+              <a:rPr sz="1200" b="0" i="0">
+                <a:solidFill>
+                  <a:srgbClr val="ECEBE6"/>
+                </a:solidFill>
+                <a:latin typeface="Yu Gothic"/>
+                <a:ea typeface="Yu Gothic"/>
+                <a:cs typeface="Yu Gothic"/>
+              </a:rPr>
+              <a:t>「チャットで話す」か</a:t>
+            </a:r>
+          </a:p>
+          <a:p>
+            <a:pPr algn="l">
+              <a:lnSpc>
+                <a:spcPts val="1920"/>
+              </a:lnSpc>
+              <a:spcBef>
+                <a:spcPts val="0"/>
+              </a:spcBef>
+              <a:spcAft>
+                <a:spcPts val="0"/>
+              </a:spcAft>
+            </a:pPr>
+            <a:r>
+              <a:rPr sz="1200" b="0" i="0">
+                <a:solidFill>
+                  <a:srgbClr val="ECEBE6"/>
+                </a:solidFill>
+                <a:latin typeface="Yu Gothic"/>
+                <a:ea typeface="Yu Gothic"/>
+                <a:cs typeface="Yu Gothic"/>
+              </a:rPr>
+              <a:t>「質問に答える」を選ぶ</a:t>
+            </a:r>
+          </a:p>
+        </p:txBody>
+      </p:sp>
+      <p:sp>
+        <p:nvSpPr>
+          <p:cNvPr id="38" name="TextBox 37"/>
+          <p:cNvSpPr txBox="1"/>
+          <p:nvPr/>
+        </p:nvSpPr>
+        <p:spPr>
+          <a:xfrm>
+            <a:off x="4348162" y="3648075"/>
+            <a:ext cx="2381631" cy="716161"/>
+          </a:xfrm>
+          <a:prstGeom prst="rect">
+            <a:avLst/>
+          </a:prstGeom>
+          <a:noFill/>
+        </p:spPr>
+        <p:txBody>
+          <a:bodyPr wrap="none" lIns="0" rIns="0" tIns="0" bIns="0" anchor="t">
+            <a:noAutofit/>
+          </a:bodyPr>
+          <a:lstStyle/>
+          <a:p>
+            <a:pPr algn="l">
+              <a:lnSpc>
+                <a:spcPts val="1920"/>
+              </a:lnSpc>
+              <a:spcBef>
+                <a:spcPts val="0"/>
+              </a:spcBef>
+              <a:spcAft>
+                <a:spcPts val="0"/>
+              </a:spcAft>
+            </a:pPr>
+            <a:r>
+              <a:rPr sz="1200" b="0" i="0">
+                <a:solidFill>
+                  <a:srgbClr val="ECEBE6"/>
+                </a:solidFill>
+                <a:latin typeface="Yu Gothic"/>
+                <a:ea typeface="Yu Gothic"/>
+                <a:cs typeface="Yu Gothic"/>
+              </a:rPr>
+              <a:t>状況をそのまま書くか、</a:t>
+            </a:r>
+          </a:p>
+          <a:p>
+            <a:pPr algn="l">
+              <a:lnSpc>
+                <a:spcPts val="1920"/>
+              </a:lnSpc>
+              <a:spcBef>
+                <a:spcPts val="0"/>
+              </a:spcBef>
+              <a:spcAft>
+                <a:spcPts val="0"/>
+              </a:spcAft>
+            </a:pPr>
+            <a:r>
+              <a:rPr sz="1200" b="0" i="0">
+                <a:solidFill>
+                  <a:srgbClr val="ECEBE6"/>
+                </a:solidFill>
+                <a:latin typeface="Yu Gothic"/>
+                <a:ea typeface="Yu Gothic"/>
+                <a:cs typeface="Yu Gothic"/>
+              </a:rPr>
+              <a:t>誰と・食べたいもの・系統・</a:t>
+            </a:r>
+          </a:p>
+          <a:p>
+            <a:pPr algn="l">
+              <a:lnSpc>
+                <a:spcPts val="1920"/>
+              </a:lnSpc>
+              <a:spcBef>
+                <a:spcPts val="0"/>
+              </a:spcBef>
+              <a:spcAft>
+                <a:spcPts val="0"/>
+              </a:spcAft>
+            </a:pPr>
+            <a:r>
+              <a:rPr sz="1200" b="0" i="0">
+                <a:solidFill>
+                  <a:srgbClr val="ECEBE6"/>
+                </a:solidFill>
+                <a:latin typeface="Yu Gothic"/>
+                <a:ea typeface="Yu Gothic"/>
+                <a:cs typeface="Yu Gothic"/>
+              </a:rPr>
+              <a:t>予算・雰囲気に答える</a:t>
+            </a:r>
+          </a:p>
+        </p:txBody>
+      </p:sp>
+      <p:sp>
+        <p:nvSpPr>
+          <p:cNvPr id="39" name="TextBox 38"/>
+          <p:cNvSpPr txBox="1"/>
+          <p:nvPr/>
+        </p:nvSpPr>
+        <p:spPr>
+          <a:xfrm>
+            <a:off x="6810375" y="3769965"/>
+            <a:ext cx="2381631" cy="472380"/>
+          </a:xfrm>
+          <a:prstGeom prst="rect">
+            <a:avLst/>
+          </a:prstGeom>
+          <a:noFill/>
+        </p:spPr>
+        <p:txBody>
+          <a:bodyPr wrap="none" lIns="0" rIns="0" tIns="0" bIns="0" anchor="t">
+            <a:noAutofit/>
+          </a:bodyPr>
+          <a:lstStyle/>
+          <a:p>
+            <a:pPr algn="l">
+              <a:lnSpc>
+                <a:spcPts val="1920"/>
+              </a:lnSpc>
+              <a:spcBef>
+                <a:spcPts val="0"/>
+              </a:spcBef>
+              <a:spcAft>
+                <a:spcPts val="0"/>
+              </a:spcAft>
+            </a:pPr>
+            <a:r>
+              <a:rPr sz="1200" b="0" i="0">
+                <a:solidFill>
+                  <a:srgbClr val="ECEBE6"/>
+                </a:solidFill>
+                <a:latin typeface="Yu Gothic"/>
+                <a:ea typeface="Yu Gothic"/>
+                <a:cs typeface="Yu Gothic"/>
+              </a:rPr>
+              <a:t>条件の追加・変更・比較を、</a:t>
+            </a:r>
+          </a:p>
+          <a:p>
+            <a:pPr algn="l">
+              <a:lnSpc>
+                <a:spcPts val="1920"/>
+              </a:lnSpc>
+              <a:spcBef>
+                <a:spcPts val="0"/>
+              </a:spcBef>
+              <a:spcAft>
+                <a:spcPts val="0"/>
+              </a:spcAft>
+            </a:pPr>
+            <a:r>
+              <a:rPr sz="1200" b="0" i="0">
+                <a:solidFill>
+                  <a:srgbClr val="ECEBE6"/>
+                </a:solidFill>
+                <a:latin typeface="Yu Gothic"/>
+                <a:ea typeface="Yu Gothic"/>
+                <a:cs typeface="Yu Gothic"/>
+              </a:rPr>
+              <a:t>同じ会話のまま頼む</a:t>
+            </a:r>
+          </a:p>
+        </p:txBody>
+      </p:sp>
+      <p:sp>
+        <p:nvSpPr>
+          <p:cNvPr id="40" name="TextBox 39"/>
+          <p:cNvSpPr txBox="1"/>
+          <p:nvPr/>
+        </p:nvSpPr>
+        <p:spPr>
+          <a:xfrm>
+            <a:off x="9272588" y="3769965"/>
+            <a:ext cx="2381631" cy="472380"/>
+          </a:xfrm>
+          <a:prstGeom prst="rect">
+            <a:avLst/>
+          </a:prstGeom>
+          <a:noFill/>
+        </p:spPr>
+        <p:txBody>
+          <a:bodyPr wrap="none" lIns="0" rIns="0" tIns="0" bIns="0" anchor="t">
+            <a:noAutofit/>
+          </a:bodyPr>
+          <a:lstStyle/>
+          <a:p>
+            <a:pPr algn="l">
+              <a:lnSpc>
+                <a:spcPts val="1920"/>
+              </a:lnSpc>
+              <a:spcBef>
+                <a:spcPts val="0"/>
+              </a:spcBef>
+              <a:spcAft>
+                <a:spcPts val="0"/>
+              </a:spcAft>
+            </a:pPr>
+            <a:r>
+              <a:rPr sz="1200" b="0" i="0">
+                <a:solidFill>
+                  <a:srgbClr val="ECEBE6"/>
+                </a:solidFill>
+                <a:latin typeface="Yu Gothic"/>
+                <a:ea typeface="Yu Gothic"/>
+                <a:cs typeface="Yu Gothic"/>
+              </a:rPr>
+              <a:t>「店舗詳細を見る」から</a:t>
+            </a:r>
+          </a:p>
+          <a:p>
+            <a:pPr algn="l">
+              <a:lnSpc>
+                <a:spcPts val="1920"/>
+              </a:lnSpc>
+              <a:spcBef>
+                <a:spcPts val="0"/>
+              </a:spcBef>
+              <a:spcAft>
+                <a:spcPts val="0"/>
+              </a:spcAft>
+            </a:pPr>
+            <a:r>
+              <a:rPr sz="1200" b="0" i="0">
+                <a:solidFill>
+                  <a:srgbClr val="ECEBE6"/>
+                </a:solidFill>
+                <a:latin typeface="Yu Gothic"/>
+                <a:ea typeface="Yu Gothic"/>
+                <a:cs typeface="Yu Gothic"/>
+              </a:rPr>
+              <a:t>「ここにする」で決める</a:t>
+            </a:r>
+          </a:p>
+        </p:txBody>
+      </p:sp>
+      <p:sp>
+        <p:nvSpPr>
+          <p:cNvPr id="41" name="TextBox 40"/>
+          <p:cNvSpPr txBox="1"/>
+          <p:nvPr/>
+        </p:nvSpPr>
+        <p:spPr>
+          <a:xfrm>
+            <a:off x="609600" y="5420916"/>
+            <a:ext cx="350591" cy="247650"/>
+          </a:xfrm>
+          <a:prstGeom prst="rect">
+            <a:avLst/>
+          </a:prstGeom>
+          <a:noFill/>
+        </p:spPr>
+        <p:txBody>
+          <a:bodyPr wrap="none" lIns="0" rIns="0" tIns="0" bIns="0" anchor="t">
+            <a:noAutofit/>
+          </a:bodyPr>
+          <a:lstStyle/>
+          <a:p>
+            <a:pPr algn="l">
+              <a:lnSpc>
+                <a:spcPts val="2025"/>
+              </a:lnSpc>
+              <a:spcBef>
+                <a:spcPts val="0"/>
+              </a:spcBef>
+              <a:spcAft>
+                <a:spcPts val="0"/>
+              </a:spcAft>
+            </a:pPr>
+            <a:r>
+              <a:rPr sz="1350" b="1" i="0">
+                <a:solidFill>
+                  <a:srgbClr val="ECEBE6"/>
+                </a:solidFill>
+                <a:latin typeface="Yu Gothic"/>
+                <a:ea typeface="Yu Gothic"/>
+                <a:cs typeface="Yu Gothic"/>
+              </a:rPr>
+              <a:t>ima</a:t>
+            </a:r>
+          </a:p>
+        </p:txBody>
+      </p:sp>
+      <p:sp>
+        <p:nvSpPr>
+          <p:cNvPr id="42" name="TextBox 41"/>
+          <p:cNvSpPr txBox="1"/>
+          <p:nvPr/>
+        </p:nvSpPr>
+        <p:spPr>
+          <a:xfrm>
+            <a:off x="1885950" y="5300960"/>
+            <a:ext cx="2381631" cy="472380"/>
+          </a:xfrm>
+          <a:prstGeom prst="rect">
+            <a:avLst/>
+          </a:prstGeom>
+          <a:noFill/>
+        </p:spPr>
+        <p:txBody>
+          <a:bodyPr wrap="none" lIns="0" rIns="0" tIns="0" bIns="0" anchor="t">
+            <a:noAutofit/>
+          </a:bodyPr>
+          <a:lstStyle/>
+          <a:p>
+            <a:pPr algn="l">
+              <a:lnSpc>
+                <a:spcPts val="1920"/>
+              </a:lnSpc>
+              <a:spcBef>
+                <a:spcPts val="0"/>
+              </a:spcBef>
+              <a:spcAft>
+                <a:spcPts val="0"/>
+              </a:spcAft>
+            </a:pPr>
+            <a:r>
+              <a:rPr sz="1200" b="0" i="0">
+                <a:solidFill>
+                  <a:srgbClr val="ECEBE6"/>
+                </a:solidFill>
+                <a:latin typeface="Yu Gothic"/>
+                <a:ea typeface="Yu Gothic"/>
+                <a:cs typeface="Yu Gothic"/>
+              </a:rPr>
+              <a:t>入口を毎回尋ね、</a:t>
+            </a:r>
+          </a:p>
+          <a:p>
+            <a:pPr algn="l">
+              <a:lnSpc>
+                <a:spcPts val="1920"/>
+              </a:lnSpc>
+              <a:spcBef>
+                <a:spcPts val="0"/>
+              </a:spcBef>
+              <a:spcAft>
+                <a:spcPts val="0"/>
+              </a:spcAft>
+            </a:pPr>
+            <a:r>
+              <a:rPr sz="1200" b="0" i="0">
+                <a:solidFill>
+                  <a:srgbClr val="ECEBE6"/>
+                </a:solidFill>
+                <a:latin typeface="Yu Gothic"/>
+                <a:ea typeface="Yu Gothic"/>
+                <a:cs typeface="Yu Gothic"/>
+              </a:rPr>
+              <a:t>選んだ入口は記憶しない</a:t>
+            </a:r>
+          </a:p>
+        </p:txBody>
+      </p:sp>
+      <p:sp>
+        <p:nvSpPr>
+          <p:cNvPr id="43" name="TextBox 42"/>
+          <p:cNvSpPr txBox="1"/>
+          <p:nvPr/>
+        </p:nvSpPr>
+        <p:spPr>
+          <a:xfrm>
+            <a:off x="4348162" y="5300960"/>
+            <a:ext cx="2381631" cy="472380"/>
+          </a:xfrm>
+          <a:prstGeom prst="rect">
+            <a:avLst/>
+          </a:prstGeom>
+          <a:noFill/>
+        </p:spPr>
+        <p:txBody>
+          <a:bodyPr wrap="none" lIns="0" rIns="0" tIns="0" bIns="0" anchor="t">
+            <a:noAutofit/>
+          </a:bodyPr>
+          <a:lstStyle/>
+          <a:p>
+            <a:pPr algn="l">
+              <a:lnSpc>
+                <a:spcPts val="1920"/>
+              </a:lnSpc>
+              <a:spcBef>
+                <a:spcPts val="0"/>
+              </a:spcBef>
+              <a:spcAft>
+                <a:spcPts val="0"/>
+              </a:spcAft>
+            </a:pPr>
+            <a:r>
+              <a:rPr sz="1200" b="0" i="0">
+                <a:solidFill>
+                  <a:srgbClr val="ECEBE6"/>
+                </a:solidFill>
+                <a:latin typeface="Yu Gothic"/>
+                <a:ea typeface="Yu Gothic"/>
+                <a:cs typeface="Yu Gothic"/>
+              </a:rPr>
+              <a:t>質問の回答を1文にまとめ、</a:t>
+            </a:r>
+          </a:p>
+          <a:p>
+            <a:pPr algn="l">
+              <a:lnSpc>
+                <a:spcPts val="1920"/>
+              </a:lnSpc>
+              <a:spcBef>
+                <a:spcPts val="0"/>
+              </a:spcBef>
+              <a:spcAft>
+                <a:spcPts val="0"/>
+              </a:spcAft>
+            </a:pPr>
+            <a:r>
+              <a:rPr sz="1200" b="0" i="0">
+                <a:solidFill>
+                  <a:srgbClr val="ECEBE6"/>
+                </a:solidFill>
+                <a:latin typeface="Yu Gothic"/>
+                <a:ea typeface="Yu Gothic"/>
+                <a:cs typeface="Yu Gothic"/>
+              </a:rPr>
+              <a:t>会話の最初の発言として送る</a:t>
+            </a:r>
+          </a:p>
+        </p:txBody>
+      </p:sp>
+      <p:sp>
+        <p:nvSpPr>
+          <p:cNvPr id="44" name="TextBox 43"/>
+          <p:cNvSpPr txBox="1"/>
+          <p:nvPr/>
+        </p:nvSpPr>
+        <p:spPr>
+          <a:xfrm>
+            <a:off x="6810375" y="5179070"/>
+            <a:ext cx="2381631" cy="716161"/>
+          </a:xfrm>
+          <a:prstGeom prst="rect">
+            <a:avLst/>
+          </a:prstGeom>
+          <a:noFill/>
+        </p:spPr>
+        <p:txBody>
+          <a:bodyPr wrap="none" lIns="0" rIns="0" tIns="0" bIns="0" anchor="t">
+            <a:noAutofit/>
+          </a:bodyPr>
+          <a:lstStyle/>
+          <a:p>
+            <a:pPr algn="l">
+              <a:lnSpc>
+                <a:spcPts val="1920"/>
+              </a:lnSpc>
+              <a:spcBef>
+                <a:spcPts val="0"/>
+              </a:spcBef>
+              <a:spcAft>
+                <a:spcPts val="0"/>
+              </a:spcAft>
+            </a:pPr>
+            <a:r>
+              <a:rPr sz="1200" b="0" i="0">
+                <a:solidFill>
+                  <a:srgbClr val="ECEBE6"/>
+                </a:solidFill>
+                <a:latin typeface="Yu Gothic"/>
+                <a:ea typeface="Yu Gothic"/>
+                <a:cs typeface="Yu Gothic"/>
+              </a:rPr>
+              <a:t>地名がなければ現在地の</a:t>
+            </a:r>
+          </a:p>
+          <a:p>
+            <a:pPr algn="l">
+              <a:lnSpc>
+                <a:spcPts val="1920"/>
+              </a:lnSpc>
+              <a:spcBef>
+                <a:spcPts val="0"/>
+              </a:spcBef>
+              <a:spcAft>
+                <a:spcPts val="0"/>
+              </a:spcAft>
+            </a:pPr>
+            <a:r>
+              <a:rPr sz="1200" b="0" i="0">
+                <a:solidFill>
+                  <a:srgbClr val="ECEBE6"/>
+                </a:solidFill>
+                <a:latin typeface="Yu Gothic"/>
+                <a:ea typeface="Yu Gothic"/>
+                <a:cs typeface="Yu Gothic"/>
+              </a:rPr>
+              <a:t>1km圏から探し、主提案1件と</a:t>
+            </a:r>
+          </a:p>
+          <a:p>
+            <a:pPr algn="l">
+              <a:lnSpc>
+                <a:spcPts val="1920"/>
+              </a:lnSpc>
+              <a:spcBef>
+                <a:spcPts val="0"/>
+              </a:spcBef>
+              <a:spcAft>
+                <a:spcPts val="0"/>
+              </a:spcAft>
+            </a:pPr>
+            <a:r>
+              <a:rPr sz="1200" b="0" i="0">
+                <a:solidFill>
+                  <a:srgbClr val="ECEBE6"/>
+                </a:solidFill>
+                <a:latin typeface="Yu Gothic"/>
+                <a:ea typeface="Yu Gothic"/>
+                <a:cs typeface="Yu Gothic"/>
+              </a:rPr>
+              <a:t>別案最大2件を返す</a:t>
+            </a:r>
+          </a:p>
+        </p:txBody>
+      </p:sp>
+      <p:sp>
+        <p:nvSpPr>
+          <p:cNvPr id="45" name="TextBox 44"/>
+          <p:cNvSpPr txBox="1"/>
+          <p:nvPr/>
+        </p:nvSpPr>
+        <p:spPr>
+          <a:xfrm>
+            <a:off x="9272588" y="5300960"/>
+            <a:ext cx="2381631" cy="472380"/>
+          </a:xfrm>
+          <a:prstGeom prst="rect">
+            <a:avLst/>
+          </a:prstGeom>
+          <a:noFill/>
+        </p:spPr>
+        <p:txBody>
+          <a:bodyPr wrap="none" lIns="0" rIns="0" tIns="0" bIns="0" anchor="t">
+            <a:noAutofit/>
+          </a:bodyPr>
+          <a:lstStyle/>
+          <a:p>
+            <a:pPr algn="l">
+              <a:lnSpc>
+                <a:spcPts val="1920"/>
+              </a:lnSpc>
+              <a:spcBef>
+                <a:spcPts val="0"/>
+              </a:spcBef>
+              <a:spcAft>
+                <a:spcPts val="0"/>
+              </a:spcAft>
+            </a:pPr>
+            <a:r>
+              <a:rPr sz="1200" b="0" i="0">
+                <a:solidFill>
+                  <a:srgbClr val="ECEBE6"/>
+                </a:solidFill>
+                <a:latin typeface="Yu Gothic"/>
+                <a:ea typeface="Yu Gothic"/>
+                <a:cs typeface="Yu Gothic"/>
+              </a:rPr>
+              <a:t>決めたお店を保存一覧に残し、</a:t>
+            </a:r>
+          </a:p>
+          <a:p>
+            <a:pPr algn="l">
+              <a:lnSpc>
+                <a:spcPts val="1920"/>
+              </a:lnSpc>
+              <a:spcBef>
+                <a:spcPts val="0"/>
+              </a:spcBef>
+              <a:spcAft>
+                <a:spcPts val="0"/>
+              </a:spcAft>
+            </a:pPr>
+            <a:r>
+              <a:rPr sz="1200" b="0" i="0">
+                <a:solidFill>
+                  <a:srgbClr val="ECEBE6"/>
+                </a:solidFill>
+                <a:latin typeface="Yu Gothic"/>
+                <a:ea typeface="Yu Gothic"/>
+                <a:cs typeface="Yu Gothic"/>
+              </a:rPr>
+              <a:t>Google Maps や共有へつなぐ</a:t>
+            </a:r>
+          </a:p>
+        </p:txBody>
+      </p:sp>
+      <p:sp>
+        <p:nvSpPr>
+          <p:cNvPr id="46" name="TextBox 45"/>
+          <p:cNvSpPr txBox="1"/>
+          <p:nvPr/>
+        </p:nvSpPr>
+        <p:spPr>
+          <a:xfrm>
+            <a:off x="609600" y="6481762"/>
+            <a:ext cx="295335" cy="200025"/>
+          </a:xfrm>
+          <a:prstGeom prst="rect">
+            <a:avLst/>
+          </a:prstGeom>
+          <a:noFill/>
+        </p:spPr>
+        <p:txBody>
+          <a:bodyPr wrap="none" lIns="0" rIns="0" tIns="0" bIns="0" anchor="t">
+            <a:noAutofit/>
+          </a:bodyPr>
+          <a:lstStyle/>
+          <a:p>
+            <a:pPr algn="l">
+              <a:lnSpc>
+                <a:spcPts val="1687"/>
+              </a:lnSpc>
+              <a:spcBef>
+                <a:spcPts val="0"/>
+              </a:spcBef>
+              <a:spcAft>
+                <a:spcPts val="0"/>
+              </a:spcAft>
+            </a:pPr>
+            <a:r>
+              <a:rPr sz="1100" b="1" i="0">
+                <a:solidFill>
+                  <a:srgbClr val="9A9993"/>
+                </a:solidFill>
+                <a:latin typeface="Yu Gothic"/>
+                <a:ea typeface="Yu Gothic"/>
+                <a:cs typeface="Yu Gothic"/>
+              </a:rPr>
+              <a:t>ima</a:t>
+            </a:r>
+          </a:p>
+        </p:txBody>
+      </p:sp>
+      <p:sp>
+        <p:nvSpPr>
+          <p:cNvPr id="47" name="TextBox 46"/>
+          <p:cNvSpPr txBox="1"/>
+          <p:nvPr/>
+        </p:nvSpPr>
+        <p:spPr>
+          <a:xfrm>
+            <a:off x="11513641" y="6491288"/>
+            <a:ext cx="90559" cy="180975"/>
+          </a:xfrm>
+          <a:prstGeom prst="rect">
+            <a:avLst/>
+          </a:prstGeom>
+          <a:noFill/>
+        </p:spPr>
+        <p:txBody>
+          <a:bodyPr wrap="none" lIns="0" rIns="0" tIns="0" bIns="0" anchor="t">
+            <a:noAutofit/>
+          </a:bodyPr>
+          <a:lstStyle/>
+          <a:p>
+            <a:pPr algn="l">
+              <a:lnSpc>
+                <a:spcPts val="1462"/>
+              </a:lnSpc>
+              <a:spcBef>
+                <a:spcPts val="0"/>
+              </a:spcBef>
+              <a:spcAft>
+                <a:spcPts val="0"/>
+              </a:spcAft>
+            </a:pPr>
+            <a:r>
+              <a:rPr sz="1000" b="0" i="0">
+                <a:solidFill>
+                  <a:srgbClr val="9A9993"/>
+                </a:solidFill>
+                <a:latin typeface="Yu Gothic"/>
+                <a:ea typeface="Yu Gothic"/>
+                <a:cs typeface="Yu Gothic"/>
+              </a:rPr>
+              <a:t>3</a:t>
+            </a:r>
+          </a:p>
+        </p:txBody>
+      </p:sp>
+    </p:spTree>
+  </p:cSld>
+  <p:clrMapOvr>
+    <a:masterClrMapping/>
+  </p:clrMapOvr>
+</p:sld>
+</file>
+
+<file path=ppt/slides/slide5.xml><?xml version="1.0" encoding="utf-8"?>
+<p:sld xmlns:a="http://schemas.openxmlformats.org/drawingml/2006/main" xmlns:p="http://schemas.openxmlformats.org/presentationml/2006/main" xmlns:r="http://schemas.openxmlformats.org/officeDocument/2006/relationships">
+  <p:cSld>
+    <p:bg>
+      <p:bgPr>
+        <a:solidFill>
+          <a:srgbClr val="0C0C0D"/>
+        </a:solidFill>
+        <a:effectLst/>
+      </p:bgPr>
+    </p:bg>
+    <p:spTree>
+      <p:nvGrpSpPr>
+        <p:cNvPr id="1" name=""/>
+        <p:cNvGrpSpPr/>
+        <p:nvPr/>
+      </p:nvGrpSpPr>
+      <p:grpSpPr/>
+      <p:pic>
+        <p:nvPicPr>
+          <p:cNvPr id="2" name="Picture 1" descr="img_5_6.png"/>
+          <p:cNvPicPr>
+            <a:picLocks noChangeAspect="1"/>
+          </p:cNvPicPr>
+          <p:nvPr/>
+        </p:nvPicPr>
+        <p:blipFill>
+          <a:blip r:embed="rId2"/>
+          <a:stretch>
+            <a:fillRect/>
+          </a:stretch>
+        </p:blipFill>
+        <p:spPr>
+          <a:xfrm>
+            <a:off x="10648950" y="209550"/>
+            <a:ext cx="1123950" cy="1123950"/>
+          </a:xfrm>
+          <a:prstGeom prst="rect">
+            <a:avLst/>
+          </a:prstGeom>
+        </p:spPr>
+      </p:pic>
+      <p:cxnSp>
+        <p:nvCxnSpPr>
+          <p:cNvPr id="3" name="Connector 2"/>
+          <p:cNvCxnSpPr/>
+          <p:nvPr/>
+        </p:nvCxnSpPr>
+        <p:spPr>
+          <a:xfrm>
+            <a:off x="609600" y="1971973"/>
+            <a:ext cx="2528888" cy="0"/>
+          </a:xfrm>
+          <a:prstGeom prst="line">
+            <a:avLst/>
+          </a:prstGeom>
+          <a:ln w="19050">
+            <a:solidFill>
+              <a:srgbClr val="ECEBE6"/>
+            </a:solidFill>
+          </a:ln>
+        </p:spPr>
+      </p:cxnSp>
+      <p:sp>
+        <p:nvSpPr>
+          <p:cNvPr id="4" name="Rectangle 3"/>
+          <p:cNvSpPr/>
+          <p:nvPr/>
+        </p:nvSpPr>
+        <p:spPr>
+          <a:xfrm>
+            <a:off x="609600" y="2133898"/>
+            <a:ext cx="1428750" cy="3095625"/>
+          </a:xfrm>
+          <a:prstGeom prst="rect">
+            <a:avLst/>
+          </a:prstGeom>
+          <a:noFill/>
+          <a:ln w="9525">
+            <a:solidFill>
+              <a:srgbClr val="6B6A66"/>
+            </a:solidFill>
+            <a:prstDash val="dash"/>
+          </a:ln>
+        </p:spPr>
+        <p:txBody>
+          <a:bodyPr rtlCol="0" anchor="ctr"/>
+          <a:lstStyle/>
+          <a:p/>
+        </p:txBody>
+      </p:sp>
+      <p:cxnSp>
+        <p:nvCxnSpPr>
+          <p:cNvPr id="5" name="Connector 4"/>
+          <p:cNvCxnSpPr/>
+          <p:nvPr/>
+        </p:nvCxnSpPr>
+        <p:spPr>
+          <a:xfrm>
+            <a:off x="3424238" y="1971973"/>
+            <a:ext cx="2528887" cy="0"/>
+          </a:xfrm>
+          <a:prstGeom prst="line">
+            <a:avLst/>
+          </a:prstGeom>
+          <a:ln w="19050">
+            <a:solidFill>
+              <a:srgbClr val="ECEBE6"/>
+            </a:solidFill>
+          </a:ln>
+        </p:spPr>
+      </p:cxnSp>
+      <p:sp>
+        <p:nvSpPr>
+          <p:cNvPr id="6" name="Rectangle 5"/>
+          <p:cNvSpPr/>
+          <p:nvPr/>
+        </p:nvSpPr>
+        <p:spPr>
+          <a:xfrm>
+            <a:off x="3424238" y="2133898"/>
+            <a:ext cx="1428750" cy="3095625"/>
+          </a:xfrm>
+          <a:prstGeom prst="rect">
+            <a:avLst/>
+          </a:prstGeom>
+          <a:noFill/>
+          <a:ln w="9525">
+            <a:solidFill>
+              <a:srgbClr val="6B6A66"/>
+            </a:solidFill>
+            <a:prstDash val="dash"/>
+          </a:ln>
+        </p:spPr>
+        <p:txBody>
+          <a:bodyPr rtlCol="0" anchor="ctr"/>
+          <a:lstStyle/>
+          <a:p/>
+        </p:txBody>
+      </p:sp>
+      <p:cxnSp>
+        <p:nvCxnSpPr>
+          <p:cNvPr id="7" name="Connector 6"/>
+          <p:cNvCxnSpPr/>
+          <p:nvPr/>
+        </p:nvCxnSpPr>
+        <p:spPr>
+          <a:xfrm>
+            <a:off x="6238875" y="1971973"/>
+            <a:ext cx="2528887" cy="0"/>
+          </a:xfrm>
+          <a:prstGeom prst="line">
+            <a:avLst/>
+          </a:prstGeom>
+          <a:ln w="19050">
+            <a:solidFill>
+              <a:srgbClr val="ECEBE6"/>
+            </a:solidFill>
+          </a:ln>
+        </p:spPr>
+      </p:cxnSp>
+      <p:sp>
+        <p:nvSpPr>
+          <p:cNvPr id="8" name="Rectangle 7"/>
+          <p:cNvSpPr/>
+          <p:nvPr/>
+        </p:nvSpPr>
+        <p:spPr>
+          <a:xfrm>
+            <a:off x="6238875" y="2133898"/>
+            <a:ext cx="1428750" cy="3095625"/>
+          </a:xfrm>
+          <a:prstGeom prst="rect">
+            <a:avLst/>
+          </a:prstGeom>
+          <a:noFill/>
+          <a:ln w="9525">
+            <a:solidFill>
+              <a:srgbClr val="6B6A66"/>
+            </a:solidFill>
+            <a:prstDash val="dash"/>
+          </a:ln>
+        </p:spPr>
+        <p:txBody>
+          <a:bodyPr rtlCol="0" anchor="ctr"/>
+          <a:lstStyle/>
+          <a:p/>
+        </p:txBody>
+      </p:sp>
+      <p:cxnSp>
+        <p:nvCxnSpPr>
+          <p:cNvPr id="9" name="Connector 8"/>
+          <p:cNvCxnSpPr/>
+          <p:nvPr/>
+        </p:nvCxnSpPr>
+        <p:spPr>
+          <a:xfrm>
+            <a:off x="9053512" y="1971973"/>
+            <a:ext cx="2528888" cy="0"/>
+          </a:xfrm>
+          <a:prstGeom prst="line">
+            <a:avLst/>
+          </a:prstGeom>
+          <a:ln w="19050">
+            <a:solidFill>
+              <a:srgbClr val="ECEBE6"/>
+            </a:solidFill>
+          </a:ln>
+        </p:spPr>
+      </p:cxnSp>
+      <p:sp>
+        <p:nvSpPr>
+          <p:cNvPr id="10" name="Rectangle 9"/>
+          <p:cNvSpPr/>
+          <p:nvPr/>
+        </p:nvSpPr>
+        <p:spPr>
+          <a:xfrm>
+            <a:off x="9053512" y="2133898"/>
+            <a:ext cx="1428750" cy="3095625"/>
+          </a:xfrm>
+          <a:prstGeom prst="rect">
+            <a:avLst/>
+          </a:prstGeom>
+          <a:noFill/>
+          <a:ln w="9525">
+            <a:solidFill>
+              <a:srgbClr val="6B6A66"/>
+            </a:solidFill>
+            <a:prstDash val="dash"/>
+          </a:ln>
+        </p:spPr>
+        <p:txBody>
+          <a:bodyPr rtlCol="0" anchor="ctr"/>
+          <a:lstStyle/>
+          <a:p/>
+        </p:txBody>
+      </p:sp>
+      <p:sp>
+        <p:nvSpPr>
+          <p:cNvPr id="11" name="Title"/>
+          <p:cNvSpPr txBox="1"/>
+          <p:nvPr/>
+        </p:nvSpPr>
+        <p:spPr>
+          <a:xfrm>
+            <a:off x="609600" y="428625"/>
+            <a:ext cx="10024110" cy="847874"/>
+          </a:xfrm>
+          <a:prstGeom prst="rect">
+            <a:avLst/>
+          </a:prstGeom>
+          <a:noFill/>
+        </p:spPr>
+        <p:txBody>
+          <a:bodyPr wrap="none" lIns="0" rIns="0" tIns="0" bIns="0" anchor="t">
+            <a:noAutofit/>
+          </a:bodyPr>
+          <a:lstStyle/>
+          <a:p>
+            <a:pPr algn="l">
+              <a:lnSpc>
+                <a:spcPts val="3301"/>
+              </a:lnSpc>
+              <a:spcBef>
+                <a:spcPts val="0"/>
+              </a:spcBef>
+              <a:spcAft>
+                <a:spcPts val="0"/>
+              </a:spcAft>
+            </a:pPr>
+            <a:r>
+              <a:rPr sz="2300" b="1" i="0">
+                <a:solidFill>
+                  <a:srgbClr val="ECEBE6"/>
+                </a:solidFill>
+                <a:latin typeface="Yu Gothic"/>
+                <a:ea typeface="Yu Gothic"/>
+                <a:cs typeface="Yu Gothic"/>
+              </a:rPr>
+              <a:t>ima の主要画面は、入口の選択から</a:t>
+            </a:r>
+          </a:p>
+          <a:p>
+            <a:pPr algn="l">
+              <a:lnSpc>
+                <a:spcPts val="3301"/>
+              </a:lnSpc>
+              <a:spcBef>
+                <a:spcPts val="0"/>
+              </a:spcBef>
+              <a:spcAft>
+                <a:spcPts val="0"/>
+              </a:spcAft>
+            </a:pPr>
+            <a:r>
+              <a:rPr sz="2300" b="1" i="0">
+                <a:solidFill>
+                  <a:srgbClr val="ECEBE6"/>
+                </a:solidFill>
+                <a:latin typeface="Yu Gothic"/>
+                <a:ea typeface="Yu Gothic"/>
+                <a:cs typeface="Yu Gothic"/>
+              </a:rPr>
+              <a:t>店舗詳細での決定までを1本の会話でつなぐ</a:t>
+            </a:r>
+          </a:p>
+        </p:txBody>
+      </p:sp>
+      <p:sp>
+        <p:nvSpPr>
+          <p:cNvPr id="12" name="TextBox 11"/>
+          <p:cNvSpPr txBox="1"/>
+          <p:nvPr/>
+        </p:nvSpPr>
+        <p:spPr>
+          <a:xfrm>
+            <a:off x="609600" y="1629073"/>
+            <a:ext cx="375666" cy="247650"/>
+          </a:xfrm>
+          <a:prstGeom prst="rect">
+            <a:avLst/>
+          </a:prstGeom>
+          <a:noFill/>
+        </p:spPr>
+        <p:txBody>
+          <a:bodyPr wrap="none" lIns="0" rIns="0" tIns="0" bIns="0" anchor="t">
+            <a:noAutofit/>
+          </a:bodyPr>
+          <a:lstStyle/>
+          <a:p>
+            <a:pPr algn="l">
+              <a:lnSpc>
+                <a:spcPts val="2025"/>
+              </a:lnSpc>
+              <a:spcBef>
+                <a:spcPts val="0"/>
+              </a:spcBef>
+              <a:spcAft>
+                <a:spcPts val="0"/>
+              </a:spcAft>
+            </a:pPr>
+            <a:r>
+              <a:rPr sz="1350" b="1" i="0">
+                <a:solidFill>
+                  <a:srgbClr val="ECEBE6"/>
+                </a:solidFill>
+                <a:latin typeface="Yu Gothic"/>
+                <a:ea typeface="Yu Gothic"/>
+                <a:cs typeface="Yu Gothic"/>
+              </a:rPr>
+              <a:t>入口</a:t>
+            </a:r>
+          </a:p>
+        </p:txBody>
+      </p:sp>
+      <p:sp>
+        <p:nvSpPr>
+          <p:cNvPr id="13" name="TextBox 12"/>
+          <p:cNvSpPr txBox="1"/>
+          <p:nvPr/>
+        </p:nvSpPr>
+        <p:spPr>
+          <a:xfrm>
+            <a:off x="714375" y="3384500"/>
+            <a:ext cx="1256538" cy="577155"/>
+          </a:xfrm>
+          <a:prstGeom prst="rect">
+            <a:avLst/>
+          </a:prstGeom>
+          <a:noFill/>
+        </p:spPr>
+        <p:txBody>
+          <a:bodyPr wrap="square" lIns="0" rIns="0" tIns="0" bIns="0" anchor="t">
+            <a:noAutofit/>
+          </a:bodyPr>
+          <a:lstStyle/>
+          <a:p>
+            <a:pPr algn="ctr">
+              <a:lnSpc>
+                <a:spcPts val="1560"/>
+              </a:lnSpc>
+              <a:spcBef>
+                <a:spcPts val="0"/>
+              </a:spcBef>
+              <a:spcAft>
+                <a:spcPts val="0"/>
+              </a:spcAft>
+            </a:pPr>
+            <a:r>
+              <a:rPr sz="1000" b="0" i="0">
+                <a:solidFill>
+                  <a:srgbClr val="9A9993"/>
+                </a:solidFill>
+                <a:latin typeface="Yu Gothic"/>
+                <a:ea typeface="Yu Gothic"/>
+                <a:cs typeface="Yu Gothic"/>
+              </a:rPr>
+              <a:t>スプラッシュの</a:t>
+            </a:r>
+          </a:p>
+          <a:p>
+            <a:pPr algn="ctr">
+              <a:lnSpc>
+                <a:spcPts val="1560"/>
+              </a:lnSpc>
+              <a:spcBef>
+                <a:spcPts val="0"/>
+              </a:spcBef>
+              <a:spcAft>
+                <a:spcPts val="0"/>
+              </a:spcAft>
+            </a:pPr>
+            <a:r>
+              <a:rPr sz="1000" b="0" i="0">
+                <a:solidFill>
+                  <a:srgbClr val="9A9993"/>
+                </a:solidFill>
+                <a:latin typeface="Yu Gothic"/>
+                <a:ea typeface="Yu Gothic"/>
+                <a:cs typeface="Yu Gothic"/>
+              </a:rPr>
+              <a:t>スクリーンショットを入れる</a:t>
+            </a:r>
+          </a:p>
+        </p:txBody>
+      </p:sp>
+      <p:sp>
+        <p:nvSpPr>
+          <p:cNvPr id="14" name="TextBox 13"/>
+          <p:cNvSpPr txBox="1"/>
+          <p:nvPr/>
+        </p:nvSpPr>
+        <p:spPr>
+          <a:xfrm>
+            <a:off x="781050" y="5372398"/>
+            <a:ext cx="2351758" cy="200025"/>
+          </a:xfrm>
+          <a:prstGeom prst="rect">
+            <a:avLst/>
+          </a:prstGeom>
+          <a:noFill/>
+        </p:spPr>
+        <p:txBody>
+          <a:bodyPr wrap="none" lIns="0" rIns="0" tIns="0" bIns="0" anchor="t">
+            <a:noAutofit/>
+          </a:bodyPr>
+          <a:lstStyle/>
+          <a:p>
+            <a:pPr algn="l" marL="142875" indent="-142875">
+              <a:lnSpc>
+                <a:spcPts val="1743"/>
+              </a:lnSpc>
+              <a:spcBef>
+                <a:spcPts val="0"/>
+              </a:spcBef>
+              <a:spcAft>
+                <a:spcPts val="0"/>
+              </a:spcAft>
+              <a:buSzPct val="100000"/>
+              <a:buFont typeface="Yu Gothic"/>
+              <a:buChar char="•"/>
+            </a:pPr>
+            <a:r>
+              <a:rPr sz="1100" b="0" i="0">
+                <a:solidFill>
+                  <a:srgbClr val="ECEBE6"/>
+                </a:solidFill>
+                <a:latin typeface="Yu Gothic"/>
+                <a:ea typeface="Yu Gothic"/>
+                <a:cs typeface="Yu Gothic"/>
+              </a:rPr>
+              <a:t>maru がチャットか質問かを尋ねる</a:t>
+            </a:r>
+          </a:p>
+        </p:txBody>
+      </p:sp>
+      <p:sp>
+        <p:nvSpPr>
+          <p:cNvPr id="15" name="TextBox 14"/>
+          <p:cNvSpPr txBox="1"/>
+          <p:nvPr/>
+        </p:nvSpPr>
+        <p:spPr>
+          <a:xfrm>
+            <a:off x="781050" y="5651004"/>
+            <a:ext cx="1802285" cy="200025"/>
+          </a:xfrm>
+          <a:prstGeom prst="rect">
+            <a:avLst/>
+          </a:prstGeom>
+          <a:noFill/>
+        </p:spPr>
+        <p:txBody>
+          <a:bodyPr wrap="none" lIns="0" rIns="0" tIns="0" bIns="0" anchor="t">
+            <a:noAutofit/>
+          </a:bodyPr>
+          <a:lstStyle/>
+          <a:p>
+            <a:pPr algn="l" marL="142875" indent="-142875">
+              <a:lnSpc>
+                <a:spcPts val="1743"/>
+              </a:lnSpc>
+              <a:spcBef>
+                <a:spcPts val="0"/>
+              </a:spcBef>
+              <a:spcAft>
+                <a:spcPts val="0"/>
+              </a:spcAft>
+              <a:buSzPct val="100000"/>
+              <a:buFont typeface="Yu Gothic"/>
+              <a:buChar char="•"/>
+            </a:pPr>
+            <a:r>
+              <a:rPr sz="1100" b="0" i="0">
+                <a:solidFill>
+                  <a:srgbClr val="ECEBE6"/>
+                </a:solidFill>
+                <a:latin typeface="Yu Gothic"/>
+                <a:ea typeface="Yu Gothic"/>
+                <a:cs typeface="Yu Gothic"/>
+              </a:rPr>
+              <a:t>選んだ入口へそのまま進む</a:t>
+            </a:r>
+          </a:p>
+        </p:txBody>
+      </p:sp>
+      <p:sp>
+        <p:nvSpPr>
+          <p:cNvPr id="16" name="TextBox 15"/>
+          <p:cNvSpPr txBox="1"/>
+          <p:nvPr/>
+        </p:nvSpPr>
+        <p:spPr>
+          <a:xfrm>
+            <a:off x="3424238" y="1629073"/>
+            <a:ext cx="375666" cy="247650"/>
+          </a:xfrm>
+          <a:prstGeom prst="rect">
+            <a:avLst/>
+          </a:prstGeom>
+          <a:noFill/>
+        </p:spPr>
+        <p:txBody>
+          <a:bodyPr wrap="none" lIns="0" rIns="0" tIns="0" bIns="0" anchor="t">
+            <a:noAutofit/>
+          </a:bodyPr>
+          <a:lstStyle/>
+          <a:p>
+            <a:pPr algn="l">
+              <a:lnSpc>
+                <a:spcPts val="2025"/>
+              </a:lnSpc>
+              <a:spcBef>
+                <a:spcPts val="0"/>
+              </a:spcBef>
+              <a:spcAft>
+                <a:spcPts val="0"/>
+              </a:spcAft>
+            </a:pPr>
+            <a:r>
+              <a:rPr sz="1350" b="1" i="0">
+                <a:solidFill>
+                  <a:srgbClr val="ECEBE6"/>
+                </a:solidFill>
+                <a:latin typeface="Yu Gothic"/>
+                <a:ea typeface="Yu Gothic"/>
+                <a:cs typeface="Yu Gothic"/>
+              </a:rPr>
+              <a:t>質問</a:t>
+            </a:r>
+          </a:p>
+        </p:txBody>
+      </p:sp>
+      <p:sp>
+        <p:nvSpPr>
+          <p:cNvPr id="17" name="TextBox 16"/>
+          <p:cNvSpPr txBox="1"/>
+          <p:nvPr/>
+        </p:nvSpPr>
+        <p:spPr>
+          <a:xfrm>
+            <a:off x="3529012" y="3384500"/>
+            <a:ext cx="1256538" cy="577155"/>
+          </a:xfrm>
+          <a:prstGeom prst="rect">
+            <a:avLst/>
+          </a:prstGeom>
+          <a:noFill/>
+        </p:spPr>
+        <p:txBody>
+          <a:bodyPr wrap="square" lIns="0" rIns="0" tIns="0" bIns="0" anchor="t">
+            <a:noAutofit/>
+          </a:bodyPr>
+          <a:lstStyle/>
+          <a:p>
+            <a:pPr algn="ctr">
+              <a:lnSpc>
+                <a:spcPts val="1560"/>
+              </a:lnSpc>
+              <a:spcBef>
+                <a:spcPts val="0"/>
+              </a:spcBef>
+              <a:spcAft>
+                <a:spcPts val="0"/>
+              </a:spcAft>
+            </a:pPr>
+            <a:r>
+              <a:rPr sz="1000" b="0" i="0">
+                <a:solidFill>
+                  <a:srgbClr val="9A9993"/>
+                </a:solidFill>
+                <a:latin typeface="Yu Gothic"/>
+                <a:ea typeface="Yu Gothic"/>
+                <a:cs typeface="Yu Gothic"/>
+              </a:rPr>
+              <a:t>質問画面の</a:t>
+            </a:r>
+          </a:p>
+          <a:p>
+            <a:pPr algn="ctr">
+              <a:lnSpc>
+                <a:spcPts val="1560"/>
+              </a:lnSpc>
+              <a:spcBef>
+                <a:spcPts val="0"/>
+              </a:spcBef>
+              <a:spcAft>
+                <a:spcPts val="0"/>
+              </a:spcAft>
+            </a:pPr>
+            <a:r>
+              <a:rPr sz="1000" b="0" i="0">
+                <a:solidFill>
+                  <a:srgbClr val="9A9993"/>
+                </a:solidFill>
+                <a:latin typeface="Yu Gothic"/>
+                <a:ea typeface="Yu Gothic"/>
+                <a:cs typeface="Yu Gothic"/>
+              </a:rPr>
+              <a:t>スクリーンショットを入れる</a:t>
+            </a:r>
+          </a:p>
+        </p:txBody>
+      </p:sp>
+      <p:sp>
+        <p:nvSpPr>
+          <p:cNvPr id="18" name="TextBox 17"/>
+          <p:cNvSpPr txBox="1"/>
+          <p:nvPr/>
+        </p:nvSpPr>
+        <p:spPr>
+          <a:xfrm>
+            <a:off x="3595688" y="5372398"/>
+            <a:ext cx="2411849" cy="421481"/>
+          </a:xfrm>
+          <a:prstGeom prst="rect">
+            <a:avLst/>
+          </a:prstGeom>
+          <a:noFill/>
+        </p:spPr>
+        <p:txBody>
+          <a:bodyPr wrap="square" lIns="0" rIns="0" tIns="0" bIns="0" anchor="t">
+            <a:noAutofit/>
+          </a:bodyPr>
+          <a:lstStyle/>
+          <a:p>
+            <a:pPr algn="l" marL="142875" indent="-142875">
+              <a:lnSpc>
+                <a:spcPts val="1743"/>
+              </a:lnSpc>
+              <a:spcBef>
+                <a:spcPts val="0"/>
+              </a:spcBef>
+              <a:spcAft>
+                <a:spcPts val="0"/>
+              </a:spcAft>
+              <a:buSzPct val="100000"/>
+              <a:buFont typeface="Yu Gothic"/>
+              <a:buChar char="•"/>
+            </a:pPr>
+            <a:r>
+              <a:rPr sz="1100" b="0" i="0">
+                <a:solidFill>
+                  <a:srgbClr val="ECEBE6"/>
+                </a:solidFill>
+                <a:latin typeface="Yu Gothic"/>
+                <a:ea typeface="Yu Gothic"/>
+                <a:cs typeface="Yu Gothic"/>
+              </a:rPr>
+              <a:t>誰と・食べたいもの・系統・予算・雰囲気をタップで答える</a:t>
+            </a:r>
+          </a:p>
+        </p:txBody>
+      </p:sp>
+      <p:sp>
+        <p:nvSpPr>
+          <p:cNvPr id="19" name="TextBox 18"/>
+          <p:cNvSpPr txBox="1"/>
+          <p:nvPr/>
+        </p:nvSpPr>
+        <p:spPr>
+          <a:xfrm>
+            <a:off x="3595688" y="5872460"/>
+            <a:ext cx="2025789" cy="200025"/>
+          </a:xfrm>
+          <a:prstGeom prst="rect">
+            <a:avLst/>
+          </a:prstGeom>
+          <a:noFill/>
+        </p:spPr>
+        <p:txBody>
+          <a:bodyPr wrap="none" lIns="0" rIns="0" tIns="0" bIns="0" anchor="t">
+            <a:noAutofit/>
+          </a:bodyPr>
+          <a:lstStyle/>
+          <a:p>
+            <a:pPr algn="l" marL="142875" indent="-142875">
+              <a:lnSpc>
+                <a:spcPts val="1743"/>
+              </a:lnSpc>
+              <a:spcBef>
+                <a:spcPts val="0"/>
+              </a:spcBef>
+              <a:spcAft>
+                <a:spcPts val="0"/>
+              </a:spcAft>
+              <a:buSzPct val="100000"/>
+              <a:buFont typeface="Yu Gothic"/>
+              <a:buChar char="•"/>
+            </a:pPr>
+            <a:r>
+              <a:rPr sz="1100" b="0" i="0">
+                <a:solidFill>
+                  <a:srgbClr val="ECEBE6"/>
+                </a:solidFill>
+                <a:latin typeface="Yu Gothic"/>
+                <a:ea typeface="Yu Gothic"/>
+                <a:cs typeface="Yu Gothic"/>
+              </a:rPr>
+              <a:t>答えは1文になって会話へ渡る</a:t>
+            </a:r>
+          </a:p>
+        </p:txBody>
+      </p:sp>
+      <p:sp>
+        <p:nvSpPr>
+          <p:cNvPr id="20" name="TextBox 19"/>
+          <p:cNvSpPr txBox="1"/>
+          <p:nvPr/>
+        </p:nvSpPr>
+        <p:spPr>
+          <a:xfrm>
+            <a:off x="6238875" y="1629073"/>
+            <a:ext cx="1445514" cy="247650"/>
+          </a:xfrm>
+          <a:prstGeom prst="rect">
+            <a:avLst/>
+          </a:prstGeom>
+          <a:noFill/>
+        </p:spPr>
+        <p:txBody>
+          <a:bodyPr wrap="none" lIns="0" rIns="0" tIns="0" bIns="0" anchor="t">
+            <a:noAutofit/>
+          </a:bodyPr>
+          <a:lstStyle/>
+          <a:p>
+            <a:pPr algn="l">
+              <a:lnSpc>
+                <a:spcPts val="2025"/>
+              </a:lnSpc>
+              <a:spcBef>
+                <a:spcPts val="0"/>
+              </a:spcBef>
+              <a:spcAft>
+                <a:spcPts val="0"/>
+              </a:spcAft>
+            </a:pPr>
+            <a:r>
+              <a:rPr sz="1350" b="1" i="0">
+                <a:solidFill>
+                  <a:srgbClr val="ECEBE6"/>
+                </a:solidFill>
+                <a:latin typeface="Yu Gothic"/>
+                <a:ea typeface="Yu Gothic"/>
+                <a:cs typeface="Yu Gothic"/>
+              </a:rPr>
+              <a:t>会話と候補カード</a:t>
+            </a:r>
+          </a:p>
+        </p:txBody>
+      </p:sp>
+      <p:sp>
+        <p:nvSpPr>
+          <p:cNvPr id="21" name="TextBox 20"/>
+          <p:cNvSpPr txBox="1"/>
+          <p:nvPr/>
+        </p:nvSpPr>
+        <p:spPr>
+          <a:xfrm>
+            <a:off x="6343650" y="3285530"/>
+            <a:ext cx="1256538" cy="775246"/>
+          </a:xfrm>
+          <a:prstGeom prst="rect">
+            <a:avLst/>
+          </a:prstGeom>
+          <a:noFill/>
+        </p:spPr>
+        <p:txBody>
+          <a:bodyPr wrap="square" lIns="0" rIns="0" tIns="0" bIns="0" anchor="t">
+            <a:noAutofit/>
+          </a:bodyPr>
+          <a:lstStyle/>
+          <a:p>
+            <a:pPr algn="ctr">
+              <a:lnSpc>
+                <a:spcPts val="1560"/>
+              </a:lnSpc>
+              <a:spcBef>
+                <a:spcPts val="0"/>
+              </a:spcBef>
+              <a:spcAft>
+                <a:spcPts val="0"/>
+              </a:spcAft>
+            </a:pPr>
+            <a:r>
+              <a:rPr sz="1000" b="0" i="0">
+                <a:solidFill>
+                  <a:srgbClr val="9A9993"/>
+                </a:solidFill>
+                <a:latin typeface="Yu Gothic"/>
+                <a:ea typeface="Yu Gothic"/>
+                <a:cs typeface="Yu Gothic"/>
+              </a:rPr>
+              <a:t>候補カードが並んだ会話の</a:t>
+            </a:r>
+          </a:p>
+          <a:p>
+            <a:pPr algn="ctr">
+              <a:lnSpc>
+                <a:spcPts val="1560"/>
+              </a:lnSpc>
+              <a:spcBef>
+                <a:spcPts val="0"/>
+              </a:spcBef>
+              <a:spcAft>
+                <a:spcPts val="0"/>
+              </a:spcAft>
+            </a:pPr>
+            <a:r>
+              <a:rPr sz="1000" b="0" i="0">
+                <a:solidFill>
+                  <a:srgbClr val="9A9993"/>
+                </a:solidFill>
+                <a:latin typeface="Yu Gothic"/>
+                <a:ea typeface="Yu Gothic"/>
+                <a:cs typeface="Yu Gothic"/>
+              </a:rPr>
+              <a:t>スクリーンショットを入れる</a:t>
+            </a:r>
+          </a:p>
+        </p:txBody>
+      </p:sp>
+      <p:sp>
+        <p:nvSpPr>
+          <p:cNvPr id="22" name="TextBox 21"/>
+          <p:cNvSpPr txBox="1"/>
+          <p:nvPr/>
+        </p:nvSpPr>
+        <p:spPr>
+          <a:xfrm>
+            <a:off x="6410325" y="5372398"/>
+            <a:ext cx="2411849" cy="421481"/>
+          </a:xfrm>
+          <a:prstGeom prst="rect">
+            <a:avLst/>
+          </a:prstGeom>
+          <a:noFill/>
+        </p:spPr>
+        <p:txBody>
+          <a:bodyPr wrap="square" lIns="0" rIns="0" tIns="0" bIns="0" anchor="t">
+            <a:noAutofit/>
+          </a:bodyPr>
+          <a:lstStyle/>
+          <a:p>
+            <a:pPr algn="l" marL="142875" indent="-142875">
+              <a:lnSpc>
+                <a:spcPts val="1743"/>
+              </a:lnSpc>
+              <a:spcBef>
+                <a:spcPts val="0"/>
+              </a:spcBef>
+              <a:spcAft>
+                <a:spcPts val="0"/>
+              </a:spcAft>
+              <a:buSzPct val="100000"/>
+              <a:buFont typeface="Yu Gothic"/>
+              <a:buChar char="•"/>
+            </a:pPr>
+            <a:r>
+              <a:rPr sz="1100" b="0" i="0">
+                <a:solidFill>
+                  <a:srgbClr val="ECEBE6"/>
+                </a:solidFill>
+                <a:latin typeface="Yu Gothic"/>
+                <a:ea typeface="Yu Gothic"/>
+                <a:cs typeface="Yu Gothic"/>
+              </a:rPr>
+              <a:t>主提案と別案を同じ大きさのカードで並べる</a:t>
+            </a:r>
+          </a:p>
+        </p:txBody>
+      </p:sp>
+      <p:sp>
+        <p:nvSpPr>
+          <p:cNvPr id="23" name="TextBox 22"/>
+          <p:cNvSpPr txBox="1"/>
+          <p:nvPr/>
+        </p:nvSpPr>
+        <p:spPr>
+          <a:xfrm>
+            <a:off x="6410325" y="5872460"/>
+            <a:ext cx="2411849" cy="421481"/>
+          </a:xfrm>
+          <a:prstGeom prst="rect">
+            <a:avLst/>
+          </a:prstGeom>
+          <a:noFill/>
+        </p:spPr>
+        <p:txBody>
+          <a:bodyPr wrap="square" lIns="0" rIns="0" tIns="0" bIns="0" anchor="t">
+            <a:noAutofit/>
+          </a:bodyPr>
+          <a:lstStyle/>
+          <a:p>
+            <a:pPr algn="l" marL="142875" indent="-142875">
+              <a:lnSpc>
+                <a:spcPts val="1743"/>
+              </a:lnSpc>
+              <a:spcBef>
+                <a:spcPts val="0"/>
+              </a:spcBef>
+              <a:spcAft>
+                <a:spcPts val="0"/>
+              </a:spcAft>
+              <a:buSzPct val="100000"/>
+              <a:buFont typeface="Yu Gothic"/>
+              <a:buChar char="•"/>
+            </a:pPr>
+            <a:r>
+              <a:rPr sz="1100" b="0" i="0">
+                <a:solidFill>
+                  <a:srgbClr val="ECEBE6"/>
+                </a:solidFill>
+                <a:latin typeface="Yu Gothic"/>
+                <a:ea typeface="Yu Gothic"/>
+                <a:cs typeface="Yu Gothic"/>
+              </a:rPr>
+              <a:t>カードから保存・地図・</a:t>
+            </a:r>
+            <a:br/>
+            <a:r>
+              <a:rPr sz="1100" b="0" i="0">
+                <a:solidFill>
+                  <a:srgbClr val="ECEBE6"/>
+                </a:solidFill>
+                <a:latin typeface="Yu Gothic"/>
+                <a:ea typeface="Yu Gothic"/>
+                <a:cs typeface="Yu Gothic"/>
+              </a:rPr>
+              <a:t>店舗詳細へ進む</a:t>
+            </a:r>
+          </a:p>
+        </p:txBody>
+      </p:sp>
+      <p:sp>
+        <p:nvSpPr>
+          <p:cNvPr id="24" name="TextBox 23"/>
+          <p:cNvSpPr txBox="1"/>
+          <p:nvPr/>
+        </p:nvSpPr>
+        <p:spPr>
+          <a:xfrm>
+            <a:off x="9053512" y="1629073"/>
+            <a:ext cx="732282" cy="247650"/>
+          </a:xfrm>
+          <a:prstGeom prst="rect">
+            <a:avLst/>
+          </a:prstGeom>
+          <a:noFill/>
+        </p:spPr>
+        <p:txBody>
+          <a:bodyPr wrap="none" lIns="0" rIns="0" tIns="0" bIns="0" anchor="t">
+            <a:noAutofit/>
+          </a:bodyPr>
+          <a:lstStyle/>
+          <a:p>
+            <a:pPr algn="l">
+              <a:lnSpc>
+                <a:spcPts val="2025"/>
+              </a:lnSpc>
+              <a:spcBef>
+                <a:spcPts val="0"/>
+              </a:spcBef>
+              <a:spcAft>
+                <a:spcPts val="0"/>
+              </a:spcAft>
+            </a:pPr>
+            <a:r>
+              <a:rPr sz="1350" b="1" i="0">
+                <a:solidFill>
+                  <a:srgbClr val="ECEBE6"/>
+                </a:solidFill>
+                <a:latin typeface="Yu Gothic"/>
+                <a:ea typeface="Yu Gothic"/>
+                <a:cs typeface="Yu Gothic"/>
+              </a:rPr>
+              <a:t>店舗詳細</a:t>
+            </a:r>
+          </a:p>
+        </p:txBody>
+      </p:sp>
+      <p:sp>
+        <p:nvSpPr>
+          <p:cNvPr id="25" name="TextBox 24"/>
+          <p:cNvSpPr txBox="1"/>
+          <p:nvPr/>
+        </p:nvSpPr>
+        <p:spPr>
+          <a:xfrm>
+            <a:off x="9158288" y="3384500"/>
+            <a:ext cx="1256538" cy="577155"/>
+          </a:xfrm>
+          <a:prstGeom prst="rect">
+            <a:avLst/>
+          </a:prstGeom>
+          <a:noFill/>
+        </p:spPr>
+        <p:txBody>
+          <a:bodyPr wrap="square" lIns="0" rIns="0" tIns="0" bIns="0" anchor="t">
+            <a:noAutofit/>
+          </a:bodyPr>
+          <a:lstStyle/>
+          <a:p>
+            <a:pPr algn="ctr">
+              <a:lnSpc>
+                <a:spcPts val="1560"/>
+              </a:lnSpc>
+              <a:spcBef>
+                <a:spcPts val="0"/>
+              </a:spcBef>
+              <a:spcAft>
+                <a:spcPts val="0"/>
+              </a:spcAft>
+            </a:pPr>
+            <a:r>
+              <a:rPr sz="1000" b="0" i="0">
+                <a:solidFill>
+                  <a:srgbClr val="9A9993"/>
+                </a:solidFill>
+                <a:latin typeface="Yu Gothic"/>
+                <a:ea typeface="Yu Gothic"/>
+                <a:cs typeface="Yu Gothic"/>
+              </a:rPr>
+              <a:t>店舗詳細シートの</a:t>
+            </a:r>
+          </a:p>
+          <a:p>
+            <a:pPr algn="ctr">
+              <a:lnSpc>
+                <a:spcPts val="1560"/>
+              </a:lnSpc>
+              <a:spcBef>
+                <a:spcPts val="0"/>
+              </a:spcBef>
+              <a:spcAft>
+                <a:spcPts val="0"/>
+              </a:spcAft>
+            </a:pPr>
+            <a:r>
+              <a:rPr sz="1000" b="0" i="0">
+                <a:solidFill>
+                  <a:srgbClr val="9A9993"/>
+                </a:solidFill>
+                <a:latin typeface="Yu Gothic"/>
+                <a:ea typeface="Yu Gothic"/>
+                <a:cs typeface="Yu Gothic"/>
+              </a:rPr>
+              <a:t>スクリーンショットを入れる</a:t>
+            </a:r>
+          </a:p>
+        </p:txBody>
+      </p:sp>
+      <p:sp>
+        <p:nvSpPr>
+          <p:cNvPr id="26" name="TextBox 25"/>
+          <p:cNvSpPr txBox="1"/>
+          <p:nvPr/>
+        </p:nvSpPr>
+        <p:spPr>
+          <a:xfrm>
+            <a:off x="9224962" y="5372398"/>
+            <a:ext cx="2411849" cy="421481"/>
+          </a:xfrm>
+          <a:prstGeom prst="rect">
+            <a:avLst/>
+          </a:prstGeom>
+          <a:noFill/>
+        </p:spPr>
+        <p:txBody>
+          <a:bodyPr wrap="square" lIns="0" rIns="0" tIns="0" bIns="0" anchor="t">
+            <a:noAutofit/>
+          </a:bodyPr>
+          <a:lstStyle/>
+          <a:p>
+            <a:pPr algn="l" marL="142875" indent="-142875">
+              <a:lnSpc>
+                <a:spcPts val="1743"/>
+              </a:lnSpc>
+              <a:spcBef>
+                <a:spcPts val="0"/>
+              </a:spcBef>
+              <a:spcAft>
+                <a:spcPts val="0"/>
+              </a:spcAft>
+              <a:buSzPct val="100000"/>
+              <a:buFont typeface="Yu Gothic"/>
+              <a:buChar char="•"/>
+            </a:pPr>
+            <a:r>
+              <a:rPr sz="1100" b="0" i="0">
+                <a:solidFill>
+                  <a:srgbClr val="ECEBE6"/>
+                </a:solidFill>
+                <a:latin typeface="Yu Gothic"/>
+                <a:ea typeface="Yu Gothic"/>
+                <a:cs typeface="Yu Gothic"/>
+              </a:rPr>
+              <a:t>営業時間・定休日・アクセス・予算の掲載情報と出典を出す</a:t>
+            </a:r>
+          </a:p>
+        </p:txBody>
+      </p:sp>
+      <p:sp>
+        <p:nvSpPr>
+          <p:cNvPr id="27" name="TextBox 26"/>
+          <p:cNvSpPr txBox="1"/>
+          <p:nvPr/>
+        </p:nvSpPr>
+        <p:spPr>
+          <a:xfrm>
+            <a:off x="9224962" y="5872460"/>
+            <a:ext cx="1655088" cy="200025"/>
+          </a:xfrm>
+          <a:prstGeom prst="rect">
+            <a:avLst/>
+          </a:prstGeom>
+          <a:noFill/>
+        </p:spPr>
+        <p:txBody>
+          <a:bodyPr wrap="none" lIns="0" rIns="0" tIns="0" bIns="0" anchor="t">
+            <a:noAutofit/>
+          </a:bodyPr>
+          <a:lstStyle/>
+          <a:p>
+            <a:pPr algn="l" marL="142875" indent="-142875">
+              <a:lnSpc>
+                <a:spcPts val="1743"/>
+              </a:lnSpc>
+              <a:spcBef>
+                <a:spcPts val="0"/>
+              </a:spcBef>
+              <a:spcAft>
+                <a:spcPts val="0"/>
+              </a:spcAft>
+              <a:buSzPct val="100000"/>
+              <a:buFont typeface="Yu Gothic"/>
+              <a:buChar char="•"/>
+            </a:pPr>
+            <a:r>
+              <a:rPr sz="1100" b="0" i="0">
+                <a:solidFill>
+                  <a:srgbClr val="ECEBE6"/>
+                </a:solidFill>
+                <a:latin typeface="Yu Gothic"/>
+                <a:ea typeface="Yu Gothic"/>
+                <a:cs typeface="Yu Gothic"/>
+              </a:rPr>
+              <a:t>「ここにする」で決める</a:t>
+            </a:r>
+          </a:p>
+        </p:txBody>
+      </p:sp>
+      <p:sp>
+        <p:nvSpPr>
+          <p:cNvPr id="28" name="TextBox 27"/>
+          <p:cNvSpPr txBox="1"/>
+          <p:nvPr/>
+        </p:nvSpPr>
+        <p:spPr>
+          <a:xfrm>
+            <a:off x="609600" y="6481762"/>
+            <a:ext cx="295335" cy="200025"/>
+          </a:xfrm>
+          <a:prstGeom prst="rect">
+            <a:avLst/>
+          </a:prstGeom>
+          <a:noFill/>
+        </p:spPr>
+        <p:txBody>
+          <a:bodyPr wrap="none" lIns="0" rIns="0" tIns="0" bIns="0" anchor="t">
+            <a:noAutofit/>
+          </a:bodyPr>
+          <a:lstStyle/>
+          <a:p>
+            <a:pPr algn="l">
+              <a:lnSpc>
+                <a:spcPts val="1687"/>
+              </a:lnSpc>
+              <a:spcBef>
+                <a:spcPts val="0"/>
+              </a:spcBef>
+              <a:spcAft>
+                <a:spcPts val="0"/>
+              </a:spcAft>
+            </a:pPr>
+            <a:r>
+              <a:rPr sz="1100" b="1" i="0">
+                <a:solidFill>
+                  <a:srgbClr val="9A9993"/>
+                </a:solidFill>
+                <a:latin typeface="Yu Gothic"/>
+                <a:ea typeface="Yu Gothic"/>
+                <a:cs typeface="Yu Gothic"/>
+              </a:rPr>
+              <a:t>ima</a:t>
+            </a:r>
+          </a:p>
+        </p:txBody>
+      </p:sp>
+      <p:sp>
+        <p:nvSpPr>
+          <p:cNvPr id="29" name="TextBox 28"/>
+          <p:cNvSpPr txBox="1"/>
+          <p:nvPr/>
+        </p:nvSpPr>
+        <p:spPr>
+          <a:xfrm>
+            <a:off x="11513641" y="6491288"/>
+            <a:ext cx="90559" cy="180975"/>
+          </a:xfrm>
+          <a:prstGeom prst="rect">
+            <a:avLst/>
+          </a:prstGeom>
+          <a:noFill/>
+        </p:spPr>
+        <p:txBody>
+          <a:bodyPr wrap="none" lIns="0" rIns="0" tIns="0" bIns="0" anchor="t">
+            <a:noAutofit/>
+          </a:bodyPr>
+          <a:lstStyle/>
+          <a:p>
+            <a:pPr algn="l">
+              <a:lnSpc>
+                <a:spcPts val="1462"/>
+              </a:lnSpc>
+              <a:spcBef>
+                <a:spcPts val="0"/>
+              </a:spcBef>
+              <a:spcAft>
+                <a:spcPts val="0"/>
+              </a:spcAft>
+            </a:pPr>
+            <a:r>
+              <a:rPr sz="1000" b="0" i="0">
+                <a:solidFill>
+                  <a:srgbClr val="9A9993"/>
+                </a:solidFill>
+                <a:latin typeface="Yu Gothic"/>
+                <a:ea typeface="Yu Gothic"/>
+                <a:cs typeface="Yu Gothic"/>
+              </a:rPr>
+              <a:t>4</a:t>
+            </a:r>
+          </a:p>
+        </p:txBody>
+      </p:sp>
+    </p:spTree>
+  </p:cSld>
+  <p:clrMapOvr>
+    <a:masterClrMapping/>
+  </p:clrMapOvr>
+</p:sld>
+</file>
+
+<file path=ppt/slides/slide6.xml><?xml version="1.0" encoding="utf-8"?>
+<p:sld xmlns:a="http://schemas.openxmlformats.org/drawingml/2006/main" xmlns:p="http://schemas.openxmlformats.org/presentationml/2006/main" xmlns:r="http://schemas.openxmlformats.org/officeDocument/2006/relationships">
+  <p:cSld>
+    <p:bg>
+      <p:bgPr>
+        <a:solidFill>
+          <a:srgbClr val="0C0C0D"/>
+        </a:solidFill>
+        <a:effectLst/>
+      </p:bgPr>
+    </p:bg>
+    <p:spTree>
+      <p:nvGrpSpPr>
+        <p:cNvPr id="1" name=""/>
+        <p:cNvGrpSpPr/>
+        <p:nvPr/>
+      </p:nvGrpSpPr>
+      <p:grpSpPr/>
+      <p:pic>
+        <p:nvPicPr>
+          <p:cNvPr id="2" name="Picture 1" descr="img_6_7.png"/>
+          <p:cNvPicPr>
+            <a:picLocks noChangeAspect="1"/>
+          </p:cNvPicPr>
+          <p:nvPr/>
+        </p:nvPicPr>
+        <p:blipFill>
+          <a:blip r:embed="rId2"/>
+          <a:stretch>
+            <a:fillRect/>
+          </a:stretch>
+        </p:blipFill>
+        <p:spPr>
+          <a:xfrm>
+            <a:off x="10648950" y="209550"/>
+            <a:ext cx="1123950" cy="1123950"/>
+          </a:xfrm>
+          <a:prstGeom prst="rect">
+            <a:avLst/>
+          </a:prstGeom>
+        </p:spPr>
+      </p:pic>
+      <p:cxnSp>
+        <p:nvCxnSpPr>
+          <p:cNvPr id="3" name="Connector 2"/>
+          <p:cNvCxnSpPr/>
+          <p:nvPr/>
+        </p:nvCxnSpPr>
+        <p:spPr>
+          <a:xfrm>
+            <a:off x="609600" y="1971973"/>
+            <a:ext cx="3048000" cy="0"/>
+          </a:xfrm>
+          <a:prstGeom prst="line">
+            <a:avLst/>
+          </a:prstGeom>
+          <a:ln w="19050">
+            <a:solidFill>
+              <a:srgbClr val="ECEBE6"/>
+            </a:solidFill>
+          </a:ln>
+        </p:spPr>
+      </p:cxnSp>
+      <p:sp>
+        <p:nvSpPr>
+          <p:cNvPr id="4" name="Rectangle 3"/>
+          <p:cNvSpPr/>
+          <p:nvPr/>
+        </p:nvSpPr>
+        <p:spPr>
+          <a:xfrm>
+            <a:off x="885825" y="2395686"/>
+            <a:ext cx="2771775" cy="733425"/>
+          </a:xfrm>
+          <a:prstGeom prst="rect">
+            <a:avLst/>
+          </a:prstGeom>
+          <a:solidFill>
+            <a:srgbClr val="E7E2D6"/>
+          </a:solidFill>
+          <a:ln>
+            <a:noFill/>
+          </a:ln>
+        </p:spPr>
+        <p:txBody>
+          <a:bodyPr rtlCol="0" anchor="ctr"/>
+          <a:lstStyle/>
+          <a:p/>
+        </p:txBody>
+      </p:sp>
+      <p:sp>
+        <p:nvSpPr>
+          <p:cNvPr id="5" name="Rectangle 4"/>
+          <p:cNvSpPr/>
+          <p:nvPr/>
+        </p:nvSpPr>
+        <p:spPr>
+          <a:xfrm>
+            <a:off x="3409950" y="3129111"/>
+            <a:ext cx="114300" cy="95250"/>
+          </a:xfrm>
+          <a:prstGeom prst="rect">
+            <a:avLst/>
+          </a:prstGeom>
+          <a:solidFill>
+            <a:srgbClr val="E7E2D6"/>
+          </a:solidFill>
+          <a:ln>
+            <a:noFill/>
+          </a:ln>
+        </p:spPr>
+        <p:txBody>
+          <a:bodyPr rtlCol="0" anchor="ctr"/>
+          <a:lstStyle/>
+          <a:p/>
+        </p:txBody>
+      </p:sp>
+      <p:sp>
+        <p:nvSpPr>
+          <p:cNvPr id="6" name="Rectangle 5"/>
+          <p:cNvSpPr/>
+          <p:nvPr/>
+        </p:nvSpPr>
+        <p:spPr>
+          <a:xfrm>
+            <a:off x="3524250" y="3224361"/>
+            <a:ext cx="66675" cy="66675"/>
+          </a:xfrm>
+          <a:prstGeom prst="rect">
+            <a:avLst/>
+          </a:prstGeom>
+          <a:solidFill>
+            <a:srgbClr val="E7E2D6"/>
+          </a:solidFill>
+          <a:ln>
+            <a:noFill/>
+          </a:ln>
+        </p:spPr>
+        <p:txBody>
+          <a:bodyPr rtlCol="0" anchor="ctr"/>
+          <a:lstStyle/>
+          <a:p/>
+        </p:txBody>
+      </p:sp>
+      <p:sp>
+        <p:nvSpPr>
+          <p:cNvPr id="7" name="Rectangle 6"/>
+          <p:cNvSpPr/>
+          <p:nvPr/>
+        </p:nvSpPr>
+        <p:spPr>
+          <a:xfrm>
+            <a:off x="609600" y="3486150"/>
+            <a:ext cx="3048000" cy="733425"/>
+          </a:xfrm>
+          <a:prstGeom prst="rect">
+            <a:avLst/>
+          </a:prstGeom>
+          <a:solidFill>
+            <a:srgbClr val="1C1C1E"/>
+          </a:solidFill>
+          <a:ln>
+            <a:noFill/>
+          </a:ln>
+        </p:spPr>
+        <p:txBody>
+          <a:bodyPr rtlCol="0" anchor="ctr"/>
+          <a:lstStyle/>
+          <a:p/>
+        </p:txBody>
+      </p:sp>
+      <p:sp>
+        <p:nvSpPr>
+          <p:cNvPr id="8" name="Rectangle 7"/>
+          <p:cNvSpPr/>
+          <p:nvPr/>
+        </p:nvSpPr>
+        <p:spPr>
+          <a:xfrm>
+            <a:off x="742950" y="4219575"/>
+            <a:ext cx="114300" cy="95250"/>
+          </a:xfrm>
+          <a:prstGeom prst="rect">
+            <a:avLst/>
+          </a:prstGeom>
+          <a:solidFill>
+            <a:srgbClr val="1C1C1E"/>
+          </a:solidFill>
+          <a:ln>
+            <a:noFill/>
+          </a:ln>
+        </p:spPr>
+        <p:txBody>
+          <a:bodyPr rtlCol="0" anchor="ctr"/>
+          <a:lstStyle/>
+          <a:p/>
+        </p:txBody>
+      </p:sp>
+      <p:sp>
+        <p:nvSpPr>
+          <p:cNvPr id="9" name="Rectangle 8"/>
+          <p:cNvSpPr/>
+          <p:nvPr/>
+        </p:nvSpPr>
+        <p:spPr>
+          <a:xfrm>
+            <a:off x="676275" y="4314825"/>
+            <a:ext cx="66675" cy="66675"/>
+          </a:xfrm>
+          <a:prstGeom prst="rect">
+            <a:avLst/>
+          </a:prstGeom>
+          <a:solidFill>
+            <a:srgbClr val="1C1C1E"/>
+          </a:solidFill>
+          <a:ln>
+            <a:noFill/>
+          </a:ln>
+        </p:spPr>
+        <p:txBody>
+          <a:bodyPr rtlCol="0" anchor="ctr"/>
+          <a:lstStyle/>
+          <a:p/>
+        </p:txBody>
+      </p:sp>
+      <p:sp>
+        <p:nvSpPr>
+          <p:cNvPr id="10" name="Rectangle 9"/>
+          <p:cNvSpPr/>
+          <p:nvPr/>
+        </p:nvSpPr>
+        <p:spPr>
+          <a:xfrm>
+            <a:off x="885825" y="4576614"/>
+            <a:ext cx="2771775" cy="490538"/>
+          </a:xfrm>
+          <a:prstGeom prst="rect">
+            <a:avLst/>
+          </a:prstGeom>
+          <a:solidFill>
+            <a:srgbClr val="E7E2D6"/>
+          </a:solidFill>
+          <a:ln>
+            <a:noFill/>
+          </a:ln>
+        </p:spPr>
+        <p:txBody>
+          <a:bodyPr rtlCol="0" anchor="ctr"/>
+          <a:lstStyle/>
+          <a:p/>
+        </p:txBody>
+      </p:sp>
+      <p:sp>
+        <p:nvSpPr>
+          <p:cNvPr id="11" name="Rectangle 10"/>
+          <p:cNvSpPr/>
+          <p:nvPr/>
+        </p:nvSpPr>
+        <p:spPr>
+          <a:xfrm>
+            <a:off x="3409950" y="5067151"/>
+            <a:ext cx="114300" cy="95250"/>
+          </a:xfrm>
+          <a:prstGeom prst="rect">
+            <a:avLst/>
+          </a:prstGeom>
+          <a:solidFill>
+            <a:srgbClr val="E7E2D6"/>
+          </a:solidFill>
+          <a:ln>
+            <a:noFill/>
+          </a:ln>
+        </p:spPr>
+        <p:txBody>
+          <a:bodyPr rtlCol="0" anchor="ctr"/>
+          <a:lstStyle/>
+          <a:p/>
+        </p:txBody>
+      </p:sp>
+      <p:sp>
+        <p:nvSpPr>
+          <p:cNvPr id="12" name="Rectangle 11"/>
+          <p:cNvSpPr/>
+          <p:nvPr/>
+        </p:nvSpPr>
+        <p:spPr>
+          <a:xfrm>
+            <a:off x="3524250" y="5162401"/>
+            <a:ext cx="66675" cy="66675"/>
+          </a:xfrm>
+          <a:prstGeom prst="rect">
+            <a:avLst/>
+          </a:prstGeom>
+          <a:solidFill>
+            <a:srgbClr val="E7E2D6"/>
+          </a:solidFill>
+          <a:ln>
+            <a:noFill/>
+          </a:ln>
+        </p:spPr>
+        <p:txBody>
+          <a:bodyPr rtlCol="0" anchor="ctr"/>
+          <a:lstStyle/>
+          <a:p/>
+        </p:txBody>
+      </p:sp>
+      <p:sp>
+        <p:nvSpPr>
+          <p:cNvPr id="13" name="Rectangle 12"/>
+          <p:cNvSpPr/>
+          <p:nvPr/>
+        </p:nvSpPr>
+        <p:spPr>
+          <a:xfrm>
+            <a:off x="609600" y="5424190"/>
+            <a:ext cx="3048000" cy="733425"/>
+          </a:xfrm>
+          <a:prstGeom prst="rect">
+            <a:avLst/>
+          </a:prstGeom>
+          <a:solidFill>
+            <a:srgbClr val="1C1C1E"/>
+          </a:solidFill>
+          <a:ln>
+            <a:noFill/>
+          </a:ln>
+        </p:spPr>
+        <p:txBody>
+          <a:bodyPr rtlCol="0" anchor="ctr"/>
+          <a:lstStyle/>
+          <a:p/>
+        </p:txBody>
+      </p:sp>
+      <p:sp>
+        <p:nvSpPr>
+          <p:cNvPr id="14" name="Rectangle 13"/>
+          <p:cNvSpPr/>
+          <p:nvPr/>
+        </p:nvSpPr>
+        <p:spPr>
+          <a:xfrm>
+            <a:off x="742950" y="6157615"/>
+            <a:ext cx="114300" cy="95250"/>
+          </a:xfrm>
+          <a:prstGeom prst="rect">
+            <a:avLst/>
+          </a:prstGeom>
+          <a:solidFill>
+            <a:srgbClr val="1C1C1E"/>
+          </a:solidFill>
+          <a:ln>
+            <a:noFill/>
+          </a:ln>
+        </p:spPr>
+        <p:txBody>
+          <a:bodyPr rtlCol="0" anchor="ctr"/>
+          <a:lstStyle/>
+          <a:p/>
+        </p:txBody>
+      </p:sp>
+      <p:sp>
+        <p:nvSpPr>
+          <p:cNvPr id="15" name="Rectangle 14"/>
+          <p:cNvSpPr/>
+          <p:nvPr/>
+        </p:nvSpPr>
+        <p:spPr>
+          <a:xfrm>
+            <a:off x="676275" y="6252865"/>
+            <a:ext cx="66675" cy="66675"/>
+          </a:xfrm>
+          <a:prstGeom prst="rect">
+            <a:avLst/>
+          </a:prstGeom>
+          <a:solidFill>
+            <a:srgbClr val="1C1C1E"/>
+          </a:solidFill>
+          <a:ln>
+            <a:noFill/>
+          </a:ln>
+        </p:spPr>
+        <p:txBody>
+          <a:bodyPr rtlCol="0" anchor="ctr"/>
+          <a:lstStyle/>
+          <a:p/>
+        </p:txBody>
+      </p:sp>
+      <p:graphicFrame>
+        <p:nvGraphicFramePr>
+          <p:cNvPr id="16" name="Table 15"/>
+          <p:cNvGraphicFramePr>
+            <a:graphicFrameLocks noGrp="1"/>
+          </p:cNvGraphicFramePr>
+          <p:nvPr/>
+        </p:nvGraphicFramePr>
+        <p:xfrm>
+          <a:off x="4076700" y="1562398"/>
+          <a:ext cx="7505700" cy="4743153"/>
+        </p:xfrm>
+        <a:graphic>
+          <a:graphicData uri="http://schemas.openxmlformats.org/drawingml/2006/table">
+            <a:tbl>
+              <a:tblPr firstRow="0" bandRow="0" firstCol="0" lastRow="0" lastCol="0" bandCol="0">
+                <a:tableStyleId>{2D5ABB26-0587-4C30-8999-92F81FD0307C}</a:tableStyleId>
+              </a:tblPr>
+              <a:tblGrid>
+                <a:gridCol w="2190750"/>
+                <a:gridCol w="5314950"/>
+              </a:tblGrid>
+              <a:tr h="419100">
+                <a:tc>
+                  <a:txBody>
+                    <a:bodyPr wrap="square"/>
+                    <a:lstStyle/>
+                    <a:p>
+                      <a:pPr algn="l">
+                        <a:lnSpc>
+                          <a:spcPts val="2137"/>
+                        </a:lnSpc>
+                        <a:spcBef>
+                          <a:spcPts val="0"/>
+                        </a:spcBef>
+                        <a:spcAft>
+                          <a:spcPts val="0"/>
+                        </a:spcAft>
+                      </a:pPr>
+                      <a:r>
+                        <a:rPr sz="1400" b="1" i="0">
+                          <a:solidFill>
+                            <a:srgbClr val="ECEBE6"/>
+                          </a:solidFill>
+                          <a:latin typeface="Yu Gothic"/>
+                          <a:ea typeface="Yu Gothic"/>
+                          <a:cs typeface="Yu Gothic"/>
+                        </a:rPr>
+                        <a:t>場面</a:t>
+                      </a:r>
+                      <a:endParaRPr sz="100"/>
+                    </a:p>
+                  </a:txBody>
+                  <a:tcPr marT="0" marR="133350" marB="85725" marL="0" anchor="b">
+                    <a:lnL w="0">
+                      <a:noFill/>
+                    </a:lnL>
+                    <a:lnR w="0">
+                      <a:noFill/>
+                    </a:lnR>
+                    <a:lnT w="0">
+                      <a:noFill/>
+                    </a:lnT>
+                    <a:lnB w="19050">
+                      <a:solidFill>
+                        <a:srgbClr val="ECEBE6"/>
+                      </a:solidFill>
+                    </a:lnB>
+                    <a:noFill/>
+                  </a:tcPr>
+                </a:tc>
+                <a:tc>
+                  <a:txBody>
+                    <a:bodyPr wrap="square"/>
+                    <a:lstStyle/>
+                    <a:p>
+                      <a:pPr algn="l">
+                        <a:lnSpc>
+                          <a:spcPts val="2137"/>
+                        </a:lnSpc>
+                        <a:spcBef>
+                          <a:spcPts val="0"/>
+                        </a:spcBef>
+                        <a:spcAft>
+                          <a:spcPts val="0"/>
+                        </a:spcAft>
+                      </a:pPr>
+                      <a:r>
+                        <a:rPr sz="1400" b="1" i="0">
+                          <a:solidFill>
+                            <a:srgbClr val="ECEBE6"/>
+                          </a:solidFill>
+                          <a:latin typeface="Yu Gothic"/>
+                          <a:ea typeface="Yu Gothic"/>
+                          <a:cs typeface="Yu Gothic"/>
+                        </a:rPr>
+                        <a:t>AI の判断</a:t>
+                      </a:r>
+                      <a:endParaRPr sz="100"/>
+                    </a:p>
+                  </a:txBody>
+                  <a:tcPr marT="0" marR="133350" marB="85725" marL="133350" anchor="b">
+                    <a:lnL w="0">
+                      <a:noFill/>
+                    </a:lnL>
+                    <a:lnR w="0">
+                      <a:noFill/>
+                    </a:lnR>
+                    <a:lnT w="0">
+                      <a:noFill/>
+                    </a:lnT>
+                    <a:lnB w="19050">
+                      <a:solidFill>
+                        <a:srgbClr val="ECEBE6"/>
+                      </a:solidFill>
+                    </a:lnB>
+                    <a:noFill/>
+                  </a:tcPr>
+                </a:tc>
+              </a:tr>
+              <a:tr h="1462385">
+                <a:tc>
+                  <a:txBody>
+                    <a:bodyPr wrap="square"/>
+                    <a:lstStyle/>
+                    <a:p>
+                      <a:pPr algn="l">
+                        <a:lnSpc>
+                          <a:spcPts val="1957"/>
+                        </a:lnSpc>
+                        <a:spcBef>
+                          <a:spcPts val="0"/>
+                        </a:spcBef>
+                        <a:spcAft>
+                          <a:spcPts val="0"/>
+                        </a:spcAft>
+                      </a:pPr>
+                      <a:r>
+                        <a:rPr sz="1350" b="1" i="0">
+                          <a:solidFill>
+                            <a:srgbClr val="ECEBE6"/>
+                          </a:solidFill>
+                          <a:latin typeface="Yu Gothic"/>
+                          <a:ea typeface="Yu Gothic"/>
+                          <a:cs typeface="Yu Gothic"/>
+                        </a:rPr>
+                        <a:t>場所が分からない</a:t>
+                      </a:r>
+                      <a:endParaRPr sz="100"/>
+                    </a:p>
+                  </a:txBody>
+                  <a:tcPr marT="114300" marR="133350" marB="114300" marL="0" anchor="ctr">
+                    <a:lnL w="0">
+                      <a:noFill/>
+                    </a:lnL>
+                    <a:lnR w="0">
+                      <a:noFill/>
+                    </a:lnR>
+                    <a:lnT w="0">
+                      <a:noFill/>
+                    </a:lnT>
+                    <a:lnB w="9525">
+                      <a:solidFill>
+                        <a:srgbClr val="2A2A2E"/>
+                      </a:solidFill>
+                    </a:lnB>
+                    <a:noFill/>
+                  </a:tcPr>
+                </a:tc>
+                <a:tc>
+                  <a:txBody>
+                    <a:bodyPr wrap="square"/>
+                    <a:lstStyle/>
+                    <a:p>
+                      <a:pPr algn="l" marL="152400" indent="-152400">
+                        <a:lnSpc>
+                          <a:spcPts val="1920"/>
+                        </a:lnSpc>
+                        <a:spcBef>
+                          <a:spcPts val="0"/>
+                        </a:spcBef>
+                        <a:spcAft>
+                          <a:spcPts val="0"/>
+                        </a:spcAft>
+                        <a:buSzPct val="100000"/>
+                        <a:buFont typeface="Yu Gothic"/>
+                        <a:buChar char="•"/>
+                      </a:pPr>
+                      <a:r>
+                        <a:rPr sz="1200" b="0" i="0">
+                          <a:solidFill>
+                            <a:srgbClr val="ECEBE6"/>
+                          </a:solidFill>
+                          <a:latin typeface="Yu Gothic"/>
+                          <a:ea typeface="Yu Gothic"/>
+                          <a:cs typeface="Yu Gothic"/>
+                        </a:rPr>
+                        <a:t>現在地が使えれば聞き返さず、</a:t>
+                      </a:r>
+                      <a:br/>
+                      <a:r>
+                        <a:rPr sz="1200" b="0" i="0">
+                          <a:solidFill>
+                            <a:srgbClr val="ECEBE6"/>
+                          </a:solidFill>
+                          <a:latin typeface="Yu Gothic"/>
+                          <a:ea typeface="Yu Gothic"/>
+                          <a:cs typeface="Yu Gothic"/>
+                        </a:rPr>
+                        <a:t>周辺を1km圏から3km圏まで広げて探す</a:t>
+                      </a:r>
+                      <a:endParaRPr sz="100"/>
+                    </a:p>
+                    <a:p>
+                      <a:pPr algn="l" marL="152400" indent="-152400">
+                        <a:lnSpc>
+                          <a:spcPts val="1920"/>
+                        </a:lnSpc>
+                        <a:spcBef>
+                          <a:spcPts val="0"/>
+                        </a:spcBef>
+                        <a:spcAft>
+                          <a:spcPts val="0"/>
+                        </a:spcAft>
+                        <a:buSzPct val="100000"/>
+                        <a:buFont typeface="Yu Gothic"/>
+                        <a:buChar char="•"/>
+                      </a:pPr>
+                      <a:r>
+                        <a:rPr sz="1200" b="0" i="0">
+                          <a:solidFill>
+                            <a:srgbClr val="ECEBE6"/>
+                          </a:solidFill>
+                          <a:latin typeface="Yu Gothic"/>
+                          <a:ea typeface="Yu Gothic"/>
+                          <a:cs typeface="Yu Gothic"/>
+                        </a:rPr>
+                        <a:t>現在地が使えなければ理由を伝え、駅名や地名を尋ねる</a:t>
+                      </a:r>
+                    </a:p>
+                  </a:txBody>
+                  <a:tcPr marT="114300" marR="133350" marB="114300" marL="133350" anchor="ctr">
+                    <a:lnL w="0">
+                      <a:noFill/>
+                    </a:lnL>
+                    <a:lnR w="0">
+                      <a:noFill/>
+                    </a:lnR>
+                    <a:lnT w="0">
+                      <a:noFill/>
+                    </a:lnT>
+                    <a:lnB w="9525">
+                      <a:solidFill>
+                        <a:srgbClr val="2A2A2E"/>
+                      </a:solidFill>
+                    </a:lnB>
+                    <a:noFill/>
+                  </a:tcPr>
+                </a:tc>
+              </a:tr>
+              <a:tr h="1103263">
+                <a:tc>
+                  <a:txBody>
+                    <a:bodyPr wrap="square"/>
+                    <a:lstStyle/>
+                    <a:p>
+                      <a:pPr algn="l">
+                        <a:lnSpc>
+                          <a:spcPts val="1957"/>
+                        </a:lnSpc>
+                        <a:spcBef>
+                          <a:spcPts val="0"/>
+                        </a:spcBef>
+                        <a:spcAft>
+                          <a:spcPts val="0"/>
+                        </a:spcAft>
+                      </a:pPr>
+                      <a:r>
+                        <a:rPr sz="1350" b="1" i="0">
+                          <a:solidFill>
+                            <a:srgbClr val="ECEBE6"/>
+                          </a:solidFill>
+                          <a:latin typeface="Yu Gothic"/>
+                          <a:ea typeface="Yu Gothic"/>
+                          <a:cs typeface="Yu Gothic"/>
+                        </a:rPr>
+                        <a:t>条件が変わった</a:t>
+                      </a:r>
+                      <a:endParaRPr sz="100"/>
+                    </a:p>
+                  </a:txBody>
+                  <a:tcPr marT="114300" marR="133350" marB="114300" marL="0" anchor="ctr">
+                    <a:lnL w="0">
+                      <a:noFill/>
+                    </a:lnL>
+                    <a:lnR w="0">
+                      <a:noFill/>
+                    </a:lnR>
+                    <a:lnT w="0">
+                      <a:noFill/>
+                    </a:lnT>
+                    <a:lnB w="9525">
+                      <a:solidFill>
+                        <a:srgbClr val="2A2A2E"/>
+                      </a:solidFill>
+                    </a:lnB>
+                    <a:noFill/>
+                  </a:tcPr>
+                </a:tc>
+                <a:tc>
+                  <a:txBody>
+                    <a:bodyPr wrap="square"/>
+                    <a:lstStyle/>
+                    <a:p>
+                      <a:pPr algn="l" marL="152400" indent="-152400">
+                        <a:lnSpc>
+                          <a:spcPts val="1920"/>
+                        </a:lnSpc>
+                        <a:spcBef>
+                          <a:spcPts val="0"/>
+                        </a:spcBef>
+                        <a:spcAft>
+                          <a:spcPts val="0"/>
+                        </a:spcAft>
+                        <a:buSzPct val="100000"/>
+                        <a:buFont typeface="Yu Gothic"/>
+                        <a:buChar char="•"/>
+                      </a:pPr>
+                      <a:r>
+                        <a:rPr sz="1200" b="0" i="0">
+                          <a:solidFill>
+                            <a:srgbClr val="ECEBE6"/>
+                          </a:solidFill>
+                          <a:latin typeface="Yu Gothic"/>
+                          <a:ea typeface="Yu Gothic"/>
+                          <a:cs typeface="Yu Gothic"/>
+                        </a:rPr>
+                        <a:t>変わっていない希望を引き継ぐ</a:t>
+                      </a:r>
+                      <a:endParaRPr sz="100"/>
+                    </a:p>
+                    <a:p>
+                      <a:pPr algn="l" marL="152400" indent="-152400">
+                        <a:lnSpc>
+                          <a:spcPts val="1920"/>
+                        </a:lnSpc>
+                        <a:spcBef>
+                          <a:spcPts val="0"/>
+                        </a:spcBef>
+                        <a:spcAft>
+                          <a:spcPts val="0"/>
+                        </a:spcAft>
+                        <a:buSzPct val="100000"/>
+                        <a:buFont typeface="Yu Gothic"/>
+                        <a:buChar char="•"/>
+                      </a:pPr>
+                      <a:r>
+                        <a:rPr sz="1200" b="0" i="0">
+                          <a:solidFill>
+                            <a:srgbClr val="ECEBE6"/>
+                          </a:solidFill>
+                          <a:latin typeface="Yu Gothic"/>
+                          <a:ea typeface="Yu Gothic"/>
+                          <a:cs typeface="Yu Gothic"/>
+                        </a:rPr>
+                        <a:t>変更点が分かれば選び直し、分からなければ聞き返す</a:t>
+                      </a:r>
+                    </a:p>
+                  </a:txBody>
+                  <a:tcPr marT="114300" marR="133350" marB="114300" marL="133350" anchor="ctr">
+                    <a:lnL w="0">
+                      <a:noFill/>
+                    </a:lnL>
+                    <a:lnR w="0">
+                      <a:noFill/>
+                    </a:lnR>
+                    <a:lnT w="0">
+                      <a:noFill/>
+                    </a:lnT>
+                    <a:lnB w="9525">
+                      <a:solidFill>
+                        <a:srgbClr val="2A2A2E"/>
+                      </a:solidFill>
+                    </a:lnB>
+                    <a:noFill/>
+                  </a:tcPr>
+                </a:tc>
+              </a:tr>
+              <a:tr h="1062038">
+                <a:tc>
+                  <a:txBody>
+                    <a:bodyPr wrap="square"/>
+                    <a:lstStyle/>
+                    <a:p>
+                      <a:pPr algn="l">
+                        <a:lnSpc>
+                          <a:spcPts val="1957"/>
+                        </a:lnSpc>
+                        <a:spcBef>
+                          <a:spcPts val="0"/>
+                        </a:spcBef>
+                        <a:spcAft>
+                          <a:spcPts val="0"/>
+                        </a:spcAft>
+                      </a:pPr>
+                      <a:r>
+                        <a:rPr sz="1350" b="1" i="0">
+                          <a:solidFill>
+                            <a:srgbClr val="ECEBE6"/>
+                          </a:solidFill>
+                          <a:latin typeface="Yu Gothic"/>
+                          <a:ea typeface="Yu Gothic"/>
+                          <a:cs typeface="Yu Gothic"/>
+                        </a:rPr>
+                        <a:t>説明や比較を</a:t>
+                      </a:r>
+                      <a:endParaRPr sz="100"/>
+                    </a:p>
+                    <a:p>
+                      <a:pPr algn="l">
+                        <a:lnSpc>
+                          <a:spcPts val="1957"/>
+                        </a:lnSpc>
+                        <a:spcBef>
+                          <a:spcPts val="0"/>
+                        </a:spcBef>
+                        <a:spcAft>
+                          <a:spcPts val="0"/>
+                        </a:spcAft>
+                      </a:pPr>
+                      <a:r>
+                        <a:rPr sz="1350" b="1" i="0">
+                          <a:solidFill>
+                            <a:srgbClr val="ECEBE6"/>
+                          </a:solidFill>
+                          <a:latin typeface="Yu Gothic"/>
+                          <a:ea typeface="Yu Gothic"/>
+                          <a:cs typeface="Yu Gothic"/>
+                        </a:rPr>
+                        <a:t>頼まれた</a:t>
+                      </a:r>
+                    </a:p>
+                  </a:txBody>
+                  <a:tcPr marT="114300" marR="133350" marB="114300" marL="0" anchor="ctr">
+                    <a:lnL w="0">
+                      <a:noFill/>
+                    </a:lnL>
+                    <a:lnR w="0">
+                      <a:noFill/>
+                    </a:lnR>
+                    <a:lnT w="0">
+                      <a:noFill/>
+                    </a:lnT>
+                    <a:lnB w="9525">
+                      <a:solidFill>
+                        <a:srgbClr val="2A2A2E"/>
+                      </a:solidFill>
+                    </a:lnB>
+                    <a:noFill/>
+                  </a:tcPr>
+                </a:tc>
+                <a:tc>
+                  <a:txBody>
+                    <a:bodyPr wrap="square"/>
+                    <a:lstStyle/>
+                    <a:p>
+                      <a:pPr algn="l">
+                        <a:lnSpc>
+                          <a:spcPts val="1920"/>
+                        </a:lnSpc>
+                        <a:spcBef>
+                          <a:spcPts val="0"/>
+                        </a:spcBef>
+                        <a:spcAft>
+                          <a:spcPts val="0"/>
+                        </a:spcAft>
+                      </a:pPr>
+                      <a:r>
+                        <a:rPr sz="1200" b="0" i="0">
+                          <a:solidFill>
+                            <a:srgbClr val="ECEBE6"/>
+                          </a:solidFill>
+                          <a:latin typeface="Yu Gothic"/>
+                          <a:ea typeface="Yu Gothic"/>
+                          <a:cs typeface="Yu Gothic"/>
+                        </a:rPr>
+                        <a:t>カードを出し直さず、メッセージで答える</a:t>
+                      </a:r>
+                      <a:endParaRPr sz="100"/>
+                    </a:p>
+                  </a:txBody>
+                  <a:tcPr marT="114300" marR="133350" marB="114300" marL="133350" anchor="ctr">
+                    <a:lnL w="0">
+                      <a:noFill/>
+                    </a:lnL>
+                    <a:lnR w="0">
+                      <a:noFill/>
+                    </a:lnR>
+                    <a:lnT w="0">
+                      <a:noFill/>
+                    </a:lnT>
+                    <a:lnB w="9525">
+                      <a:solidFill>
+                        <a:srgbClr val="2A2A2E"/>
+                      </a:solidFill>
+                    </a:lnB>
+                    <a:noFill/>
+                  </a:tcPr>
+                </a:tc>
+              </a:tr>
+              <a:tr h="696367">
+                <a:tc>
+                  <a:txBody>
+                    <a:bodyPr wrap="square"/>
+                    <a:lstStyle/>
+                    <a:p>
+                      <a:pPr algn="l">
+                        <a:lnSpc>
+                          <a:spcPts val="1957"/>
+                        </a:lnSpc>
+                        <a:spcBef>
+                          <a:spcPts val="0"/>
+                        </a:spcBef>
+                        <a:spcAft>
+                          <a:spcPts val="0"/>
+                        </a:spcAft>
+                      </a:pPr>
+                      <a:r>
+                        <a:rPr sz="1350" b="1" i="0">
+                          <a:solidFill>
+                            <a:srgbClr val="ECEBE6"/>
+                          </a:solidFill>
+                          <a:latin typeface="Yu Gothic"/>
+                          <a:ea typeface="Yu Gothic"/>
+                          <a:cs typeface="Yu Gothic"/>
+                        </a:rPr>
+                        <a:t>候補が見つからない</a:t>
+                      </a:r>
+                      <a:endParaRPr sz="100"/>
+                    </a:p>
+                  </a:txBody>
+                  <a:tcPr marT="114300" marR="133350" marB="114300" marL="0" anchor="ctr">
+                    <a:lnL w="0">
+                      <a:noFill/>
+                    </a:lnL>
+                    <a:lnR w="0">
+                      <a:noFill/>
+                    </a:lnR>
+                    <a:lnT w="0">
+                      <a:noFill/>
+                    </a:lnT>
+                    <a:lnB w="0">
+                      <a:noFill/>
+                    </a:lnB>
+                    <a:noFill/>
+                  </a:tcPr>
+                </a:tc>
+                <a:tc>
+                  <a:txBody>
+                    <a:bodyPr wrap="square"/>
+                    <a:lstStyle/>
+                    <a:p>
+                      <a:pPr algn="l">
+                        <a:lnSpc>
+                          <a:spcPts val="1920"/>
+                        </a:lnSpc>
+                        <a:spcBef>
+                          <a:spcPts val="0"/>
+                        </a:spcBef>
+                        <a:spcAft>
+                          <a:spcPts val="0"/>
+                        </a:spcAft>
+                      </a:pPr>
+                      <a:r>
+                        <a:rPr sz="1200" b="0" i="0">
+                          <a:solidFill>
+                            <a:srgbClr val="ECEBE6"/>
+                          </a:solidFill>
+                          <a:latin typeface="Yu Gothic"/>
+                          <a:ea typeface="Yu Gothic"/>
+                          <a:cs typeface="Yu Gothic"/>
+                        </a:rPr>
+                        <a:t>条件に合わない店で数を埋めず、見つからなかったことを伝える</a:t>
+                      </a:r>
+                      <a:endParaRPr sz="100"/>
+                    </a:p>
+                  </a:txBody>
+                  <a:tcPr marT="114300" marR="133350" marB="114300" marL="133350" anchor="ctr">
+                    <a:lnL w="0">
+                      <a:noFill/>
+                    </a:lnL>
+                    <a:lnR w="0">
+                      <a:noFill/>
+                    </a:lnR>
+                    <a:lnT w="0">
+                      <a:noFill/>
+                    </a:lnT>
+                    <a:lnB w="0">
+                      <a:noFill/>
+                    </a:lnB>
+                    <a:noFill/>
+                  </a:tcPr>
+                </a:tc>
+              </a:tr>
+            </a:tbl>
+          </a:graphicData>
+        </a:graphic>
+      </p:graphicFrame>
+      <p:sp>
+        <p:nvSpPr>
+          <p:cNvPr id="17" name="Title"/>
+          <p:cNvSpPr txBox="1"/>
+          <p:nvPr/>
+        </p:nvSpPr>
+        <p:spPr>
+          <a:xfrm>
+            <a:off x="609600" y="428625"/>
+            <a:ext cx="10024110" cy="847874"/>
+          </a:xfrm>
+          <a:prstGeom prst="rect">
+            <a:avLst/>
+          </a:prstGeom>
+          <a:noFill/>
+        </p:spPr>
+        <p:txBody>
+          <a:bodyPr wrap="none" lIns="0" rIns="0" tIns="0" bIns="0" anchor="t">
+            <a:noAutofit/>
+          </a:bodyPr>
+          <a:lstStyle/>
+          <a:p>
+            <a:pPr algn="l">
+              <a:lnSpc>
+                <a:spcPts val="3301"/>
+              </a:lnSpc>
+              <a:spcBef>
+                <a:spcPts val="0"/>
+              </a:spcBef>
+              <a:spcAft>
+                <a:spcPts val="0"/>
+              </a:spcAft>
+            </a:pPr>
+            <a:r>
+              <a:rPr sz="2300" b="1" i="0">
+                <a:solidFill>
+                  <a:srgbClr val="ECEBE6"/>
+                </a:solidFill>
+                <a:latin typeface="Yu Gothic"/>
+                <a:ea typeface="Yu Gothic"/>
+                <a:cs typeface="Yu Gothic"/>
+              </a:rPr>
+              <a:t>ima の AI は、変わっていない希望を引き継ぎ、</a:t>
+            </a:r>
+          </a:p>
+          <a:p>
+            <a:pPr algn="l">
+              <a:lnSpc>
+                <a:spcPts val="3301"/>
+              </a:lnSpc>
+              <a:spcBef>
+                <a:spcPts val="0"/>
+              </a:spcBef>
+              <a:spcAft>
+                <a:spcPts val="0"/>
+              </a:spcAft>
+            </a:pPr>
+            <a:r>
+              <a:rPr sz="2300" b="1" i="0">
+                <a:solidFill>
+                  <a:srgbClr val="ECEBE6"/>
+                </a:solidFill>
+                <a:latin typeface="Yu Gothic"/>
+                <a:ea typeface="Yu Gothic"/>
+                <a:cs typeface="Yu Gothic"/>
+              </a:rPr>
+              <a:t>足りない情報だけを聞き返して提案し直す</a:t>
+            </a:r>
+          </a:p>
+        </p:txBody>
+      </p:sp>
+      <p:sp>
+        <p:nvSpPr>
+          <p:cNvPr id="18" name="TextBox 17"/>
+          <p:cNvSpPr txBox="1"/>
+          <p:nvPr/>
+        </p:nvSpPr>
+        <p:spPr>
+          <a:xfrm>
+            <a:off x="609600" y="1629073"/>
+            <a:ext cx="2337054" cy="247650"/>
+          </a:xfrm>
+          <a:prstGeom prst="rect">
+            <a:avLst/>
+          </a:prstGeom>
+          <a:noFill/>
+        </p:spPr>
+        <p:txBody>
+          <a:bodyPr wrap="none" lIns="0" rIns="0" tIns="0" bIns="0" anchor="t">
+            <a:noAutofit/>
+          </a:bodyPr>
+          <a:lstStyle/>
+          <a:p>
+            <a:pPr algn="l">
+              <a:lnSpc>
+                <a:spcPts val="2025"/>
+              </a:lnSpc>
+              <a:spcBef>
+                <a:spcPts val="0"/>
+              </a:spcBef>
+              <a:spcAft>
+                <a:spcPts val="0"/>
+              </a:spcAft>
+            </a:pPr>
+            <a:r>
+              <a:rPr sz="1350" b="1" i="0">
+                <a:solidFill>
+                  <a:srgbClr val="ECEBE6"/>
+                </a:solidFill>
+                <a:latin typeface="Yu Gothic"/>
+                <a:ea typeface="Yu Gothic"/>
+                <a:cs typeface="Yu Gothic"/>
+              </a:rPr>
+              <a:t>条件を変えたときの会話の例</a:t>
+            </a:r>
+          </a:p>
+        </p:txBody>
+      </p:sp>
+      <p:sp>
+        <p:nvSpPr>
+          <p:cNvPr id="19" name="TextBox 18"/>
+          <p:cNvSpPr txBox="1"/>
+          <p:nvPr/>
+        </p:nvSpPr>
+        <p:spPr>
+          <a:xfrm>
+            <a:off x="3164681" y="2148036"/>
+            <a:ext cx="531686" cy="180975"/>
+          </a:xfrm>
+          <a:prstGeom prst="rect">
+            <a:avLst/>
+          </a:prstGeom>
+          <a:noFill/>
+        </p:spPr>
+        <p:txBody>
+          <a:bodyPr wrap="none" lIns="0" rIns="0" tIns="0" bIns="0" anchor="t">
+            <a:noAutofit/>
+          </a:bodyPr>
+          <a:lstStyle/>
+          <a:p>
+            <a:pPr algn="l">
+              <a:lnSpc>
+                <a:spcPts val="1462"/>
+              </a:lnSpc>
+              <a:spcBef>
+                <a:spcPts val="0"/>
+              </a:spcBef>
+              <a:spcAft>
+                <a:spcPts val="0"/>
+              </a:spcAft>
+            </a:pPr>
+            <a:r>
+              <a:rPr sz="1000" b="0" i="0">
+                <a:solidFill>
+                  <a:srgbClr val="9A9993"/>
+                </a:solidFill>
+                <a:latin typeface="Yu Gothic"/>
+                <a:ea typeface="Yu Gothic"/>
+                <a:cs typeface="Yu Gothic"/>
+              </a:rPr>
+              <a:t>ユーザー</a:t>
+            </a:r>
+          </a:p>
+        </p:txBody>
+      </p:sp>
+      <p:sp>
+        <p:nvSpPr>
+          <p:cNvPr id="20" name="TextBox 19"/>
+          <p:cNvSpPr txBox="1"/>
+          <p:nvPr/>
+        </p:nvSpPr>
+        <p:spPr>
+          <a:xfrm>
+            <a:off x="1057275" y="2519511"/>
+            <a:ext cx="2545080" cy="481012"/>
+          </a:xfrm>
+          <a:prstGeom prst="rect">
+            <a:avLst/>
+          </a:prstGeom>
+          <a:noFill/>
+        </p:spPr>
+        <p:txBody>
+          <a:bodyPr wrap="none" lIns="0" rIns="0" tIns="0" bIns="0" anchor="t">
+            <a:noAutofit/>
+          </a:bodyPr>
+          <a:lstStyle/>
+          <a:p>
+            <a:pPr algn="l">
+              <a:lnSpc>
+                <a:spcPts val="1912"/>
+              </a:lnSpc>
+              <a:spcBef>
+                <a:spcPts val="0"/>
+              </a:spcBef>
+              <a:spcAft>
+                <a:spcPts val="0"/>
+              </a:spcAft>
+            </a:pPr>
+            <a:r>
+              <a:rPr sz="1300" b="0" i="0">
+                <a:solidFill>
+                  <a:srgbClr val="161616"/>
+                </a:solidFill>
+                <a:latin typeface="Yu Gothic"/>
+                <a:ea typeface="Yu Gothic"/>
+                <a:cs typeface="Yu Gothic"/>
+              </a:rPr>
+              <a:t>友だちと和食の定食が食べたい、</a:t>
+            </a:r>
+          </a:p>
+          <a:p>
+            <a:pPr algn="l">
+              <a:lnSpc>
+                <a:spcPts val="1912"/>
+              </a:lnSpc>
+              <a:spcBef>
+                <a:spcPts val="0"/>
+              </a:spcBef>
+              <a:spcAft>
+                <a:spcPts val="0"/>
+              </a:spcAft>
+            </a:pPr>
+            <a:r>
+              <a:rPr sz="1300" b="0" i="0">
+                <a:solidFill>
+                  <a:srgbClr val="161616"/>
+                </a:solidFill>
+                <a:latin typeface="Yu Gothic"/>
+                <a:ea typeface="Yu Gothic"/>
+                <a:cs typeface="Yu Gothic"/>
+              </a:rPr>
+              <a:t>予算は4,000円くらいまで</a:t>
+            </a:r>
+          </a:p>
+        </p:txBody>
+      </p:sp>
+      <p:sp>
+        <p:nvSpPr>
+          <p:cNvPr id="21" name="TextBox 20"/>
+          <p:cNvSpPr txBox="1"/>
+          <p:nvPr/>
+        </p:nvSpPr>
+        <p:spPr>
+          <a:xfrm>
+            <a:off x="609600" y="3238500"/>
+            <a:ext cx="251686" cy="180975"/>
+          </a:xfrm>
+          <a:prstGeom prst="rect">
+            <a:avLst/>
+          </a:prstGeom>
+          <a:noFill/>
+        </p:spPr>
+        <p:txBody>
+          <a:bodyPr wrap="none" lIns="0" rIns="0" tIns="0" bIns="0" anchor="t">
+            <a:noAutofit/>
+          </a:bodyPr>
+          <a:lstStyle/>
+          <a:p>
+            <a:pPr algn="l">
+              <a:lnSpc>
+                <a:spcPts val="1462"/>
+              </a:lnSpc>
+              <a:spcBef>
+                <a:spcPts val="0"/>
+              </a:spcBef>
+              <a:spcAft>
+                <a:spcPts val="0"/>
+              </a:spcAft>
+            </a:pPr>
+            <a:r>
+              <a:rPr sz="1000" b="0" i="0">
+                <a:solidFill>
+                  <a:srgbClr val="9A9993"/>
+                </a:solidFill>
+                <a:latin typeface="Yu Gothic"/>
+                <a:ea typeface="Yu Gothic"/>
+                <a:cs typeface="Yu Gothic"/>
+              </a:rPr>
+              <a:t>ima</a:t>
+            </a:r>
+          </a:p>
+        </p:txBody>
+      </p:sp>
+      <p:sp>
+        <p:nvSpPr>
+          <p:cNvPr id="22" name="TextBox 21"/>
+          <p:cNvSpPr txBox="1"/>
+          <p:nvPr/>
+        </p:nvSpPr>
+        <p:spPr>
+          <a:xfrm>
+            <a:off x="781050" y="3609975"/>
+            <a:ext cx="2832354" cy="481012"/>
+          </a:xfrm>
+          <a:prstGeom prst="rect">
+            <a:avLst/>
+          </a:prstGeom>
+          <a:noFill/>
+        </p:spPr>
+        <p:txBody>
+          <a:bodyPr wrap="none" lIns="0" rIns="0" tIns="0" bIns="0" anchor="t">
+            <a:noAutofit/>
+          </a:bodyPr>
+          <a:lstStyle/>
+          <a:p>
+            <a:pPr algn="l">
+              <a:lnSpc>
+                <a:spcPts val="1912"/>
+              </a:lnSpc>
+              <a:spcBef>
+                <a:spcPts val="0"/>
+              </a:spcBef>
+              <a:spcAft>
+                <a:spcPts val="0"/>
+              </a:spcAft>
+            </a:pPr>
+            <a:r>
+              <a:rPr sz="1300" b="0" i="0">
+                <a:solidFill>
+                  <a:srgbClr val="ECEBE6"/>
+                </a:solidFill>
+                <a:latin typeface="Yu Gothic"/>
+                <a:ea typeface="Yu Gothic"/>
+                <a:cs typeface="Yu Gothic"/>
+              </a:rPr>
+              <a:t>近くの和食店から、</a:t>
+            </a:r>
+          </a:p>
+          <a:p>
+            <a:pPr algn="l">
+              <a:lnSpc>
+                <a:spcPts val="1912"/>
+              </a:lnSpc>
+              <a:spcBef>
+                <a:spcPts val="0"/>
+              </a:spcBef>
+              <a:spcAft>
+                <a:spcPts val="0"/>
+              </a:spcAft>
+            </a:pPr>
+            <a:r>
+              <a:rPr sz="1300" b="0" i="0">
+                <a:solidFill>
+                  <a:srgbClr val="ECEBE6"/>
+                </a:solidFill>
+                <a:latin typeface="Yu Gothic"/>
+                <a:ea typeface="Yu Gothic"/>
+                <a:cs typeface="Yu Gothic"/>
+              </a:rPr>
+              <a:t>条件に合う3件を選びました</a:t>
+            </a:r>
+          </a:p>
+        </p:txBody>
+      </p:sp>
+      <p:sp>
+        <p:nvSpPr>
+          <p:cNvPr id="23" name="TextBox 22"/>
+          <p:cNvSpPr txBox="1"/>
+          <p:nvPr/>
+        </p:nvSpPr>
+        <p:spPr>
+          <a:xfrm>
+            <a:off x="3164681" y="4328964"/>
+            <a:ext cx="531686" cy="180975"/>
+          </a:xfrm>
+          <a:prstGeom prst="rect">
+            <a:avLst/>
+          </a:prstGeom>
+          <a:noFill/>
+        </p:spPr>
+        <p:txBody>
+          <a:bodyPr wrap="none" lIns="0" rIns="0" tIns="0" bIns="0" anchor="t">
+            <a:noAutofit/>
+          </a:bodyPr>
+          <a:lstStyle/>
+          <a:p>
+            <a:pPr algn="l">
+              <a:lnSpc>
+                <a:spcPts val="1462"/>
+              </a:lnSpc>
+              <a:spcBef>
+                <a:spcPts val="0"/>
+              </a:spcBef>
+              <a:spcAft>
+                <a:spcPts val="0"/>
+              </a:spcAft>
+            </a:pPr>
+            <a:r>
+              <a:rPr sz="1000" b="0" i="0">
+                <a:solidFill>
+                  <a:srgbClr val="9A9993"/>
+                </a:solidFill>
+                <a:latin typeface="Yu Gothic"/>
+                <a:ea typeface="Yu Gothic"/>
+                <a:cs typeface="Yu Gothic"/>
+              </a:rPr>
+              <a:t>ユーザー</a:t>
+            </a:r>
+          </a:p>
+        </p:txBody>
+      </p:sp>
+      <p:sp>
+        <p:nvSpPr>
+          <p:cNvPr id="24" name="TextBox 23"/>
+          <p:cNvSpPr txBox="1"/>
+          <p:nvPr/>
+        </p:nvSpPr>
+        <p:spPr>
+          <a:xfrm>
+            <a:off x="1057275" y="4700439"/>
+            <a:ext cx="2545080" cy="238125"/>
+          </a:xfrm>
+          <a:prstGeom prst="rect">
+            <a:avLst/>
+          </a:prstGeom>
+          <a:noFill/>
+        </p:spPr>
+        <p:txBody>
+          <a:bodyPr wrap="none" lIns="0" rIns="0" tIns="0" bIns="0" anchor="t">
+            <a:noAutofit/>
+          </a:bodyPr>
+          <a:lstStyle/>
+          <a:p>
+            <a:pPr algn="l">
+              <a:lnSpc>
+                <a:spcPts val="1912"/>
+              </a:lnSpc>
+              <a:spcBef>
+                <a:spcPts val="0"/>
+              </a:spcBef>
+              <a:spcAft>
+                <a:spcPts val="0"/>
+              </a:spcAft>
+            </a:pPr>
+            <a:r>
+              <a:rPr sz="1300" b="0" i="0">
+                <a:solidFill>
+                  <a:srgbClr val="161616"/>
+                </a:solidFill>
+                <a:latin typeface="Yu Gothic"/>
+                <a:ea typeface="Yu Gothic"/>
+                <a:cs typeface="Yu Gothic"/>
+              </a:rPr>
+              <a:t>やっぱり個室があるところがいい</a:t>
+            </a:r>
+          </a:p>
+        </p:txBody>
+      </p:sp>
+      <p:sp>
+        <p:nvSpPr>
+          <p:cNvPr id="25" name="TextBox 24"/>
+          <p:cNvSpPr txBox="1"/>
+          <p:nvPr/>
+        </p:nvSpPr>
+        <p:spPr>
+          <a:xfrm>
+            <a:off x="609600" y="5176540"/>
+            <a:ext cx="251686" cy="180975"/>
+          </a:xfrm>
+          <a:prstGeom prst="rect">
+            <a:avLst/>
+          </a:prstGeom>
+          <a:noFill/>
+        </p:spPr>
+        <p:txBody>
+          <a:bodyPr wrap="none" lIns="0" rIns="0" tIns="0" bIns="0" anchor="t">
+            <a:noAutofit/>
+          </a:bodyPr>
+          <a:lstStyle/>
+          <a:p>
+            <a:pPr algn="l">
+              <a:lnSpc>
+                <a:spcPts val="1462"/>
+              </a:lnSpc>
+              <a:spcBef>
+                <a:spcPts val="0"/>
+              </a:spcBef>
+              <a:spcAft>
+                <a:spcPts val="0"/>
+              </a:spcAft>
+            </a:pPr>
+            <a:r>
+              <a:rPr sz="1000" b="0" i="0">
+                <a:solidFill>
+                  <a:srgbClr val="9A9993"/>
+                </a:solidFill>
+                <a:latin typeface="Yu Gothic"/>
+                <a:ea typeface="Yu Gothic"/>
+                <a:cs typeface="Yu Gothic"/>
+              </a:rPr>
+              <a:t>ima</a:t>
+            </a:r>
+          </a:p>
+        </p:txBody>
+      </p:sp>
+      <p:sp>
+        <p:nvSpPr>
+          <p:cNvPr id="26" name="TextBox 25"/>
+          <p:cNvSpPr txBox="1"/>
+          <p:nvPr/>
+        </p:nvSpPr>
+        <p:spPr>
+          <a:xfrm>
+            <a:off x="781050" y="5548015"/>
+            <a:ext cx="2832354" cy="481012"/>
+          </a:xfrm>
+          <a:prstGeom prst="rect">
+            <a:avLst/>
+          </a:prstGeom>
+          <a:noFill/>
+        </p:spPr>
+        <p:txBody>
+          <a:bodyPr wrap="none" lIns="0" rIns="0" tIns="0" bIns="0" anchor="t">
+            <a:noAutofit/>
+          </a:bodyPr>
+          <a:lstStyle/>
+          <a:p>
+            <a:pPr algn="l">
+              <a:lnSpc>
+                <a:spcPts val="1912"/>
+              </a:lnSpc>
+              <a:spcBef>
+                <a:spcPts val="0"/>
+              </a:spcBef>
+              <a:spcAft>
+                <a:spcPts val="0"/>
+              </a:spcAft>
+            </a:pPr>
+            <a:r>
+              <a:rPr sz="1300" b="0" i="0">
+                <a:solidFill>
+                  <a:srgbClr val="ECEBE6"/>
+                </a:solidFill>
+                <a:latin typeface="Yu Gothic"/>
+                <a:ea typeface="Yu Gothic"/>
+                <a:cs typeface="Yu Gothic"/>
+              </a:rPr>
+              <a:t>和食・4,000円以内はそのままに、</a:t>
+            </a:r>
+          </a:p>
+          <a:p>
+            <a:pPr algn="l">
+              <a:lnSpc>
+                <a:spcPts val="1912"/>
+              </a:lnSpc>
+              <a:spcBef>
+                <a:spcPts val="0"/>
+              </a:spcBef>
+              <a:spcAft>
+                <a:spcPts val="0"/>
+              </a:spcAft>
+            </a:pPr>
+            <a:r>
+              <a:rPr sz="1300" b="0" i="0">
+                <a:solidFill>
+                  <a:srgbClr val="ECEBE6"/>
+                </a:solidFill>
+                <a:latin typeface="Yu Gothic"/>
+                <a:ea typeface="Yu Gothic"/>
+                <a:cs typeface="Yu Gothic"/>
+              </a:rPr>
+              <a:t>個室のある店で選び直しました</a:t>
+            </a:r>
+          </a:p>
+        </p:txBody>
+      </p:sp>
+      <p:sp>
+        <p:nvSpPr>
+          <p:cNvPr id="27" name="TextBox 26"/>
+          <p:cNvSpPr txBox="1"/>
+          <p:nvPr/>
+        </p:nvSpPr>
+        <p:spPr>
+          <a:xfrm>
+            <a:off x="609600" y="6481762"/>
+            <a:ext cx="295335" cy="200025"/>
+          </a:xfrm>
+          <a:prstGeom prst="rect">
+            <a:avLst/>
+          </a:prstGeom>
+          <a:noFill/>
+        </p:spPr>
+        <p:txBody>
+          <a:bodyPr wrap="none" lIns="0" rIns="0" tIns="0" bIns="0" anchor="t">
+            <a:noAutofit/>
+          </a:bodyPr>
+          <a:lstStyle/>
+          <a:p>
+            <a:pPr algn="l">
+              <a:lnSpc>
+                <a:spcPts val="1687"/>
+              </a:lnSpc>
+              <a:spcBef>
+                <a:spcPts val="0"/>
+              </a:spcBef>
+              <a:spcAft>
+                <a:spcPts val="0"/>
+              </a:spcAft>
+            </a:pPr>
+            <a:r>
+              <a:rPr sz="1100" b="1" i="0">
+                <a:solidFill>
+                  <a:srgbClr val="9A9993"/>
+                </a:solidFill>
+                <a:latin typeface="Yu Gothic"/>
+                <a:ea typeface="Yu Gothic"/>
+                <a:cs typeface="Yu Gothic"/>
+              </a:rPr>
+              <a:t>ima</a:t>
+            </a:r>
+          </a:p>
+        </p:txBody>
+      </p:sp>
+      <p:sp>
+        <p:nvSpPr>
+          <p:cNvPr id="28" name="TextBox 27"/>
+          <p:cNvSpPr txBox="1"/>
+          <p:nvPr/>
+        </p:nvSpPr>
+        <p:spPr>
+          <a:xfrm>
+            <a:off x="11513641" y="6491288"/>
+            <a:ext cx="90559" cy="180975"/>
+          </a:xfrm>
+          <a:prstGeom prst="rect">
+            <a:avLst/>
+          </a:prstGeom>
+          <a:noFill/>
+        </p:spPr>
+        <p:txBody>
+          <a:bodyPr wrap="none" lIns="0" rIns="0" tIns="0" bIns="0" anchor="t">
+            <a:noAutofit/>
+          </a:bodyPr>
+          <a:lstStyle/>
+          <a:p>
+            <a:pPr algn="l">
+              <a:lnSpc>
+                <a:spcPts val="1462"/>
+              </a:lnSpc>
+              <a:spcBef>
+                <a:spcPts val="0"/>
+              </a:spcBef>
+              <a:spcAft>
+                <a:spcPts val="0"/>
+              </a:spcAft>
+            </a:pPr>
+            <a:r>
+              <a:rPr sz="1000" b="0" i="0">
+                <a:solidFill>
+                  <a:srgbClr val="9A9993"/>
+                </a:solidFill>
+                <a:latin typeface="Yu Gothic"/>
+                <a:ea typeface="Yu Gothic"/>
+                <a:cs typeface="Yu Gothic"/>
+              </a:rPr>
+              <a:t>5</a:t>
+            </a:r>
+          </a:p>
+        </p:txBody>
+      </p:sp>
+    </p:spTree>
+  </p:cSld>
+  <p:clrMapOvr>
+    <a:masterClrMapping/>
+  </p:clrMapOvr>
+</p:sld>
+</file>
+
+<file path=ppt/slides/slide7.xml><?xml version="1.0" encoding="utf-8"?>
+<p:sld xmlns:a="http://schemas.openxmlformats.org/drawingml/2006/main" xmlns:p="http://schemas.openxmlformats.org/presentationml/2006/main" xmlns:r="http://schemas.openxmlformats.org/officeDocument/2006/relationships">
+  <p:cSld>
+    <p:bg>
+      <p:bgPr>
+        <a:solidFill>
+          <a:srgbClr val="0C0C0D"/>
+        </a:solidFill>
+        <a:effectLst/>
+      </p:bgPr>
+    </p:bg>
+    <p:spTree>
+      <p:nvGrpSpPr>
+        <p:cNvPr id="1" name=""/>
+        <p:cNvGrpSpPr/>
+        <p:nvPr/>
+      </p:nvGrpSpPr>
+      <p:grpSpPr/>
+      <p:pic>
+        <p:nvPicPr>
+          <p:cNvPr id="2" name="Picture 1" descr="img_7_8.png"/>
+          <p:cNvPicPr>
+            <a:picLocks noChangeAspect="1"/>
+          </p:cNvPicPr>
+          <p:nvPr/>
+        </p:nvPicPr>
+        <p:blipFill>
+          <a:blip r:embed="rId2"/>
+          <a:stretch>
+            <a:fillRect/>
+          </a:stretch>
+        </p:blipFill>
+        <p:spPr>
+          <a:xfrm>
+            <a:off x="10648950" y="209550"/>
+            <a:ext cx="1123950" cy="1123950"/>
+          </a:xfrm>
+          <a:prstGeom prst="rect">
+            <a:avLst/>
+          </a:prstGeom>
+        </p:spPr>
+      </p:pic>
+      <p:cxnSp>
+        <p:nvCxnSpPr>
+          <p:cNvPr id="3" name="Connector 2"/>
+          <p:cNvCxnSpPr/>
+          <p:nvPr/>
+        </p:nvCxnSpPr>
+        <p:spPr>
+          <a:xfrm>
+            <a:off x="609600" y="1971973"/>
+            <a:ext cx="4563814" cy="0"/>
+          </a:xfrm>
+          <a:prstGeom prst="line">
+            <a:avLst/>
+          </a:prstGeom>
+          <a:ln w="19050">
+            <a:solidFill>
+              <a:srgbClr val="ECEBE6"/>
+            </a:solidFill>
+          </a:ln>
+        </p:spPr>
+      </p:cxnSp>
+      <p:pic>
+        <p:nvPicPr>
+          <p:cNvPr id="4" name="Picture 3" descr="img_7_9.png"/>
+          <p:cNvPicPr>
+            <a:picLocks noChangeAspect="1"/>
+          </p:cNvPicPr>
+          <p:nvPr/>
+        </p:nvPicPr>
+        <p:blipFill>
+          <a:blip r:embed="rId3"/>
+          <a:stretch>
+            <a:fillRect/>
+          </a:stretch>
+        </p:blipFill>
+        <p:spPr>
+          <a:xfrm>
+            <a:off x="381000" y="2400598"/>
+            <a:ext cx="1676400" cy="1676400"/>
+          </a:xfrm>
+          <a:prstGeom prst="rect">
+            <a:avLst/>
+          </a:prstGeom>
+        </p:spPr>
+      </p:pic>
+      <p:sp>
+        <p:nvSpPr>
+          <p:cNvPr id="5" name="Rectangle 4"/>
+          <p:cNvSpPr/>
+          <p:nvPr/>
+        </p:nvSpPr>
+        <p:spPr>
+          <a:xfrm>
+            <a:off x="609600" y="4438948"/>
+            <a:ext cx="1065461" cy="585788"/>
+          </a:xfrm>
+          <a:prstGeom prst="rect">
+            <a:avLst/>
+          </a:prstGeom>
+          <a:solidFill>
+            <a:srgbClr val="1C1C1E"/>
+          </a:solidFill>
+          <a:ln>
+            <a:noFill/>
+          </a:ln>
+        </p:spPr>
+        <p:txBody>
+          <a:bodyPr rtlCol="0" anchor="ctr"/>
+          <a:lstStyle/>
+          <a:p/>
+        </p:txBody>
+      </p:sp>
+      <p:sp>
+        <p:nvSpPr>
+          <p:cNvPr id="6" name="Rectangle 5"/>
+          <p:cNvSpPr/>
+          <p:nvPr/>
+        </p:nvSpPr>
+        <p:spPr>
+          <a:xfrm>
+            <a:off x="723900" y="5024735"/>
+            <a:ext cx="114300" cy="95250"/>
+          </a:xfrm>
+          <a:prstGeom prst="rect">
+            <a:avLst/>
+          </a:prstGeom>
+          <a:solidFill>
+            <a:srgbClr val="1C1C1E"/>
+          </a:solidFill>
+          <a:ln>
+            <a:noFill/>
+          </a:ln>
+        </p:spPr>
+        <p:txBody>
+          <a:bodyPr rtlCol="0" anchor="ctr"/>
+          <a:lstStyle/>
+          <a:p/>
+        </p:txBody>
+      </p:sp>
+      <p:sp>
+        <p:nvSpPr>
+          <p:cNvPr id="7" name="Rectangle 6"/>
+          <p:cNvSpPr/>
+          <p:nvPr/>
+        </p:nvSpPr>
+        <p:spPr>
+          <a:xfrm>
+            <a:off x="657225" y="5119985"/>
+            <a:ext cx="66675" cy="66675"/>
+          </a:xfrm>
+          <a:prstGeom prst="rect">
+            <a:avLst/>
+          </a:prstGeom>
+          <a:solidFill>
+            <a:srgbClr val="1C1C1E"/>
+          </a:solidFill>
+          <a:ln>
+            <a:noFill/>
+          </a:ln>
+        </p:spPr>
+        <p:txBody>
+          <a:bodyPr rtlCol="0" anchor="ctr"/>
+          <a:lstStyle/>
+          <a:p/>
+        </p:txBody>
+      </p:sp>
+      <p:pic>
+        <p:nvPicPr>
+          <p:cNvPr id="8" name="Picture 7" descr="img_7_10.png"/>
+          <p:cNvPicPr>
+            <a:picLocks noChangeAspect="1"/>
+          </p:cNvPicPr>
+          <p:nvPr/>
+        </p:nvPicPr>
+        <p:blipFill>
+          <a:blip r:embed="rId4"/>
+          <a:stretch>
+            <a:fillRect/>
+          </a:stretch>
+        </p:blipFill>
+        <p:spPr>
+          <a:xfrm>
+            <a:off x="1946672" y="2400598"/>
+            <a:ext cx="1676400" cy="1676400"/>
+          </a:xfrm>
+          <a:prstGeom prst="rect">
+            <a:avLst/>
+          </a:prstGeom>
+        </p:spPr>
+      </p:pic>
+      <p:pic>
+        <p:nvPicPr>
+          <p:cNvPr id="9" name="Picture 8" descr="img_7_11.png"/>
+          <p:cNvPicPr>
+            <a:picLocks noChangeAspect="1"/>
+          </p:cNvPicPr>
+          <p:nvPr/>
+        </p:nvPicPr>
+        <p:blipFill>
+          <a:blip r:embed="rId5"/>
+          <a:stretch>
+            <a:fillRect/>
+          </a:stretch>
+        </p:blipFill>
+        <p:spPr>
+          <a:xfrm>
+            <a:off x="3512344" y="2400598"/>
+            <a:ext cx="1676400" cy="1676400"/>
+          </a:xfrm>
+          <a:prstGeom prst="rect">
+            <a:avLst/>
+          </a:prstGeom>
+        </p:spPr>
+      </p:pic>
+      <p:sp>
+        <p:nvSpPr>
+          <p:cNvPr id="10" name="Rectangle 9"/>
+          <p:cNvSpPr/>
+          <p:nvPr/>
+        </p:nvSpPr>
+        <p:spPr>
+          <a:xfrm>
+            <a:off x="3740944" y="4438948"/>
+            <a:ext cx="912614" cy="585788"/>
+          </a:xfrm>
+          <a:prstGeom prst="rect">
+            <a:avLst/>
+          </a:prstGeom>
+          <a:solidFill>
+            <a:srgbClr val="1C1C1E"/>
+          </a:solidFill>
+          <a:ln>
+            <a:noFill/>
+          </a:ln>
+        </p:spPr>
+        <p:txBody>
+          <a:bodyPr rtlCol="0" anchor="ctr"/>
+          <a:lstStyle/>
+          <a:p/>
+        </p:txBody>
+      </p:sp>
+      <p:sp>
+        <p:nvSpPr>
+          <p:cNvPr id="11" name="Rectangle 10"/>
+          <p:cNvSpPr/>
+          <p:nvPr/>
+        </p:nvSpPr>
+        <p:spPr>
+          <a:xfrm>
+            <a:off x="3855244" y="5024735"/>
+            <a:ext cx="114300" cy="95250"/>
+          </a:xfrm>
+          <a:prstGeom prst="rect">
+            <a:avLst/>
+          </a:prstGeom>
+          <a:solidFill>
+            <a:srgbClr val="1C1C1E"/>
+          </a:solidFill>
+          <a:ln>
+            <a:noFill/>
+          </a:ln>
+        </p:spPr>
+        <p:txBody>
+          <a:bodyPr rtlCol="0" anchor="ctr"/>
+          <a:lstStyle/>
+          <a:p/>
+        </p:txBody>
+      </p:sp>
+      <p:sp>
+        <p:nvSpPr>
+          <p:cNvPr id="12" name="Rectangle 11"/>
+          <p:cNvSpPr/>
+          <p:nvPr/>
+        </p:nvSpPr>
+        <p:spPr>
+          <a:xfrm>
+            <a:off x="3788569" y="5119985"/>
+            <a:ext cx="66675" cy="66675"/>
+          </a:xfrm>
+          <a:prstGeom prst="rect">
+            <a:avLst/>
+          </a:prstGeom>
+          <a:solidFill>
+            <a:srgbClr val="1C1C1E"/>
+          </a:solidFill>
+          <a:ln>
+            <a:noFill/>
+          </a:ln>
+        </p:spPr>
+        <p:txBody>
+          <a:bodyPr rtlCol="0" anchor="ctr"/>
+          <a:lstStyle/>
+          <a:p/>
+        </p:txBody>
+      </p:sp>
+      <p:cxnSp>
+        <p:nvCxnSpPr>
+          <p:cNvPr id="13" name="Connector 12"/>
+          <p:cNvCxnSpPr/>
+          <p:nvPr/>
+        </p:nvCxnSpPr>
+        <p:spPr>
+          <a:xfrm>
+            <a:off x="5497264" y="1971973"/>
+            <a:ext cx="6084987" cy="0"/>
+          </a:xfrm>
+          <a:prstGeom prst="line">
+            <a:avLst/>
+          </a:prstGeom>
+          <a:ln w="19050">
+            <a:solidFill>
+              <a:srgbClr val="ECEBE6"/>
+            </a:solidFill>
+          </a:ln>
+        </p:spPr>
+      </p:cxnSp>
+      <p:pic>
+        <p:nvPicPr>
+          <p:cNvPr id="14" name="Picture 13" descr="img_7_11.png"/>
+          <p:cNvPicPr>
+            <a:picLocks noChangeAspect="1"/>
+          </p:cNvPicPr>
+          <p:nvPr/>
+        </p:nvPicPr>
+        <p:blipFill>
+          <a:blip r:embed="rId5"/>
+          <a:stretch>
+            <a:fillRect/>
+          </a:stretch>
+        </p:blipFill>
+        <p:spPr>
+          <a:xfrm>
+            <a:off x="5268664" y="2400598"/>
+            <a:ext cx="1676400" cy="1676400"/>
+          </a:xfrm>
+          <a:prstGeom prst="rect">
+            <a:avLst/>
+          </a:prstGeom>
+        </p:spPr>
+      </p:pic>
+      <p:pic>
+        <p:nvPicPr>
+          <p:cNvPr id="15" name="Picture 14" descr="img_7_13.png"/>
+          <p:cNvPicPr>
+            <a:picLocks noChangeAspect="1"/>
+          </p:cNvPicPr>
+          <p:nvPr/>
+        </p:nvPicPr>
+        <p:blipFill>
+          <a:blip r:embed="rId6"/>
+          <a:stretch>
+            <a:fillRect/>
+          </a:stretch>
+        </p:blipFill>
+        <p:spPr>
+          <a:xfrm>
+            <a:off x="6823174" y="2400598"/>
+            <a:ext cx="1676400" cy="1676400"/>
+          </a:xfrm>
+          <a:prstGeom prst="rect">
+            <a:avLst/>
+          </a:prstGeom>
+        </p:spPr>
+      </p:pic>
+      <p:sp>
+        <p:nvSpPr>
+          <p:cNvPr id="16" name="Rectangle 15"/>
+          <p:cNvSpPr/>
+          <p:nvPr/>
+        </p:nvSpPr>
+        <p:spPr>
+          <a:xfrm>
+            <a:off x="7051774" y="4438948"/>
+            <a:ext cx="1066949" cy="585788"/>
+          </a:xfrm>
+          <a:prstGeom prst="rect">
+            <a:avLst/>
+          </a:prstGeom>
+          <a:solidFill>
+            <a:srgbClr val="1C1C1E"/>
+          </a:solidFill>
+          <a:ln>
+            <a:noFill/>
+          </a:ln>
+        </p:spPr>
+        <p:txBody>
+          <a:bodyPr rtlCol="0" anchor="ctr"/>
+          <a:lstStyle/>
+          <a:p/>
+        </p:txBody>
+      </p:sp>
+      <p:sp>
+        <p:nvSpPr>
+          <p:cNvPr id="17" name="Rectangle 16"/>
+          <p:cNvSpPr/>
+          <p:nvPr/>
+        </p:nvSpPr>
+        <p:spPr>
+          <a:xfrm>
+            <a:off x="7166074" y="5024735"/>
+            <a:ext cx="114300" cy="95250"/>
+          </a:xfrm>
+          <a:prstGeom prst="rect">
+            <a:avLst/>
+          </a:prstGeom>
+          <a:solidFill>
+            <a:srgbClr val="1C1C1E"/>
+          </a:solidFill>
+          <a:ln>
+            <a:noFill/>
+          </a:ln>
+        </p:spPr>
+        <p:txBody>
+          <a:bodyPr rtlCol="0" anchor="ctr"/>
+          <a:lstStyle/>
+          <a:p/>
+        </p:txBody>
+      </p:sp>
+      <p:sp>
+        <p:nvSpPr>
+          <p:cNvPr id="18" name="Rectangle 17"/>
+          <p:cNvSpPr/>
+          <p:nvPr/>
+        </p:nvSpPr>
+        <p:spPr>
+          <a:xfrm>
+            <a:off x="7099399" y="5119985"/>
+            <a:ext cx="66675" cy="66675"/>
+          </a:xfrm>
+          <a:prstGeom prst="rect">
+            <a:avLst/>
+          </a:prstGeom>
+          <a:solidFill>
+            <a:srgbClr val="1C1C1E"/>
+          </a:solidFill>
+          <a:ln>
+            <a:noFill/>
+          </a:ln>
+        </p:spPr>
+        <p:txBody>
+          <a:bodyPr rtlCol="0" anchor="ctr"/>
+          <a:lstStyle/>
+          <a:p/>
+        </p:txBody>
+      </p:sp>
+      <p:pic>
+        <p:nvPicPr>
+          <p:cNvPr id="19" name="Picture 18" descr="img_7_14.png"/>
+          <p:cNvPicPr>
+            <a:picLocks noChangeAspect="1"/>
+          </p:cNvPicPr>
+          <p:nvPr/>
+        </p:nvPicPr>
+        <p:blipFill>
+          <a:blip r:embed="rId7"/>
+          <a:stretch>
+            <a:fillRect/>
+          </a:stretch>
+        </p:blipFill>
+        <p:spPr>
+          <a:xfrm>
+            <a:off x="8377833" y="2400598"/>
+            <a:ext cx="1676400" cy="1676400"/>
+          </a:xfrm>
+          <a:prstGeom prst="rect">
+            <a:avLst/>
+          </a:prstGeom>
+        </p:spPr>
+      </p:pic>
+      <p:pic>
+        <p:nvPicPr>
+          <p:cNvPr id="20" name="Picture 19" descr="img_7_15.png"/>
+          <p:cNvPicPr>
+            <a:picLocks noChangeAspect="1"/>
+          </p:cNvPicPr>
+          <p:nvPr/>
+        </p:nvPicPr>
+        <p:blipFill>
+          <a:blip r:embed="rId8"/>
+          <a:stretch>
+            <a:fillRect/>
+          </a:stretch>
+        </p:blipFill>
+        <p:spPr>
+          <a:xfrm>
+            <a:off x="9932343" y="2400598"/>
+            <a:ext cx="1676400" cy="1676400"/>
+          </a:xfrm>
+          <a:prstGeom prst="rect">
+            <a:avLst/>
+          </a:prstGeom>
+        </p:spPr>
+      </p:pic>
+      <p:sp>
+        <p:nvSpPr>
+          <p:cNvPr id="21" name="Title"/>
+          <p:cNvSpPr txBox="1"/>
+          <p:nvPr/>
+        </p:nvSpPr>
+        <p:spPr>
+          <a:xfrm>
+            <a:off x="609600" y="428625"/>
+            <a:ext cx="10024110" cy="847874"/>
+          </a:xfrm>
+          <a:prstGeom prst="rect">
+            <a:avLst/>
+          </a:prstGeom>
+          <a:noFill/>
+        </p:spPr>
+        <p:txBody>
+          <a:bodyPr wrap="none" lIns="0" rIns="0" tIns="0" bIns="0" anchor="t">
+            <a:noAutofit/>
+          </a:bodyPr>
+          <a:lstStyle/>
+          <a:p>
+            <a:pPr algn="l">
+              <a:lnSpc>
+                <a:spcPts val="3301"/>
+              </a:lnSpc>
+              <a:spcBef>
+                <a:spcPts val="0"/>
+              </a:spcBef>
+              <a:spcAft>
+                <a:spcPts val="0"/>
+              </a:spcAft>
+            </a:pPr>
+            <a:r>
+              <a:rPr sz="2300" b="1" i="0">
+                <a:solidFill>
+                  <a:srgbClr val="ECEBE6"/>
+                </a:solidFill>
+                <a:latin typeface="Yu Gothic"/>
+                <a:ea typeface="Yu Gothic"/>
+                <a:cs typeface="Yu Gothic"/>
+              </a:rPr>
+              <a:t>maru は入口から決定までの場面ごとに姿を変え、</a:t>
+            </a:r>
+          </a:p>
+          <a:p>
+            <a:pPr algn="l">
+              <a:lnSpc>
+                <a:spcPts val="3301"/>
+              </a:lnSpc>
+              <a:spcBef>
+                <a:spcPts val="0"/>
+              </a:spcBef>
+              <a:spcAft>
+                <a:spcPts val="0"/>
+              </a:spcAft>
+            </a:pPr>
+            <a:r>
+              <a:rPr sz="2300" b="1" i="0">
+                <a:solidFill>
+                  <a:srgbClr val="ECEBE6"/>
+                </a:solidFill>
+                <a:latin typeface="Yu Gothic"/>
+                <a:ea typeface="Yu Gothic"/>
+                <a:cs typeface="Yu Gothic"/>
+              </a:rPr>
+              <a:t>ima がいま何をしているかを伝える</a:t>
+            </a:r>
+          </a:p>
+        </p:txBody>
+      </p:sp>
+      <p:sp>
+        <p:nvSpPr>
+          <p:cNvPr id="22" name="TextBox 21"/>
+          <p:cNvSpPr txBox="1"/>
+          <p:nvPr/>
+        </p:nvSpPr>
+        <p:spPr>
+          <a:xfrm>
+            <a:off x="609600" y="1629073"/>
+            <a:ext cx="910590" cy="247650"/>
+          </a:xfrm>
+          <a:prstGeom prst="rect">
+            <a:avLst/>
+          </a:prstGeom>
+          <a:noFill/>
+        </p:spPr>
+        <p:txBody>
+          <a:bodyPr wrap="none" lIns="0" rIns="0" tIns="0" bIns="0" anchor="t">
+            <a:noAutofit/>
+          </a:bodyPr>
+          <a:lstStyle/>
+          <a:p>
+            <a:pPr algn="l">
+              <a:lnSpc>
+                <a:spcPts val="2025"/>
+              </a:lnSpc>
+              <a:spcBef>
+                <a:spcPts val="0"/>
+              </a:spcBef>
+              <a:spcAft>
+                <a:spcPts val="0"/>
+              </a:spcAft>
+            </a:pPr>
+            <a:r>
+              <a:rPr sz="1350" b="1" i="0">
+                <a:solidFill>
+                  <a:srgbClr val="ECEBE6"/>
+                </a:solidFill>
+                <a:latin typeface="Yu Gothic"/>
+                <a:ea typeface="Yu Gothic"/>
+                <a:cs typeface="Yu Gothic"/>
+              </a:rPr>
+              <a:t>入口と質問</a:t>
+            </a:r>
+          </a:p>
+        </p:txBody>
+      </p:sp>
+      <p:sp>
+        <p:nvSpPr>
+          <p:cNvPr id="23" name="TextBox 22"/>
+          <p:cNvSpPr txBox="1"/>
+          <p:nvPr/>
+        </p:nvSpPr>
+        <p:spPr>
+          <a:xfrm>
+            <a:off x="609600" y="4096048"/>
+            <a:ext cx="1088898" cy="247650"/>
+          </a:xfrm>
+          <a:prstGeom prst="rect">
+            <a:avLst/>
+          </a:prstGeom>
+          <a:noFill/>
+        </p:spPr>
+        <p:txBody>
+          <a:bodyPr wrap="none" lIns="0" rIns="0" tIns="0" bIns="0" anchor="t">
+            <a:noAutofit/>
+          </a:bodyPr>
+          <a:lstStyle/>
+          <a:p>
+            <a:pPr algn="l">
+              <a:lnSpc>
+                <a:spcPts val="2025"/>
+              </a:lnSpc>
+              <a:spcBef>
+                <a:spcPts val="0"/>
+              </a:spcBef>
+              <a:spcAft>
+                <a:spcPts val="0"/>
+              </a:spcAft>
+            </a:pPr>
+            <a:r>
+              <a:rPr sz="1350" b="1" i="0">
+                <a:solidFill>
+                  <a:srgbClr val="ECEBE6"/>
+                </a:solidFill>
+                <a:latin typeface="Yu Gothic"/>
+                <a:ea typeface="Yu Gothic"/>
+                <a:cs typeface="Yu Gothic"/>
+              </a:rPr>
+              <a:t>スプラッシュ</a:t>
+            </a:r>
+          </a:p>
+        </p:txBody>
+      </p:sp>
+      <p:sp>
+        <p:nvSpPr>
+          <p:cNvPr id="24" name="TextBox 23"/>
+          <p:cNvSpPr txBox="1"/>
+          <p:nvPr/>
+        </p:nvSpPr>
+        <p:spPr>
+          <a:xfrm>
+            <a:off x="714375" y="4524673"/>
+            <a:ext cx="909197" cy="407194"/>
+          </a:xfrm>
+          <a:prstGeom prst="rect">
+            <a:avLst/>
+          </a:prstGeom>
+          <a:noFill/>
+        </p:spPr>
+        <p:txBody>
+          <a:bodyPr wrap="none" lIns="0" rIns="0" tIns="0" bIns="0" anchor="t">
+            <a:noAutofit/>
+          </a:bodyPr>
+          <a:lstStyle/>
+          <a:p>
+            <a:pPr algn="l">
+              <a:lnSpc>
+                <a:spcPts val="1631"/>
+              </a:lnSpc>
+              <a:spcBef>
+                <a:spcPts val="0"/>
+              </a:spcBef>
+              <a:spcAft>
+                <a:spcPts val="0"/>
+              </a:spcAft>
+            </a:pPr>
+            <a:r>
+              <a:rPr sz="1100" b="1" i="0">
+                <a:solidFill>
+                  <a:srgbClr val="ECEBE6"/>
+                </a:solidFill>
+                <a:latin typeface="Yu Gothic"/>
+                <a:ea typeface="Yu Gothic"/>
+                <a:cs typeface="Yu Gothic"/>
+              </a:rPr>
+              <a:t>チャットから</a:t>
+            </a:r>
+          </a:p>
+          <a:p>
+            <a:pPr algn="l">
+              <a:lnSpc>
+                <a:spcPts val="1631"/>
+              </a:lnSpc>
+              <a:spcBef>
+                <a:spcPts val="0"/>
+              </a:spcBef>
+              <a:spcAft>
+                <a:spcPts val="0"/>
+              </a:spcAft>
+            </a:pPr>
+            <a:r>
+              <a:rPr sz="1100" b="1" i="0">
+                <a:solidFill>
+                  <a:srgbClr val="ECEBE6"/>
+                </a:solidFill>
+                <a:latin typeface="Yu Gothic"/>
+                <a:ea typeface="Yu Gothic"/>
+                <a:cs typeface="Yu Gothic"/>
+              </a:rPr>
+              <a:t>始める？</a:t>
+            </a:r>
+          </a:p>
+        </p:txBody>
+      </p:sp>
+      <p:sp>
+        <p:nvSpPr>
+          <p:cNvPr id="25" name="TextBox 24"/>
+          <p:cNvSpPr txBox="1"/>
+          <p:nvPr/>
+        </p:nvSpPr>
+        <p:spPr>
+          <a:xfrm>
+            <a:off x="2175272" y="4096048"/>
+            <a:ext cx="553974" cy="247650"/>
+          </a:xfrm>
+          <a:prstGeom prst="rect">
+            <a:avLst/>
+          </a:prstGeom>
+          <a:noFill/>
+        </p:spPr>
+        <p:txBody>
+          <a:bodyPr wrap="none" lIns="0" rIns="0" tIns="0" bIns="0" anchor="t">
+            <a:noAutofit/>
+          </a:bodyPr>
+          <a:lstStyle/>
+          <a:p>
+            <a:pPr algn="l">
+              <a:lnSpc>
+                <a:spcPts val="2025"/>
+              </a:lnSpc>
+              <a:spcBef>
+                <a:spcPts val="0"/>
+              </a:spcBef>
+              <a:spcAft>
+                <a:spcPts val="0"/>
+              </a:spcAft>
+            </a:pPr>
+            <a:r>
+              <a:rPr sz="1350" b="1" i="0">
+                <a:solidFill>
+                  <a:srgbClr val="ECEBE6"/>
+                </a:solidFill>
+                <a:latin typeface="Yu Gothic"/>
+                <a:ea typeface="Yu Gothic"/>
+                <a:cs typeface="Yu Gothic"/>
+              </a:rPr>
+              <a:t>質問中</a:t>
+            </a:r>
+          </a:p>
+        </p:txBody>
+      </p:sp>
+      <p:sp>
+        <p:nvSpPr>
+          <p:cNvPr id="26" name="TextBox 25"/>
+          <p:cNvSpPr txBox="1"/>
+          <p:nvPr/>
+        </p:nvSpPr>
+        <p:spPr>
+          <a:xfrm>
+            <a:off x="2175272" y="4448473"/>
+            <a:ext cx="1508665" cy="421481"/>
+          </a:xfrm>
+          <a:prstGeom prst="rect">
+            <a:avLst/>
+          </a:prstGeom>
+          <a:noFill/>
+        </p:spPr>
+        <p:txBody>
+          <a:bodyPr wrap="none" lIns="0" rIns="0" tIns="0" bIns="0" anchor="t">
+            <a:noAutofit/>
+          </a:bodyPr>
+          <a:lstStyle/>
+          <a:p>
+            <a:pPr algn="l">
+              <a:lnSpc>
+                <a:spcPts val="1743"/>
+              </a:lnSpc>
+              <a:spcBef>
+                <a:spcPts val="0"/>
+              </a:spcBef>
+              <a:spcAft>
+                <a:spcPts val="0"/>
+              </a:spcAft>
+            </a:pPr>
+            <a:r>
+              <a:rPr sz="1100" b="0" i="0">
+                <a:solidFill>
+                  <a:srgbClr val="9A9993"/>
+                </a:solidFill>
+                <a:latin typeface="Yu Gothic"/>
+                <a:ea typeface="Yu Gothic"/>
+                <a:cs typeface="Yu Gothic"/>
+              </a:rPr>
+              <a:t>質問の横で</a:t>
+            </a:r>
+          </a:p>
+          <a:p>
+            <a:pPr algn="l">
+              <a:lnSpc>
+                <a:spcPts val="1743"/>
+              </a:lnSpc>
+              <a:spcBef>
+                <a:spcPts val="0"/>
+              </a:spcBef>
+              <a:spcAft>
+                <a:spcPts val="0"/>
+              </a:spcAft>
+            </a:pPr>
+            <a:r>
+              <a:rPr sz="1100" b="0" i="0">
+                <a:solidFill>
+                  <a:srgbClr val="9A9993"/>
+                </a:solidFill>
+                <a:latin typeface="Yu Gothic"/>
+                <a:ea typeface="Yu Gothic"/>
+                <a:cs typeface="Yu Gothic"/>
+              </a:rPr>
+              <a:t>虫眼鏡をのぞく</a:t>
+            </a:r>
+          </a:p>
+        </p:txBody>
+      </p:sp>
+      <p:sp>
+        <p:nvSpPr>
+          <p:cNvPr id="27" name="TextBox 26"/>
+          <p:cNvSpPr txBox="1"/>
+          <p:nvPr/>
+        </p:nvSpPr>
+        <p:spPr>
+          <a:xfrm>
+            <a:off x="3740944" y="4096048"/>
+            <a:ext cx="1267206" cy="247650"/>
+          </a:xfrm>
+          <a:prstGeom prst="rect">
+            <a:avLst/>
+          </a:prstGeom>
+          <a:noFill/>
+        </p:spPr>
+        <p:txBody>
+          <a:bodyPr wrap="none" lIns="0" rIns="0" tIns="0" bIns="0" anchor="t">
+            <a:noAutofit/>
+          </a:bodyPr>
+          <a:lstStyle/>
+          <a:p>
+            <a:pPr algn="l">
+              <a:lnSpc>
+                <a:spcPts val="2025"/>
+              </a:lnSpc>
+              <a:spcBef>
+                <a:spcPts val="0"/>
+              </a:spcBef>
+              <a:spcAft>
+                <a:spcPts val="0"/>
+              </a:spcAft>
+            </a:pPr>
+            <a:r>
+              <a:rPr sz="1350" b="1" i="0">
+                <a:solidFill>
+                  <a:srgbClr val="ECEBE6"/>
+                </a:solidFill>
+                <a:latin typeface="Yu Gothic"/>
+                <a:ea typeface="Yu Gothic"/>
+                <a:cs typeface="Yu Gothic"/>
+              </a:rPr>
+              <a:t>答え終えたとき</a:t>
+            </a:r>
+          </a:p>
+        </p:txBody>
+      </p:sp>
+      <p:sp>
+        <p:nvSpPr>
+          <p:cNvPr id="28" name="TextBox 27"/>
+          <p:cNvSpPr txBox="1"/>
+          <p:nvPr/>
+        </p:nvSpPr>
+        <p:spPr>
+          <a:xfrm>
+            <a:off x="3845719" y="4524673"/>
+            <a:ext cx="750237" cy="407194"/>
+          </a:xfrm>
+          <a:prstGeom prst="rect">
+            <a:avLst/>
+          </a:prstGeom>
+          <a:noFill/>
+        </p:spPr>
+        <p:txBody>
+          <a:bodyPr wrap="none" lIns="0" rIns="0" tIns="0" bIns="0" anchor="t">
+            <a:noAutofit/>
+          </a:bodyPr>
+          <a:lstStyle/>
+          <a:p>
+            <a:pPr algn="l">
+              <a:lnSpc>
+                <a:spcPts val="1631"/>
+              </a:lnSpc>
+              <a:spcBef>
+                <a:spcPts val="0"/>
+              </a:spcBef>
+              <a:spcAft>
+                <a:spcPts val="0"/>
+              </a:spcAft>
+            </a:pPr>
+            <a:r>
+              <a:rPr sz="1100" b="1" i="0">
+                <a:solidFill>
+                  <a:srgbClr val="ECEBE6"/>
+                </a:solidFill>
+                <a:latin typeface="Yu Gothic"/>
+                <a:ea typeface="Yu Gothic"/>
+                <a:cs typeface="Yu Gothic"/>
+              </a:rPr>
+              <a:t>探してくる</a:t>
+            </a:r>
+          </a:p>
+          <a:p>
+            <a:pPr algn="l">
+              <a:lnSpc>
+                <a:spcPts val="1631"/>
+              </a:lnSpc>
+              <a:spcBef>
+                <a:spcPts val="0"/>
+              </a:spcBef>
+              <a:spcAft>
+                <a:spcPts val="0"/>
+              </a:spcAft>
+            </a:pPr>
+            <a:r>
+              <a:rPr sz="1100" b="1" i="0">
+                <a:solidFill>
+                  <a:srgbClr val="ECEBE6"/>
+                </a:solidFill>
+                <a:latin typeface="Yu Gothic"/>
+                <a:ea typeface="Yu Gothic"/>
+                <a:cs typeface="Yu Gothic"/>
+              </a:rPr>
+              <a:t>わん！</a:t>
+            </a:r>
+          </a:p>
+        </p:txBody>
+      </p:sp>
+      <p:sp>
+        <p:nvSpPr>
+          <p:cNvPr id="29" name="TextBox 28"/>
+          <p:cNvSpPr txBox="1"/>
+          <p:nvPr/>
+        </p:nvSpPr>
+        <p:spPr>
+          <a:xfrm>
+            <a:off x="5497264" y="1629073"/>
+            <a:ext cx="1267206" cy="247650"/>
+          </a:xfrm>
+          <a:prstGeom prst="rect">
+            <a:avLst/>
+          </a:prstGeom>
+          <a:noFill/>
+        </p:spPr>
+        <p:txBody>
+          <a:bodyPr wrap="none" lIns="0" rIns="0" tIns="0" bIns="0" anchor="t">
+            <a:noAutofit/>
+          </a:bodyPr>
+          <a:lstStyle/>
+          <a:p>
+            <a:pPr algn="l">
+              <a:lnSpc>
+                <a:spcPts val="2025"/>
+              </a:lnSpc>
+              <a:spcBef>
+                <a:spcPts val="0"/>
+              </a:spcBef>
+              <a:spcAft>
+                <a:spcPts val="0"/>
+              </a:spcAft>
+            </a:pPr>
+            <a:r>
+              <a:rPr sz="1350" b="1" i="0">
+                <a:solidFill>
+                  <a:srgbClr val="ECEBE6"/>
+                </a:solidFill>
+                <a:latin typeface="Yu Gothic"/>
+                <a:ea typeface="Yu Gothic"/>
+                <a:cs typeface="Yu Gothic"/>
+              </a:rPr>
+              <a:t>会話画面の右下</a:t>
+            </a:r>
+          </a:p>
+        </p:txBody>
+      </p:sp>
+      <p:sp>
+        <p:nvSpPr>
+          <p:cNvPr id="30" name="TextBox 29"/>
+          <p:cNvSpPr txBox="1"/>
+          <p:nvPr/>
+        </p:nvSpPr>
+        <p:spPr>
+          <a:xfrm>
+            <a:off x="5497264" y="4096048"/>
+            <a:ext cx="553974" cy="247650"/>
+          </a:xfrm>
+          <a:prstGeom prst="rect">
+            <a:avLst/>
+          </a:prstGeom>
+          <a:noFill/>
+        </p:spPr>
+        <p:txBody>
+          <a:bodyPr wrap="none" lIns="0" rIns="0" tIns="0" bIns="0" anchor="t">
+            <a:noAutofit/>
+          </a:bodyPr>
+          <a:lstStyle/>
+          <a:p>
+            <a:pPr algn="l">
+              <a:lnSpc>
+                <a:spcPts val="2025"/>
+              </a:lnSpc>
+              <a:spcBef>
+                <a:spcPts val="0"/>
+              </a:spcBef>
+              <a:spcAft>
+                <a:spcPts val="0"/>
+              </a:spcAft>
+            </a:pPr>
+            <a:r>
+              <a:rPr sz="1350" b="1" i="0">
+                <a:solidFill>
+                  <a:srgbClr val="ECEBE6"/>
+                </a:solidFill>
+                <a:latin typeface="Yu Gothic"/>
+                <a:ea typeface="Yu Gothic"/>
+                <a:cs typeface="Yu Gothic"/>
+              </a:rPr>
+              <a:t>検索中</a:t>
+            </a:r>
+          </a:p>
+        </p:txBody>
+      </p:sp>
+      <p:sp>
+        <p:nvSpPr>
+          <p:cNvPr id="31" name="TextBox 30"/>
+          <p:cNvSpPr txBox="1"/>
+          <p:nvPr/>
+        </p:nvSpPr>
+        <p:spPr>
+          <a:xfrm>
+            <a:off x="5497264" y="4448473"/>
+            <a:ext cx="754725" cy="200025"/>
+          </a:xfrm>
+          <a:prstGeom prst="rect">
+            <a:avLst/>
+          </a:prstGeom>
+          <a:noFill/>
+        </p:spPr>
+        <p:txBody>
+          <a:bodyPr wrap="none" lIns="0" rIns="0" tIns="0" bIns="0" anchor="t">
+            <a:noAutofit/>
+          </a:bodyPr>
+          <a:lstStyle/>
+          <a:p>
+            <a:pPr algn="l">
+              <a:lnSpc>
+                <a:spcPts val="1743"/>
+              </a:lnSpc>
+              <a:spcBef>
+                <a:spcPts val="0"/>
+              </a:spcBef>
+              <a:spcAft>
+                <a:spcPts val="0"/>
+              </a:spcAft>
+            </a:pPr>
+            <a:r>
+              <a:rPr sz="1100" b="0" i="0">
+                <a:solidFill>
+                  <a:srgbClr val="9A9993"/>
+                </a:solidFill>
+                <a:latin typeface="Yu Gothic"/>
+                <a:ea typeface="Yu Gothic"/>
+                <a:cs typeface="Yu Gothic"/>
+              </a:rPr>
+              <a:t>走って探す</a:t>
+            </a:r>
+          </a:p>
+        </p:txBody>
+      </p:sp>
+      <p:sp>
+        <p:nvSpPr>
+          <p:cNvPr id="32" name="TextBox 31"/>
+          <p:cNvSpPr txBox="1"/>
+          <p:nvPr/>
+        </p:nvSpPr>
+        <p:spPr>
+          <a:xfrm>
+            <a:off x="7051774" y="4096048"/>
+            <a:ext cx="659225" cy="247650"/>
+          </a:xfrm>
+          <a:prstGeom prst="rect">
+            <a:avLst/>
+          </a:prstGeom>
+          <a:noFill/>
+        </p:spPr>
+        <p:txBody>
+          <a:bodyPr wrap="none" lIns="0" rIns="0" tIns="0" bIns="0" anchor="t">
+            <a:noAutofit/>
+          </a:bodyPr>
+          <a:lstStyle/>
+          <a:p>
+            <a:pPr algn="l">
+              <a:lnSpc>
+                <a:spcPts val="2025"/>
+              </a:lnSpc>
+              <a:spcBef>
+                <a:spcPts val="0"/>
+              </a:spcBef>
+              <a:spcAft>
+                <a:spcPts val="0"/>
+              </a:spcAft>
+            </a:pPr>
+            <a:r>
+              <a:rPr sz="1350" b="1" i="0">
+                <a:solidFill>
+                  <a:srgbClr val="ECEBE6"/>
+                </a:solidFill>
+                <a:latin typeface="Yu Gothic"/>
+                <a:ea typeface="Yu Gothic"/>
+                <a:cs typeface="Yu Gothic"/>
+              </a:rPr>
+              <a:t>候補0件</a:t>
+            </a:r>
+          </a:p>
+        </p:txBody>
+      </p:sp>
+      <p:sp>
+        <p:nvSpPr>
+          <p:cNvPr id="33" name="TextBox 32"/>
+          <p:cNvSpPr txBox="1"/>
+          <p:nvPr/>
+        </p:nvSpPr>
+        <p:spPr>
+          <a:xfrm>
+            <a:off x="7156549" y="4524673"/>
+            <a:ext cx="910745" cy="407194"/>
+          </a:xfrm>
+          <a:prstGeom prst="rect">
+            <a:avLst/>
+          </a:prstGeom>
+          <a:noFill/>
+        </p:spPr>
+        <p:txBody>
+          <a:bodyPr wrap="none" lIns="0" rIns="0" tIns="0" bIns="0" anchor="t">
+            <a:noAutofit/>
+          </a:bodyPr>
+          <a:lstStyle/>
+          <a:p>
+            <a:pPr algn="l">
+              <a:lnSpc>
+                <a:spcPts val="1631"/>
+              </a:lnSpc>
+              <a:spcBef>
+                <a:spcPts val="0"/>
+              </a:spcBef>
+              <a:spcAft>
+                <a:spcPts val="0"/>
+              </a:spcAft>
+            </a:pPr>
+            <a:r>
+              <a:rPr sz="1100" b="1" i="0">
+                <a:solidFill>
+                  <a:srgbClr val="ECEBE6"/>
+                </a:solidFill>
+                <a:latin typeface="Yu Gothic"/>
+                <a:ea typeface="Yu Gothic"/>
+                <a:cs typeface="Yu Gothic"/>
+              </a:rPr>
+              <a:t>見つから</a:t>
+            </a:r>
+          </a:p>
+          <a:p>
+            <a:pPr algn="l">
+              <a:lnSpc>
+                <a:spcPts val="1631"/>
+              </a:lnSpc>
+              <a:spcBef>
+                <a:spcPts val="0"/>
+              </a:spcBef>
+              <a:spcAft>
+                <a:spcPts val="0"/>
+              </a:spcAft>
+            </a:pPr>
+            <a:r>
+              <a:rPr sz="1100" b="1" i="0">
+                <a:solidFill>
+                  <a:srgbClr val="ECEBE6"/>
+                </a:solidFill>
+                <a:latin typeface="Yu Gothic"/>
+                <a:ea typeface="Yu Gothic"/>
+                <a:cs typeface="Yu Gothic"/>
+              </a:rPr>
+              <a:t>なかったわん</a:t>
+            </a:r>
+          </a:p>
+        </p:txBody>
+      </p:sp>
+      <p:sp>
+        <p:nvSpPr>
+          <p:cNvPr id="34" name="TextBox 33"/>
+          <p:cNvSpPr txBox="1"/>
+          <p:nvPr/>
+        </p:nvSpPr>
+        <p:spPr>
+          <a:xfrm>
+            <a:off x="7051774" y="5129510"/>
+            <a:ext cx="1497211" cy="421481"/>
+          </a:xfrm>
+          <a:prstGeom prst="rect">
+            <a:avLst/>
+          </a:prstGeom>
+          <a:noFill/>
+        </p:spPr>
+        <p:txBody>
+          <a:bodyPr wrap="none" lIns="0" rIns="0" tIns="0" bIns="0" anchor="t">
+            <a:noAutofit/>
+          </a:bodyPr>
+          <a:lstStyle/>
+          <a:p>
+            <a:pPr algn="l">
+              <a:lnSpc>
+                <a:spcPts val="1743"/>
+              </a:lnSpc>
+              <a:spcBef>
+                <a:spcPts val="0"/>
+              </a:spcBef>
+              <a:spcAft>
+                <a:spcPts val="0"/>
+              </a:spcAft>
+            </a:pPr>
+            <a:r>
+              <a:rPr sz="1100" b="0" i="0">
+                <a:solidFill>
+                  <a:srgbClr val="9A9993"/>
+                </a:solidFill>
+                <a:latin typeface="Yu Gothic"/>
+                <a:ea typeface="Yu Gothic"/>
+                <a:cs typeface="Yu Gothic"/>
+              </a:rPr>
+              <a:t>検索して0件の</a:t>
+            </a:r>
+          </a:p>
+          <a:p>
+            <a:pPr algn="l">
+              <a:lnSpc>
+                <a:spcPts val="1743"/>
+              </a:lnSpc>
+              <a:spcBef>
+                <a:spcPts val="0"/>
+              </a:spcBef>
+              <a:spcAft>
+                <a:spcPts val="0"/>
+              </a:spcAft>
+            </a:pPr>
+            <a:r>
+              <a:rPr sz="1100" b="0" i="0">
+                <a:solidFill>
+                  <a:srgbClr val="9A9993"/>
+                </a:solidFill>
+                <a:latin typeface="Yu Gothic"/>
+                <a:ea typeface="Yu Gothic"/>
+                <a:cs typeface="Yu Gothic"/>
+              </a:rPr>
+              <a:t>ときだけ言う</a:t>
+            </a:r>
+          </a:p>
+        </p:txBody>
+      </p:sp>
+      <p:sp>
+        <p:nvSpPr>
+          <p:cNvPr id="35" name="TextBox 34"/>
+          <p:cNvSpPr txBox="1"/>
+          <p:nvPr/>
+        </p:nvSpPr>
+        <p:spPr>
+          <a:xfrm>
+            <a:off x="8606433" y="4096048"/>
+            <a:ext cx="1267206" cy="247650"/>
+          </a:xfrm>
+          <a:prstGeom prst="rect">
+            <a:avLst/>
+          </a:prstGeom>
+          <a:noFill/>
+        </p:spPr>
+        <p:txBody>
+          <a:bodyPr wrap="none" lIns="0" rIns="0" tIns="0" bIns="0" anchor="t">
+            <a:noAutofit/>
+          </a:bodyPr>
+          <a:lstStyle/>
+          <a:p>
+            <a:pPr algn="l">
+              <a:lnSpc>
+                <a:spcPts val="2025"/>
+              </a:lnSpc>
+              <a:spcBef>
+                <a:spcPts val="0"/>
+              </a:spcBef>
+              <a:spcAft>
+                <a:spcPts val="0"/>
+              </a:spcAft>
+            </a:pPr>
+            <a:r>
+              <a:rPr sz="1350" b="1" i="0">
+                <a:solidFill>
+                  <a:srgbClr val="ECEBE6"/>
+                </a:solidFill>
+                <a:latin typeface="Yu Gothic"/>
+                <a:ea typeface="Yu Gothic"/>
+                <a:cs typeface="Yu Gothic"/>
+              </a:rPr>
+              <a:t>失敗・取り消し</a:t>
+            </a:r>
+          </a:p>
+        </p:txBody>
+      </p:sp>
+      <p:sp>
+        <p:nvSpPr>
+          <p:cNvPr id="36" name="TextBox 35"/>
+          <p:cNvSpPr txBox="1"/>
+          <p:nvPr/>
+        </p:nvSpPr>
+        <p:spPr>
+          <a:xfrm>
+            <a:off x="8606433" y="4448473"/>
+            <a:ext cx="1059335" cy="200025"/>
+          </a:xfrm>
+          <a:prstGeom prst="rect">
+            <a:avLst/>
+          </a:prstGeom>
+          <a:noFill/>
+        </p:spPr>
+        <p:txBody>
+          <a:bodyPr wrap="none" lIns="0" rIns="0" tIns="0" bIns="0" anchor="t">
+            <a:noAutofit/>
+          </a:bodyPr>
+          <a:lstStyle/>
+          <a:p>
+            <a:pPr algn="l">
+              <a:lnSpc>
+                <a:spcPts val="1743"/>
+              </a:lnSpc>
+              <a:spcBef>
+                <a:spcPts val="0"/>
+              </a:spcBef>
+              <a:spcAft>
+                <a:spcPts val="0"/>
+              </a:spcAft>
+            </a:pPr>
+            <a:r>
+              <a:rPr sz="1100" b="0" i="0">
+                <a:solidFill>
+                  <a:srgbClr val="9A9993"/>
+                </a:solidFill>
+                <a:latin typeface="Yu Gothic"/>
+                <a:ea typeface="Yu Gothic"/>
+                <a:cs typeface="Yu Gothic"/>
+              </a:rPr>
+              <a:t>困った顔になる</a:t>
+            </a:r>
+          </a:p>
+        </p:txBody>
+      </p:sp>
+      <p:sp>
+        <p:nvSpPr>
+          <p:cNvPr id="37" name="TextBox 36"/>
+          <p:cNvSpPr txBox="1"/>
+          <p:nvPr/>
+        </p:nvSpPr>
+        <p:spPr>
+          <a:xfrm>
+            <a:off x="10160943" y="4096048"/>
+            <a:ext cx="553974" cy="247650"/>
+          </a:xfrm>
+          <a:prstGeom prst="rect">
+            <a:avLst/>
+          </a:prstGeom>
+          <a:noFill/>
+        </p:spPr>
+        <p:txBody>
+          <a:bodyPr wrap="none" lIns="0" rIns="0" tIns="0" bIns="0" anchor="t">
+            <a:noAutofit/>
+          </a:bodyPr>
+          <a:lstStyle/>
+          <a:p>
+            <a:pPr algn="l">
+              <a:lnSpc>
+                <a:spcPts val="2025"/>
+              </a:lnSpc>
+              <a:spcBef>
+                <a:spcPts val="0"/>
+              </a:spcBef>
+              <a:spcAft>
+                <a:spcPts val="0"/>
+              </a:spcAft>
+            </a:pPr>
+            <a:r>
+              <a:rPr sz="1350" b="1" i="0">
+                <a:solidFill>
+                  <a:srgbClr val="ECEBE6"/>
+                </a:solidFill>
+                <a:latin typeface="Yu Gothic"/>
+                <a:ea typeface="Yu Gothic"/>
+                <a:cs typeface="Yu Gothic"/>
+              </a:rPr>
+              <a:t>決定後</a:t>
+            </a:r>
+          </a:p>
+        </p:txBody>
+      </p:sp>
+      <p:sp>
+        <p:nvSpPr>
+          <p:cNvPr id="38" name="TextBox 37"/>
+          <p:cNvSpPr txBox="1"/>
+          <p:nvPr/>
+        </p:nvSpPr>
+        <p:spPr>
+          <a:xfrm>
+            <a:off x="10160943" y="4448473"/>
+            <a:ext cx="316385" cy="200025"/>
+          </a:xfrm>
+          <a:prstGeom prst="rect">
+            <a:avLst/>
+          </a:prstGeom>
+          <a:noFill/>
+        </p:spPr>
+        <p:txBody>
+          <a:bodyPr wrap="none" lIns="0" rIns="0" tIns="0" bIns="0" anchor="t">
+            <a:noAutofit/>
+          </a:bodyPr>
+          <a:lstStyle/>
+          <a:p>
+            <a:pPr algn="l">
+              <a:lnSpc>
+                <a:spcPts val="1743"/>
+              </a:lnSpc>
+              <a:spcBef>
+                <a:spcPts val="0"/>
+              </a:spcBef>
+              <a:spcAft>
+                <a:spcPts val="0"/>
+              </a:spcAft>
+            </a:pPr>
+            <a:r>
+              <a:rPr sz="1100" b="0" i="0">
+                <a:solidFill>
+                  <a:srgbClr val="9A9993"/>
+                </a:solidFill>
+                <a:latin typeface="Yu Gothic"/>
+                <a:ea typeface="Yu Gothic"/>
+                <a:cs typeface="Yu Gothic"/>
+              </a:rPr>
+              <a:t>喜ぶ</a:t>
+            </a:r>
+          </a:p>
+        </p:txBody>
+      </p:sp>
+      <p:sp>
+        <p:nvSpPr>
+          <p:cNvPr id="39" name="TextBox 38"/>
+          <p:cNvSpPr txBox="1"/>
+          <p:nvPr/>
+        </p:nvSpPr>
+        <p:spPr>
+          <a:xfrm>
+            <a:off x="609600" y="6481762"/>
+            <a:ext cx="295335" cy="200025"/>
+          </a:xfrm>
+          <a:prstGeom prst="rect">
+            <a:avLst/>
+          </a:prstGeom>
+          <a:noFill/>
+        </p:spPr>
+        <p:txBody>
+          <a:bodyPr wrap="none" lIns="0" rIns="0" tIns="0" bIns="0" anchor="t">
+            <a:noAutofit/>
+          </a:bodyPr>
+          <a:lstStyle/>
+          <a:p>
+            <a:pPr algn="l">
+              <a:lnSpc>
+                <a:spcPts val="1687"/>
+              </a:lnSpc>
+              <a:spcBef>
+                <a:spcPts val="0"/>
+              </a:spcBef>
+              <a:spcAft>
+                <a:spcPts val="0"/>
+              </a:spcAft>
+            </a:pPr>
+            <a:r>
+              <a:rPr sz="1100" b="1" i="0">
+                <a:solidFill>
+                  <a:srgbClr val="9A9993"/>
+                </a:solidFill>
+                <a:latin typeface="Yu Gothic"/>
+                <a:ea typeface="Yu Gothic"/>
+                <a:cs typeface="Yu Gothic"/>
+              </a:rPr>
+              <a:t>ima</a:t>
+            </a:r>
+          </a:p>
+        </p:txBody>
+      </p:sp>
+      <p:sp>
+        <p:nvSpPr>
+          <p:cNvPr id="40" name="TextBox 39"/>
+          <p:cNvSpPr txBox="1"/>
+          <p:nvPr/>
+        </p:nvSpPr>
+        <p:spPr>
+          <a:xfrm>
+            <a:off x="11513641" y="6491288"/>
+            <a:ext cx="90559" cy="180975"/>
+          </a:xfrm>
+          <a:prstGeom prst="rect">
+            <a:avLst/>
+          </a:prstGeom>
+          <a:noFill/>
+        </p:spPr>
+        <p:txBody>
+          <a:bodyPr wrap="none" lIns="0" rIns="0" tIns="0" bIns="0" anchor="t">
+            <a:noAutofit/>
+          </a:bodyPr>
+          <a:lstStyle/>
+          <a:p>
+            <a:pPr algn="l">
+              <a:lnSpc>
+                <a:spcPts val="1462"/>
+              </a:lnSpc>
+              <a:spcBef>
+                <a:spcPts val="0"/>
+              </a:spcBef>
+              <a:spcAft>
+                <a:spcPts val="0"/>
+              </a:spcAft>
+            </a:pPr>
+            <a:r>
+              <a:rPr sz="1000" b="0" i="0">
+                <a:solidFill>
+                  <a:srgbClr val="9A9993"/>
+                </a:solidFill>
+                <a:latin typeface="Yu Gothic"/>
+                <a:ea typeface="Yu Gothic"/>
+                <a:cs typeface="Yu Gothic"/>
+              </a:rPr>
+              <a:t>6</a:t>
+            </a:r>
+          </a:p>
+        </p:txBody>
+      </p:sp>
+    </p:spTree>
+  </p:cSld>
+  <p:clrMapOvr>
+    <a:masterClrMapping/>
+  </p:clrMapOvr>
+</p:sld>
+</file>
+
 <file path=ppt/theme/theme1.xml><?xml version="1.0" encoding="utf-8"?>
 <a:theme xmlns:a="http://schemas.openxmlformats.org/drawingml/2006/main" name="Office Theme">
   <a:themeElements>

--- a/docs/pitch/ima-pitch.pptx
+++ b/docs/pitch/ima-pitch.pptx
@@ -4078,7 +4078,7 @@
                           <a:ea typeface="Yu Gothic"/>
                           <a:cs typeface="Yu Gothic"/>
                         </a:rPr>
-                        <a:t>同行者の気分・体力・予算が</a:t>
+                        <a:t>同行者の気分・体力・予算を</a:t>
                       </a:r>
                       <a:endParaRPr sz="100"/>
                     </a:p>
@@ -4103,7 +4103,7 @@
                           <a:ea typeface="Yu Gothic"/>
                           <a:cs typeface="Yu Gothic"/>
                         </a:rPr>
-                        <a:t>言葉にならないまま任され、</a:t>
+                        <a:t>聞けないまま店選びを任され、</a:t>
                       </a:r>
                     </a:p>
                     <a:p>
@@ -4127,7 +4127,7 @@
                           <a:ea typeface="Yu Gothic"/>
                           <a:cs typeface="Yu Gothic"/>
                         </a:rPr>
-                        <a:t>探す人が推し量るしかない</a:t>
+                        <a:t>探す役が推し量るしかない</a:t>
                       </a:r>
                     </a:p>
                   </a:txBody>
@@ -5595,7 +5595,7 @@
         </p:nvSpPr>
         <p:spPr>
           <a:xfrm>
-            <a:off x="885825" y="2360414"/>
+            <a:off x="885825" y="2296120"/>
             <a:ext cx="2771775" cy="733425"/>
           </a:xfrm>
           <a:prstGeom prst="rect">
@@ -5622,7 +5622,7 @@
         </p:nvSpPr>
         <p:spPr>
           <a:xfrm>
-            <a:off x="3409950" y="3093839"/>
+            <a:off x="3409950" y="3029545"/>
             <a:ext cx="114300" cy="95250"/>
           </a:xfrm>
           <a:prstGeom prst="rect">
@@ -5649,7 +5649,7 @@
         </p:nvSpPr>
         <p:spPr>
           <a:xfrm>
-            <a:off x="3524250" y="3189089"/>
+            <a:off x="3524250" y="3124795"/>
             <a:ext cx="66675" cy="66675"/>
           </a:xfrm>
           <a:prstGeom prst="rect">
@@ -5676,7 +5676,7 @@
         </p:nvSpPr>
         <p:spPr>
           <a:xfrm>
-            <a:off x="609600" y="3415605"/>
+            <a:off x="609600" y="3287018"/>
             <a:ext cx="2378422" cy="733425"/>
           </a:xfrm>
           <a:prstGeom prst="rect">
@@ -5703,7 +5703,7 @@
         </p:nvSpPr>
         <p:spPr>
           <a:xfrm>
-            <a:off x="609600" y="4206180"/>
+            <a:off x="609600" y="4077593"/>
             <a:ext cx="2379613" cy="733425"/>
           </a:xfrm>
           <a:prstGeom prst="rect">
@@ -5730,7 +5730,7 @@
         </p:nvSpPr>
         <p:spPr>
           <a:xfrm>
-            <a:off x="742950" y="4939605"/>
+            <a:off x="742950" y="4811018"/>
             <a:ext cx="114300" cy="95250"/>
           </a:xfrm>
           <a:prstGeom prst="rect">
@@ -5757,7 +5757,7 @@
         </p:nvSpPr>
         <p:spPr>
           <a:xfrm>
-            <a:off x="676275" y="5034855"/>
+            <a:off x="676275" y="4906268"/>
             <a:ext cx="66675" cy="66675"/>
           </a:xfrm>
           <a:prstGeom prst="rect">
@@ -5784,7 +5784,7 @@
         </p:nvSpPr>
         <p:spPr>
           <a:xfrm>
-            <a:off x="609600" y="5166122"/>
+            <a:off x="609600" y="4973241"/>
             <a:ext cx="952500" cy="1026765"/>
           </a:xfrm>
           <a:prstGeom prst="rect">
@@ -5811,7 +5811,7 @@
         </p:nvSpPr>
         <p:spPr>
           <a:xfrm>
-            <a:off x="695325" y="5821412"/>
+            <a:off x="695325" y="5628531"/>
             <a:ext cx="781050" cy="266700"/>
           </a:xfrm>
           <a:prstGeom prst="rect">
@@ -5838,7 +5838,7 @@
         </p:nvSpPr>
         <p:spPr>
           <a:xfrm>
-            <a:off x="1657350" y="5166122"/>
+            <a:off x="1657350" y="4973241"/>
             <a:ext cx="952500" cy="1026765"/>
           </a:xfrm>
           <a:prstGeom prst="rect">
@@ -5865,7 +5865,7 @@
         </p:nvSpPr>
         <p:spPr>
           <a:xfrm>
-            <a:off x="1743075" y="5821412"/>
+            <a:off x="1743075" y="5628531"/>
             <a:ext cx="781050" cy="266700"/>
           </a:xfrm>
           <a:prstGeom prst="rect">
@@ -5892,7 +5892,7 @@
         </p:nvSpPr>
         <p:spPr>
           <a:xfrm>
-            <a:off x="2705100" y="5166122"/>
+            <a:off x="2705100" y="4973241"/>
             <a:ext cx="952500" cy="1026765"/>
           </a:xfrm>
           <a:prstGeom prst="rect">
@@ -5919,7 +5919,7 @@
         </p:nvSpPr>
         <p:spPr>
           <a:xfrm>
-            <a:off x="2790825" y="5821412"/>
+            <a:off x="2790825" y="5628531"/>
             <a:ext cx="781050" cy="266700"/>
           </a:xfrm>
           <a:prstGeom prst="rect">
@@ -5948,7 +5948,7 @@
         </p:nvGraphicFramePr>
         <p:xfrm>
           <a:off x="4076700" y="1562398"/>
-          <a:ext cx="7505700" cy="4743153"/>
+          <a:ext cx="7505700" cy="4485978"/>
         </p:xfrm>
         <a:graphic>
           <a:graphicData uri="http://schemas.openxmlformats.org/drawingml/2006/table">
@@ -6083,7 +6083,7 @@
                           <a:ea typeface="Yu Gothic"/>
                           <a:cs typeface="Yu Gothic"/>
                         </a:rPr>
-                        <a:t>応えるつまずき</a:t>
+                        <a:t>対応するつまずき</a:t>
                       </a:r>
                       <a:endParaRPr sz="100"/>
                     </a:p>
@@ -6107,7 +6107,7 @@
                   </a:tcPr>
                 </a:tc>
               </a:tr>
-              <a:tr h="1446758">
+              <a:tr h="1360736">
                 <a:tc>
                   <a:txBody>
                     <a:bodyPr wrap="square"/>
@@ -6158,7 +6158,7 @@
                           <a:ea typeface="Yu Gothic"/>
                           <a:cs typeface="Yu Gothic"/>
                         </a:rPr>
-                        <a:t>伝えられる</a:t>
+                        <a:t>受け取る</a:t>
                       </a:r>
                     </a:p>
                   </a:txBody>
@@ -6260,7 +6260,7 @@
                           <a:ea typeface="Yu Gothic"/>
                           <a:cs typeface="Yu Gothic"/>
                         </a:rPr>
-                        <a:t>足りないときだけ、AIが原則1つ聞き返す</a:t>
+                        <a:t>足りないときだけ、AIが原則1問聞き返す</a:t>
                       </a:r>
                     </a:p>
                   </a:txBody>
@@ -6309,7 +6309,7 @@
                   </a:tcPr>
                 </a:tc>
               </a:tr>
-              <a:tr h="1441252">
+              <a:tr h="1355527">
                 <a:tc>
                   <a:txBody>
                     <a:bodyPr wrap="square"/>
@@ -6487,7 +6487,7 @@
                   </a:tcPr>
                 </a:tc>
               </a:tr>
-              <a:tr h="1436043">
+              <a:tr h="1350615">
                 <a:tc>
                   <a:txBody>
                     <a:bodyPr wrap="square"/>
@@ -6671,7 +6671,7 @@
         </p:nvSpPr>
         <p:spPr>
           <a:xfrm>
-            <a:off x="9563100" y="2592884"/>
+            <a:off x="9563100" y="2549872"/>
             <a:ext cx="228600" cy="228600"/>
           </a:xfrm>
           <a:prstGeom prst="rect">
@@ -6698,7 +6698,7 @@
         </p:nvSpPr>
         <p:spPr>
           <a:xfrm>
-            <a:off x="9563100" y="4034582"/>
+            <a:off x="9563100" y="3905696"/>
             <a:ext cx="228600" cy="228600"/>
           </a:xfrm>
           <a:prstGeom prst="rect">
@@ -6725,7 +6725,7 @@
         </p:nvSpPr>
         <p:spPr>
           <a:xfrm>
-            <a:off x="9563100" y="5475536"/>
+            <a:off x="9563100" y="5261074"/>
             <a:ext cx="228600" cy="228600"/>
           </a:xfrm>
           <a:prstGeom prst="rect">
@@ -6870,7 +6870,7 @@
         </p:nvSpPr>
         <p:spPr>
           <a:xfrm>
-            <a:off x="3164681" y="2112764"/>
+            <a:off x="3164681" y="2048470"/>
             <a:ext cx="531686" cy="180975"/>
           </a:xfrm>
           <a:prstGeom prst="rect">
@@ -6917,7 +6917,7 @@
         </p:nvSpPr>
         <p:spPr>
           <a:xfrm>
-            <a:off x="1057275" y="2484239"/>
+            <a:off x="1057275" y="2419945"/>
             <a:ext cx="2545080" cy="481012"/>
           </a:xfrm>
           <a:prstGeom prst="rect">
@@ -6988,7 +6988,7 @@
         </p:nvSpPr>
         <p:spPr>
           <a:xfrm>
-            <a:off x="609600" y="3167955"/>
+            <a:off x="609600" y="3039368"/>
             <a:ext cx="251686" cy="180975"/>
           </a:xfrm>
           <a:prstGeom prst="rect">
@@ -7035,7 +7035,7 @@
         </p:nvSpPr>
         <p:spPr>
           <a:xfrm>
-            <a:off x="781050" y="3539430"/>
+            <a:off x="781050" y="3410843"/>
             <a:ext cx="2135993" cy="481012"/>
           </a:xfrm>
           <a:prstGeom prst="rect">
@@ -7106,7 +7106,7 @@
         </p:nvSpPr>
         <p:spPr>
           <a:xfrm>
-            <a:off x="781050" y="4330005"/>
+            <a:off x="781050" y="4201418"/>
             <a:ext cx="2137231" cy="481012"/>
           </a:xfrm>
           <a:prstGeom prst="rect">
@@ -7177,7 +7177,7 @@
         </p:nvSpPr>
         <p:spPr>
           <a:xfrm>
-            <a:off x="695325" y="5289947"/>
+            <a:off x="695325" y="5097066"/>
             <a:ext cx="464975" cy="200025"/>
           </a:xfrm>
           <a:prstGeom prst="rect">
@@ -7224,7 +7224,7 @@
         </p:nvSpPr>
         <p:spPr>
           <a:xfrm>
-            <a:off x="695325" y="5556647"/>
+            <a:off x="695325" y="5363766"/>
             <a:ext cx="613565" cy="161925"/>
           </a:xfrm>
           <a:prstGeom prst="rect">
@@ -7271,7 +7271,7 @@
         </p:nvSpPr>
         <p:spPr>
           <a:xfrm>
-            <a:off x="694944" y="5878562"/>
+            <a:off x="694944" y="5685681"/>
             <a:ext cx="781812" cy="152400"/>
           </a:xfrm>
           <a:prstGeom prst="rect">
@@ -7318,7 +7318,7 @@
         </p:nvSpPr>
         <p:spPr>
           <a:xfrm>
-            <a:off x="1743075" y="5289947"/>
+            <a:off x="1743075" y="5097066"/>
             <a:ext cx="316385" cy="200025"/>
           </a:xfrm>
           <a:prstGeom prst="rect">
@@ -7365,7 +7365,7 @@
         </p:nvSpPr>
         <p:spPr>
           <a:xfrm>
-            <a:off x="1743075" y="5556647"/>
+            <a:off x="1743075" y="5363766"/>
             <a:ext cx="613565" cy="161925"/>
           </a:xfrm>
           <a:prstGeom prst="rect">
@@ -7412,7 +7412,7 @@
         </p:nvSpPr>
         <p:spPr>
           <a:xfrm>
-            <a:off x="1742694" y="5878562"/>
+            <a:off x="1742694" y="5685681"/>
             <a:ext cx="781812" cy="152400"/>
           </a:xfrm>
           <a:prstGeom prst="rect">
@@ -7459,7 +7459,7 @@
         </p:nvSpPr>
         <p:spPr>
           <a:xfrm>
-            <a:off x="2790825" y="5289947"/>
+            <a:off x="2790825" y="5097066"/>
             <a:ext cx="316385" cy="200025"/>
           </a:xfrm>
           <a:prstGeom prst="rect">
@@ -7506,7 +7506,7 @@
         </p:nvSpPr>
         <p:spPr>
           <a:xfrm>
-            <a:off x="2790825" y="5556647"/>
+            <a:off x="2790825" y="5363766"/>
             <a:ext cx="613565" cy="161925"/>
           </a:xfrm>
           <a:prstGeom prst="rect">
@@ -7553,7 +7553,7 @@
         </p:nvSpPr>
         <p:spPr>
           <a:xfrm>
-            <a:off x="2790444" y="5878562"/>
+            <a:off x="2790444" y="5685681"/>
             <a:ext cx="781812" cy="152400"/>
           </a:xfrm>
           <a:prstGeom prst="rect">
@@ -7600,7 +7600,7 @@
         </p:nvSpPr>
         <p:spPr>
           <a:xfrm>
-            <a:off x="9886950" y="2476798"/>
+            <a:off x="9886950" y="2433786"/>
             <a:ext cx="811685" cy="228600"/>
           </a:xfrm>
           <a:prstGeom prst="rect">
@@ -7647,7 +7647,7 @@
         </p:nvSpPr>
         <p:spPr>
           <a:xfrm>
-            <a:off x="9886950" y="2697659"/>
+            <a:off x="9886950" y="2654647"/>
             <a:ext cx="905173" cy="228600"/>
           </a:xfrm>
           <a:prstGeom prst="rect">
@@ -7694,7 +7694,7 @@
         </p:nvSpPr>
         <p:spPr>
           <a:xfrm>
-            <a:off x="9636770" y="2611934"/>
+            <a:off x="9636770" y="2568922"/>
             <a:ext cx="103561" cy="190500"/>
           </a:xfrm>
           <a:prstGeom prst="rect">
@@ -7741,7 +7741,7 @@
         </p:nvSpPr>
         <p:spPr>
           <a:xfrm>
-            <a:off x="9886950" y="3918496"/>
+            <a:off x="9886950" y="3789611"/>
             <a:ext cx="965383" cy="228600"/>
           </a:xfrm>
           <a:prstGeom prst="rect">
@@ -7788,7 +7788,7 @@
         </p:nvSpPr>
         <p:spPr>
           <a:xfrm>
-            <a:off x="9886950" y="4139357"/>
+            <a:off x="9886950" y="4010471"/>
             <a:ext cx="970181" cy="228600"/>
           </a:xfrm>
           <a:prstGeom prst="rect">
@@ -7835,7 +7835,7 @@
         </p:nvSpPr>
         <p:spPr>
           <a:xfrm>
-            <a:off x="9636770" y="4053632"/>
+            <a:off x="9636770" y="3924746"/>
             <a:ext cx="103561" cy="190500"/>
           </a:xfrm>
           <a:prstGeom prst="rect">
@@ -7882,7 +7882,7 @@
         </p:nvSpPr>
         <p:spPr>
           <a:xfrm>
-            <a:off x="9886950" y="5359450"/>
+            <a:off x="9886950" y="5144988"/>
             <a:ext cx="970181" cy="228600"/>
           </a:xfrm>
           <a:prstGeom prst="rect">
@@ -7929,7 +7929,7 @@
         </p:nvSpPr>
         <p:spPr>
           <a:xfrm>
-            <a:off x="9886950" y="5580311"/>
+            <a:off x="9886950" y="5365849"/>
             <a:ext cx="808434" cy="228600"/>
           </a:xfrm>
           <a:prstGeom prst="rect">
@@ -7976,7 +7976,7 @@
         </p:nvSpPr>
         <p:spPr>
           <a:xfrm>
-            <a:off x="9636770" y="5494586"/>
+            <a:off x="9636770" y="5280124"/>
             <a:ext cx="103561" cy="190500"/>
           </a:xfrm>
           <a:prstGeom prst="rect">
@@ -8023,8 +8023,8 @@
         </p:nvSpPr>
         <p:spPr>
           <a:xfrm>
-            <a:off x="609600" y="6481762"/>
-            <a:ext cx="295335" cy="200025"/>
+            <a:off x="609600" y="6143625"/>
+            <a:ext cx="3342049" cy="161925"/>
           </a:xfrm>
           <a:prstGeom prst="rect">
             <a:avLst/>
@@ -8039,6 +8039,64 @@
           <a:p>
             <a:pPr algn="l">
               <a:lnSpc>
+                <a:spcPts val="1350"/>
+              </a:lnSpc>
+              <a:spcBef>
+                <a:spcPts val="0"/>
+              </a:spcBef>
+              <a:spcAft>
+                <a:spcPts val="0"/>
+              </a:spcAft>
+            </a:pPr>
+            <a:r>
+              <a:rPr sz="900" b="0" i="0">
+                <a:solidFill>
+                  <a:srgbClr val="9A9993"/>
+                </a:solidFill>
+                <a:latin typeface="Yu Gothic"/>
+                <a:ea typeface="Yu Gothic"/>
+                <a:cs typeface="Yu Gothic"/>
+              </a:rPr>
+              <a:t>店舗データ：Powered by </a:t>
+            </a:r>
+            <a:r>
+              <a:rPr sz="900" b="0" i="0" u="sng">
+                <a:solidFill>
+                  <a:srgbClr val="9A9993"/>
+                </a:solidFill>
+                <a:latin typeface="Yu Gothic"/>
+                <a:ea typeface="Yu Gothic"/>
+                <a:cs typeface="Yu Gothic"/>
+              </a:rPr>
+              <a:t>ホットペッパーグルメ Webサービス</a:t>
+            </a:r>
+          </a:p>
+        </p:txBody>
+      </p:sp>
+      <p:sp>
+        <p:nvSpPr>
+          <p:cNvPr id="47" name="TextBox 46"/>
+          <p:cNvSpPr txBox="1"/>
+          <p:nvPr/>
+        </p:nvSpPr>
+        <p:spPr>
+          <a:xfrm>
+            <a:off x="609600" y="6481762"/>
+            <a:ext cx="295335" cy="200025"/>
+          </a:xfrm>
+          <a:prstGeom prst="rect">
+            <a:avLst/>
+          </a:prstGeom>
+          <a:noFill/>
+        </p:spPr>
+        <p:txBody>
+          <a:bodyPr wrap="none" lIns="0" rIns="0" tIns="0" bIns="0" anchor="t">
+            <a:noAutofit/>
+          </a:bodyPr>
+          <a:lstStyle/>
+          <a:p>
+            <a:pPr algn="l">
+              <a:lnSpc>
                 <a:spcPts val="1687"/>
               </a:lnSpc>
               <a:spcBef>
@@ -8064,7 +8122,7 @@
       </p:sp>
       <p:sp>
         <p:nvSpPr>
-          <p:cNvPr id="47" name="TextBox 46"/>
+          <p:cNvPr id="48" name="TextBox 47"/>
           <p:cNvSpPr txBox="1"/>
           <p:nvPr/>
         </p:nvSpPr>
@@ -9035,7 +9093,7 @@
                 <a:ea typeface="Yu Gothic"/>
                 <a:cs typeface="Yu Gothic"/>
               </a:rPr>
-              <a:t>候補を受け取る</a:t>
+              <a:t>候補を絞り込む</a:t>
             </a:r>
           </a:p>
         </p:txBody>
@@ -9190,7 +9248,7 @@
         <p:spPr>
           <a:xfrm>
             <a:off x="1885950" y="2595414"/>
-            <a:ext cx="2238149" cy="228600"/>
+            <a:ext cx="653189" cy="228600"/>
           </a:xfrm>
           <a:prstGeom prst="rect">
             <a:avLst/>
@@ -9223,7 +9281,7 @@
                 <a:ea typeface="Yu Gothic"/>
                 <a:cs typeface="Yu Gothic"/>
               </a:rPr>
-              <a:t>起動のたびに出るスプラッシュ</a:t>
+              <a:t>起動画面</a:t>
             </a:r>
           </a:p>
         </p:txBody>
@@ -9270,7 +9328,7 @@
                 <a:ea typeface="Yu Gothic"/>
                 <a:cs typeface="Yu Gothic"/>
               </a:rPr>
-              <a:t>チャット、または5問の質問</a:t>
+              <a:t>チャット、または5つの質問</a:t>
             </a:r>
           </a:p>
         </p:txBody>
@@ -9813,7 +9871,7 @@
                 <a:ea typeface="Yu Gothic"/>
                 <a:cs typeface="Yu Gothic"/>
               </a:rPr>
-              <a:t>入口を毎回尋ね、</a:t>
+              <a:t>案内役の犬 maru が</a:t>
             </a:r>
           </a:p>
           <a:p>
@@ -9837,7 +9895,7 @@
                 <a:ea typeface="Yu Gothic"/>
                 <a:cs typeface="Yu Gothic"/>
               </a:rPr>
-              <a:t>選んだ入口は記憶しない</a:t>
+              <a:t>起動のたびに入口を尋ねる</a:t>
             </a:r>
           </a:p>
         </p:txBody>
@@ -9979,7 +10037,7 @@
                 <a:ea typeface="Yu Gothic"/>
                 <a:cs typeface="Yu Gothic"/>
               </a:rPr>
-              <a:t>1km圏から探し、主提案1件と</a:t>
+              <a:t>1km圏から3km圏まで広げて、</a:t>
             </a:r>
           </a:p>
           <a:p>
@@ -10003,7 +10061,7 @@
                 <a:ea typeface="Yu Gothic"/>
                 <a:cs typeface="Yu Gothic"/>
               </a:rPr>
-              <a:t>別案最大2件を返す</a:t>
+              <a:t>主提案1件と別案最大2件を返す</a:t>
             </a:r>
           </a:p>
         </p:txBody>
@@ -10074,7 +10132,7 @@
                 <a:ea typeface="Yu Gothic"/>
                 <a:cs typeface="Yu Gothic"/>
               </a:rPr>
-              <a:t>Google Maps や共有へつなぐ</a:t>
+              <a:t>Google Maps や共有へ進める</a:t>
             </a:r>
           </a:p>
         </p:txBody>
@@ -10461,7 +10519,7 @@
                 <a:ea typeface="Yu Gothic"/>
                 <a:cs typeface="Yu Gothic"/>
               </a:rPr>
-              <a:t>ima の主要画面は、入口の選択から</a:t>
+              <a:t>ima の主要画面は、起動画面での入口の選択から</a:t>
             </a:r>
           </a:p>
           <a:p>
@@ -10485,7 +10543,7 @@
                 <a:ea typeface="Yu Gothic"/>
                 <a:cs typeface="Yu Gothic"/>
               </a:rPr>
-              <a:t>店舗詳細での決定までを1本の会話でつなぐ</a:t>
+              <a:t>店舗詳細の「ここにする」までを順につなぐ</a:t>
             </a:r>
           </a:p>
         </p:txBody>
@@ -10499,7 +10557,7 @@
         <p:spPr>
           <a:xfrm>
             <a:off x="609600" y="1629073"/>
-            <a:ext cx="375666" cy="247650"/>
+            <a:ext cx="732282" cy="247650"/>
           </a:xfrm>
           <a:prstGeom prst="rect">
             <a:avLst/>
@@ -10532,7 +10590,7 @@
                 <a:ea typeface="Yu Gothic"/>
                 <a:cs typeface="Yu Gothic"/>
               </a:rPr>
-              <a:t>入口</a:t>
+              <a:t>起動画面</a:t>
             </a:r>
           </a:p>
         </p:txBody>
@@ -10579,7 +10637,7 @@
                 <a:ea typeface="Yu Gothic"/>
                 <a:cs typeface="Yu Gothic"/>
               </a:rPr>
-              <a:t>スプラッシュの</a:t>
+              <a:t>起動画面の</a:t>
             </a:r>
           </a:p>
           <a:p>
@@ -11089,7 +11147,19 @@
                 <a:ea typeface="Yu Gothic"/>
                 <a:cs typeface="Yu Gothic"/>
               </a:rPr>
-              <a:t>主提案と別案を同じ大きさのカードで並べる</a:t>
+              <a:t>主提案と別案を</a:t>
+            </a:r>
+            <a:br/>
+            <a:r>
+              <a:rPr sz="1100" b="0" i="0">
+                <a:solidFill>
+                  <a:srgbClr val="ECEBE6"/>
+                </a:solidFill>
+                <a:latin typeface="Yu Gothic"/>
+                <a:ea typeface="Yu Gothic"/>
+                <a:cs typeface="Yu Gothic"/>
+              </a:rPr>
+              <a:t>同じ大きさのカードで並べる</a:t>
             </a:r>
           </a:p>
         </p:txBody>
@@ -11245,7 +11315,7 @@
                 <a:ea typeface="Yu Gothic"/>
                 <a:cs typeface="Yu Gothic"/>
               </a:rPr>
-              <a:t>店舗詳細シートの</a:t>
+              <a:t>店舗詳細の</a:t>
             </a:r>
           </a:p>
           <a:p>
@@ -11319,7 +11389,19 @@
                 <a:ea typeface="Yu Gothic"/>
                 <a:cs typeface="Yu Gothic"/>
               </a:rPr>
-              <a:t>営業時間・定休日・アクセス・予算の掲載情報と出典を出す</a:t>
+              <a:t>営業時間・定休日・アクセス・</a:t>
+            </a:r>
+            <a:br/>
+            <a:r>
+              <a:rPr sz="1100" b="0" i="0">
+                <a:solidFill>
+                  <a:srgbClr val="ECEBE6"/>
+                </a:solidFill>
+                <a:latin typeface="Yu Gothic"/>
+                <a:ea typeface="Yu Gothic"/>
+                <a:cs typeface="Yu Gothic"/>
+              </a:rPr>
+              <a:t>予算を出典つきで表示する</a:t>
             </a:r>
           </a:p>
         </p:txBody>
@@ -11547,7 +11629,7 @@
         </p:nvSpPr>
         <p:spPr>
           <a:xfrm>
-            <a:off x="885825" y="2395686"/>
+            <a:off x="885825" y="2347168"/>
             <a:ext cx="2771775" cy="733425"/>
           </a:xfrm>
           <a:prstGeom prst="rect">
@@ -11574,7 +11656,7 @@
         </p:nvSpPr>
         <p:spPr>
           <a:xfrm>
-            <a:off x="3409950" y="3129111"/>
+            <a:off x="3409950" y="3080593"/>
             <a:ext cx="114300" cy="95250"/>
           </a:xfrm>
           <a:prstGeom prst="rect">
@@ -11601,7 +11683,7 @@
         </p:nvSpPr>
         <p:spPr>
           <a:xfrm>
-            <a:off x="3524250" y="3224361"/>
+            <a:off x="3524250" y="3175843"/>
             <a:ext cx="66675" cy="66675"/>
           </a:xfrm>
           <a:prstGeom prst="rect">
@@ -11628,7 +11710,7 @@
         </p:nvSpPr>
         <p:spPr>
           <a:xfrm>
-            <a:off x="609600" y="3486150"/>
+            <a:off x="609600" y="3389114"/>
             <a:ext cx="3048000" cy="733425"/>
           </a:xfrm>
           <a:prstGeom prst="rect">
@@ -11655,7 +11737,7 @@
         </p:nvSpPr>
         <p:spPr>
           <a:xfrm>
-            <a:off x="742950" y="4219575"/>
+            <a:off x="742950" y="4122539"/>
             <a:ext cx="114300" cy="95250"/>
           </a:xfrm>
           <a:prstGeom prst="rect">
@@ -11682,7 +11764,7 @@
         </p:nvSpPr>
         <p:spPr>
           <a:xfrm>
-            <a:off x="676275" y="4314825"/>
+            <a:off x="676275" y="4217789"/>
             <a:ext cx="66675" cy="66675"/>
           </a:xfrm>
           <a:prstGeom prst="rect">
@@ -11709,7 +11791,7 @@
         </p:nvSpPr>
         <p:spPr>
           <a:xfrm>
-            <a:off x="885825" y="4576614"/>
+            <a:off x="885825" y="4431060"/>
             <a:ext cx="2771775" cy="490538"/>
           </a:xfrm>
           <a:prstGeom prst="rect">
@@ -11736,7 +11818,7 @@
         </p:nvSpPr>
         <p:spPr>
           <a:xfrm>
-            <a:off x="3409950" y="5067151"/>
+            <a:off x="3409950" y="4921597"/>
             <a:ext cx="114300" cy="95250"/>
           </a:xfrm>
           <a:prstGeom prst="rect">
@@ -11763,7 +11845,7 @@
         </p:nvSpPr>
         <p:spPr>
           <a:xfrm>
-            <a:off x="3524250" y="5162401"/>
+            <a:off x="3524250" y="5016847"/>
             <a:ext cx="66675" cy="66675"/>
           </a:xfrm>
           <a:prstGeom prst="rect">
@@ -11790,8 +11872,8 @@
         </p:nvSpPr>
         <p:spPr>
           <a:xfrm>
-            <a:off x="609600" y="5424190"/>
-            <a:ext cx="3048000" cy="733425"/>
+            <a:off x="609600" y="5230118"/>
+            <a:ext cx="3048000" cy="976312"/>
           </a:xfrm>
           <a:prstGeom prst="rect">
             <a:avLst/>
@@ -11817,7 +11899,7 @@
         </p:nvSpPr>
         <p:spPr>
           <a:xfrm>
-            <a:off x="742950" y="6157615"/>
+            <a:off x="742950" y="6206430"/>
             <a:ext cx="114300" cy="95250"/>
           </a:xfrm>
           <a:prstGeom prst="rect">
@@ -11844,7 +11926,7 @@
         </p:nvSpPr>
         <p:spPr>
           <a:xfrm>
-            <a:off x="676275" y="6252865"/>
+            <a:off x="676275" y="6301680"/>
             <a:ext cx="66675" cy="66675"/>
           </a:xfrm>
           <a:prstGeom prst="rect">
@@ -12009,7 +12091,7 @@
                           <a:ea typeface="Yu Gothic"/>
                           <a:cs typeface="Yu Gothic"/>
                         </a:rPr>
-                        <a:t>場所が分からない</a:t>
+                        <a:t>場所の指定がない</a:t>
                       </a:r>
                       <a:endParaRPr sz="100"/>
                     </a:p>
@@ -12302,7 +12384,7 @@
                           <a:ea typeface="Yu Gothic"/>
                           <a:cs typeface="Yu Gothic"/>
                         </a:rPr>
-                        <a:t>頼まれた</a:t>
+                        <a:t>求められた</a:t>
                       </a:r>
                     </a:p>
                   </a:txBody>
@@ -12399,7 +12481,7 @@
                           <a:ea typeface="Yu Gothic"/>
                           <a:cs typeface="Yu Gothic"/>
                         </a:rPr>
-                        <a:t>候補が見つからない</a:t>
+                        <a:t>条件に合う店がない</a:t>
                       </a:r>
                       <a:endParaRPr sz="100"/>
                     </a:p>
@@ -12513,7 +12595,7 @@
                 <a:ea typeface="Yu Gothic"/>
                 <a:cs typeface="Yu Gothic"/>
               </a:rPr>
-              <a:t>ima の AI は、変わっていない希望を引き継ぎ、</a:t>
+              <a:t>ima の AI は、変わった点だけを反映して選び直し、</a:t>
             </a:r>
           </a:p>
           <a:p>
@@ -12537,7 +12619,7 @@
                 <a:ea typeface="Yu Gothic"/>
                 <a:cs typeface="Yu Gothic"/>
               </a:rPr>
-              <a:t>足りない情報だけを聞き返して提案し直す</a:t>
+              <a:t>足りない情報や見つからないことは言葉で伝える</a:t>
             </a:r>
           </a:p>
         </p:txBody>
@@ -12597,7 +12679,7 @@
         </p:nvSpPr>
         <p:spPr>
           <a:xfrm>
-            <a:off x="3164681" y="2148036"/>
+            <a:off x="3164681" y="2099518"/>
             <a:ext cx="531686" cy="180975"/>
           </a:xfrm>
           <a:prstGeom prst="rect">
@@ -12644,7 +12726,7 @@
         </p:nvSpPr>
         <p:spPr>
           <a:xfrm>
-            <a:off x="1057275" y="2519511"/>
+            <a:off x="1057275" y="2470993"/>
             <a:ext cx="2545080" cy="481012"/>
           </a:xfrm>
           <a:prstGeom prst="rect">
@@ -12715,7 +12797,7 @@
         </p:nvSpPr>
         <p:spPr>
           <a:xfrm>
-            <a:off x="609600" y="3238500"/>
+            <a:off x="609600" y="3141464"/>
             <a:ext cx="251686" cy="180975"/>
           </a:xfrm>
           <a:prstGeom prst="rect">
@@ -12762,7 +12844,7 @@
         </p:nvSpPr>
         <p:spPr>
           <a:xfrm>
-            <a:off x="781050" y="3609975"/>
+            <a:off x="781050" y="3512939"/>
             <a:ext cx="2832354" cy="481012"/>
           </a:xfrm>
           <a:prstGeom prst="rect">
@@ -12833,7 +12915,7 @@
         </p:nvSpPr>
         <p:spPr>
           <a:xfrm>
-            <a:off x="3164681" y="4328964"/>
+            <a:off x="3164681" y="4183410"/>
             <a:ext cx="531686" cy="180975"/>
           </a:xfrm>
           <a:prstGeom prst="rect">
@@ -12880,7 +12962,7 @@
         </p:nvSpPr>
         <p:spPr>
           <a:xfrm>
-            <a:off x="1057275" y="4700439"/>
+            <a:off x="1057275" y="4554885"/>
             <a:ext cx="2545080" cy="238125"/>
           </a:xfrm>
           <a:prstGeom prst="rect">
@@ -12927,7 +13009,7 @@
         </p:nvSpPr>
         <p:spPr>
           <a:xfrm>
-            <a:off x="609600" y="5176540"/>
+            <a:off x="609600" y="4982468"/>
             <a:ext cx="251686" cy="180975"/>
           </a:xfrm>
           <a:prstGeom prst="rect">
@@ -12974,8 +13056,8 @@
         </p:nvSpPr>
         <p:spPr>
           <a:xfrm>
-            <a:off x="781050" y="5548015"/>
-            <a:ext cx="2832354" cy="481012"/>
+            <a:off x="781050" y="5353943"/>
+            <a:ext cx="2832354" cy="723900"/>
           </a:xfrm>
           <a:prstGeom prst="rect">
             <a:avLst/>
@@ -13008,7 +13090,7 @@
                 <a:ea typeface="Yu Gothic"/>
                 <a:cs typeface="Yu Gothic"/>
               </a:rPr>
-              <a:t>和食・4,000円以内はそのままに、</a:t>
+              <a:t>和食の定食・4,000円以内は</a:t>
             </a:r>
           </a:p>
           <a:p>
@@ -13032,7 +13114,31 @@
                 <a:ea typeface="Yu Gothic"/>
                 <a:cs typeface="Yu Gothic"/>
               </a:rPr>
-              <a:t>個室のある店で選び直しました</a:t>
+              <a:t>そのままに、個室のある店で</a:t>
+            </a:r>
+          </a:p>
+          <a:p>
+            <a:pPr algn="l">
+              <a:lnSpc>
+                <a:spcPts val="1912"/>
+              </a:lnSpc>
+              <a:spcBef>
+                <a:spcPts val="0"/>
+              </a:spcBef>
+              <a:spcAft>
+                <a:spcPts val="0"/>
+              </a:spcAft>
+            </a:pPr>
+            <a:r>
+              <a:rPr sz="1300" b="0" i="0">
+                <a:solidFill>
+                  <a:srgbClr val="ECEBE6"/>
+                </a:solidFill>
+                <a:latin typeface="Yu Gothic"/>
+                <a:ea typeface="Yu Gothic"/>
+                <a:cs typeface="Yu Gothic"/>
+              </a:rPr>
+              <a:t>選び直しました</a:t>
             </a:r>
           </a:p>
         </p:txBody>
@@ -13714,7 +13820,7 @@
         <p:spPr>
           <a:xfrm>
             <a:off x="609600" y="1629073"/>
-            <a:ext cx="910590" cy="247650"/>
+            <a:ext cx="1623822" cy="247650"/>
           </a:xfrm>
           <a:prstGeom prst="rect">
             <a:avLst/>
@@ -13747,7 +13853,7 @@
                 <a:ea typeface="Yu Gothic"/>
                 <a:cs typeface="Yu Gothic"/>
               </a:rPr>
-              <a:t>入口と質問</a:t>
+              <a:t>起動画面と質問画面</a:t>
             </a:r>
           </a:p>
         </p:txBody>
@@ -13761,7 +13867,7 @@
         <p:spPr>
           <a:xfrm>
             <a:off x="609600" y="4096048"/>
-            <a:ext cx="1088898" cy="247650"/>
+            <a:ext cx="732282" cy="247650"/>
           </a:xfrm>
           <a:prstGeom prst="rect">
             <a:avLst/>
@@ -13794,7 +13900,7 @@
                 <a:ea typeface="Yu Gothic"/>
                 <a:cs typeface="Yu Gothic"/>
               </a:rPr>
-              <a:t>スプラッシュ</a:t>
+              <a:t>起動画面</a:t>
             </a:r>
           </a:p>
         </p:txBody>
@@ -14115,7 +14221,7 @@
         <p:spPr>
           <a:xfrm>
             <a:off x="5497264" y="1629073"/>
-            <a:ext cx="1267206" cy="247650"/>
+            <a:ext cx="732282" cy="247650"/>
           </a:xfrm>
           <a:prstGeom prst="rect">
             <a:avLst/>
@@ -14148,7 +14254,7 @@
                 <a:ea typeface="Yu Gothic"/>
                 <a:cs typeface="Yu Gothic"/>
               </a:rPr>
-              <a:t>会話画面の右下</a:t>
+              <a:t>会話画面</a:t>
             </a:r>
           </a:p>
         </p:txBody>
@@ -14407,7 +14513,7 @@
                 <a:ea typeface="Yu Gothic"/>
                 <a:cs typeface="Yu Gothic"/>
               </a:rPr>
-              <a:t>検索して0件の</a:t>
+              <a:t>検索結果が0件の</a:t>
             </a:r>
           </a:p>
           <a:p>

--- a/docs/pitch/ima-pitch.pptx
+++ b/docs/pitch/ima-pitch.pptx
@@ -12,6 +12,9 @@
     <p:sldId id="260" r:id="rId11"/>
     <p:sldId id="261" r:id="rId12"/>
     <p:sldId id="262" r:id="rId13"/>
+    <p:sldId id="263" r:id="rId14"/>
+    <p:sldId id="264" r:id="rId15"/>
+    <p:sldId id="265" r:id="rId16"/>
   </p:sldIdLst>
   <p:sldSz cx="12192000" cy="6858000" type="screen4x3"/>
   <p:notesSz cx="6858000" cy="9144000"/>
@@ -3440,6 +3443,1173 @@
                 <a:cs typeface="Yu Gothic"/>
               </a:rPr>
               <a:t>次に入るお店を絞り込める iPhone アプリ</a:t>
+            </a:r>
+          </a:p>
+        </p:txBody>
+      </p:sp>
+    </p:spTree>
+  </p:cSld>
+  <p:clrMapOvr>
+    <a:masterClrMapping/>
+  </p:clrMapOvr>
+</p:sld>
+</file>
+
+<file path=ppt/slides/slide10.xml><?xml version="1.0" encoding="utf-8"?>
+<p:sld xmlns:a="http://schemas.openxmlformats.org/drawingml/2006/main" xmlns:p="http://schemas.openxmlformats.org/presentationml/2006/main" xmlns:r="http://schemas.openxmlformats.org/officeDocument/2006/relationships">
+  <p:cSld>
+    <p:bg>
+      <p:bgPr>
+        <a:solidFill>
+          <a:srgbClr val="0C0C0D"/>
+        </a:solidFill>
+        <a:effectLst/>
+      </p:bgPr>
+    </p:bg>
+    <p:spTree>
+      <p:nvGrpSpPr>
+        <p:cNvPr id="1" name=""/>
+        <p:cNvGrpSpPr/>
+        <p:nvPr/>
+      </p:nvGrpSpPr>
+      <p:grpSpPr/>
+      <p:pic>
+        <p:nvPicPr>
+          <p:cNvPr id="2" name="Picture 1" descr="img_4_5.png"/>
+          <p:cNvPicPr>
+            <a:picLocks noChangeAspect="1"/>
+          </p:cNvPicPr>
+          <p:nvPr/>
+        </p:nvPicPr>
+        <p:blipFill>
+          <a:blip r:embed="rId2"/>
+          <a:stretch>
+            <a:fillRect/>
+          </a:stretch>
+        </p:blipFill>
+        <p:spPr>
+          <a:xfrm>
+            <a:off x="10648950" y="209550"/>
+            <a:ext cx="1123950" cy="1123950"/>
+          </a:xfrm>
+          <a:prstGeom prst="rect">
+            <a:avLst/>
+          </a:prstGeom>
+        </p:spPr>
+      </p:pic>
+      <p:cxnSp>
+        <p:nvCxnSpPr>
+          <p:cNvPr id="3" name="Connector 2"/>
+          <p:cNvCxnSpPr/>
+          <p:nvPr/>
+        </p:nvCxnSpPr>
+        <p:spPr>
+          <a:xfrm>
+            <a:off x="609600" y="1971973"/>
+            <a:ext cx="3441650" cy="0"/>
+          </a:xfrm>
+          <a:prstGeom prst="line">
+            <a:avLst/>
+          </a:prstGeom>
+          <a:ln w="19050">
+            <a:solidFill>
+              <a:srgbClr val="ECEBE6"/>
+            </a:solidFill>
+          </a:ln>
+        </p:spPr>
+      </p:cxnSp>
+      <p:cxnSp>
+        <p:nvCxnSpPr>
+          <p:cNvPr id="4" name="Connector 3"/>
+          <p:cNvCxnSpPr/>
+          <p:nvPr/>
+        </p:nvCxnSpPr>
+        <p:spPr>
+          <a:xfrm>
+            <a:off x="4375100" y="1971973"/>
+            <a:ext cx="3441651" cy="0"/>
+          </a:xfrm>
+          <a:prstGeom prst="line">
+            <a:avLst/>
+          </a:prstGeom>
+          <a:ln w="19050">
+            <a:solidFill>
+              <a:srgbClr val="ECEBE6"/>
+            </a:solidFill>
+          </a:ln>
+        </p:spPr>
+      </p:cxnSp>
+      <p:pic>
+        <p:nvPicPr>
+          <p:cNvPr id="5" name="Picture 4" descr="img_10_19.png"/>
+          <p:cNvPicPr>
+            <a:picLocks noChangeAspect="1"/>
+          </p:cNvPicPr>
+          <p:nvPr/>
+        </p:nvPicPr>
+        <p:blipFill>
+          <a:blip r:embed="rId3"/>
+          <a:stretch>
+            <a:fillRect/>
+          </a:stretch>
+        </p:blipFill>
+        <p:spPr>
+          <a:xfrm>
+            <a:off x="4375100" y="5248275"/>
+            <a:ext cx="800100" cy="800100"/>
+          </a:xfrm>
+          <a:prstGeom prst="rect">
+            <a:avLst/>
+          </a:prstGeom>
+        </p:spPr>
+      </p:pic>
+      <p:pic>
+        <p:nvPicPr>
+          <p:cNvPr id="6" name="Picture 5" descr="img_10_20.png"/>
+          <p:cNvPicPr>
+            <a:picLocks noChangeAspect="1"/>
+          </p:cNvPicPr>
+          <p:nvPr/>
+        </p:nvPicPr>
+        <p:blipFill>
+          <a:blip r:embed="rId4"/>
+          <a:stretch>
+            <a:fillRect/>
+          </a:stretch>
+        </p:blipFill>
+        <p:spPr>
+          <a:xfrm>
+            <a:off x="5213300" y="5248275"/>
+            <a:ext cx="800100" cy="800100"/>
+          </a:xfrm>
+          <a:prstGeom prst="rect">
+            <a:avLst/>
+          </a:prstGeom>
+        </p:spPr>
+      </p:pic>
+      <p:pic>
+        <p:nvPicPr>
+          <p:cNvPr id="7" name="Picture 6" descr="img_10_21.png"/>
+          <p:cNvPicPr>
+            <a:picLocks noChangeAspect="1"/>
+          </p:cNvPicPr>
+          <p:nvPr/>
+        </p:nvPicPr>
+        <p:blipFill>
+          <a:blip r:embed="rId5"/>
+          <a:stretch>
+            <a:fillRect/>
+          </a:stretch>
+        </p:blipFill>
+        <p:spPr>
+          <a:xfrm>
+            <a:off x="6051500" y="5248275"/>
+            <a:ext cx="800100" cy="800100"/>
+          </a:xfrm>
+          <a:prstGeom prst="rect">
+            <a:avLst/>
+          </a:prstGeom>
+        </p:spPr>
+      </p:pic>
+      <p:pic>
+        <p:nvPicPr>
+          <p:cNvPr id="8" name="Picture 7" descr="img_10_22.png"/>
+          <p:cNvPicPr>
+            <a:picLocks noChangeAspect="1"/>
+          </p:cNvPicPr>
+          <p:nvPr/>
+        </p:nvPicPr>
+        <p:blipFill>
+          <a:blip r:embed="rId6"/>
+          <a:stretch>
+            <a:fillRect/>
+          </a:stretch>
+        </p:blipFill>
+        <p:spPr>
+          <a:xfrm>
+            <a:off x="6889700" y="5248275"/>
+            <a:ext cx="800100" cy="800100"/>
+          </a:xfrm>
+          <a:prstGeom prst="rect">
+            <a:avLst/>
+          </a:prstGeom>
+        </p:spPr>
+      </p:pic>
+      <p:cxnSp>
+        <p:nvCxnSpPr>
+          <p:cNvPr id="9" name="Connector 8"/>
+          <p:cNvCxnSpPr/>
+          <p:nvPr/>
+        </p:nvCxnSpPr>
+        <p:spPr>
+          <a:xfrm>
+            <a:off x="8140601" y="1971973"/>
+            <a:ext cx="3441799" cy="0"/>
+          </a:xfrm>
+          <a:prstGeom prst="line">
+            <a:avLst/>
+          </a:prstGeom>
+          <a:ln w="19050">
+            <a:solidFill>
+              <a:srgbClr val="ECEBE6"/>
+            </a:solidFill>
+          </a:ln>
+        </p:spPr>
+      </p:cxnSp>
+      <p:sp>
+        <p:nvSpPr>
+          <p:cNvPr id="10" name="Title"/>
+          <p:cNvSpPr txBox="1"/>
+          <p:nvPr/>
+        </p:nvSpPr>
+        <p:spPr>
+          <a:xfrm>
+            <a:off x="609600" y="428625"/>
+            <a:ext cx="10024110" cy="847874"/>
+          </a:xfrm>
+          <a:prstGeom prst="rect">
+            <a:avLst/>
+          </a:prstGeom>
+          <a:noFill/>
+        </p:spPr>
+        <p:txBody>
+          <a:bodyPr wrap="none" lIns="0" rIns="0" tIns="0" bIns="0" anchor="t">
+            <a:noAutofit/>
+          </a:bodyPr>
+          <a:lstStyle/>
+          <a:p>
+            <a:pPr algn="l">
+              <a:lnSpc>
+                <a:spcPts val="3301"/>
+              </a:lnSpc>
+              <a:spcBef>
+                <a:spcPts val="0"/>
+              </a:spcBef>
+              <a:spcAft>
+                <a:spcPts val="0"/>
+              </a:spcAft>
+            </a:pPr>
+            <a:r>
+              <a:rPr sz="2300" b="1" i="0">
+                <a:solidFill>
+                  <a:srgbClr val="ECEBE6"/>
+                </a:solidFill>
+                <a:latin typeface="Yu Gothic"/>
+                <a:ea typeface="Yu Gothic"/>
+                <a:cs typeface="Yu Gothic"/>
+              </a:rPr>
+              <a:t>次は候補の見せ方と maru の会話を広げ、</a:t>
+            </a:r>
+          </a:p>
+          <a:p>
+            <a:pPr algn="l">
+              <a:lnSpc>
+                <a:spcPts val="3301"/>
+              </a:lnSpc>
+              <a:spcBef>
+                <a:spcPts val="0"/>
+              </a:spcBef>
+              <a:spcAft>
+                <a:spcPts val="0"/>
+              </a:spcAft>
+            </a:pPr>
+            <a:r>
+              <a:rPr sz="2300" b="1" i="0">
+                <a:solidFill>
+                  <a:srgbClr val="ECEBE6"/>
+                </a:solidFill>
+                <a:latin typeface="Yu Gothic"/>
+                <a:ea typeface="Yu Gothic"/>
+                <a:cs typeface="Yu Gothic"/>
+              </a:rPr>
+              <a:t>一軒めのあとの「二軒め」まで一緒に探せるようにする</a:t>
+            </a:r>
+          </a:p>
+        </p:txBody>
+      </p:sp>
+      <p:sp>
+        <p:nvSpPr>
+          <p:cNvPr id="11" name="TextBox 10"/>
+          <p:cNvSpPr txBox="1"/>
+          <p:nvPr/>
+        </p:nvSpPr>
+        <p:spPr>
+          <a:xfrm>
+            <a:off x="609600" y="1629073"/>
+            <a:ext cx="1980438" cy="247650"/>
+          </a:xfrm>
+          <a:prstGeom prst="rect">
+            <a:avLst/>
+          </a:prstGeom>
+          <a:noFill/>
+        </p:spPr>
+        <p:txBody>
+          <a:bodyPr wrap="none" lIns="0" rIns="0" tIns="0" bIns="0" anchor="t">
+            <a:noAutofit/>
+          </a:bodyPr>
+          <a:lstStyle/>
+          <a:p>
+            <a:pPr algn="l">
+              <a:lnSpc>
+                <a:spcPts val="2025"/>
+              </a:lnSpc>
+              <a:spcBef>
+                <a:spcPts val="0"/>
+              </a:spcBef>
+              <a:spcAft>
+                <a:spcPts val="0"/>
+              </a:spcAft>
+            </a:pPr>
+            <a:r>
+              <a:rPr sz="1350" b="1" i="0">
+                <a:solidFill>
+                  <a:srgbClr val="ECEBE6"/>
+                </a:solidFill>
+                <a:latin typeface="Yu Gothic"/>
+                <a:ea typeface="Yu Gothic"/>
+                <a:cs typeface="Yu Gothic"/>
+              </a:rPr>
+              <a:t>候補を見比べやすくする</a:t>
+            </a:r>
+          </a:p>
+        </p:txBody>
+      </p:sp>
+      <p:sp>
+        <p:nvSpPr>
+          <p:cNvPr id="12" name="TextBox 11"/>
+          <p:cNvSpPr txBox="1"/>
+          <p:nvPr/>
+        </p:nvSpPr>
+        <p:spPr>
+          <a:xfrm>
+            <a:off x="781050" y="2181523"/>
+            <a:ext cx="3338303" cy="497086"/>
+          </a:xfrm>
+          <a:prstGeom prst="rect">
+            <a:avLst/>
+          </a:prstGeom>
+          <a:noFill/>
+        </p:spPr>
+        <p:txBody>
+          <a:bodyPr wrap="square" lIns="0" rIns="0" tIns="0" bIns="0" anchor="t">
+            <a:noAutofit/>
+          </a:bodyPr>
+          <a:lstStyle/>
+          <a:p>
+            <a:pPr algn="l" marL="161925" indent="-161925">
+              <a:lnSpc>
+                <a:spcPts val="2039"/>
+              </a:lnSpc>
+              <a:spcBef>
+                <a:spcPts val="0"/>
+              </a:spcBef>
+              <a:spcAft>
+                <a:spcPts val="0"/>
+              </a:spcAft>
+              <a:buSzPct val="100000"/>
+              <a:buFont typeface="Yu Gothic"/>
+              <a:buChar char="•"/>
+            </a:pPr>
+            <a:r>
+              <a:rPr sz="1300" b="0" i="0">
+                <a:solidFill>
+                  <a:srgbClr val="ECEBE6"/>
+                </a:solidFill>
+                <a:latin typeface="Yu Gothic"/>
+                <a:ea typeface="Yu Gothic"/>
+                <a:cs typeface="Yu Gothic"/>
+              </a:rPr>
+              <a:t>候補カードを横スワイプの帯で</a:t>
+            </a:r>
+            <a:br/>
+            <a:r>
+              <a:rPr sz="1300" b="0" i="0">
+                <a:solidFill>
+                  <a:srgbClr val="ECEBE6"/>
+                </a:solidFill>
+                <a:latin typeface="Yu Gothic"/>
+                <a:ea typeface="Yu Gothic"/>
+                <a:cs typeface="Yu Gothic"/>
+              </a:rPr>
+              <a:t>1枚ずつ見せ、何枚目かを示す</a:t>
+            </a:r>
+          </a:p>
+        </p:txBody>
+      </p:sp>
+      <p:sp>
+        <p:nvSpPr>
+          <p:cNvPr id="13" name="TextBox 12"/>
+          <p:cNvSpPr txBox="1"/>
+          <p:nvPr/>
+        </p:nvSpPr>
+        <p:spPr>
+          <a:xfrm>
+            <a:off x="781050" y="2851845"/>
+            <a:ext cx="3338303" cy="497086"/>
+          </a:xfrm>
+          <a:prstGeom prst="rect">
+            <a:avLst/>
+          </a:prstGeom>
+          <a:noFill/>
+        </p:spPr>
+        <p:txBody>
+          <a:bodyPr wrap="square" lIns="0" rIns="0" tIns="0" bIns="0" anchor="t">
+            <a:noAutofit/>
+          </a:bodyPr>
+          <a:lstStyle/>
+          <a:p>
+            <a:pPr algn="l" marL="161925" indent="-161925">
+              <a:lnSpc>
+                <a:spcPts val="2039"/>
+              </a:lnSpc>
+              <a:spcBef>
+                <a:spcPts val="0"/>
+              </a:spcBef>
+              <a:spcAft>
+                <a:spcPts val="0"/>
+              </a:spcAft>
+              <a:buSzPct val="100000"/>
+              <a:buFont typeface="Yu Gothic"/>
+              <a:buChar char="•"/>
+            </a:pPr>
+            <a:r>
+              <a:rPr sz="1300" b="0" i="0">
+                <a:solidFill>
+                  <a:srgbClr val="ECEBE6"/>
+                </a:solidFill>
+                <a:latin typeface="Yu Gothic"/>
+                <a:ea typeface="Yu Gothic"/>
+                <a:cs typeface="Yu Gothic"/>
+              </a:rPr>
+              <a:t>カードを出した回答の説明文を、</a:t>
+            </a:r>
+            <a:br/>
+            <a:r>
+              <a:rPr sz="1300" b="0" i="0">
+                <a:solidFill>
+                  <a:srgbClr val="ECEBE6"/>
+                </a:solidFill>
+                <a:latin typeface="Yu Gothic"/>
+                <a:ea typeface="Yu Gothic"/>
+                <a:cs typeface="Yu Gothic"/>
+              </a:rPr>
+              <a:t>帯の下に畳む</a:t>
+            </a:r>
+          </a:p>
+        </p:txBody>
+      </p:sp>
+      <p:sp>
+        <p:nvSpPr>
+          <p:cNvPr id="14" name="TextBox 13"/>
+          <p:cNvSpPr txBox="1"/>
+          <p:nvPr/>
+        </p:nvSpPr>
+        <p:spPr>
+          <a:xfrm>
+            <a:off x="781050" y="3522166"/>
+            <a:ext cx="3338303" cy="497086"/>
+          </a:xfrm>
+          <a:prstGeom prst="rect">
+            <a:avLst/>
+          </a:prstGeom>
+          <a:noFill/>
+        </p:spPr>
+        <p:txBody>
+          <a:bodyPr wrap="square" lIns="0" rIns="0" tIns="0" bIns="0" anchor="t">
+            <a:noAutofit/>
+          </a:bodyPr>
+          <a:lstStyle/>
+          <a:p>
+            <a:pPr algn="l" marL="161925" indent="-161925">
+              <a:lnSpc>
+                <a:spcPts val="2039"/>
+              </a:lnSpc>
+              <a:spcBef>
+                <a:spcPts val="0"/>
+              </a:spcBef>
+              <a:spcAft>
+                <a:spcPts val="0"/>
+              </a:spcAft>
+              <a:buSzPct val="100000"/>
+              <a:buFont typeface="Yu Gothic"/>
+              <a:buChar char="•"/>
+            </a:pPr>
+            <a:r>
+              <a:rPr sz="1300" b="0" i="0">
+                <a:solidFill>
+                  <a:srgbClr val="ECEBE6"/>
+                </a:solidFill>
+                <a:latin typeface="Yu Gothic"/>
+                <a:ea typeface="Yu Gothic"/>
+                <a:cs typeface="Yu Gothic"/>
+              </a:rPr>
+              <a:t>店舗詳細シートを</a:t>
+            </a:r>
+            <a:br/>
+            <a:r>
+              <a:rPr sz="1300" b="0" i="0">
+                <a:solidFill>
+                  <a:srgbClr val="ECEBE6"/>
+                </a:solidFill>
+                <a:latin typeface="Yu Gothic"/>
+                <a:ea typeface="Yu Gothic"/>
+                <a:cs typeface="Yu Gothic"/>
+              </a:rPr>
+              <a:t>新しいカードのデザインにそろえる</a:t>
+            </a:r>
+          </a:p>
+        </p:txBody>
+      </p:sp>
+      <p:sp>
+        <p:nvSpPr>
+          <p:cNvPr id="15" name="TextBox 14"/>
+          <p:cNvSpPr txBox="1"/>
+          <p:nvPr/>
+        </p:nvSpPr>
+        <p:spPr>
+          <a:xfrm>
+            <a:off x="4375100" y="1629073"/>
+            <a:ext cx="1954899" cy="247650"/>
+          </a:xfrm>
+          <a:prstGeom prst="rect">
+            <a:avLst/>
+          </a:prstGeom>
+          <a:noFill/>
+        </p:spPr>
+        <p:txBody>
+          <a:bodyPr wrap="none" lIns="0" rIns="0" tIns="0" bIns="0" anchor="t">
+            <a:noAutofit/>
+          </a:bodyPr>
+          <a:lstStyle/>
+          <a:p>
+            <a:pPr algn="l">
+              <a:lnSpc>
+                <a:spcPts val="2025"/>
+              </a:lnSpc>
+              <a:spcBef>
+                <a:spcPts val="0"/>
+              </a:spcBef>
+              <a:spcAft>
+                <a:spcPts val="0"/>
+              </a:spcAft>
+            </a:pPr>
+            <a:r>
+              <a:rPr sz="1350" b="1" i="0">
+                <a:solidFill>
+                  <a:srgbClr val="ECEBE6"/>
+                </a:solidFill>
+                <a:latin typeface="Yu Gothic"/>
+                <a:ea typeface="Yu Gothic"/>
+                <a:cs typeface="Yu Gothic"/>
+              </a:rPr>
+              <a:t>maru と話しながら選ぶ</a:t>
+            </a:r>
+          </a:p>
+        </p:txBody>
+      </p:sp>
+      <p:sp>
+        <p:nvSpPr>
+          <p:cNvPr id="16" name="TextBox 15"/>
+          <p:cNvSpPr txBox="1"/>
+          <p:nvPr/>
+        </p:nvSpPr>
+        <p:spPr>
+          <a:xfrm>
+            <a:off x="4546550" y="2181523"/>
+            <a:ext cx="3338303" cy="497086"/>
+          </a:xfrm>
+          <a:prstGeom prst="rect">
+            <a:avLst/>
+          </a:prstGeom>
+          <a:noFill/>
+        </p:spPr>
+        <p:txBody>
+          <a:bodyPr wrap="square" lIns="0" rIns="0" tIns="0" bIns="0" anchor="t">
+            <a:noAutofit/>
+          </a:bodyPr>
+          <a:lstStyle/>
+          <a:p>
+            <a:pPr algn="l" marL="161925" indent="-161925">
+              <a:lnSpc>
+                <a:spcPts val="2039"/>
+              </a:lnSpc>
+              <a:spcBef>
+                <a:spcPts val="0"/>
+              </a:spcBef>
+              <a:spcAft>
+                <a:spcPts val="0"/>
+              </a:spcAft>
+              <a:buSzPct val="100000"/>
+              <a:buFont typeface="Yu Gothic"/>
+              <a:buChar char="•"/>
+            </a:pPr>
+            <a:r>
+              <a:rPr sz="1300" b="0" i="0">
+                <a:solidFill>
+                  <a:srgbClr val="ECEBE6"/>
+                </a:solidFill>
+                <a:latin typeface="Yu Gothic"/>
+                <a:ea typeface="Yu Gothic"/>
+                <a:cs typeface="Yu Gothic"/>
+              </a:rPr>
+              <a:t>いま見ている候補の選定理由を、</a:t>
+            </a:r>
+            <a:br/>
+            <a:r>
+              <a:rPr sz="1300" b="0" i="0">
+                <a:solidFill>
+                  <a:srgbClr val="ECEBE6"/>
+                </a:solidFill>
+                <a:latin typeface="Yu Gothic"/>
+                <a:ea typeface="Yu Gothic"/>
+                <a:cs typeface="Yu Gothic"/>
+              </a:rPr>
+              <a:t>maru が吹き出しで話す</a:t>
+            </a:r>
+          </a:p>
+        </p:txBody>
+      </p:sp>
+      <p:sp>
+        <p:nvSpPr>
+          <p:cNvPr id="17" name="TextBox 16"/>
+          <p:cNvSpPr txBox="1"/>
+          <p:nvPr/>
+        </p:nvSpPr>
+        <p:spPr>
+          <a:xfrm>
+            <a:off x="4546550" y="2851845"/>
+            <a:ext cx="3338303" cy="497086"/>
+          </a:xfrm>
+          <a:prstGeom prst="rect">
+            <a:avLst/>
+          </a:prstGeom>
+          <a:noFill/>
+        </p:spPr>
+        <p:txBody>
+          <a:bodyPr wrap="square" lIns="0" rIns="0" tIns="0" bIns="0" anchor="t">
+            <a:noAutofit/>
+          </a:bodyPr>
+          <a:lstStyle/>
+          <a:p>
+            <a:pPr algn="l" marL="161925" indent="-161925">
+              <a:lnSpc>
+                <a:spcPts val="2039"/>
+              </a:lnSpc>
+              <a:spcBef>
+                <a:spcPts val="0"/>
+              </a:spcBef>
+              <a:spcAft>
+                <a:spcPts val="0"/>
+              </a:spcAft>
+              <a:buSzPct val="100000"/>
+              <a:buFont typeface="Yu Gothic"/>
+              <a:buChar char="•"/>
+            </a:pPr>
+            <a:r>
+              <a:rPr sz="1300" b="0" i="0">
+                <a:solidFill>
+                  <a:srgbClr val="ECEBE6"/>
+                </a:solidFill>
+                <a:latin typeface="Yu Gothic"/>
+                <a:ea typeface="Yu Gothic"/>
+                <a:cs typeface="Yu Gothic"/>
+              </a:rPr>
+              <a:t>結果が出たとき、maru が</a:t>
+            </a:r>
+            <a:br/>
+            <a:r>
+              <a:rPr sz="1300" b="0" i="0">
+                <a:solidFill>
+                  <a:srgbClr val="ECEBE6"/>
+                </a:solidFill>
+                <a:latin typeface="Yu Gothic"/>
+                <a:ea typeface="Yu Gothic"/>
+                <a:cs typeface="Yu Gothic"/>
+              </a:rPr>
+              <a:t>お店の雰囲気をひとことで伝える</a:t>
+            </a:r>
+          </a:p>
+        </p:txBody>
+      </p:sp>
+      <p:sp>
+        <p:nvSpPr>
+          <p:cNvPr id="18" name="TextBox 17"/>
+          <p:cNvSpPr txBox="1"/>
+          <p:nvPr/>
+        </p:nvSpPr>
+        <p:spPr>
+          <a:xfrm>
+            <a:off x="4546550" y="3522166"/>
+            <a:ext cx="3338303" cy="497086"/>
+          </a:xfrm>
+          <a:prstGeom prst="rect">
+            <a:avLst/>
+          </a:prstGeom>
+          <a:noFill/>
+        </p:spPr>
+        <p:txBody>
+          <a:bodyPr wrap="square" lIns="0" rIns="0" tIns="0" bIns="0" anchor="t">
+            <a:noAutofit/>
+          </a:bodyPr>
+          <a:lstStyle/>
+          <a:p>
+            <a:pPr algn="l" marL="161925" indent="-161925">
+              <a:lnSpc>
+                <a:spcPts val="2039"/>
+              </a:lnSpc>
+              <a:spcBef>
+                <a:spcPts val="0"/>
+              </a:spcBef>
+              <a:spcAft>
+                <a:spcPts val="0"/>
+              </a:spcAft>
+              <a:buSzPct val="100000"/>
+              <a:buFont typeface="Yu Gothic"/>
+              <a:buChar char="•"/>
+            </a:pPr>
+            <a:r>
+              <a:rPr sz="1300" b="0" i="0">
+                <a:solidFill>
+                  <a:srgbClr val="ECEBE6"/>
+                </a:solidFill>
+                <a:latin typeface="Yu Gothic"/>
+                <a:ea typeface="Yu Gothic"/>
+                <a:cs typeface="Yu Gothic"/>
+              </a:rPr>
+              <a:t>一緒に探すキャラクターを</a:t>
+            </a:r>
+            <a:br/>
+            <a:r>
+              <a:rPr sz="1300" b="0" i="0">
+                <a:solidFill>
+                  <a:srgbClr val="ECEBE6"/>
+                </a:solidFill>
+                <a:latin typeface="Yu Gothic"/>
+                <a:ea typeface="Yu Gothic"/>
+                <a:cs typeface="Yu Gothic"/>
+              </a:rPr>
+              <a:t>5体から選べるようにする</a:t>
+            </a:r>
+          </a:p>
+        </p:txBody>
+      </p:sp>
+      <p:sp>
+        <p:nvSpPr>
+          <p:cNvPr id="19" name="TextBox 18"/>
+          <p:cNvSpPr txBox="1"/>
+          <p:nvPr/>
+        </p:nvSpPr>
+        <p:spPr>
+          <a:xfrm>
+            <a:off x="4375100" y="5029200"/>
+            <a:ext cx="2113395" cy="180975"/>
+          </a:xfrm>
+          <a:prstGeom prst="rect">
+            <a:avLst/>
+          </a:prstGeom>
+          <a:noFill/>
+        </p:spPr>
+        <p:txBody>
+          <a:bodyPr wrap="none" lIns="0" rIns="0" tIns="0" bIns="0" anchor="t">
+            <a:noAutofit/>
+          </a:bodyPr>
+          <a:lstStyle/>
+          <a:p>
+            <a:pPr algn="l">
+              <a:lnSpc>
+                <a:spcPts val="1462"/>
+              </a:lnSpc>
+              <a:spcBef>
+                <a:spcPts val="0"/>
+              </a:spcBef>
+              <a:spcAft>
+                <a:spcPts val="0"/>
+              </a:spcAft>
+            </a:pPr>
+            <a:r>
+              <a:rPr sz="1000" b="0" i="0">
+                <a:solidFill>
+                  <a:srgbClr val="9A9993"/>
+                </a:solidFill>
+                <a:latin typeface="Yu Gothic"/>
+                <a:ea typeface="Yu Gothic"/>
+                <a:cs typeface="Yu Gothic"/>
+              </a:rPr>
+              <a:t>maru のほかに描き起こし済みの4体</a:t>
+            </a:r>
+          </a:p>
+        </p:txBody>
+      </p:sp>
+      <p:sp>
+        <p:nvSpPr>
+          <p:cNvPr id="20" name="TextBox 19"/>
+          <p:cNvSpPr txBox="1"/>
+          <p:nvPr/>
+        </p:nvSpPr>
+        <p:spPr>
+          <a:xfrm>
+            <a:off x="8140601" y="1629073"/>
+            <a:ext cx="1623822" cy="247650"/>
+          </a:xfrm>
+          <a:prstGeom prst="rect">
+            <a:avLst/>
+          </a:prstGeom>
+          <a:noFill/>
+        </p:spPr>
+        <p:txBody>
+          <a:bodyPr wrap="none" lIns="0" rIns="0" tIns="0" bIns="0" anchor="t">
+            <a:noAutofit/>
+          </a:bodyPr>
+          <a:lstStyle/>
+          <a:p>
+            <a:pPr algn="l">
+              <a:lnSpc>
+                <a:spcPts val="2025"/>
+              </a:lnSpc>
+              <a:spcBef>
+                <a:spcPts val="0"/>
+              </a:spcBef>
+              <a:spcAft>
+                <a:spcPts val="0"/>
+              </a:spcAft>
+            </a:pPr>
+            <a:r>
+              <a:rPr sz="1350" b="1" i="0">
+                <a:solidFill>
+                  <a:srgbClr val="ECEBE6"/>
+                </a:solidFill>
+                <a:latin typeface="Yu Gothic"/>
+                <a:ea typeface="Yu Gothic"/>
+                <a:cs typeface="Yu Gothic"/>
+              </a:rPr>
+              <a:t>次の一軒までつなぐ</a:t>
+            </a:r>
+          </a:p>
+        </p:txBody>
+      </p:sp>
+      <p:sp>
+        <p:nvSpPr>
+          <p:cNvPr id="21" name="TextBox 20"/>
+          <p:cNvSpPr txBox="1"/>
+          <p:nvPr/>
+        </p:nvSpPr>
+        <p:spPr>
+          <a:xfrm>
+            <a:off x="8312051" y="2181523"/>
+            <a:ext cx="3338454" cy="497086"/>
+          </a:xfrm>
+          <a:prstGeom prst="rect">
+            <a:avLst/>
+          </a:prstGeom>
+          <a:noFill/>
+        </p:spPr>
+        <p:txBody>
+          <a:bodyPr wrap="square" lIns="0" rIns="0" tIns="0" bIns="0" anchor="t">
+            <a:noAutofit/>
+          </a:bodyPr>
+          <a:lstStyle/>
+          <a:p>
+            <a:pPr algn="l" marL="161925" indent="-161925">
+              <a:lnSpc>
+                <a:spcPts val="2039"/>
+              </a:lnSpc>
+              <a:spcBef>
+                <a:spcPts val="0"/>
+              </a:spcBef>
+              <a:spcAft>
+                <a:spcPts val="0"/>
+              </a:spcAft>
+              <a:buSzPct val="100000"/>
+              <a:buFont typeface="Yu Gothic"/>
+              <a:buChar char="•"/>
+            </a:pPr>
+            <a:r>
+              <a:rPr sz="1300" b="0" i="0">
+                <a:solidFill>
+                  <a:srgbClr val="ECEBE6"/>
+                </a:solidFill>
+                <a:latin typeface="Yu Gothic"/>
+                <a:ea typeface="Yu Gothic"/>
+                <a:cs typeface="Yu Gothic"/>
+              </a:rPr>
+              <a:t>決定の演出と、「ただいま」から</a:t>
+            </a:r>
+            <a:br/>
+            <a:r>
+              <a:rPr sz="1300" b="0" i="0">
+                <a:solidFill>
+                  <a:srgbClr val="ECEBE6"/>
+                </a:solidFill>
+                <a:latin typeface="Yu Gothic"/>
+                <a:ea typeface="Yu Gothic"/>
+                <a:cs typeface="Yu Gothic"/>
+              </a:rPr>
+              <a:t>二軒めを探す流れを作る</a:t>
+            </a:r>
+          </a:p>
+        </p:txBody>
+      </p:sp>
+      <p:sp>
+        <p:nvSpPr>
+          <p:cNvPr id="22" name="TextBox 21"/>
+          <p:cNvSpPr txBox="1"/>
+          <p:nvPr/>
+        </p:nvSpPr>
+        <p:spPr>
+          <a:xfrm>
+            <a:off x="8312051" y="2851845"/>
+            <a:ext cx="3338454" cy="497086"/>
+          </a:xfrm>
+          <a:prstGeom prst="rect">
+            <a:avLst/>
+          </a:prstGeom>
+          <a:noFill/>
+        </p:spPr>
+        <p:txBody>
+          <a:bodyPr wrap="square" lIns="0" rIns="0" tIns="0" bIns="0" anchor="t">
+            <a:noAutofit/>
+          </a:bodyPr>
+          <a:lstStyle/>
+          <a:p>
+            <a:pPr algn="l" marL="161925" indent="-161925">
+              <a:lnSpc>
+                <a:spcPts val="2039"/>
+              </a:lnSpc>
+              <a:spcBef>
+                <a:spcPts val="0"/>
+              </a:spcBef>
+              <a:spcAft>
+                <a:spcPts val="0"/>
+              </a:spcAft>
+              <a:buSzPct val="100000"/>
+              <a:buFont typeface="Yu Gothic"/>
+              <a:buChar char="•"/>
+            </a:pPr>
+            <a:r>
+              <a:rPr sz="1300" b="0" i="0">
+                <a:solidFill>
+                  <a:srgbClr val="ECEBE6"/>
+                </a:solidFill>
+                <a:latin typeface="Yu Gothic"/>
+                <a:ea typeface="Yu Gothic"/>
+                <a:cs typeface="Yu Gothic"/>
+              </a:rPr>
+              <a:t>候補が0件のとき、範囲を広げて</a:t>
+            </a:r>
+            <a:br/>
+            <a:r>
+              <a:rPr sz="1300" b="0" i="0">
+                <a:solidFill>
+                  <a:srgbClr val="ECEBE6"/>
+                </a:solidFill>
+                <a:latin typeface="Yu Gothic"/>
+                <a:ea typeface="Yu Gothic"/>
+                <a:cs typeface="Yu Gothic"/>
+              </a:rPr>
+              <a:t>探し直すかを検討する</a:t>
+            </a:r>
+          </a:p>
+        </p:txBody>
+      </p:sp>
+      <p:sp>
+        <p:nvSpPr>
+          <p:cNvPr id="23" name="TextBox 22"/>
+          <p:cNvSpPr txBox="1"/>
+          <p:nvPr/>
+        </p:nvSpPr>
+        <p:spPr>
+          <a:xfrm>
+            <a:off x="8312051" y="3522166"/>
+            <a:ext cx="3338454" cy="497086"/>
+          </a:xfrm>
+          <a:prstGeom prst="rect">
+            <a:avLst/>
+          </a:prstGeom>
+          <a:noFill/>
+        </p:spPr>
+        <p:txBody>
+          <a:bodyPr wrap="square" lIns="0" rIns="0" tIns="0" bIns="0" anchor="t">
+            <a:noAutofit/>
+          </a:bodyPr>
+          <a:lstStyle/>
+          <a:p>
+            <a:pPr algn="l" marL="161925" indent="-161925">
+              <a:lnSpc>
+                <a:spcPts val="2039"/>
+              </a:lnSpc>
+              <a:spcBef>
+                <a:spcPts val="0"/>
+              </a:spcBef>
+              <a:spcAft>
+                <a:spcPts val="0"/>
+              </a:spcAft>
+              <a:buSzPct val="100000"/>
+              <a:buFont typeface="Yu Gothic"/>
+              <a:buChar char="•"/>
+            </a:pPr>
+            <a:r>
+              <a:rPr sz="1300" b="0" i="0">
+                <a:solidFill>
+                  <a:srgbClr val="ECEBE6"/>
+                </a:solidFill>
+                <a:latin typeface="Yu Gothic"/>
+                <a:ea typeface="Yu Gothic"/>
+                <a:cs typeface="Yu Gothic"/>
+              </a:rPr>
+              <a:t>位置情報の許可状態を表示し、</a:t>
+            </a:r>
+            <a:br/>
+            <a:r>
+              <a:rPr sz="1300" b="0" i="0">
+                <a:solidFill>
+                  <a:srgbClr val="ECEBE6"/>
+                </a:solidFill>
+                <a:latin typeface="Yu Gothic"/>
+                <a:ea typeface="Yu Gothic"/>
+                <a:cs typeface="Yu Gothic"/>
+              </a:rPr>
+              <a:t>拒否されたときは iOS の設定へ案内する</a:t>
+            </a:r>
+          </a:p>
+        </p:txBody>
+      </p:sp>
+      <p:sp>
+        <p:nvSpPr>
+          <p:cNvPr id="24" name="TextBox 23"/>
+          <p:cNvSpPr txBox="1"/>
+          <p:nvPr/>
+        </p:nvSpPr>
+        <p:spPr>
+          <a:xfrm>
+            <a:off x="609600" y="6143625"/>
+            <a:ext cx="4722233" cy="161925"/>
+          </a:xfrm>
+          <a:prstGeom prst="rect">
+            <a:avLst/>
+          </a:prstGeom>
+          <a:noFill/>
+        </p:spPr>
+        <p:txBody>
+          <a:bodyPr wrap="none" lIns="0" rIns="0" tIns="0" bIns="0" anchor="t">
+            <a:noAutofit/>
+          </a:bodyPr>
+          <a:lstStyle/>
+          <a:p>
+            <a:pPr algn="l">
+              <a:lnSpc>
+                <a:spcPts val="1350"/>
+              </a:lnSpc>
+              <a:spcBef>
+                <a:spcPts val="0"/>
+              </a:spcBef>
+              <a:spcAft>
+                <a:spcPts val="0"/>
+              </a:spcAft>
+            </a:pPr>
+            <a:r>
+              <a:rPr sz="900" b="0" i="0">
+                <a:solidFill>
+                  <a:srgbClr val="9A9993"/>
+                </a:solidFill>
+                <a:latin typeface="Yu Gothic"/>
+                <a:ea typeface="Yu Gothic"/>
+                <a:cs typeface="Yu Gothic"/>
+              </a:rPr>
+              <a:t>本資料は consulting-pptx-skill（github.com/carnot-tech/consulting-pptx-skill）で作成</a:t>
+            </a:r>
+          </a:p>
+        </p:txBody>
+      </p:sp>
+      <p:sp>
+        <p:nvSpPr>
+          <p:cNvPr id="25" name="TextBox 24"/>
+          <p:cNvSpPr txBox="1"/>
+          <p:nvPr/>
+        </p:nvSpPr>
+        <p:spPr>
+          <a:xfrm>
+            <a:off x="609600" y="6481762"/>
+            <a:ext cx="295335" cy="200025"/>
+          </a:xfrm>
+          <a:prstGeom prst="rect">
+            <a:avLst/>
+          </a:prstGeom>
+          <a:noFill/>
+        </p:spPr>
+        <p:txBody>
+          <a:bodyPr wrap="none" lIns="0" rIns="0" tIns="0" bIns="0" anchor="t">
+            <a:noAutofit/>
+          </a:bodyPr>
+          <a:lstStyle/>
+          <a:p>
+            <a:pPr algn="l">
+              <a:lnSpc>
+                <a:spcPts val="1687"/>
+              </a:lnSpc>
+              <a:spcBef>
+                <a:spcPts val="0"/>
+              </a:spcBef>
+              <a:spcAft>
+                <a:spcPts val="0"/>
+              </a:spcAft>
+            </a:pPr>
+            <a:r>
+              <a:rPr sz="1100" b="1" i="0">
+                <a:solidFill>
+                  <a:srgbClr val="9A9993"/>
+                </a:solidFill>
+                <a:latin typeface="Yu Gothic"/>
+                <a:ea typeface="Yu Gothic"/>
+                <a:cs typeface="Yu Gothic"/>
+              </a:rPr>
+              <a:t>ima</a:t>
+            </a:r>
+          </a:p>
+        </p:txBody>
+      </p:sp>
+      <p:sp>
+        <p:nvSpPr>
+          <p:cNvPr id="26" name="TextBox 25"/>
+          <p:cNvSpPr txBox="1"/>
+          <p:nvPr/>
+        </p:nvSpPr>
+        <p:spPr>
+          <a:xfrm>
+            <a:off x="11513641" y="6491288"/>
+            <a:ext cx="90559" cy="180975"/>
+          </a:xfrm>
+          <a:prstGeom prst="rect">
+            <a:avLst/>
+          </a:prstGeom>
+          <a:noFill/>
+        </p:spPr>
+        <p:txBody>
+          <a:bodyPr wrap="none" lIns="0" rIns="0" tIns="0" bIns="0" anchor="t">
+            <a:noAutofit/>
+          </a:bodyPr>
+          <a:lstStyle/>
+          <a:p>
+            <a:pPr algn="l">
+              <a:lnSpc>
+                <a:spcPts val="1462"/>
+              </a:lnSpc>
+              <a:spcBef>
+                <a:spcPts val="0"/>
+              </a:spcBef>
+              <a:spcAft>
+                <a:spcPts val="0"/>
+              </a:spcAft>
+            </a:pPr>
+            <a:r>
+              <a:rPr sz="1000" b="0" i="0">
+                <a:solidFill>
+                  <a:srgbClr val="9A9993"/>
+                </a:solidFill>
+                <a:latin typeface="Yu Gothic"/>
+                <a:ea typeface="Yu Gothic"/>
+                <a:cs typeface="Yu Gothic"/>
+              </a:rPr>
+              <a:t>9</a:t>
             </a:r>
           </a:p>
         </p:txBody>
@@ -14832,6 +16002,4367 @@
 </p:sld>
 </file>
 
+<file path=ppt/slides/slide8.xml><?xml version="1.0" encoding="utf-8"?>
+<p:sld xmlns:a="http://schemas.openxmlformats.org/drawingml/2006/main" xmlns:p="http://schemas.openxmlformats.org/presentationml/2006/main" xmlns:r="http://schemas.openxmlformats.org/officeDocument/2006/relationships">
+  <p:cSld>
+    <p:bg>
+      <p:bgPr>
+        <a:solidFill>
+          <a:srgbClr val="0C0C0D"/>
+        </a:solidFill>
+        <a:effectLst/>
+      </p:bgPr>
+    </p:bg>
+    <p:spTree>
+      <p:nvGrpSpPr>
+        <p:cNvPr id="1" name=""/>
+        <p:cNvGrpSpPr/>
+        <p:nvPr/>
+      </p:nvGrpSpPr>
+      <p:grpSpPr/>
+      <p:pic>
+        <p:nvPicPr>
+          <p:cNvPr id="2" name="Picture 1" descr="img_8_16.png"/>
+          <p:cNvPicPr>
+            <a:picLocks noChangeAspect="1"/>
+          </p:cNvPicPr>
+          <p:nvPr/>
+        </p:nvPicPr>
+        <p:blipFill>
+          <a:blip r:embed="rId2"/>
+          <a:stretch>
+            <a:fillRect/>
+          </a:stretch>
+        </p:blipFill>
+        <p:spPr>
+          <a:xfrm>
+            <a:off x="10648950" y="209550"/>
+            <a:ext cx="1123950" cy="1123950"/>
+          </a:xfrm>
+          <a:prstGeom prst="rect">
+            <a:avLst/>
+          </a:prstGeom>
+        </p:spPr>
+      </p:pic>
+      <p:cxnSp>
+        <p:nvCxnSpPr>
+          <p:cNvPr id="3" name="Connector 2"/>
+          <p:cNvCxnSpPr/>
+          <p:nvPr/>
+        </p:nvCxnSpPr>
+        <p:spPr>
+          <a:xfrm>
+            <a:off x="609600" y="1971973"/>
+            <a:ext cx="7696200" cy="0"/>
+          </a:xfrm>
+          <a:prstGeom prst="line">
+            <a:avLst/>
+          </a:prstGeom>
+          <a:ln w="19050">
+            <a:solidFill>
+              <a:srgbClr val="ECEBE6"/>
+            </a:solidFill>
+          </a:ln>
+        </p:spPr>
+      </p:cxnSp>
+      <p:sp>
+        <p:nvSpPr>
+          <p:cNvPr id="4" name="Rectangle 3"/>
+          <p:cNvSpPr/>
+          <p:nvPr/>
+        </p:nvSpPr>
+        <p:spPr>
+          <a:xfrm>
+            <a:off x="609600" y="2133898"/>
+            <a:ext cx="1905000" cy="4171652"/>
+          </a:xfrm>
+          <a:prstGeom prst="rect">
+            <a:avLst/>
+          </a:prstGeom>
+          <a:solidFill>
+            <a:srgbClr val="1C1C1E"/>
+          </a:solidFill>
+          <a:ln>
+            <a:noFill/>
+          </a:ln>
+        </p:spPr>
+        <p:txBody>
+          <a:bodyPr rtlCol="0" anchor="ctr"/>
+          <a:lstStyle/>
+          <a:p/>
+        </p:txBody>
+      </p:sp>
+      <p:cxnSp>
+        <p:nvCxnSpPr>
+          <p:cNvPr id="5" name="Connector 4"/>
+          <p:cNvCxnSpPr/>
+          <p:nvPr/>
+        </p:nvCxnSpPr>
+        <p:spPr>
+          <a:xfrm>
+            <a:off x="762000" y="3088184"/>
+            <a:ext cx="1600200" cy="0"/>
+          </a:xfrm>
+          <a:prstGeom prst="line">
+            <a:avLst/>
+          </a:prstGeom>
+          <a:ln w="9525">
+            <a:solidFill>
+              <a:srgbClr val="2A2A2E"/>
+            </a:solidFill>
+          </a:ln>
+        </p:spPr>
+      </p:cxnSp>
+      <p:cxnSp>
+        <p:nvCxnSpPr>
+          <p:cNvPr id="6" name="Connector 5"/>
+          <p:cNvCxnSpPr/>
+          <p:nvPr/>
+        </p:nvCxnSpPr>
+        <p:spPr>
+          <a:xfrm>
+            <a:off x="762000" y="3677245"/>
+            <a:ext cx="1600200" cy="0"/>
+          </a:xfrm>
+          <a:prstGeom prst="line">
+            <a:avLst/>
+          </a:prstGeom>
+          <a:ln w="9525">
+            <a:solidFill>
+              <a:srgbClr val="2A2A2E"/>
+            </a:solidFill>
+          </a:ln>
+        </p:spPr>
+      </p:cxnSp>
+      <p:cxnSp>
+        <p:nvCxnSpPr>
+          <p:cNvPr id="7" name="Connector 6"/>
+          <p:cNvCxnSpPr/>
+          <p:nvPr/>
+        </p:nvCxnSpPr>
+        <p:spPr>
+          <a:xfrm>
+            <a:off x="762000" y="4266307"/>
+            <a:ext cx="1600200" cy="0"/>
+          </a:xfrm>
+          <a:prstGeom prst="line">
+            <a:avLst/>
+          </a:prstGeom>
+          <a:ln w="9525">
+            <a:solidFill>
+              <a:srgbClr val="2A2A2E"/>
+            </a:solidFill>
+          </a:ln>
+        </p:spPr>
+      </p:cxnSp>
+      <p:cxnSp>
+        <p:nvCxnSpPr>
+          <p:cNvPr id="8" name="Connector 7"/>
+          <p:cNvCxnSpPr/>
+          <p:nvPr/>
+        </p:nvCxnSpPr>
+        <p:spPr>
+          <a:xfrm>
+            <a:off x="762000" y="4855369"/>
+            <a:ext cx="1600200" cy="0"/>
+          </a:xfrm>
+          <a:prstGeom prst="line">
+            <a:avLst/>
+          </a:prstGeom>
+          <a:ln w="9525">
+            <a:solidFill>
+              <a:srgbClr val="2A2A2E"/>
+            </a:solidFill>
+          </a:ln>
+        </p:spPr>
+      </p:cxnSp>
+      <p:sp>
+        <p:nvSpPr>
+          <p:cNvPr id="9" name="Rectangle 8"/>
+          <p:cNvSpPr/>
+          <p:nvPr/>
+        </p:nvSpPr>
+        <p:spPr>
+          <a:xfrm>
+            <a:off x="2590800" y="4025354"/>
+            <a:ext cx="381000" cy="19050"/>
+          </a:xfrm>
+          <a:prstGeom prst="rect">
+            <a:avLst/>
+          </a:prstGeom>
+          <a:solidFill>
+            <a:srgbClr val="9A9993"/>
+          </a:solidFill>
+          <a:ln>
+            <a:noFill/>
+          </a:ln>
+        </p:spPr>
+        <p:txBody>
+          <a:bodyPr rtlCol="0" anchor="ctr"/>
+          <a:lstStyle/>
+          <a:p/>
+        </p:txBody>
+      </p:sp>
+      <p:sp>
+        <p:nvSpPr>
+          <p:cNvPr id="10" name="Freeform 9"/>
+          <p:cNvSpPr/>
+          <p:nvPr/>
+        </p:nvSpPr>
+        <p:spPr>
+          <a:xfrm>
+            <a:off x="2971800" y="3968204"/>
+            <a:ext cx="95250" cy="133350"/>
+          </a:xfrm>
+          <a:custGeom>
+            <a:avLst/>
+            <a:gdLst/>
+            <a:ahLst/>
+            <a:cxnLst/>
+            <a:rect l="l" t="t" r="r" b="b"/>
+            <a:pathLst>
+              <a:path w="95250" h="133350">
+                <a:moveTo>
+                  <a:pt x="0" y="0"/>
+                </a:moveTo>
+                <a:lnTo>
+                  <a:pt x="0" y="133350"/>
+                </a:lnTo>
+                <a:lnTo>
+                  <a:pt x="95250" y="66675"/>
+                </a:lnTo>
+                <a:close/>
+              </a:path>
+            </a:pathLst>
+          </a:custGeom>
+          <a:solidFill>
+            <a:srgbClr val="9A9993"/>
+          </a:solidFill>
+          <a:ln>
+            <a:noFill/>
+          </a:ln>
+        </p:spPr>
+        <p:txBody>
+          <a:bodyPr rtlCol="0" anchor="ctr"/>
+          <a:lstStyle/>
+          <a:p/>
+        </p:txBody>
+      </p:sp>
+      <p:sp>
+        <p:nvSpPr>
+          <p:cNvPr id="11" name="Freeform 10"/>
+          <p:cNvSpPr/>
+          <p:nvPr/>
+        </p:nvSpPr>
+        <p:spPr>
+          <a:xfrm>
+            <a:off x="2590800" y="4177754"/>
+            <a:ext cx="95250" cy="133350"/>
+          </a:xfrm>
+          <a:custGeom>
+            <a:avLst/>
+            <a:gdLst/>
+            <a:ahLst/>
+            <a:cxnLst/>
+            <a:rect l="l" t="t" r="r" b="b"/>
+            <a:pathLst>
+              <a:path w="95250" h="133350">
+                <a:moveTo>
+                  <a:pt x="95250" y="0"/>
+                </a:moveTo>
+                <a:lnTo>
+                  <a:pt x="95250" y="133350"/>
+                </a:lnTo>
+                <a:lnTo>
+                  <a:pt x="0" y="66675"/>
+                </a:lnTo>
+                <a:close/>
+              </a:path>
+            </a:pathLst>
+          </a:custGeom>
+          <a:solidFill>
+            <a:srgbClr val="9A9993"/>
+          </a:solidFill>
+          <a:ln>
+            <a:noFill/>
+          </a:ln>
+        </p:spPr>
+        <p:txBody>
+          <a:bodyPr rtlCol="0" anchor="ctr"/>
+          <a:lstStyle/>
+          <a:p/>
+        </p:txBody>
+      </p:sp>
+      <p:sp>
+        <p:nvSpPr>
+          <p:cNvPr id="12" name="Rectangle 11"/>
+          <p:cNvSpPr/>
+          <p:nvPr/>
+        </p:nvSpPr>
+        <p:spPr>
+          <a:xfrm>
+            <a:off x="2686050" y="4234904"/>
+            <a:ext cx="381000" cy="19050"/>
+          </a:xfrm>
+          <a:prstGeom prst="rect">
+            <a:avLst/>
+          </a:prstGeom>
+          <a:solidFill>
+            <a:srgbClr val="9A9993"/>
+          </a:solidFill>
+          <a:ln>
+            <a:noFill/>
+          </a:ln>
+        </p:spPr>
+        <p:txBody>
+          <a:bodyPr rtlCol="0" anchor="ctr"/>
+          <a:lstStyle/>
+          <a:p/>
+        </p:txBody>
+      </p:sp>
+      <p:sp>
+        <p:nvSpPr>
+          <p:cNvPr id="13" name="Rectangle 12"/>
+          <p:cNvSpPr/>
+          <p:nvPr/>
+        </p:nvSpPr>
+        <p:spPr>
+          <a:xfrm>
+            <a:off x="3143250" y="2133898"/>
+            <a:ext cx="2762250" cy="4171652"/>
+          </a:xfrm>
+          <a:prstGeom prst="rect">
+            <a:avLst/>
+          </a:prstGeom>
+          <a:solidFill>
+            <a:srgbClr val="1C1C1E"/>
+          </a:solidFill>
+          <a:ln>
+            <a:noFill/>
+          </a:ln>
+        </p:spPr>
+        <p:txBody>
+          <a:bodyPr rtlCol="0" anchor="ctr"/>
+          <a:lstStyle/>
+          <a:p/>
+        </p:txBody>
+      </p:sp>
+      <p:sp>
+        <p:nvSpPr>
+          <p:cNvPr id="14" name="Rectangle 13"/>
+          <p:cNvSpPr/>
+          <p:nvPr/>
+        </p:nvSpPr>
+        <p:spPr>
+          <a:xfrm>
+            <a:off x="3295650" y="3083421"/>
+            <a:ext cx="2457450" cy="554236"/>
+          </a:xfrm>
+          <a:prstGeom prst="rect">
+            <a:avLst/>
+          </a:prstGeom>
+          <a:solidFill>
+            <a:srgbClr val="0C0C0D"/>
+          </a:solidFill>
+          <a:ln>
+            <a:noFill/>
+          </a:ln>
+        </p:spPr>
+        <p:txBody>
+          <a:bodyPr rtlCol="0" anchor="ctr"/>
+          <a:lstStyle/>
+          <a:p/>
+        </p:txBody>
+      </p:sp>
+      <p:sp>
+        <p:nvSpPr>
+          <p:cNvPr id="15" name="Rectangle 14"/>
+          <p:cNvSpPr/>
+          <p:nvPr/>
+        </p:nvSpPr>
+        <p:spPr>
+          <a:xfrm>
+            <a:off x="3295650" y="3713857"/>
+            <a:ext cx="2457450" cy="554236"/>
+          </a:xfrm>
+          <a:prstGeom prst="rect">
+            <a:avLst/>
+          </a:prstGeom>
+          <a:solidFill>
+            <a:srgbClr val="0C0C0D"/>
+          </a:solidFill>
+          <a:ln>
+            <a:noFill/>
+          </a:ln>
+        </p:spPr>
+        <p:txBody>
+          <a:bodyPr rtlCol="0" anchor="ctr"/>
+          <a:lstStyle/>
+          <a:p/>
+        </p:txBody>
+      </p:sp>
+      <p:sp>
+        <p:nvSpPr>
+          <p:cNvPr id="16" name="Rectangle 15"/>
+          <p:cNvSpPr/>
+          <p:nvPr/>
+        </p:nvSpPr>
+        <p:spPr>
+          <a:xfrm>
+            <a:off x="3295650" y="4344293"/>
+            <a:ext cx="2457450" cy="554236"/>
+          </a:xfrm>
+          <a:prstGeom prst="rect">
+            <a:avLst/>
+          </a:prstGeom>
+          <a:solidFill>
+            <a:srgbClr val="0C0C0D"/>
+          </a:solidFill>
+          <a:ln>
+            <a:noFill/>
+          </a:ln>
+        </p:spPr>
+        <p:txBody>
+          <a:bodyPr rtlCol="0" anchor="ctr"/>
+          <a:lstStyle/>
+          <a:p/>
+        </p:txBody>
+      </p:sp>
+      <p:sp>
+        <p:nvSpPr>
+          <p:cNvPr id="17" name="Rectangle 16"/>
+          <p:cNvSpPr/>
+          <p:nvPr/>
+        </p:nvSpPr>
+        <p:spPr>
+          <a:xfrm>
+            <a:off x="3295650" y="4974729"/>
+            <a:ext cx="2457450" cy="554236"/>
+          </a:xfrm>
+          <a:prstGeom prst="rect">
+            <a:avLst/>
+          </a:prstGeom>
+          <a:solidFill>
+            <a:srgbClr val="0C0C0D"/>
+          </a:solidFill>
+          <a:ln>
+            <a:noFill/>
+          </a:ln>
+        </p:spPr>
+        <p:txBody>
+          <a:bodyPr rtlCol="0" anchor="ctr"/>
+          <a:lstStyle/>
+          <a:p/>
+        </p:txBody>
+      </p:sp>
+      <p:sp>
+        <p:nvSpPr>
+          <p:cNvPr id="18" name="Rectangle 17"/>
+          <p:cNvSpPr/>
+          <p:nvPr/>
+        </p:nvSpPr>
+        <p:spPr>
+          <a:xfrm>
+            <a:off x="5981700" y="4408289"/>
+            <a:ext cx="381000" cy="19050"/>
+          </a:xfrm>
+          <a:prstGeom prst="rect">
+            <a:avLst/>
+          </a:prstGeom>
+          <a:solidFill>
+            <a:srgbClr val="9A9993"/>
+          </a:solidFill>
+          <a:ln>
+            <a:noFill/>
+          </a:ln>
+        </p:spPr>
+        <p:txBody>
+          <a:bodyPr rtlCol="0" anchor="ctr"/>
+          <a:lstStyle/>
+          <a:p/>
+        </p:txBody>
+      </p:sp>
+      <p:sp>
+        <p:nvSpPr>
+          <p:cNvPr id="19" name="Freeform 18"/>
+          <p:cNvSpPr/>
+          <p:nvPr/>
+        </p:nvSpPr>
+        <p:spPr>
+          <a:xfrm>
+            <a:off x="6362700" y="4351139"/>
+            <a:ext cx="95250" cy="133350"/>
+          </a:xfrm>
+          <a:custGeom>
+            <a:avLst/>
+            <a:gdLst/>
+            <a:ahLst/>
+            <a:cxnLst/>
+            <a:rect l="l" t="t" r="r" b="b"/>
+            <a:pathLst>
+              <a:path w="95250" h="133350">
+                <a:moveTo>
+                  <a:pt x="0" y="0"/>
+                </a:moveTo>
+                <a:lnTo>
+                  <a:pt x="0" y="133350"/>
+                </a:lnTo>
+                <a:lnTo>
+                  <a:pt x="95250" y="66675"/>
+                </a:lnTo>
+                <a:close/>
+              </a:path>
+            </a:pathLst>
+          </a:custGeom>
+          <a:solidFill>
+            <a:srgbClr val="9A9993"/>
+          </a:solidFill>
+          <a:ln>
+            <a:noFill/>
+          </a:ln>
+        </p:spPr>
+        <p:txBody>
+          <a:bodyPr rtlCol="0" anchor="ctr"/>
+          <a:lstStyle/>
+          <a:p/>
+        </p:txBody>
+      </p:sp>
+      <p:sp>
+        <p:nvSpPr>
+          <p:cNvPr id="20" name="Rectangle 19"/>
+          <p:cNvSpPr/>
+          <p:nvPr/>
+        </p:nvSpPr>
+        <p:spPr>
+          <a:xfrm>
+            <a:off x="6534150" y="2133898"/>
+            <a:ext cx="1771650" cy="4171652"/>
+          </a:xfrm>
+          <a:prstGeom prst="rect">
+            <a:avLst/>
+          </a:prstGeom>
+          <a:solidFill>
+            <a:srgbClr val="1C1C1E"/>
+          </a:solidFill>
+          <a:ln>
+            <a:noFill/>
+          </a:ln>
+        </p:spPr>
+        <p:txBody>
+          <a:bodyPr rtlCol="0" anchor="ctr"/>
+          <a:lstStyle/>
+          <a:p/>
+        </p:txBody>
+      </p:sp>
+      <p:cxnSp>
+        <p:nvCxnSpPr>
+          <p:cNvPr id="21" name="Connector 20"/>
+          <p:cNvCxnSpPr/>
+          <p:nvPr/>
+        </p:nvCxnSpPr>
+        <p:spPr>
+          <a:xfrm>
+            <a:off x="6686550" y="2908697"/>
+            <a:ext cx="1466850" cy="0"/>
+          </a:xfrm>
+          <a:prstGeom prst="line">
+            <a:avLst/>
+          </a:prstGeom>
+          <a:ln w="9525">
+            <a:solidFill>
+              <a:srgbClr val="2A2A2E"/>
+            </a:solidFill>
+          </a:ln>
+        </p:spPr>
+      </p:cxnSp>
+      <p:cxnSp>
+        <p:nvCxnSpPr>
+          <p:cNvPr id="22" name="Connector 21"/>
+          <p:cNvCxnSpPr/>
+          <p:nvPr/>
+        </p:nvCxnSpPr>
+        <p:spPr>
+          <a:xfrm>
+            <a:off x="6686550" y="3677245"/>
+            <a:ext cx="1466850" cy="0"/>
+          </a:xfrm>
+          <a:prstGeom prst="line">
+            <a:avLst/>
+          </a:prstGeom>
+          <a:ln w="9525">
+            <a:solidFill>
+              <a:srgbClr val="2A2A2E"/>
+            </a:solidFill>
+          </a:ln>
+        </p:spPr>
+      </p:cxnSp>
+      <p:cxnSp>
+        <p:nvCxnSpPr>
+          <p:cNvPr id="23" name="Connector 22"/>
+          <p:cNvCxnSpPr/>
+          <p:nvPr/>
+        </p:nvCxnSpPr>
+        <p:spPr>
+          <a:xfrm>
+            <a:off x="8686800" y="1971973"/>
+            <a:ext cx="2895600" cy="0"/>
+          </a:xfrm>
+          <a:prstGeom prst="line">
+            <a:avLst/>
+          </a:prstGeom>
+          <a:ln w="19050">
+            <a:solidFill>
+              <a:srgbClr val="ECEBE6"/>
+            </a:solidFill>
+          </a:ln>
+        </p:spPr>
+      </p:cxnSp>
+      <p:sp>
+        <p:nvSpPr>
+          <p:cNvPr id="24" name="Title"/>
+          <p:cNvSpPr txBox="1"/>
+          <p:nvPr/>
+        </p:nvSpPr>
+        <p:spPr>
+          <a:xfrm>
+            <a:off x="609600" y="428625"/>
+            <a:ext cx="10024110" cy="847874"/>
+          </a:xfrm>
+          <a:prstGeom prst="rect">
+            <a:avLst/>
+          </a:prstGeom>
+          <a:noFill/>
+        </p:spPr>
+        <p:txBody>
+          <a:bodyPr wrap="none" lIns="0" rIns="0" tIns="0" bIns="0" anchor="t">
+            <a:noAutofit/>
+          </a:bodyPr>
+          <a:lstStyle/>
+          <a:p>
+            <a:pPr algn="l">
+              <a:lnSpc>
+                <a:spcPts val="3301"/>
+              </a:lnSpc>
+              <a:spcBef>
+                <a:spcPts val="0"/>
+              </a:spcBef>
+              <a:spcAft>
+                <a:spcPts val="0"/>
+              </a:spcAft>
+            </a:pPr>
+            <a:r>
+              <a:rPr sz="2300" b="1" i="0">
+                <a:solidFill>
+                  <a:srgbClr val="ECEBE6"/>
+                </a:solidFill>
+                <a:latin typeface="Yu Gothic"/>
+                <a:ea typeface="Yu Gothic"/>
+                <a:cs typeface="Yu Gothic"/>
+              </a:rPr>
+              <a:t>ima は iPhone アプリと Cloudflare Workers の2つで動き、</a:t>
+            </a:r>
+          </a:p>
+          <a:p>
+            <a:pPr algn="l">
+              <a:lnSpc>
+                <a:spcPts val="3301"/>
+              </a:lnSpc>
+              <a:spcBef>
+                <a:spcPts val="0"/>
+              </a:spcBef>
+              <a:spcAft>
+                <a:spcPts val="0"/>
+              </a:spcAft>
+            </a:pPr>
+            <a:r>
+              <a:rPr sz="2300" b="1" i="0">
+                <a:solidFill>
+                  <a:srgbClr val="ECEBE6"/>
+                </a:solidFill>
+                <a:latin typeface="Yu Gothic"/>
+                <a:ea typeface="Yu Gothic"/>
+                <a:cs typeface="Yu Gothic"/>
+              </a:rPr>
+              <a:t>会話・実行・保存を Durable Objects に分けて持つ</a:t>
+            </a:r>
+          </a:p>
+        </p:txBody>
+      </p:sp>
+      <p:sp>
+        <p:nvSpPr>
+          <p:cNvPr id="25" name="TextBox 24"/>
+          <p:cNvSpPr txBox="1"/>
+          <p:nvPr/>
+        </p:nvSpPr>
+        <p:spPr>
+          <a:xfrm>
+            <a:off x="609600" y="1629073"/>
+            <a:ext cx="1618559" cy="247650"/>
+          </a:xfrm>
+          <a:prstGeom prst="rect">
+            <a:avLst/>
+          </a:prstGeom>
+          <a:noFill/>
+        </p:spPr>
+        <p:txBody>
+          <a:bodyPr wrap="none" lIns="0" rIns="0" tIns="0" bIns="0" anchor="t">
+            <a:noAutofit/>
+          </a:bodyPr>
+          <a:lstStyle/>
+          <a:p>
+            <a:pPr algn="l">
+              <a:lnSpc>
+                <a:spcPts val="2025"/>
+              </a:lnSpc>
+              <a:spcBef>
+                <a:spcPts val="0"/>
+              </a:spcBef>
+              <a:spcAft>
+                <a:spcPts val="0"/>
+              </a:spcAft>
+            </a:pPr>
+            <a:r>
+              <a:rPr sz="1350" b="1" i="0">
+                <a:solidFill>
+                  <a:srgbClr val="ECEBE6"/>
+                </a:solidFill>
+                <a:latin typeface="Yu Gothic"/>
+                <a:ea typeface="Yu Gothic"/>
+                <a:cs typeface="Yu Gothic"/>
+              </a:rPr>
+              <a:t>システム全体の構成</a:t>
+            </a:r>
+          </a:p>
+        </p:txBody>
+      </p:sp>
+      <p:sp>
+        <p:nvSpPr>
+          <p:cNvPr id="26" name="TextBox 25"/>
+          <p:cNvSpPr txBox="1"/>
+          <p:nvPr/>
+        </p:nvSpPr>
+        <p:spPr>
+          <a:xfrm>
+            <a:off x="762000" y="2286298"/>
+            <a:ext cx="1211330" cy="247650"/>
+          </a:xfrm>
+          <a:prstGeom prst="rect">
+            <a:avLst/>
+          </a:prstGeom>
+          <a:noFill/>
+        </p:spPr>
+        <p:txBody>
+          <a:bodyPr wrap="none" lIns="0" rIns="0" tIns="0" bIns="0" anchor="t">
+            <a:noAutofit/>
+          </a:bodyPr>
+          <a:lstStyle/>
+          <a:p>
+            <a:pPr algn="l">
+              <a:lnSpc>
+                <a:spcPts val="2025"/>
+              </a:lnSpc>
+              <a:spcBef>
+                <a:spcPts val="0"/>
+              </a:spcBef>
+              <a:spcAft>
+                <a:spcPts val="0"/>
+              </a:spcAft>
+            </a:pPr>
+            <a:r>
+              <a:rPr sz="1350" b="1" i="0">
+                <a:solidFill>
+                  <a:srgbClr val="ECEBE6"/>
+                </a:solidFill>
+                <a:latin typeface="Yu Gothic"/>
+                <a:ea typeface="Yu Gothic"/>
+                <a:cs typeface="Yu Gothic"/>
+              </a:rPr>
+              <a:t>iPhone アプリ</a:t>
+            </a:r>
+          </a:p>
+        </p:txBody>
+      </p:sp>
+      <p:sp>
+        <p:nvSpPr>
+          <p:cNvPr id="27" name="TextBox 26"/>
+          <p:cNvSpPr txBox="1"/>
+          <p:nvPr/>
+        </p:nvSpPr>
+        <p:spPr>
+          <a:xfrm>
+            <a:off x="762000" y="2619673"/>
+            <a:ext cx="1683258" cy="360462"/>
+          </a:xfrm>
+          <a:prstGeom prst="rect">
+            <a:avLst/>
+          </a:prstGeom>
+          <a:noFill/>
+        </p:spPr>
+        <p:txBody>
+          <a:bodyPr wrap="none" lIns="0" rIns="0" tIns="0" bIns="0" anchor="t">
+            <a:noAutofit/>
+          </a:bodyPr>
+          <a:lstStyle/>
+          <a:p>
+            <a:pPr algn="l">
+              <a:lnSpc>
+                <a:spcPts val="1413"/>
+              </a:lnSpc>
+              <a:spcBef>
+                <a:spcPts val="0"/>
+              </a:spcBef>
+              <a:spcAft>
+                <a:spcPts val="0"/>
+              </a:spcAft>
+            </a:pPr>
+            <a:r>
+              <a:rPr sz="1000" b="0" i="0">
+                <a:solidFill>
+                  <a:srgbClr val="9A9993"/>
+                </a:solidFill>
+                <a:latin typeface="Yu Gothic"/>
+                <a:ea typeface="Yu Gothic"/>
+                <a:cs typeface="Yu Gothic"/>
+              </a:rPr>
+              <a:t>React Native 0.86</a:t>
+            </a:r>
+          </a:p>
+          <a:p>
+            <a:pPr algn="l">
+              <a:lnSpc>
+                <a:spcPts val="1413"/>
+              </a:lnSpc>
+              <a:spcBef>
+                <a:spcPts val="0"/>
+              </a:spcBef>
+              <a:spcAft>
+                <a:spcPts val="0"/>
+              </a:spcAft>
+            </a:pPr>
+            <a:r>
+              <a:rPr sz="1000" b="0" i="0">
+                <a:solidFill>
+                  <a:srgbClr val="9A9993"/>
+                </a:solidFill>
+                <a:latin typeface="Yu Gothic"/>
+                <a:ea typeface="Yu Gothic"/>
+                <a:cs typeface="Yu Gothic"/>
+              </a:rPr>
+              <a:t>Expo 57・TypeScript</a:t>
+            </a:r>
+          </a:p>
+        </p:txBody>
+      </p:sp>
+      <p:sp>
+        <p:nvSpPr>
+          <p:cNvPr id="28" name="TextBox 27"/>
+          <p:cNvSpPr txBox="1"/>
+          <p:nvPr/>
+        </p:nvSpPr>
+        <p:spPr>
+          <a:xfrm>
+            <a:off x="762000" y="3178671"/>
+            <a:ext cx="712470" cy="190500"/>
+          </a:xfrm>
+          <a:prstGeom prst="rect">
+            <a:avLst/>
+          </a:prstGeom>
+          <a:noFill/>
+        </p:spPr>
+        <p:txBody>
+          <a:bodyPr wrap="none" lIns="0" rIns="0" tIns="0" bIns="0" anchor="t">
+            <a:noAutofit/>
+          </a:bodyPr>
+          <a:lstStyle/>
+          <a:p>
+            <a:pPr algn="l">
+              <a:lnSpc>
+                <a:spcPts val="1575"/>
+              </a:lnSpc>
+              <a:spcBef>
+                <a:spcPts val="0"/>
+              </a:spcBef>
+              <a:spcAft>
+                <a:spcPts val="0"/>
+              </a:spcAft>
+            </a:pPr>
+            <a:r>
+              <a:rPr sz="1050" b="1" i="0">
+                <a:solidFill>
+                  <a:srgbClr val="ECEBE6"/>
+                </a:solidFill>
+                <a:latin typeface="Yu Gothic"/>
+                <a:ea typeface="Yu Gothic"/>
+                <a:cs typeface="Yu Gothic"/>
+              </a:rPr>
+              <a:t>画面と会話</a:t>
+            </a:r>
+          </a:p>
+        </p:txBody>
+      </p:sp>
+      <p:sp>
+        <p:nvSpPr>
+          <p:cNvPr id="29" name="TextBox 28"/>
+          <p:cNvSpPr txBox="1"/>
+          <p:nvPr/>
+        </p:nvSpPr>
+        <p:spPr>
+          <a:xfrm>
+            <a:off x="762000" y="3388221"/>
+            <a:ext cx="1564541" cy="180975"/>
+          </a:xfrm>
+          <a:prstGeom prst="rect">
+            <a:avLst/>
+          </a:prstGeom>
+          <a:noFill/>
+        </p:spPr>
+        <p:txBody>
+          <a:bodyPr wrap="none" lIns="0" rIns="0" tIns="0" bIns="0" anchor="t">
+            <a:noAutofit/>
+          </a:bodyPr>
+          <a:lstStyle/>
+          <a:p>
+            <a:pPr algn="l">
+              <a:lnSpc>
+                <a:spcPts val="1413"/>
+              </a:lnSpc>
+              <a:spcBef>
+                <a:spcPts val="0"/>
+              </a:spcBef>
+              <a:spcAft>
+                <a:spcPts val="0"/>
+              </a:spcAft>
+            </a:pPr>
+            <a:r>
+              <a:rPr sz="1000" b="0" i="0">
+                <a:solidFill>
+                  <a:srgbClr val="9A9993"/>
+                </a:solidFill>
+                <a:latin typeface="Yu Gothic"/>
+                <a:ea typeface="Yu Gothic"/>
+                <a:cs typeface="Yu Gothic"/>
+              </a:rPr>
+              <a:t>起動画面から店舗詳細まで</a:t>
+            </a:r>
+          </a:p>
+        </p:txBody>
+      </p:sp>
+      <p:sp>
+        <p:nvSpPr>
+          <p:cNvPr id="30" name="TextBox 29"/>
+          <p:cNvSpPr txBox="1"/>
+          <p:nvPr/>
+        </p:nvSpPr>
+        <p:spPr>
+          <a:xfrm>
+            <a:off x="762000" y="3767733"/>
+            <a:ext cx="470237" cy="190500"/>
+          </a:xfrm>
+          <a:prstGeom prst="rect">
+            <a:avLst/>
+          </a:prstGeom>
+          <a:noFill/>
+        </p:spPr>
+        <p:txBody>
+          <a:bodyPr wrap="none" lIns="0" rIns="0" tIns="0" bIns="0" anchor="t">
+            <a:noAutofit/>
+          </a:bodyPr>
+          <a:lstStyle/>
+          <a:p>
+            <a:pPr algn="l">
+              <a:lnSpc>
+                <a:spcPts val="1575"/>
+              </a:lnSpc>
+              <a:spcBef>
+                <a:spcPts val="0"/>
+              </a:spcBef>
+              <a:spcAft>
+                <a:spcPts val="0"/>
+              </a:spcAft>
+            </a:pPr>
+            <a:r>
+              <a:rPr sz="1050" b="1" i="0">
+                <a:solidFill>
+                  <a:srgbClr val="ECEBE6"/>
+                </a:solidFill>
+                <a:latin typeface="Yu Gothic"/>
+                <a:ea typeface="Yu Gothic"/>
+                <a:cs typeface="Yu Gothic"/>
+              </a:rPr>
+              <a:t>SQLite</a:t>
+            </a:r>
+          </a:p>
+        </p:txBody>
+      </p:sp>
+      <p:sp>
+        <p:nvSpPr>
+          <p:cNvPr id="31" name="TextBox 30"/>
+          <p:cNvSpPr txBox="1"/>
+          <p:nvPr/>
+        </p:nvSpPr>
+        <p:spPr>
+          <a:xfrm>
+            <a:off x="762000" y="3977283"/>
+            <a:ext cx="1378339" cy="180975"/>
+          </a:xfrm>
+          <a:prstGeom prst="rect">
+            <a:avLst/>
+          </a:prstGeom>
+          <a:noFill/>
+        </p:spPr>
+        <p:txBody>
+          <a:bodyPr wrap="none" lIns="0" rIns="0" tIns="0" bIns="0" anchor="t">
+            <a:noAutofit/>
+          </a:bodyPr>
+          <a:lstStyle/>
+          <a:p>
+            <a:pPr algn="l">
+              <a:lnSpc>
+                <a:spcPts val="1413"/>
+              </a:lnSpc>
+              <a:spcBef>
+                <a:spcPts val="0"/>
+              </a:spcBef>
+              <a:spcAft>
+                <a:spcPts val="0"/>
+              </a:spcAft>
+            </a:pPr>
+            <a:r>
+              <a:rPr sz="1000" b="0" i="0">
+                <a:solidFill>
+                  <a:srgbClr val="9A9993"/>
+                </a:solidFill>
+                <a:latin typeface="Yu Gothic"/>
+                <a:ea typeface="Yu Gothic"/>
+                <a:cs typeface="Yu Gothic"/>
+              </a:rPr>
+              <a:t>直近3会話のキャッシュ</a:t>
+            </a:r>
+          </a:p>
+        </p:txBody>
+      </p:sp>
+      <p:sp>
+        <p:nvSpPr>
+          <p:cNvPr id="32" name="TextBox 31"/>
+          <p:cNvSpPr txBox="1"/>
+          <p:nvPr/>
+        </p:nvSpPr>
+        <p:spPr>
+          <a:xfrm>
+            <a:off x="762000" y="4356795"/>
+            <a:ext cx="844653" cy="190500"/>
+          </a:xfrm>
+          <a:prstGeom prst="rect">
+            <a:avLst/>
+          </a:prstGeom>
+          <a:noFill/>
+        </p:spPr>
+        <p:txBody>
+          <a:bodyPr wrap="none" lIns="0" rIns="0" tIns="0" bIns="0" anchor="t">
+            <a:noAutofit/>
+          </a:bodyPr>
+          <a:lstStyle/>
+          <a:p>
+            <a:pPr algn="l">
+              <a:lnSpc>
+                <a:spcPts val="1575"/>
+              </a:lnSpc>
+              <a:spcBef>
+                <a:spcPts val="0"/>
+              </a:spcBef>
+              <a:spcAft>
+                <a:spcPts val="0"/>
+              </a:spcAft>
+            </a:pPr>
+            <a:r>
+              <a:rPr sz="1050" b="1" i="0">
+                <a:solidFill>
+                  <a:srgbClr val="ECEBE6"/>
+                </a:solidFill>
+                <a:latin typeface="Yu Gothic"/>
+                <a:ea typeface="Yu Gothic"/>
+                <a:cs typeface="Yu Gothic"/>
+              </a:rPr>
+              <a:t>SecureStore</a:t>
+            </a:r>
+          </a:p>
+        </p:txBody>
+      </p:sp>
+      <p:sp>
+        <p:nvSpPr>
+          <p:cNvPr id="33" name="TextBox 32"/>
+          <p:cNvSpPr txBox="1"/>
+          <p:nvPr/>
+        </p:nvSpPr>
+        <p:spPr>
+          <a:xfrm>
+            <a:off x="762000" y="4566345"/>
+            <a:ext cx="1176814" cy="180975"/>
+          </a:xfrm>
+          <a:prstGeom prst="rect">
+            <a:avLst/>
+          </a:prstGeom>
+          <a:noFill/>
+        </p:spPr>
+        <p:txBody>
+          <a:bodyPr wrap="none" lIns="0" rIns="0" tIns="0" bIns="0" anchor="t">
+            <a:noAutofit/>
+          </a:bodyPr>
+          <a:lstStyle/>
+          <a:p>
+            <a:pPr algn="l">
+              <a:lnSpc>
+                <a:spcPts val="1413"/>
+              </a:lnSpc>
+              <a:spcBef>
+                <a:spcPts val="0"/>
+              </a:spcBef>
+              <a:spcAft>
+                <a:spcPts val="0"/>
+              </a:spcAft>
+            </a:pPr>
+            <a:r>
+              <a:rPr sz="1000" b="0" i="0">
+                <a:solidFill>
+                  <a:srgbClr val="9A9993"/>
+                </a:solidFill>
+                <a:latin typeface="Yu Gothic"/>
+                <a:ea typeface="Yu Gothic"/>
+                <a:cs typeface="Yu Gothic"/>
+              </a:rPr>
+              <a:t>端末ごとの資格情報</a:t>
+            </a:r>
+          </a:p>
+        </p:txBody>
+      </p:sp>
+      <p:sp>
+        <p:nvSpPr>
+          <p:cNvPr id="34" name="TextBox 33"/>
+          <p:cNvSpPr txBox="1"/>
+          <p:nvPr/>
+        </p:nvSpPr>
+        <p:spPr>
+          <a:xfrm>
+            <a:off x="762000" y="4945856"/>
+            <a:ext cx="573786" cy="190500"/>
+          </a:xfrm>
+          <a:prstGeom prst="rect">
+            <a:avLst/>
+          </a:prstGeom>
+          <a:noFill/>
+        </p:spPr>
+        <p:txBody>
+          <a:bodyPr wrap="none" lIns="0" rIns="0" tIns="0" bIns="0" anchor="t">
+            <a:noAutofit/>
+          </a:bodyPr>
+          <a:lstStyle/>
+          <a:p>
+            <a:pPr algn="l">
+              <a:lnSpc>
+                <a:spcPts val="1575"/>
+              </a:lnSpc>
+              <a:spcBef>
+                <a:spcPts val="0"/>
+              </a:spcBef>
+              <a:spcAft>
+                <a:spcPts val="0"/>
+              </a:spcAft>
+            </a:pPr>
+            <a:r>
+              <a:rPr sz="1050" b="1" i="0">
+                <a:solidFill>
+                  <a:srgbClr val="ECEBE6"/>
+                </a:solidFill>
+                <a:latin typeface="Yu Gothic"/>
+                <a:ea typeface="Yu Gothic"/>
+                <a:cs typeface="Yu Gothic"/>
+              </a:rPr>
+              <a:t>位置情報</a:t>
+            </a:r>
+          </a:p>
+        </p:txBody>
+      </p:sp>
+      <p:sp>
+        <p:nvSpPr>
+          <p:cNvPr id="35" name="TextBox 34"/>
+          <p:cNvSpPr txBox="1"/>
+          <p:nvPr/>
+        </p:nvSpPr>
+        <p:spPr>
+          <a:xfrm>
+            <a:off x="762000" y="5155406"/>
+            <a:ext cx="1304354" cy="180975"/>
+          </a:xfrm>
+          <a:prstGeom prst="rect">
+            <a:avLst/>
+          </a:prstGeom>
+          <a:noFill/>
+        </p:spPr>
+        <p:txBody>
+          <a:bodyPr wrap="none" lIns="0" rIns="0" tIns="0" bIns="0" anchor="t">
+            <a:noAutofit/>
+          </a:bodyPr>
+          <a:lstStyle/>
+          <a:p>
+            <a:pPr algn="l">
+              <a:lnSpc>
+                <a:spcPts val="1413"/>
+              </a:lnSpc>
+              <a:spcBef>
+                <a:spcPts val="0"/>
+              </a:spcBef>
+              <a:spcAft>
+                <a:spcPts val="0"/>
+              </a:spcAft>
+            </a:pPr>
+            <a:r>
+              <a:rPr sz="1000" b="0" i="0">
+                <a:solidFill>
+                  <a:srgbClr val="9A9993"/>
+                </a:solidFill>
+                <a:latin typeface="Yu Gothic"/>
+                <a:ea typeface="Yu Gothic"/>
+                <a:cs typeface="Yu Gothic"/>
+              </a:rPr>
+              <a:t>ユーザーの操作で取得</a:t>
+            </a:r>
+          </a:p>
+        </p:txBody>
+      </p:sp>
+      <p:sp>
+        <p:nvSpPr>
+          <p:cNvPr id="36" name="TextBox 35"/>
+          <p:cNvSpPr txBox="1"/>
+          <p:nvPr/>
+        </p:nvSpPr>
+        <p:spPr>
+          <a:xfrm>
+            <a:off x="2522068" y="3722489"/>
+            <a:ext cx="613565" cy="161925"/>
+          </a:xfrm>
+          <a:prstGeom prst="rect">
+            <a:avLst/>
+          </a:prstGeom>
+          <a:noFill/>
+        </p:spPr>
+        <p:txBody>
+          <a:bodyPr wrap="none" lIns="0" rIns="0" tIns="0" bIns="0" anchor="t">
+            <a:noAutofit/>
+          </a:bodyPr>
+          <a:lstStyle/>
+          <a:p>
+            <a:pPr algn="ctr">
+              <a:lnSpc>
+                <a:spcPts val="1260"/>
+              </a:lnSpc>
+              <a:spcBef>
+                <a:spcPts val="0"/>
+              </a:spcBef>
+              <a:spcAft>
+                <a:spcPts val="0"/>
+              </a:spcAft>
+            </a:pPr>
+            <a:r>
+              <a:rPr sz="900" b="0" i="0">
+                <a:solidFill>
+                  <a:srgbClr val="9A9993"/>
+                </a:solidFill>
+                <a:latin typeface="Yu Gothic"/>
+                <a:ea typeface="Yu Gothic"/>
+                <a:cs typeface="Yu Gothic"/>
+              </a:rPr>
+              <a:t>発言を送る</a:t>
+            </a:r>
+          </a:p>
+        </p:txBody>
+      </p:sp>
+      <p:sp>
+        <p:nvSpPr>
+          <p:cNvPr id="37" name="TextBox 36"/>
+          <p:cNvSpPr txBox="1"/>
+          <p:nvPr/>
+        </p:nvSpPr>
+        <p:spPr>
+          <a:xfrm>
+            <a:off x="2522068" y="4377779"/>
+            <a:ext cx="613565" cy="321915"/>
+          </a:xfrm>
+          <a:prstGeom prst="rect">
+            <a:avLst/>
+          </a:prstGeom>
+          <a:noFill/>
+        </p:spPr>
+        <p:txBody>
+          <a:bodyPr wrap="none" lIns="0" rIns="0" tIns="0" bIns="0" anchor="t">
+            <a:noAutofit/>
+          </a:bodyPr>
+          <a:lstStyle/>
+          <a:p>
+            <a:pPr algn="ctr">
+              <a:lnSpc>
+                <a:spcPts val="1260"/>
+              </a:lnSpc>
+              <a:spcBef>
+                <a:spcPts val="0"/>
+              </a:spcBef>
+              <a:spcAft>
+                <a:spcPts val="0"/>
+              </a:spcAft>
+            </a:pPr>
+            <a:r>
+              <a:rPr sz="900" b="0" i="0">
+                <a:solidFill>
+                  <a:srgbClr val="9A9993"/>
+                </a:solidFill>
+                <a:latin typeface="Yu Gothic"/>
+                <a:ea typeface="Yu Gothic"/>
+                <a:cs typeface="Yu Gothic"/>
+              </a:rPr>
+              <a:t>SSE で</a:t>
+            </a:r>
+          </a:p>
+          <a:p>
+            <a:pPr algn="ctr">
+              <a:lnSpc>
+                <a:spcPts val="1260"/>
+              </a:lnSpc>
+              <a:spcBef>
+                <a:spcPts val="0"/>
+              </a:spcBef>
+              <a:spcAft>
+                <a:spcPts val="0"/>
+              </a:spcAft>
+            </a:pPr>
+            <a:r>
+              <a:rPr sz="900" b="0" i="0">
+                <a:solidFill>
+                  <a:srgbClr val="9A9993"/>
+                </a:solidFill>
+                <a:latin typeface="Yu Gothic"/>
+                <a:ea typeface="Yu Gothic"/>
+                <a:cs typeface="Yu Gothic"/>
+              </a:rPr>
+              <a:t>結果を返す</a:t>
+            </a:r>
+          </a:p>
+        </p:txBody>
+      </p:sp>
+      <p:sp>
+        <p:nvSpPr>
+          <p:cNvPr id="38" name="TextBox 37"/>
+          <p:cNvSpPr txBox="1"/>
+          <p:nvPr/>
+        </p:nvSpPr>
+        <p:spPr>
+          <a:xfrm>
+            <a:off x="3295650" y="2286298"/>
+            <a:ext cx="1700594" cy="247650"/>
+          </a:xfrm>
+          <a:prstGeom prst="rect">
+            <a:avLst/>
+          </a:prstGeom>
+          <a:noFill/>
+        </p:spPr>
+        <p:txBody>
+          <a:bodyPr wrap="none" lIns="0" rIns="0" tIns="0" bIns="0" anchor="t">
+            <a:noAutofit/>
+          </a:bodyPr>
+          <a:lstStyle/>
+          <a:p>
+            <a:pPr algn="l">
+              <a:lnSpc>
+                <a:spcPts val="2025"/>
+              </a:lnSpc>
+              <a:spcBef>
+                <a:spcPts val="0"/>
+              </a:spcBef>
+              <a:spcAft>
+                <a:spcPts val="0"/>
+              </a:spcAft>
+            </a:pPr>
+            <a:r>
+              <a:rPr sz="1350" b="1" i="0">
+                <a:solidFill>
+                  <a:srgbClr val="ECEBE6"/>
+                </a:solidFill>
+                <a:latin typeface="Yu Gothic"/>
+                <a:ea typeface="Yu Gothic"/>
+                <a:cs typeface="Yu Gothic"/>
+              </a:rPr>
+              <a:t>Cloudflare Workers</a:t>
+            </a:r>
+          </a:p>
+        </p:txBody>
+      </p:sp>
+      <p:sp>
+        <p:nvSpPr>
+          <p:cNvPr id="39" name="TextBox 38"/>
+          <p:cNvSpPr txBox="1"/>
+          <p:nvPr/>
+        </p:nvSpPr>
+        <p:spPr>
+          <a:xfrm>
+            <a:off x="3295650" y="2619673"/>
+            <a:ext cx="2574798" cy="360462"/>
+          </a:xfrm>
+          <a:prstGeom prst="rect">
+            <a:avLst/>
+          </a:prstGeom>
+          <a:noFill/>
+        </p:spPr>
+        <p:txBody>
+          <a:bodyPr wrap="none" lIns="0" rIns="0" tIns="0" bIns="0" anchor="t">
+            <a:noAutofit/>
+          </a:bodyPr>
+          <a:lstStyle/>
+          <a:p>
+            <a:pPr algn="l">
+              <a:lnSpc>
+                <a:spcPts val="1413"/>
+              </a:lnSpc>
+              <a:spcBef>
+                <a:spcPts val="0"/>
+              </a:spcBef>
+              <a:spcAft>
+                <a:spcPts val="0"/>
+              </a:spcAft>
+            </a:pPr>
+            <a:r>
+              <a:rPr sz="1000" b="0" i="0">
+                <a:solidFill>
+                  <a:srgbClr val="9A9993"/>
+                </a:solidFill>
+                <a:latin typeface="Yu Gothic"/>
+                <a:ea typeface="Yu Gothic"/>
+                <a:cs typeface="Yu Gothic"/>
+              </a:rPr>
+              <a:t>HTTPS を Hono 4 で受け、</a:t>
+            </a:r>
+          </a:p>
+          <a:p>
+            <a:pPr algn="l">
+              <a:lnSpc>
+                <a:spcPts val="1413"/>
+              </a:lnSpc>
+              <a:spcBef>
+                <a:spcPts val="0"/>
+              </a:spcBef>
+              <a:spcAft>
+                <a:spcPts val="0"/>
+              </a:spcAft>
+            </a:pPr>
+            <a:r>
+              <a:rPr sz="1000" b="0" i="0">
+                <a:solidFill>
+                  <a:srgbClr val="9A9993"/>
+                </a:solidFill>
+                <a:latin typeface="Yu Gothic"/>
+                <a:ea typeface="Yu Gothic"/>
+                <a:cs typeface="Yu Gothic"/>
+              </a:rPr>
+              <a:t>認証・入力検証をする</a:t>
+            </a:r>
+          </a:p>
+        </p:txBody>
+      </p:sp>
+      <p:sp>
+        <p:nvSpPr>
+          <p:cNvPr id="40" name="TextBox 39"/>
+          <p:cNvSpPr txBox="1"/>
+          <p:nvPr/>
+        </p:nvSpPr>
+        <p:spPr>
+          <a:xfrm>
+            <a:off x="3400425" y="3169146"/>
+            <a:ext cx="1627227" cy="190500"/>
+          </a:xfrm>
+          <a:prstGeom prst="rect">
+            <a:avLst/>
+          </a:prstGeom>
+          <a:noFill/>
+        </p:spPr>
+        <p:txBody>
+          <a:bodyPr wrap="none" lIns="0" rIns="0" tIns="0" bIns="0" anchor="t">
+            <a:noAutofit/>
+          </a:bodyPr>
+          <a:lstStyle/>
+          <a:p>
+            <a:pPr algn="l">
+              <a:lnSpc>
+                <a:spcPts val="1575"/>
+              </a:lnSpc>
+              <a:spcBef>
+                <a:spcPts val="0"/>
+              </a:spcBef>
+              <a:spcAft>
+                <a:spcPts val="0"/>
+              </a:spcAft>
+            </a:pPr>
+            <a:r>
+              <a:rPr sz="1050" b="1" i="0">
+                <a:solidFill>
+                  <a:srgbClr val="B7C97A"/>
+                </a:solidFill>
+                <a:latin typeface="Yu Gothic"/>
+                <a:ea typeface="Yu Gothic"/>
+                <a:cs typeface="Yu Gothic"/>
+              </a:rPr>
+              <a:t>ConversationHistoryDO</a:t>
+            </a:r>
+          </a:p>
+        </p:txBody>
+      </p:sp>
+      <p:sp>
+        <p:nvSpPr>
+          <p:cNvPr id="41" name="TextBox 40"/>
+          <p:cNvSpPr txBox="1"/>
+          <p:nvPr/>
+        </p:nvSpPr>
+        <p:spPr>
+          <a:xfrm>
+            <a:off x="3400425" y="3369171"/>
+            <a:ext cx="1435763" cy="180975"/>
+          </a:xfrm>
+          <a:prstGeom prst="rect">
+            <a:avLst/>
+          </a:prstGeom>
+          <a:noFill/>
+        </p:spPr>
+        <p:txBody>
+          <a:bodyPr wrap="none" lIns="0" rIns="0" tIns="0" bIns="0" anchor="t">
+            <a:noAutofit/>
+          </a:bodyPr>
+          <a:lstStyle/>
+          <a:p>
+            <a:pPr algn="l">
+              <a:lnSpc>
+                <a:spcPts val="1364"/>
+              </a:lnSpc>
+              <a:spcBef>
+                <a:spcPts val="0"/>
+              </a:spcBef>
+              <a:spcAft>
+                <a:spcPts val="0"/>
+              </a:spcAft>
+            </a:pPr>
+            <a:r>
+              <a:rPr sz="1000" b="0" i="0">
+                <a:solidFill>
+                  <a:srgbClr val="ECEBE6"/>
+                </a:solidFill>
+                <a:latin typeface="Yu Gothic"/>
+                <a:ea typeface="Yu Gothic"/>
+                <a:cs typeface="Yu Gothic"/>
+              </a:rPr>
+              <a:t>会話・発言・実行の受付</a:t>
+            </a:r>
+          </a:p>
+        </p:txBody>
+      </p:sp>
+      <p:sp>
+        <p:nvSpPr>
+          <p:cNvPr id="42" name="TextBox 41"/>
+          <p:cNvSpPr txBox="1"/>
+          <p:nvPr/>
+        </p:nvSpPr>
+        <p:spPr>
+          <a:xfrm>
+            <a:off x="3400425" y="3799582"/>
+            <a:ext cx="707672" cy="190500"/>
+          </a:xfrm>
+          <a:prstGeom prst="rect">
+            <a:avLst/>
+          </a:prstGeom>
+          <a:noFill/>
+        </p:spPr>
+        <p:txBody>
+          <a:bodyPr wrap="none" lIns="0" rIns="0" tIns="0" bIns="0" anchor="t">
+            <a:noAutofit/>
+          </a:bodyPr>
+          <a:lstStyle/>
+          <a:p>
+            <a:pPr algn="l">
+              <a:lnSpc>
+                <a:spcPts val="1575"/>
+              </a:lnSpc>
+              <a:spcBef>
+                <a:spcPts val="0"/>
+              </a:spcBef>
+              <a:spcAft>
+                <a:spcPts val="0"/>
+              </a:spcAft>
+            </a:pPr>
+            <a:r>
+              <a:rPr sz="1050" b="1" i="0">
+                <a:solidFill>
+                  <a:srgbClr val="B7C97A"/>
+                </a:solidFill>
+                <a:latin typeface="Yu Gothic"/>
+                <a:ea typeface="Yu Gothic"/>
+                <a:cs typeface="Yu Gothic"/>
+              </a:rPr>
+              <a:t>ThreadDO</a:t>
+            </a:r>
+          </a:p>
+        </p:txBody>
+      </p:sp>
+      <p:sp>
+        <p:nvSpPr>
+          <p:cNvPr id="43" name="TextBox 42"/>
+          <p:cNvSpPr txBox="1"/>
+          <p:nvPr/>
+        </p:nvSpPr>
+        <p:spPr>
+          <a:xfrm>
+            <a:off x="3400425" y="3999607"/>
+            <a:ext cx="1518416" cy="180975"/>
+          </a:xfrm>
+          <a:prstGeom prst="rect">
+            <a:avLst/>
+          </a:prstGeom>
+          <a:noFill/>
+        </p:spPr>
+        <p:txBody>
+          <a:bodyPr wrap="none" lIns="0" rIns="0" tIns="0" bIns="0" anchor="t">
+            <a:noAutofit/>
+          </a:bodyPr>
+          <a:lstStyle/>
+          <a:p>
+            <a:pPr algn="l">
+              <a:lnSpc>
+                <a:spcPts val="1364"/>
+              </a:lnSpc>
+              <a:spcBef>
+                <a:spcPts val="0"/>
+              </a:spcBef>
+              <a:spcAft>
+                <a:spcPts val="0"/>
+              </a:spcAft>
+            </a:pPr>
+            <a:r>
+              <a:rPr sz="1000" b="0" i="0">
+                <a:solidFill>
+                  <a:srgbClr val="ECEBE6"/>
+                </a:solidFill>
+                <a:latin typeface="Yu Gothic"/>
+                <a:ea typeface="Yu Gothic"/>
+                <a:cs typeface="Yu Gothic"/>
+              </a:rPr>
+              <a:t>今夜の会話実行（Think）</a:t>
+            </a:r>
+          </a:p>
+        </p:txBody>
+      </p:sp>
+      <p:sp>
+        <p:nvSpPr>
+          <p:cNvPr id="44" name="TextBox 43"/>
+          <p:cNvSpPr txBox="1"/>
+          <p:nvPr/>
+        </p:nvSpPr>
+        <p:spPr>
+          <a:xfrm>
+            <a:off x="3400425" y="4430018"/>
+            <a:ext cx="1318903" cy="190500"/>
+          </a:xfrm>
+          <a:prstGeom prst="rect">
+            <a:avLst/>
+          </a:prstGeom>
+          <a:noFill/>
+        </p:spPr>
+        <p:txBody>
+          <a:bodyPr wrap="none" lIns="0" rIns="0" tIns="0" bIns="0" anchor="t">
+            <a:noAutofit/>
+          </a:bodyPr>
+          <a:lstStyle/>
+          <a:p>
+            <a:pPr algn="l">
+              <a:lnSpc>
+                <a:spcPts val="1575"/>
+              </a:lnSpc>
+              <a:spcBef>
+                <a:spcPts val="0"/>
+              </a:spcBef>
+              <a:spcAft>
+                <a:spcPts val="0"/>
+              </a:spcAft>
+            </a:pPr>
+            <a:r>
+              <a:rPr sz="1050" b="1" i="0">
+                <a:solidFill>
+                  <a:srgbClr val="B7C97A"/>
+                </a:solidFill>
+                <a:latin typeface="Yu Gothic"/>
+                <a:ea typeface="Yu Gothic"/>
+                <a:cs typeface="Yu Gothic"/>
+              </a:rPr>
+              <a:t>SavedReferenceDO</a:t>
+            </a:r>
+          </a:p>
+        </p:txBody>
+      </p:sp>
+      <p:sp>
+        <p:nvSpPr>
+          <p:cNvPr id="45" name="TextBox 44"/>
+          <p:cNvSpPr txBox="1"/>
+          <p:nvPr/>
+        </p:nvSpPr>
+        <p:spPr>
+          <a:xfrm>
+            <a:off x="3400425" y="4630043"/>
+            <a:ext cx="1564541" cy="180975"/>
+          </a:xfrm>
+          <a:prstGeom prst="rect">
+            <a:avLst/>
+          </a:prstGeom>
+          <a:noFill/>
+        </p:spPr>
+        <p:txBody>
+          <a:bodyPr wrap="none" lIns="0" rIns="0" tIns="0" bIns="0" anchor="t">
+            <a:noAutofit/>
+          </a:bodyPr>
+          <a:lstStyle/>
+          <a:p>
+            <a:pPr algn="l">
+              <a:lnSpc>
+                <a:spcPts val="1364"/>
+              </a:lnSpc>
+              <a:spcBef>
+                <a:spcPts val="0"/>
+              </a:spcBef>
+              <a:spcAft>
+                <a:spcPts val="0"/>
+              </a:spcAft>
+            </a:pPr>
+            <a:r>
+              <a:rPr sz="1000" b="0" i="0">
+                <a:solidFill>
+                  <a:srgbClr val="ECEBE6"/>
+                </a:solidFill>
+                <a:latin typeface="Yu Gothic"/>
+                <a:ea typeface="Yu Gothic"/>
+                <a:cs typeface="Yu Gothic"/>
+              </a:rPr>
+              <a:t>保存したお店・決定・条件</a:t>
+            </a:r>
+          </a:p>
+        </p:txBody>
+      </p:sp>
+      <p:sp>
+        <p:nvSpPr>
+          <p:cNvPr id="46" name="TextBox 45"/>
+          <p:cNvSpPr txBox="1"/>
+          <p:nvPr/>
+        </p:nvSpPr>
+        <p:spPr>
+          <a:xfrm>
+            <a:off x="3400425" y="5060454"/>
+            <a:ext cx="915853" cy="190500"/>
+          </a:xfrm>
+          <a:prstGeom prst="rect">
+            <a:avLst/>
+          </a:prstGeom>
+          <a:noFill/>
+        </p:spPr>
+        <p:txBody>
+          <a:bodyPr wrap="none" lIns="0" rIns="0" tIns="0" bIns="0" anchor="t">
+            <a:noAutofit/>
+          </a:bodyPr>
+          <a:lstStyle/>
+          <a:p>
+            <a:pPr algn="l">
+              <a:lnSpc>
+                <a:spcPts val="1575"/>
+              </a:lnSpc>
+              <a:spcBef>
+                <a:spcPts val="0"/>
+              </a:spcBef>
+              <a:spcAft>
+                <a:spcPts val="0"/>
+              </a:spcAft>
+            </a:pPr>
+            <a:r>
+              <a:rPr sz="1050" b="1" i="0">
+                <a:solidFill>
+                  <a:srgbClr val="B7C97A"/>
+                </a:solidFill>
+                <a:latin typeface="Yu Gothic"/>
+                <a:ea typeface="Yu Gothic"/>
+                <a:cs typeface="Yu Gothic"/>
+              </a:rPr>
+              <a:t>TelemetryDO</a:t>
+            </a:r>
+          </a:p>
+        </p:txBody>
+      </p:sp>
+      <p:sp>
+        <p:nvSpPr>
+          <p:cNvPr id="47" name="TextBox 46"/>
+          <p:cNvSpPr txBox="1"/>
+          <p:nvPr/>
+        </p:nvSpPr>
+        <p:spPr>
+          <a:xfrm>
+            <a:off x="3400425" y="5260479"/>
+            <a:ext cx="1635895" cy="180975"/>
+          </a:xfrm>
+          <a:prstGeom prst="rect">
+            <a:avLst/>
+          </a:prstGeom>
+          <a:noFill/>
+        </p:spPr>
+        <p:txBody>
+          <a:bodyPr wrap="none" lIns="0" rIns="0" tIns="0" bIns="0" anchor="t">
+            <a:noAutofit/>
+          </a:bodyPr>
+          <a:lstStyle/>
+          <a:p>
+            <a:pPr algn="l">
+              <a:lnSpc>
+                <a:spcPts val="1364"/>
+              </a:lnSpc>
+              <a:spcBef>
+                <a:spcPts val="0"/>
+              </a:spcBef>
+              <a:spcAft>
+                <a:spcPts val="0"/>
+              </a:spcAft>
+            </a:pPr>
+            <a:r>
+              <a:rPr sz="1000" b="0" i="0">
+                <a:solidFill>
+                  <a:srgbClr val="ECEBE6"/>
+                </a:solidFill>
+                <a:latin typeface="Yu Gothic"/>
+                <a:ea typeface="Yu Gothic"/>
+                <a:cs typeface="Yu Gothic"/>
+              </a:rPr>
+              <a:t>運用イベント（7日で削除）</a:t>
+            </a:r>
+          </a:p>
+        </p:txBody>
+      </p:sp>
+      <p:sp>
+        <p:nvSpPr>
+          <p:cNvPr id="48" name="TextBox 47"/>
+          <p:cNvSpPr txBox="1"/>
+          <p:nvPr/>
+        </p:nvSpPr>
+        <p:spPr>
+          <a:xfrm>
+            <a:off x="5958010" y="3945434"/>
+            <a:ext cx="523482" cy="321915"/>
+          </a:xfrm>
+          <a:prstGeom prst="rect">
+            <a:avLst/>
+          </a:prstGeom>
+          <a:noFill/>
+        </p:spPr>
+        <p:txBody>
+          <a:bodyPr wrap="none" lIns="0" rIns="0" tIns="0" bIns="0" anchor="t">
+            <a:noAutofit/>
+          </a:bodyPr>
+          <a:lstStyle/>
+          <a:p>
+            <a:pPr algn="ctr">
+              <a:lnSpc>
+                <a:spcPts val="1260"/>
+              </a:lnSpc>
+              <a:spcBef>
+                <a:spcPts val="0"/>
+              </a:spcBef>
+              <a:spcAft>
+                <a:spcPts val="0"/>
+              </a:spcAft>
+            </a:pPr>
+            <a:r>
+              <a:rPr sz="900" b="0" i="0">
+                <a:solidFill>
+                  <a:srgbClr val="9A9993"/>
+                </a:solidFill>
+                <a:latin typeface="Yu Gothic"/>
+                <a:ea typeface="Yu Gothic"/>
+                <a:cs typeface="Yu Gothic"/>
+              </a:rPr>
+              <a:t>Tool から</a:t>
+            </a:r>
+          </a:p>
+          <a:p>
+            <a:pPr algn="ctr">
+              <a:lnSpc>
+                <a:spcPts val="1260"/>
+              </a:lnSpc>
+              <a:spcBef>
+                <a:spcPts val="0"/>
+              </a:spcBef>
+              <a:spcAft>
+                <a:spcPts val="0"/>
+              </a:spcAft>
+            </a:pPr>
+            <a:r>
+              <a:rPr sz="900" b="0" i="0">
+                <a:solidFill>
+                  <a:srgbClr val="9A9993"/>
+                </a:solidFill>
+                <a:latin typeface="Yu Gothic"/>
+                <a:ea typeface="Yu Gothic"/>
+                <a:cs typeface="Yu Gothic"/>
+              </a:rPr>
+              <a:t>呼び出す</a:t>
+            </a:r>
+          </a:p>
+        </p:txBody>
+      </p:sp>
+      <p:sp>
+        <p:nvSpPr>
+          <p:cNvPr id="49" name="TextBox 48"/>
+          <p:cNvSpPr txBox="1"/>
+          <p:nvPr/>
+        </p:nvSpPr>
+        <p:spPr>
+          <a:xfrm>
+            <a:off x="6686550" y="2286298"/>
+            <a:ext cx="708291" cy="247650"/>
+          </a:xfrm>
+          <a:prstGeom prst="rect">
+            <a:avLst/>
+          </a:prstGeom>
+          <a:noFill/>
+        </p:spPr>
+        <p:txBody>
+          <a:bodyPr wrap="none" lIns="0" rIns="0" tIns="0" bIns="0" anchor="t">
+            <a:noAutofit/>
+          </a:bodyPr>
+          <a:lstStyle/>
+          <a:p>
+            <a:pPr algn="l">
+              <a:lnSpc>
+                <a:spcPts val="2025"/>
+              </a:lnSpc>
+              <a:spcBef>
+                <a:spcPts val="0"/>
+              </a:spcBef>
+              <a:spcAft>
+                <a:spcPts val="0"/>
+              </a:spcAft>
+            </a:pPr>
+            <a:r>
+              <a:rPr sz="1350" b="1" i="0">
+                <a:solidFill>
+                  <a:srgbClr val="ECEBE6"/>
+                </a:solidFill>
+                <a:latin typeface="Yu Gothic"/>
+                <a:ea typeface="Yu Gothic"/>
+                <a:cs typeface="Yu Gothic"/>
+              </a:rPr>
+              <a:t>外部 API</a:t>
+            </a:r>
+          </a:p>
+        </p:txBody>
+      </p:sp>
+      <p:sp>
+        <p:nvSpPr>
+          <p:cNvPr id="50" name="TextBox 49"/>
+          <p:cNvSpPr txBox="1"/>
+          <p:nvPr/>
+        </p:nvSpPr>
+        <p:spPr>
+          <a:xfrm>
+            <a:off x="6686550" y="2619673"/>
+            <a:ext cx="1537609" cy="180975"/>
+          </a:xfrm>
+          <a:prstGeom prst="rect">
+            <a:avLst/>
+          </a:prstGeom>
+          <a:noFill/>
+        </p:spPr>
+        <p:txBody>
+          <a:bodyPr wrap="none" lIns="0" rIns="0" tIns="0" bIns="0" anchor="t">
+            <a:noAutofit/>
+          </a:bodyPr>
+          <a:lstStyle/>
+          <a:p>
+            <a:pPr algn="l">
+              <a:lnSpc>
+                <a:spcPts val="1413"/>
+              </a:lnSpc>
+              <a:spcBef>
+                <a:spcPts val="0"/>
+              </a:spcBef>
+              <a:spcAft>
+                <a:spcPts val="0"/>
+              </a:spcAft>
+            </a:pPr>
+            <a:r>
+              <a:rPr sz="1000" b="0" i="0">
+                <a:solidFill>
+                  <a:srgbClr val="9A9993"/>
+                </a:solidFill>
+                <a:latin typeface="Yu Gothic"/>
+                <a:ea typeface="Yu Gothic"/>
+                <a:cs typeface="Yu Gothic"/>
+              </a:rPr>
+              <a:t>キーは Worker だけが持つ</a:t>
+            </a:r>
+          </a:p>
+        </p:txBody>
+      </p:sp>
+      <p:sp>
+        <p:nvSpPr>
+          <p:cNvPr id="51" name="TextBox 50"/>
+          <p:cNvSpPr txBox="1"/>
+          <p:nvPr/>
+        </p:nvSpPr>
+        <p:spPr>
+          <a:xfrm>
+            <a:off x="6686550" y="2999184"/>
+            <a:ext cx="519303" cy="190500"/>
+          </a:xfrm>
+          <a:prstGeom prst="rect">
+            <a:avLst/>
+          </a:prstGeom>
+          <a:noFill/>
+        </p:spPr>
+        <p:txBody>
+          <a:bodyPr wrap="none" lIns="0" rIns="0" tIns="0" bIns="0" anchor="t">
+            <a:noAutofit/>
+          </a:bodyPr>
+          <a:lstStyle/>
+          <a:p>
+            <a:pPr algn="l">
+              <a:lnSpc>
+                <a:spcPts val="1575"/>
+              </a:lnSpc>
+              <a:spcBef>
+                <a:spcPts val="0"/>
+              </a:spcBef>
+              <a:spcAft>
+                <a:spcPts val="0"/>
+              </a:spcAft>
+            </a:pPr>
+            <a:r>
+              <a:rPr sz="1050" b="1" i="0">
+                <a:solidFill>
+                  <a:srgbClr val="ECEBE6"/>
+                </a:solidFill>
+                <a:latin typeface="Yu Gothic"/>
+                <a:ea typeface="Yu Gothic"/>
+                <a:cs typeface="Yu Gothic"/>
+              </a:rPr>
+              <a:t>OpenAI</a:t>
+            </a:r>
+          </a:p>
+        </p:txBody>
+      </p:sp>
+      <p:sp>
+        <p:nvSpPr>
+          <p:cNvPr id="52" name="TextBox 51"/>
+          <p:cNvSpPr txBox="1"/>
+          <p:nvPr/>
+        </p:nvSpPr>
+        <p:spPr>
+          <a:xfrm>
+            <a:off x="6686550" y="3208734"/>
+            <a:ext cx="1544574" cy="360462"/>
+          </a:xfrm>
+          <a:prstGeom prst="rect">
+            <a:avLst/>
+          </a:prstGeom>
+          <a:noFill/>
+        </p:spPr>
+        <p:txBody>
+          <a:bodyPr wrap="none" lIns="0" rIns="0" tIns="0" bIns="0" anchor="t">
+            <a:noAutofit/>
+          </a:bodyPr>
+          <a:lstStyle/>
+          <a:p>
+            <a:pPr algn="l">
+              <a:lnSpc>
+                <a:spcPts val="1413"/>
+              </a:lnSpc>
+              <a:spcBef>
+                <a:spcPts val="0"/>
+              </a:spcBef>
+              <a:spcAft>
+                <a:spcPts val="0"/>
+              </a:spcAft>
+            </a:pPr>
+            <a:r>
+              <a:rPr sz="1000" b="0" i="0">
+                <a:solidFill>
+                  <a:srgbClr val="9A9993"/>
+                </a:solidFill>
+                <a:latin typeface="Yu Gothic"/>
+                <a:ea typeface="Yu Gothic"/>
+                <a:cs typeface="Yu Gothic"/>
+              </a:rPr>
+              <a:t>gpt-5.6-luna</a:t>
+            </a:r>
+          </a:p>
+          <a:p>
+            <a:pPr algn="l">
+              <a:lnSpc>
+                <a:spcPts val="1413"/>
+              </a:lnSpc>
+              <a:spcBef>
+                <a:spcPts val="0"/>
+              </a:spcBef>
+              <a:spcAft>
+                <a:spcPts val="0"/>
+              </a:spcAft>
+            </a:pPr>
+            <a:r>
+              <a:rPr sz="1000" b="0" i="0">
+                <a:solidFill>
+                  <a:srgbClr val="9A9993"/>
+                </a:solidFill>
+                <a:latin typeface="Yu Gothic"/>
+                <a:ea typeface="Yu Gothic"/>
+                <a:cs typeface="Yu Gothic"/>
+              </a:rPr>
+              <a:t>（推論は low）</a:t>
+            </a:r>
+          </a:p>
+        </p:txBody>
+      </p:sp>
+      <p:sp>
+        <p:nvSpPr>
+          <p:cNvPr id="53" name="TextBox 52"/>
+          <p:cNvSpPr txBox="1"/>
+          <p:nvPr/>
+        </p:nvSpPr>
+        <p:spPr>
+          <a:xfrm>
+            <a:off x="6686550" y="3767733"/>
+            <a:ext cx="1544574" cy="381000"/>
+          </a:xfrm>
+          <a:prstGeom prst="rect">
+            <a:avLst/>
+          </a:prstGeom>
+          <a:noFill/>
+        </p:spPr>
+        <p:txBody>
+          <a:bodyPr wrap="none" lIns="0" rIns="0" tIns="0" bIns="0" anchor="t">
+            <a:noAutofit/>
+          </a:bodyPr>
+          <a:lstStyle/>
+          <a:p>
+            <a:pPr algn="l">
+              <a:lnSpc>
+                <a:spcPts val="1575"/>
+              </a:lnSpc>
+              <a:spcBef>
+                <a:spcPts val="0"/>
+              </a:spcBef>
+              <a:spcAft>
+                <a:spcPts val="0"/>
+              </a:spcAft>
+            </a:pPr>
+            <a:r>
+              <a:rPr sz="1050" b="1" i="0">
+                <a:solidFill>
+                  <a:srgbClr val="ECEBE6"/>
+                </a:solidFill>
+                <a:latin typeface="Yu Gothic"/>
+                <a:ea typeface="Yu Gothic"/>
+                <a:cs typeface="Yu Gothic"/>
+              </a:rPr>
+              <a:t>ホットペッパー</a:t>
+            </a:r>
+          </a:p>
+          <a:p>
+            <a:pPr algn="l">
+              <a:lnSpc>
+                <a:spcPts val="1575"/>
+              </a:lnSpc>
+              <a:spcBef>
+                <a:spcPts val="0"/>
+              </a:spcBef>
+              <a:spcAft>
+                <a:spcPts val="0"/>
+              </a:spcAft>
+            </a:pPr>
+            <a:r>
+              <a:rPr sz="1050" b="1" i="0">
+                <a:solidFill>
+                  <a:srgbClr val="ECEBE6"/>
+                </a:solidFill>
+                <a:latin typeface="Yu Gothic"/>
+                <a:ea typeface="Yu Gothic"/>
+                <a:cs typeface="Yu Gothic"/>
+              </a:rPr>
+              <a:t>グルメサーチAPI</a:t>
+            </a:r>
+          </a:p>
+        </p:txBody>
+      </p:sp>
+      <p:sp>
+        <p:nvSpPr>
+          <p:cNvPr id="54" name="TextBox 53"/>
+          <p:cNvSpPr txBox="1"/>
+          <p:nvPr/>
+        </p:nvSpPr>
+        <p:spPr>
+          <a:xfrm>
+            <a:off x="6686550" y="4167783"/>
+            <a:ext cx="1435763" cy="180975"/>
+          </a:xfrm>
+          <a:prstGeom prst="rect">
+            <a:avLst/>
+          </a:prstGeom>
+          <a:noFill/>
+        </p:spPr>
+        <p:txBody>
+          <a:bodyPr wrap="none" lIns="0" rIns="0" tIns="0" bIns="0" anchor="t">
+            <a:noAutofit/>
+          </a:bodyPr>
+          <a:lstStyle/>
+          <a:p>
+            <a:pPr algn="l">
+              <a:lnSpc>
+                <a:spcPts val="1413"/>
+              </a:lnSpc>
+              <a:spcBef>
+                <a:spcPts val="0"/>
+              </a:spcBef>
+              <a:spcAft>
+                <a:spcPts val="0"/>
+              </a:spcAft>
+            </a:pPr>
+            <a:r>
+              <a:rPr sz="1000" b="0" i="0">
+                <a:solidFill>
+                  <a:srgbClr val="9A9993"/>
+                </a:solidFill>
+                <a:latin typeface="Yu Gothic"/>
+                <a:ea typeface="Yu Gothic"/>
+                <a:cs typeface="Yu Gothic"/>
+              </a:rPr>
+              <a:t>店舗の検索・詳細・写真</a:t>
+            </a:r>
+          </a:p>
+        </p:txBody>
+      </p:sp>
+      <p:sp>
+        <p:nvSpPr>
+          <p:cNvPr id="55" name="TextBox 54"/>
+          <p:cNvSpPr txBox="1"/>
+          <p:nvPr/>
+        </p:nvSpPr>
+        <p:spPr>
+          <a:xfrm>
+            <a:off x="8686800" y="1629073"/>
+            <a:ext cx="1623822" cy="247650"/>
+          </a:xfrm>
+          <a:prstGeom prst="rect">
+            <a:avLst/>
+          </a:prstGeom>
+          <a:noFill/>
+        </p:spPr>
+        <p:txBody>
+          <a:bodyPr wrap="none" lIns="0" rIns="0" tIns="0" bIns="0" anchor="t">
+            <a:noAutofit/>
+          </a:bodyPr>
+          <a:lstStyle/>
+          <a:p>
+            <a:pPr algn="l">
+              <a:lnSpc>
+                <a:spcPts val="2025"/>
+              </a:lnSpc>
+              <a:spcBef>
+                <a:spcPts val="0"/>
+              </a:spcBef>
+              <a:spcAft>
+                <a:spcPts val="0"/>
+              </a:spcAft>
+            </a:pPr>
+            <a:r>
+              <a:rPr sz="1350" b="1" i="0">
+                <a:solidFill>
+                  <a:srgbClr val="ECEBE6"/>
+                </a:solidFill>
+                <a:latin typeface="Yu Gothic"/>
+                <a:ea typeface="Yu Gothic"/>
+                <a:cs typeface="Yu Gothic"/>
+              </a:rPr>
+              <a:t>この構成にした理由</a:t>
+            </a:r>
+          </a:p>
+        </p:txBody>
+      </p:sp>
+      <p:sp>
+        <p:nvSpPr>
+          <p:cNvPr id="56" name="TextBox 55"/>
+          <p:cNvSpPr txBox="1"/>
+          <p:nvPr/>
+        </p:nvSpPr>
+        <p:spPr>
+          <a:xfrm>
+            <a:off x="8858250" y="2200573"/>
+            <a:ext cx="2784062" cy="445740"/>
+          </a:xfrm>
+          <a:prstGeom prst="rect">
+            <a:avLst/>
+          </a:prstGeom>
+          <a:noFill/>
+        </p:spPr>
+        <p:txBody>
+          <a:bodyPr wrap="square" lIns="0" rIns="0" tIns="0" bIns="0" anchor="t">
+            <a:noAutofit/>
+          </a:bodyPr>
+          <a:lstStyle/>
+          <a:p>
+            <a:pPr algn="l" marL="147638" indent="-147638">
+              <a:lnSpc>
+                <a:spcPts val="1860"/>
+              </a:lnSpc>
+              <a:spcBef>
+                <a:spcPts val="0"/>
+              </a:spcBef>
+              <a:spcAft>
+                <a:spcPts val="0"/>
+              </a:spcAft>
+              <a:buSzPct val="100000"/>
+              <a:buFont typeface="Yu Gothic"/>
+              <a:buChar char="•"/>
+            </a:pPr>
+            <a:r>
+              <a:rPr sz="1150" b="0" i="0">
+                <a:solidFill>
+                  <a:srgbClr val="ECEBE6"/>
+                </a:solidFill>
+                <a:latin typeface="Yu Gothic"/>
+                <a:ea typeface="Yu Gothic"/>
+                <a:cs typeface="Yu Gothic"/>
+              </a:rPr>
+              <a:t>会話と保存の正はサーバーに置き、</a:t>
+            </a:r>
+            <a:br/>
+            <a:r>
+              <a:rPr sz="1150" b="0" i="0">
+                <a:solidFill>
+                  <a:srgbClr val="ECEBE6"/>
+                </a:solidFill>
+                <a:latin typeface="Yu Gothic"/>
+                <a:ea typeface="Yu Gothic"/>
+                <a:cs typeface="Yu Gothic"/>
+              </a:rPr>
+              <a:t>端末の SQLite はキャッシュに留める</a:t>
+            </a:r>
+          </a:p>
+        </p:txBody>
+      </p:sp>
+      <p:sp>
+        <p:nvSpPr>
+          <p:cNvPr id="57" name="TextBox 56"/>
+          <p:cNvSpPr txBox="1"/>
+          <p:nvPr/>
+        </p:nvSpPr>
+        <p:spPr>
+          <a:xfrm>
+            <a:off x="8858250" y="2844403"/>
+            <a:ext cx="2784062" cy="681930"/>
+          </a:xfrm>
+          <a:prstGeom prst="rect">
+            <a:avLst/>
+          </a:prstGeom>
+          <a:noFill/>
+        </p:spPr>
+        <p:txBody>
+          <a:bodyPr wrap="square" lIns="0" rIns="0" tIns="0" bIns="0" anchor="t">
+            <a:noAutofit/>
+          </a:bodyPr>
+          <a:lstStyle/>
+          <a:p>
+            <a:pPr algn="l" marL="147638" indent="-147638">
+              <a:lnSpc>
+                <a:spcPts val="1860"/>
+              </a:lnSpc>
+              <a:spcBef>
+                <a:spcPts val="0"/>
+              </a:spcBef>
+              <a:spcAft>
+                <a:spcPts val="0"/>
+              </a:spcAft>
+              <a:buSzPct val="100000"/>
+              <a:buFont typeface="Yu Gothic"/>
+              <a:buChar char="•"/>
+            </a:pPr>
+            <a:r>
+              <a:rPr sz="1150" b="0" i="0">
+                <a:solidFill>
+                  <a:srgbClr val="ECEBE6"/>
+                </a:solidFill>
+                <a:latin typeface="Yu Gothic"/>
+                <a:ea typeface="Yu Gothic"/>
+                <a:cs typeface="Yu Gothic"/>
+              </a:rPr>
+              <a:t>生成は実行単位で受け付け、</a:t>
+            </a:r>
+            <a:br/>
+            <a:r>
+              <a:rPr sz="1150" b="0" i="0">
+                <a:solidFill>
+                  <a:srgbClr val="ECEBE6"/>
+                </a:solidFill>
+                <a:latin typeface="Yu Gothic"/>
+                <a:ea typeface="Yu Gothic"/>
+                <a:cs typeface="Yu Gothic"/>
+              </a:rPr>
+              <a:t>通信が切れても同じ実行を</a:t>
+            </a:r>
+            <a:br/>
+            <a:r>
+              <a:rPr sz="1150" b="0" i="0">
+                <a:solidFill>
+                  <a:srgbClr val="ECEBE6"/>
+                </a:solidFill>
+                <a:latin typeface="Yu Gothic"/>
+                <a:ea typeface="Yu Gothic"/>
+                <a:cs typeface="Yu Gothic"/>
+              </a:rPr>
+              <a:t>再照会して結果を受け取る</a:t>
+            </a:r>
+          </a:p>
+        </p:txBody>
+      </p:sp>
+      <p:sp>
+        <p:nvSpPr>
+          <p:cNvPr id="58" name="TextBox 57"/>
+          <p:cNvSpPr txBox="1"/>
+          <p:nvPr/>
+        </p:nvSpPr>
+        <p:spPr>
+          <a:xfrm>
+            <a:off x="8858250" y="3724424"/>
+            <a:ext cx="2784062" cy="445740"/>
+          </a:xfrm>
+          <a:prstGeom prst="rect">
+            <a:avLst/>
+          </a:prstGeom>
+          <a:noFill/>
+        </p:spPr>
+        <p:txBody>
+          <a:bodyPr wrap="square" lIns="0" rIns="0" tIns="0" bIns="0" anchor="t">
+            <a:noAutofit/>
+          </a:bodyPr>
+          <a:lstStyle/>
+          <a:p>
+            <a:pPr algn="l" marL="147638" indent="-147638">
+              <a:lnSpc>
+                <a:spcPts val="1860"/>
+              </a:lnSpc>
+              <a:spcBef>
+                <a:spcPts val="0"/>
+              </a:spcBef>
+              <a:spcAft>
+                <a:spcPts val="0"/>
+              </a:spcAft>
+              <a:buSzPct val="100000"/>
+              <a:buFont typeface="Yu Gothic"/>
+              <a:buChar char="•"/>
+            </a:pPr>
+            <a:r>
+              <a:rPr sz="1150" b="0" i="0">
+                <a:solidFill>
+                  <a:srgbClr val="ECEBE6"/>
+                </a:solidFill>
+                <a:latin typeface="Yu Gothic"/>
+                <a:ea typeface="Yu Gothic"/>
+                <a:cs typeface="Yu Gothic"/>
+              </a:rPr>
+              <a:t>会話と保存はユーザーごとの Durable</a:t>
+            </a:r>
+            <a:br/>
+            <a:r>
+              <a:rPr sz="1150" b="0" i="0">
+                <a:solidFill>
+                  <a:srgbClr val="ECEBE6"/>
+                </a:solidFill>
+                <a:latin typeface="Yu Gothic"/>
+                <a:ea typeface="Yu Gothic"/>
+                <a:cs typeface="Yu Gothic"/>
+              </a:rPr>
+              <a:t>Object に分け、他人の会話と混ぜない</a:t>
+            </a:r>
+          </a:p>
+        </p:txBody>
+      </p:sp>
+      <p:sp>
+        <p:nvSpPr>
+          <p:cNvPr id="59" name="TextBox 58"/>
+          <p:cNvSpPr txBox="1"/>
+          <p:nvPr/>
+        </p:nvSpPr>
+        <p:spPr>
+          <a:xfrm>
+            <a:off x="8858250" y="4368254"/>
+            <a:ext cx="2784062" cy="445740"/>
+          </a:xfrm>
+          <a:prstGeom prst="rect">
+            <a:avLst/>
+          </a:prstGeom>
+          <a:noFill/>
+        </p:spPr>
+        <p:txBody>
+          <a:bodyPr wrap="square" lIns="0" rIns="0" tIns="0" bIns="0" anchor="t">
+            <a:noAutofit/>
+          </a:bodyPr>
+          <a:lstStyle/>
+          <a:p>
+            <a:pPr algn="l" marL="147638" indent="-147638">
+              <a:lnSpc>
+                <a:spcPts val="1860"/>
+              </a:lnSpc>
+              <a:spcBef>
+                <a:spcPts val="0"/>
+              </a:spcBef>
+              <a:spcAft>
+                <a:spcPts val="0"/>
+              </a:spcAft>
+              <a:buSzPct val="100000"/>
+              <a:buFont typeface="Yu Gothic"/>
+              <a:buChar char="•"/>
+            </a:pPr>
+            <a:r>
+              <a:rPr sz="1150" b="0" i="0">
+                <a:solidFill>
+                  <a:srgbClr val="ECEBE6"/>
+                </a:solidFill>
+                <a:latin typeface="Yu Gothic"/>
+                <a:ea typeface="Yu Gothic"/>
+                <a:cs typeface="Yu Gothic"/>
+              </a:rPr>
+              <a:t>API キーは Worker の secret に</a:t>
+            </a:r>
+            <a:br/>
+            <a:r>
+              <a:rPr sz="1150" b="0" i="0">
+                <a:solidFill>
+                  <a:srgbClr val="ECEBE6"/>
+                </a:solidFill>
+                <a:latin typeface="Yu Gothic"/>
+                <a:ea typeface="Yu Gothic"/>
+                <a:cs typeface="Yu Gothic"/>
+              </a:rPr>
+              <a:t>だけ置き、アプリには入れない</a:t>
+            </a:r>
+          </a:p>
+        </p:txBody>
+      </p:sp>
+      <p:sp>
+        <p:nvSpPr>
+          <p:cNvPr id="60" name="TextBox 59"/>
+          <p:cNvSpPr txBox="1"/>
+          <p:nvPr/>
+        </p:nvSpPr>
+        <p:spPr>
+          <a:xfrm>
+            <a:off x="609600" y="6481762"/>
+            <a:ext cx="295335" cy="200025"/>
+          </a:xfrm>
+          <a:prstGeom prst="rect">
+            <a:avLst/>
+          </a:prstGeom>
+          <a:noFill/>
+        </p:spPr>
+        <p:txBody>
+          <a:bodyPr wrap="none" lIns="0" rIns="0" tIns="0" bIns="0" anchor="t">
+            <a:noAutofit/>
+          </a:bodyPr>
+          <a:lstStyle/>
+          <a:p>
+            <a:pPr algn="l">
+              <a:lnSpc>
+                <a:spcPts val="1687"/>
+              </a:lnSpc>
+              <a:spcBef>
+                <a:spcPts val="0"/>
+              </a:spcBef>
+              <a:spcAft>
+                <a:spcPts val="0"/>
+              </a:spcAft>
+            </a:pPr>
+            <a:r>
+              <a:rPr sz="1100" b="1" i="0">
+                <a:solidFill>
+                  <a:srgbClr val="9A9993"/>
+                </a:solidFill>
+                <a:latin typeface="Yu Gothic"/>
+                <a:ea typeface="Yu Gothic"/>
+                <a:cs typeface="Yu Gothic"/>
+              </a:rPr>
+              <a:t>ima</a:t>
+            </a:r>
+          </a:p>
+        </p:txBody>
+      </p:sp>
+      <p:sp>
+        <p:nvSpPr>
+          <p:cNvPr id="61" name="TextBox 60"/>
+          <p:cNvSpPr txBox="1"/>
+          <p:nvPr/>
+        </p:nvSpPr>
+        <p:spPr>
+          <a:xfrm>
+            <a:off x="11513641" y="6491288"/>
+            <a:ext cx="90559" cy="180975"/>
+          </a:xfrm>
+          <a:prstGeom prst="rect">
+            <a:avLst/>
+          </a:prstGeom>
+          <a:noFill/>
+        </p:spPr>
+        <p:txBody>
+          <a:bodyPr wrap="none" lIns="0" rIns="0" tIns="0" bIns="0" anchor="t">
+            <a:noAutofit/>
+          </a:bodyPr>
+          <a:lstStyle/>
+          <a:p>
+            <a:pPr algn="l">
+              <a:lnSpc>
+                <a:spcPts val="1462"/>
+              </a:lnSpc>
+              <a:spcBef>
+                <a:spcPts val="0"/>
+              </a:spcBef>
+              <a:spcAft>
+                <a:spcPts val="0"/>
+              </a:spcAft>
+            </a:pPr>
+            <a:r>
+              <a:rPr sz="1000" b="0" i="0">
+                <a:solidFill>
+                  <a:srgbClr val="9A9993"/>
+                </a:solidFill>
+                <a:latin typeface="Yu Gothic"/>
+                <a:ea typeface="Yu Gothic"/>
+                <a:cs typeface="Yu Gothic"/>
+              </a:rPr>
+              <a:t>7</a:t>
+            </a:r>
+          </a:p>
+        </p:txBody>
+      </p:sp>
+    </p:spTree>
+  </p:cSld>
+  <p:clrMapOvr>
+    <a:masterClrMapping/>
+  </p:clrMapOvr>
+</p:sld>
+</file>
+
+<file path=ppt/slides/slide9.xml><?xml version="1.0" encoding="utf-8"?>
+<p:sld xmlns:a="http://schemas.openxmlformats.org/drawingml/2006/main" xmlns:p="http://schemas.openxmlformats.org/presentationml/2006/main" xmlns:r="http://schemas.openxmlformats.org/officeDocument/2006/relationships">
+  <p:cSld>
+    <p:bg>
+      <p:bgPr>
+        <a:solidFill>
+          <a:srgbClr val="0C0C0D"/>
+        </a:solidFill>
+        <a:effectLst/>
+      </p:bgPr>
+    </p:bg>
+    <p:spTree>
+      <p:nvGrpSpPr>
+        <p:cNvPr id="1" name=""/>
+        <p:cNvGrpSpPr/>
+        <p:nvPr/>
+      </p:nvGrpSpPr>
+      <p:grpSpPr/>
+      <p:pic>
+        <p:nvPicPr>
+          <p:cNvPr id="2" name="Picture 1" descr="img_2_3.png"/>
+          <p:cNvPicPr>
+            <a:picLocks noChangeAspect="1"/>
+          </p:cNvPicPr>
+          <p:nvPr/>
+        </p:nvPicPr>
+        <p:blipFill>
+          <a:blip r:embed="rId2"/>
+          <a:stretch>
+            <a:fillRect/>
+          </a:stretch>
+        </p:blipFill>
+        <p:spPr>
+          <a:xfrm>
+            <a:off x="10648950" y="209550"/>
+            <a:ext cx="1123950" cy="1123950"/>
+          </a:xfrm>
+          <a:prstGeom prst="rect">
+            <a:avLst/>
+          </a:prstGeom>
+        </p:spPr>
+      </p:pic>
+      <p:cxnSp>
+        <p:nvCxnSpPr>
+          <p:cNvPr id="3" name="Connector 2"/>
+          <p:cNvCxnSpPr/>
+          <p:nvPr/>
+        </p:nvCxnSpPr>
+        <p:spPr>
+          <a:xfrm>
+            <a:off x="609600" y="1971973"/>
+            <a:ext cx="6572250" cy="0"/>
+          </a:xfrm>
+          <a:prstGeom prst="line">
+            <a:avLst/>
+          </a:prstGeom>
+          <a:ln w="19050">
+            <a:solidFill>
+              <a:srgbClr val="ECEBE6"/>
+            </a:solidFill>
+          </a:ln>
+        </p:spPr>
+      </p:cxnSp>
+      <p:sp>
+        <p:nvSpPr>
+          <p:cNvPr id="4" name="Rectangle 3"/>
+          <p:cNvSpPr/>
+          <p:nvPr/>
+        </p:nvSpPr>
+        <p:spPr>
+          <a:xfrm>
+            <a:off x="609600" y="2114848"/>
+            <a:ext cx="419100" cy="419100"/>
+          </a:xfrm>
+          <a:prstGeom prst="rect">
+            <a:avLst/>
+          </a:prstGeom>
+          <a:solidFill>
+            <a:srgbClr val="1C1C1E"/>
+          </a:solidFill>
+          <a:ln>
+            <a:noFill/>
+          </a:ln>
+        </p:spPr>
+        <p:txBody>
+          <a:bodyPr rtlCol="0" anchor="ctr"/>
+          <a:lstStyle/>
+          <a:p/>
+        </p:txBody>
+      </p:sp>
+      <p:sp>
+        <p:nvSpPr>
+          <p:cNvPr id="5" name="Freeform 4"/>
+          <p:cNvSpPr/>
+          <p:nvPr/>
+        </p:nvSpPr>
+        <p:spPr>
+          <a:xfrm>
+            <a:off x="752475" y="2740521"/>
+            <a:ext cx="133350" cy="85725"/>
+          </a:xfrm>
+          <a:custGeom>
+            <a:avLst/>
+            <a:gdLst/>
+            <a:ahLst/>
+            <a:cxnLst/>
+            <a:rect l="l" t="t" r="r" b="b"/>
+            <a:pathLst>
+              <a:path w="133350" h="85725">
+                <a:moveTo>
+                  <a:pt x="0" y="0"/>
+                </a:moveTo>
+                <a:lnTo>
+                  <a:pt x="133350" y="0"/>
+                </a:lnTo>
+                <a:lnTo>
+                  <a:pt x="66675" y="85725"/>
+                </a:lnTo>
+                <a:close/>
+              </a:path>
+            </a:pathLst>
+          </a:custGeom>
+          <a:solidFill>
+            <a:srgbClr val="6B6A66"/>
+          </a:solidFill>
+          <a:ln>
+            <a:noFill/>
+          </a:ln>
+        </p:spPr>
+        <p:txBody>
+          <a:bodyPr rtlCol="0" anchor="ctr"/>
+          <a:lstStyle/>
+          <a:p/>
+        </p:txBody>
+      </p:sp>
+      <p:sp>
+        <p:nvSpPr>
+          <p:cNvPr id="6" name="Rectangle 5"/>
+          <p:cNvSpPr/>
+          <p:nvPr/>
+        </p:nvSpPr>
+        <p:spPr>
+          <a:xfrm>
+            <a:off x="609600" y="3044726"/>
+            <a:ext cx="419100" cy="419100"/>
+          </a:xfrm>
+          <a:prstGeom prst="rect">
+            <a:avLst/>
+          </a:prstGeom>
+          <a:solidFill>
+            <a:srgbClr val="1C1C1E"/>
+          </a:solidFill>
+          <a:ln>
+            <a:noFill/>
+          </a:ln>
+        </p:spPr>
+        <p:txBody>
+          <a:bodyPr rtlCol="0" anchor="ctr"/>
+          <a:lstStyle/>
+          <a:p/>
+        </p:txBody>
+      </p:sp>
+      <p:sp>
+        <p:nvSpPr>
+          <p:cNvPr id="7" name="Freeform 6"/>
+          <p:cNvSpPr/>
+          <p:nvPr/>
+        </p:nvSpPr>
+        <p:spPr>
+          <a:xfrm>
+            <a:off x="752475" y="3682305"/>
+            <a:ext cx="133350" cy="85725"/>
+          </a:xfrm>
+          <a:custGeom>
+            <a:avLst/>
+            <a:gdLst/>
+            <a:ahLst/>
+            <a:cxnLst/>
+            <a:rect l="l" t="t" r="r" b="b"/>
+            <a:pathLst>
+              <a:path w="133350" h="85725">
+                <a:moveTo>
+                  <a:pt x="0" y="0"/>
+                </a:moveTo>
+                <a:lnTo>
+                  <a:pt x="133350" y="0"/>
+                </a:lnTo>
+                <a:lnTo>
+                  <a:pt x="66675" y="85725"/>
+                </a:lnTo>
+                <a:close/>
+              </a:path>
+            </a:pathLst>
+          </a:custGeom>
+          <a:solidFill>
+            <a:srgbClr val="6B6A66"/>
+          </a:solidFill>
+          <a:ln>
+            <a:noFill/>
+          </a:ln>
+        </p:spPr>
+        <p:txBody>
+          <a:bodyPr rtlCol="0" anchor="ctr"/>
+          <a:lstStyle/>
+          <a:p/>
+        </p:txBody>
+      </p:sp>
+      <p:sp>
+        <p:nvSpPr>
+          <p:cNvPr id="8" name="Rectangle 7"/>
+          <p:cNvSpPr/>
+          <p:nvPr/>
+        </p:nvSpPr>
+        <p:spPr>
+          <a:xfrm>
+            <a:off x="609600" y="4000202"/>
+            <a:ext cx="419100" cy="419100"/>
+          </a:xfrm>
+          <a:prstGeom prst="rect">
+            <a:avLst/>
+          </a:prstGeom>
+          <a:solidFill>
+            <a:srgbClr val="1C1C1E"/>
+          </a:solidFill>
+          <a:ln>
+            <a:noFill/>
+          </a:ln>
+        </p:spPr>
+        <p:txBody>
+          <a:bodyPr rtlCol="0" anchor="ctr"/>
+          <a:lstStyle/>
+          <a:p/>
+        </p:txBody>
+      </p:sp>
+      <p:sp>
+        <p:nvSpPr>
+          <p:cNvPr id="9" name="Freeform 8"/>
+          <p:cNvSpPr/>
+          <p:nvPr/>
+        </p:nvSpPr>
+        <p:spPr>
+          <a:xfrm>
+            <a:off x="752475" y="4651474"/>
+            <a:ext cx="133350" cy="85725"/>
+          </a:xfrm>
+          <a:custGeom>
+            <a:avLst/>
+            <a:gdLst/>
+            <a:ahLst/>
+            <a:cxnLst/>
+            <a:rect l="l" t="t" r="r" b="b"/>
+            <a:pathLst>
+              <a:path w="133350" h="85725">
+                <a:moveTo>
+                  <a:pt x="0" y="0"/>
+                </a:moveTo>
+                <a:lnTo>
+                  <a:pt x="133350" y="0"/>
+                </a:lnTo>
+                <a:lnTo>
+                  <a:pt x="66675" y="85725"/>
+                </a:lnTo>
+                <a:close/>
+              </a:path>
+            </a:pathLst>
+          </a:custGeom>
+          <a:solidFill>
+            <a:srgbClr val="6B6A66"/>
+          </a:solidFill>
+          <a:ln>
+            <a:noFill/>
+          </a:ln>
+        </p:spPr>
+        <p:txBody>
+          <a:bodyPr rtlCol="0" anchor="ctr"/>
+          <a:lstStyle/>
+          <a:p/>
+        </p:txBody>
+      </p:sp>
+      <p:sp>
+        <p:nvSpPr>
+          <p:cNvPr id="10" name="Rectangle 9"/>
+          <p:cNvSpPr/>
+          <p:nvPr/>
+        </p:nvSpPr>
+        <p:spPr>
+          <a:xfrm>
+            <a:off x="609600" y="4943773"/>
+            <a:ext cx="419100" cy="419100"/>
+          </a:xfrm>
+          <a:prstGeom prst="rect">
+            <a:avLst/>
+          </a:prstGeom>
+          <a:solidFill>
+            <a:srgbClr val="1C1C1E"/>
+          </a:solidFill>
+          <a:ln>
+            <a:noFill/>
+          </a:ln>
+        </p:spPr>
+        <p:txBody>
+          <a:bodyPr rtlCol="0" anchor="ctr"/>
+          <a:lstStyle/>
+          <a:p/>
+        </p:txBody>
+      </p:sp>
+      <p:sp>
+        <p:nvSpPr>
+          <p:cNvPr id="11" name="Freeform 10"/>
+          <p:cNvSpPr/>
+          <p:nvPr/>
+        </p:nvSpPr>
+        <p:spPr>
+          <a:xfrm>
+            <a:off x="752475" y="5569446"/>
+            <a:ext cx="133350" cy="85725"/>
+          </a:xfrm>
+          <a:custGeom>
+            <a:avLst/>
+            <a:gdLst/>
+            <a:ahLst/>
+            <a:cxnLst/>
+            <a:rect l="l" t="t" r="r" b="b"/>
+            <a:pathLst>
+              <a:path w="133350" h="85725">
+                <a:moveTo>
+                  <a:pt x="0" y="0"/>
+                </a:moveTo>
+                <a:lnTo>
+                  <a:pt x="133350" y="0"/>
+                </a:lnTo>
+                <a:lnTo>
+                  <a:pt x="66675" y="85725"/>
+                </a:lnTo>
+                <a:close/>
+              </a:path>
+            </a:pathLst>
+          </a:custGeom>
+          <a:solidFill>
+            <a:srgbClr val="6B6A66"/>
+          </a:solidFill>
+          <a:ln>
+            <a:noFill/>
+          </a:ln>
+        </p:spPr>
+        <p:txBody>
+          <a:bodyPr rtlCol="0" anchor="ctr"/>
+          <a:lstStyle/>
+          <a:p/>
+        </p:txBody>
+      </p:sp>
+      <p:sp>
+        <p:nvSpPr>
+          <p:cNvPr id="12" name="Rectangle 11"/>
+          <p:cNvSpPr/>
+          <p:nvPr/>
+        </p:nvSpPr>
+        <p:spPr>
+          <a:xfrm>
+            <a:off x="609600" y="5873651"/>
+            <a:ext cx="419100" cy="419100"/>
+          </a:xfrm>
+          <a:prstGeom prst="rect">
+            <a:avLst/>
+          </a:prstGeom>
+          <a:solidFill>
+            <a:srgbClr val="1C1C1E"/>
+          </a:solidFill>
+          <a:ln>
+            <a:noFill/>
+          </a:ln>
+        </p:spPr>
+        <p:txBody>
+          <a:bodyPr rtlCol="0" anchor="ctr"/>
+          <a:lstStyle/>
+          <a:p/>
+        </p:txBody>
+      </p:sp>
+      <p:cxnSp>
+        <p:nvCxnSpPr>
+          <p:cNvPr id="13" name="Connector 12"/>
+          <p:cNvCxnSpPr/>
+          <p:nvPr/>
+        </p:nvCxnSpPr>
+        <p:spPr>
+          <a:xfrm>
+            <a:off x="7600950" y="1971973"/>
+            <a:ext cx="3981450" cy="0"/>
+          </a:xfrm>
+          <a:prstGeom prst="line">
+            <a:avLst/>
+          </a:prstGeom>
+          <a:ln w="19050">
+            <a:solidFill>
+              <a:srgbClr val="ECEBE6"/>
+            </a:solidFill>
+          </a:ln>
+        </p:spPr>
+      </p:cxnSp>
+      <p:sp>
+        <p:nvSpPr>
+          <p:cNvPr id="14" name="Title"/>
+          <p:cNvSpPr txBox="1"/>
+          <p:nvPr/>
+        </p:nvSpPr>
+        <p:spPr>
+          <a:xfrm>
+            <a:off x="609600" y="428625"/>
+            <a:ext cx="10024110" cy="847874"/>
+          </a:xfrm>
+          <a:prstGeom prst="rect">
+            <a:avLst/>
+          </a:prstGeom>
+          <a:noFill/>
+        </p:spPr>
+        <p:txBody>
+          <a:bodyPr wrap="none" lIns="0" rIns="0" tIns="0" bIns="0" anchor="t">
+            <a:noAutofit/>
+          </a:bodyPr>
+          <a:lstStyle/>
+          <a:p>
+            <a:pPr algn="l">
+              <a:lnSpc>
+                <a:spcPts val="3301"/>
+              </a:lnSpc>
+              <a:spcBef>
+                <a:spcPts val="0"/>
+              </a:spcBef>
+              <a:spcAft>
+                <a:spcPts val="0"/>
+              </a:spcAft>
+            </a:pPr>
+            <a:r>
+              <a:rPr sz="2300" b="1" i="0">
+                <a:solidFill>
+                  <a:srgbClr val="ECEBE6"/>
+                </a:solidFill>
+                <a:latin typeface="Yu Gothic"/>
+                <a:ea typeface="Yu Gothic"/>
+                <a:cs typeface="Yu Gothic"/>
+              </a:rPr>
+              <a:t>ima の AI は3つの Tool だけを使い、</a:t>
+            </a:r>
+          </a:p>
+          <a:p>
+            <a:pPr algn="l">
+              <a:lnSpc>
+                <a:spcPts val="3301"/>
+              </a:lnSpc>
+              <a:spcBef>
+                <a:spcPts val="0"/>
+              </a:spcBef>
+              <a:spcAft>
+                <a:spcPts val="0"/>
+              </a:spcAft>
+            </a:pPr>
+            <a:r>
+              <a:rPr sz="2300" b="1" i="0">
+                <a:solidFill>
+                  <a:srgbClr val="ECEBE6"/>
+                </a:solidFill>
+                <a:latin typeface="Yu Gothic"/>
+                <a:ea typeface="Yu Gothic"/>
+                <a:cs typeface="Yu Gothic"/>
+              </a:rPr>
+              <a:t>応答は respond で1回だけ確定させる</a:t>
+            </a:r>
+          </a:p>
+        </p:txBody>
+      </p:sp>
+      <p:sp>
+        <p:nvSpPr>
+          <p:cNvPr id="15" name="TextBox 14"/>
+          <p:cNvSpPr txBox="1"/>
+          <p:nvPr/>
+        </p:nvSpPr>
+        <p:spPr>
+          <a:xfrm>
+            <a:off x="609600" y="1629073"/>
+            <a:ext cx="2085689" cy="247650"/>
+          </a:xfrm>
+          <a:prstGeom prst="rect">
+            <a:avLst/>
+          </a:prstGeom>
+          <a:noFill/>
+        </p:spPr>
+        <p:txBody>
+          <a:bodyPr wrap="none" lIns="0" rIns="0" tIns="0" bIns="0" anchor="t">
+            <a:noAutofit/>
+          </a:bodyPr>
+          <a:lstStyle/>
+          <a:p>
+            <a:pPr algn="l">
+              <a:lnSpc>
+                <a:spcPts val="2025"/>
+              </a:lnSpc>
+              <a:spcBef>
+                <a:spcPts val="0"/>
+              </a:spcBef>
+              <a:spcAft>
+                <a:spcPts val="0"/>
+              </a:spcAft>
+            </a:pPr>
+            <a:r>
+              <a:rPr sz="1350" b="1" i="0">
+                <a:solidFill>
+                  <a:srgbClr val="ECEBE6"/>
+                </a:solidFill>
+                <a:latin typeface="Yu Gothic"/>
+                <a:ea typeface="Yu Gothic"/>
+                <a:cs typeface="Yu Gothic"/>
+              </a:rPr>
+              <a:t>1回の発言を処理する流れ</a:t>
+            </a:r>
+          </a:p>
+        </p:txBody>
+      </p:sp>
+      <p:sp>
+        <p:nvSpPr>
+          <p:cNvPr id="16" name="TextBox 15"/>
+          <p:cNvSpPr txBox="1"/>
+          <p:nvPr/>
+        </p:nvSpPr>
+        <p:spPr>
+          <a:xfrm>
+            <a:off x="766911" y="2200573"/>
+            <a:ext cx="127706" cy="247650"/>
+          </a:xfrm>
+          <a:prstGeom prst="rect">
+            <a:avLst/>
+          </a:prstGeom>
+          <a:noFill/>
+        </p:spPr>
+        <p:txBody>
+          <a:bodyPr wrap="none" lIns="0" rIns="0" tIns="0" bIns="0" anchor="t">
+            <a:noAutofit/>
+          </a:bodyPr>
+          <a:lstStyle/>
+          <a:p>
+            <a:pPr algn="l">
+              <a:lnSpc>
+                <a:spcPts val="2025"/>
+              </a:lnSpc>
+              <a:spcBef>
+                <a:spcPts val="0"/>
+              </a:spcBef>
+              <a:spcAft>
+                <a:spcPts val="0"/>
+              </a:spcAft>
+            </a:pPr>
+            <a:r>
+              <a:rPr sz="1350" b="1" i="0">
+                <a:solidFill>
+                  <a:srgbClr val="B7C97A"/>
+                </a:solidFill>
+                <a:latin typeface="Yu Gothic"/>
+                <a:ea typeface="Yu Gothic"/>
+                <a:cs typeface="Yu Gothic"/>
+              </a:rPr>
+              <a:t>1</a:t>
+            </a:r>
+          </a:p>
+        </p:txBody>
+      </p:sp>
+      <p:sp>
+        <p:nvSpPr>
+          <p:cNvPr id="17" name="TextBox 16"/>
+          <p:cNvSpPr txBox="1"/>
+          <p:nvPr/>
+        </p:nvSpPr>
+        <p:spPr>
+          <a:xfrm>
+            <a:off x="1162050" y="2201466"/>
+            <a:ext cx="1366266" cy="238125"/>
+          </a:xfrm>
+          <a:prstGeom prst="rect">
+            <a:avLst/>
+          </a:prstGeom>
+          <a:noFill/>
+        </p:spPr>
+        <p:txBody>
+          <a:bodyPr wrap="none" lIns="0" rIns="0" tIns="0" bIns="0" anchor="t">
+            <a:noAutofit/>
+          </a:bodyPr>
+          <a:lstStyle/>
+          <a:p>
+            <a:pPr algn="l">
+              <a:lnSpc>
+                <a:spcPts val="1785"/>
+              </a:lnSpc>
+              <a:spcBef>
+                <a:spcPts val="0"/>
+              </a:spcBef>
+              <a:spcAft>
+                <a:spcPts val="0"/>
+              </a:spcAft>
+            </a:pPr>
+            <a:r>
+              <a:rPr sz="1300" b="1" i="0">
+                <a:solidFill>
+                  <a:srgbClr val="ECEBE6"/>
+                </a:solidFill>
+                <a:latin typeface="Yu Gothic"/>
+                <a:ea typeface="Yu Gothic"/>
+                <a:cs typeface="Yu Gothic"/>
+              </a:rPr>
+              <a:t>発言を受け付ける</a:t>
+            </a:r>
+          </a:p>
+        </p:txBody>
+      </p:sp>
+      <p:sp>
+        <p:nvSpPr>
+          <p:cNvPr id="18" name="TextBox 17"/>
+          <p:cNvSpPr txBox="1"/>
+          <p:nvPr/>
+        </p:nvSpPr>
+        <p:spPr>
+          <a:xfrm>
+            <a:off x="3162300" y="2223195"/>
+            <a:ext cx="3372386" cy="200025"/>
+          </a:xfrm>
+          <a:prstGeom prst="rect">
+            <a:avLst/>
+          </a:prstGeom>
+          <a:noFill/>
+        </p:spPr>
+        <p:txBody>
+          <a:bodyPr wrap="none" lIns="0" rIns="0" tIns="0" bIns="0" anchor="t">
+            <a:noAutofit/>
+          </a:bodyPr>
+          <a:lstStyle/>
+          <a:p>
+            <a:pPr algn="l">
+              <a:lnSpc>
+                <a:spcPts val="1743"/>
+              </a:lnSpc>
+              <a:spcBef>
+                <a:spcPts val="0"/>
+              </a:spcBef>
+              <a:spcAft>
+                <a:spcPts val="0"/>
+              </a:spcAft>
+            </a:pPr>
+            <a:r>
+              <a:rPr sz="1100" b="0" i="0">
+                <a:solidFill>
+                  <a:srgbClr val="ECEBE6"/>
+                </a:solidFill>
+                <a:latin typeface="Yu Gothic"/>
+                <a:ea typeface="Yu Gothic"/>
+                <a:cs typeface="Yu Gothic"/>
+              </a:rPr>
+              <a:t>Worker が発言を会話に保存し、実行の受付を返す</a:t>
+            </a:r>
+          </a:p>
+        </p:txBody>
+      </p:sp>
+      <p:sp>
+        <p:nvSpPr>
+          <p:cNvPr id="19" name="TextBox 18"/>
+          <p:cNvSpPr txBox="1"/>
+          <p:nvPr/>
+        </p:nvSpPr>
+        <p:spPr>
+          <a:xfrm>
+            <a:off x="766911" y="3130451"/>
+            <a:ext cx="127706" cy="247650"/>
+          </a:xfrm>
+          <a:prstGeom prst="rect">
+            <a:avLst/>
+          </a:prstGeom>
+          <a:noFill/>
+        </p:spPr>
+        <p:txBody>
+          <a:bodyPr wrap="none" lIns="0" rIns="0" tIns="0" bIns="0" anchor="t">
+            <a:noAutofit/>
+          </a:bodyPr>
+          <a:lstStyle/>
+          <a:p>
+            <a:pPr algn="l">
+              <a:lnSpc>
+                <a:spcPts val="2025"/>
+              </a:lnSpc>
+              <a:spcBef>
+                <a:spcPts val="0"/>
+              </a:spcBef>
+              <a:spcAft>
+                <a:spcPts val="0"/>
+              </a:spcAft>
+            </a:pPr>
+            <a:r>
+              <a:rPr sz="1350" b="1" i="0">
+                <a:solidFill>
+                  <a:srgbClr val="B7C97A"/>
+                </a:solidFill>
+                <a:latin typeface="Yu Gothic"/>
+                <a:ea typeface="Yu Gothic"/>
+                <a:cs typeface="Yu Gothic"/>
+              </a:rPr>
+              <a:t>2</a:t>
+            </a:r>
+          </a:p>
+        </p:txBody>
+      </p:sp>
+      <p:sp>
+        <p:nvSpPr>
+          <p:cNvPr id="20" name="TextBox 19"/>
+          <p:cNvSpPr txBox="1"/>
+          <p:nvPr/>
+        </p:nvSpPr>
+        <p:spPr>
+          <a:xfrm>
+            <a:off x="1162050" y="3131344"/>
+            <a:ext cx="1019401" cy="238125"/>
+          </a:xfrm>
+          <a:prstGeom prst="rect">
+            <a:avLst/>
+          </a:prstGeom>
+          <a:noFill/>
+        </p:spPr>
+        <p:txBody>
+          <a:bodyPr wrap="none" lIns="0" rIns="0" tIns="0" bIns="0" anchor="t">
+            <a:noAutofit/>
+          </a:bodyPr>
+          <a:lstStyle/>
+          <a:p>
+            <a:pPr algn="l">
+              <a:lnSpc>
+                <a:spcPts val="1785"/>
+              </a:lnSpc>
+              <a:spcBef>
+                <a:spcPts val="0"/>
+              </a:spcBef>
+              <a:spcAft>
+                <a:spcPts val="0"/>
+              </a:spcAft>
+            </a:pPr>
+            <a:r>
+              <a:rPr sz="1300" b="1" i="0">
+                <a:solidFill>
+                  <a:srgbClr val="ECEBE6"/>
+                </a:solidFill>
+                <a:latin typeface="Yu Gothic"/>
+                <a:ea typeface="Yu Gothic"/>
+                <a:cs typeface="Yu Gothic"/>
+              </a:rPr>
+              <a:t>ループを回す</a:t>
+            </a:r>
+          </a:p>
+        </p:txBody>
+      </p:sp>
+      <p:sp>
+        <p:nvSpPr>
+          <p:cNvPr id="21" name="TextBox 20"/>
+          <p:cNvSpPr txBox="1"/>
+          <p:nvPr/>
+        </p:nvSpPr>
+        <p:spPr>
+          <a:xfrm>
+            <a:off x="3162300" y="3042345"/>
+            <a:ext cx="4199382" cy="421481"/>
+          </a:xfrm>
+          <a:prstGeom prst="rect">
+            <a:avLst/>
+          </a:prstGeom>
+          <a:noFill/>
+        </p:spPr>
+        <p:txBody>
+          <a:bodyPr wrap="none" lIns="0" rIns="0" tIns="0" bIns="0" anchor="t">
+            <a:noAutofit/>
+          </a:bodyPr>
+          <a:lstStyle/>
+          <a:p>
+            <a:pPr algn="l">
+              <a:lnSpc>
+                <a:spcPts val="1743"/>
+              </a:lnSpc>
+              <a:spcBef>
+                <a:spcPts val="0"/>
+              </a:spcBef>
+              <a:spcAft>
+                <a:spcPts val="0"/>
+              </a:spcAft>
+            </a:pPr>
+            <a:r>
+              <a:rPr sz="1100" b="0" i="0">
+                <a:solidFill>
+                  <a:srgbClr val="ECEBE6"/>
+                </a:solidFill>
+                <a:latin typeface="Yu Gothic"/>
+                <a:ea typeface="Yu Gothic"/>
+                <a:cs typeface="Yu Gothic"/>
+              </a:rPr>
+              <a:t>ThreadDO の Think がモデルを呼ぶ</a:t>
+            </a:r>
+          </a:p>
+          <a:p>
+            <a:pPr algn="l">
+              <a:lnSpc>
+                <a:spcPts val="1743"/>
+              </a:lnSpc>
+              <a:spcBef>
+                <a:spcPts val="0"/>
+              </a:spcBef>
+              <a:spcAft>
+                <a:spcPts val="0"/>
+              </a:spcAft>
+            </a:pPr>
+            <a:r>
+              <a:rPr sz="1100" b="0" i="0">
+                <a:solidFill>
+                  <a:srgbClr val="ECEBE6"/>
+                </a:solidFill>
+                <a:latin typeface="Yu Gothic"/>
+                <a:ea typeface="Yu Gothic"/>
+                <a:cs typeface="Yu Gothic"/>
+              </a:rPr>
+              <a:t>（1回の発言につき最大6ステップ・60秒）</a:t>
+            </a:r>
+          </a:p>
+        </p:txBody>
+      </p:sp>
+      <p:sp>
+        <p:nvSpPr>
+          <p:cNvPr id="22" name="TextBox 21"/>
+          <p:cNvSpPr txBox="1"/>
+          <p:nvPr/>
+        </p:nvSpPr>
+        <p:spPr>
+          <a:xfrm>
+            <a:off x="766911" y="4085927"/>
+            <a:ext cx="127706" cy="247650"/>
+          </a:xfrm>
+          <a:prstGeom prst="rect">
+            <a:avLst/>
+          </a:prstGeom>
+          <a:noFill/>
+        </p:spPr>
+        <p:txBody>
+          <a:bodyPr wrap="none" lIns="0" rIns="0" tIns="0" bIns="0" anchor="t">
+            <a:noAutofit/>
+          </a:bodyPr>
+          <a:lstStyle/>
+          <a:p>
+            <a:pPr algn="l">
+              <a:lnSpc>
+                <a:spcPts val="2025"/>
+              </a:lnSpc>
+              <a:spcBef>
+                <a:spcPts val="0"/>
+              </a:spcBef>
+              <a:spcAft>
+                <a:spcPts val="0"/>
+              </a:spcAft>
+            </a:pPr>
+            <a:r>
+              <a:rPr sz="1350" b="1" i="0">
+                <a:solidFill>
+                  <a:srgbClr val="B7C97A"/>
+                </a:solidFill>
+                <a:latin typeface="Yu Gothic"/>
+                <a:ea typeface="Yu Gothic"/>
+                <a:cs typeface="Yu Gothic"/>
+              </a:rPr>
+              <a:t>3</a:t>
+            </a:r>
+          </a:p>
+        </p:txBody>
+      </p:sp>
+      <p:sp>
+        <p:nvSpPr>
+          <p:cNvPr id="23" name="TextBox 22"/>
+          <p:cNvSpPr txBox="1"/>
+          <p:nvPr/>
+        </p:nvSpPr>
+        <p:spPr>
+          <a:xfrm>
+            <a:off x="1162050" y="4086820"/>
+            <a:ext cx="1534668" cy="238125"/>
+          </a:xfrm>
+          <a:prstGeom prst="rect">
+            <a:avLst/>
+          </a:prstGeom>
+          <a:noFill/>
+        </p:spPr>
+        <p:txBody>
+          <a:bodyPr wrap="none" lIns="0" rIns="0" tIns="0" bIns="0" anchor="t">
+            <a:noAutofit/>
+          </a:bodyPr>
+          <a:lstStyle/>
+          <a:p>
+            <a:pPr algn="l">
+              <a:lnSpc>
+                <a:spcPts val="1785"/>
+              </a:lnSpc>
+              <a:spcBef>
+                <a:spcPts val="0"/>
+              </a:spcBef>
+              <a:spcAft>
+                <a:spcPts val="0"/>
+              </a:spcAft>
+            </a:pPr>
+            <a:r>
+              <a:rPr sz="1300" b="1" i="0">
+                <a:solidFill>
+                  <a:srgbClr val="ECEBE6"/>
+                </a:solidFill>
+                <a:latin typeface="Yu Gothic"/>
+                <a:ea typeface="Yu Gothic"/>
+                <a:cs typeface="Yu Gothic"/>
+              </a:rPr>
+              <a:t>お店の情報を集める</a:t>
+            </a:r>
+          </a:p>
+        </p:txBody>
+      </p:sp>
+      <p:sp>
+        <p:nvSpPr>
+          <p:cNvPr id="24" name="TextBox 23"/>
+          <p:cNvSpPr txBox="1"/>
+          <p:nvPr/>
+        </p:nvSpPr>
+        <p:spPr>
+          <a:xfrm>
+            <a:off x="3162300" y="3984129"/>
+            <a:ext cx="4199382" cy="435173"/>
+          </a:xfrm>
+          <a:prstGeom prst="rect">
+            <a:avLst/>
+          </a:prstGeom>
+          <a:noFill/>
+        </p:spPr>
+        <p:txBody>
+          <a:bodyPr wrap="none" lIns="0" rIns="0" tIns="0" bIns="0" anchor="t">
+            <a:noAutofit/>
+          </a:bodyPr>
+          <a:lstStyle/>
+          <a:p>
+            <a:pPr algn="l">
+              <a:lnSpc>
+                <a:spcPts val="1743"/>
+              </a:lnSpc>
+              <a:spcBef>
+                <a:spcPts val="0"/>
+              </a:spcBef>
+              <a:spcAft>
+                <a:spcPts val="0"/>
+              </a:spcAft>
+            </a:pPr>
+            <a:r>
+              <a:rPr sz="1050" b="0" i="0">
+                <a:solidFill>
+                  <a:srgbClr val="B7C97A"/>
+                </a:solidFill>
+                <a:latin typeface="Yu Gothic"/>
+                <a:ea typeface="Yu Gothic"/>
+                <a:cs typeface="Yu Gothic"/>
+              </a:rPr>
+              <a:t>search_places</a:t>
+            </a:r>
+            <a:r>
+              <a:rPr sz="1100" b="0" i="0">
+                <a:solidFill>
+                  <a:srgbClr val="ECEBE6"/>
+                </a:solidFill>
+                <a:latin typeface="Yu Gothic"/>
+                <a:ea typeface="Yu Gothic"/>
+                <a:cs typeface="Yu Gothic"/>
+              </a:rPr>
+              <a:t> で探し、</a:t>
+            </a:r>
+          </a:p>
+          <a:p>
+            <a:pPr algn="l">
+              <a:lnSpc>
+                <a:spcPts val="1743"/>
+              </a:lnSpc>
+              <a:spcBef>
+                <a:spcPts val="0"/>
+              </a:spcBef>
+              <a:spcAft>
+                <a:spcPts val="0"/>
+              </a:spcAft>
+            </a:pPr>
+            <a:r>
+              <a:rPr sz="1050" b="0" i="0">
+                <a:solidFill>
+                  <a:srgbClr val="B7C97A"/>
+                </a:solidFill>
+                <a:latin typeface="Yu Gothic"/>
+                <a:ea typeface="Yu Gothic"/>
+                <a:cs typeface="Yu Gothic"/>
+              </a:rPr>
+              <a:t>get_place_details</a:t>
+            </a:r>
+            <a:r>
+              <a:rPr sz="1100" b="0" i="0">
+                <a:solidFill>
+                  <a:srgbClr val="ECEBE6"/>
+                </a:solidFill>
+                <a:latin typeface="Yu Gothic"/>
+                <a:ea typeface="Yu Gothic"/>
+                <a:cs typeface="Yu Gothic"/>
+              </a:rPr>
+              <a:t> で詳細を取り直す</a:t>
+            </a:r>
+          </a:p>
+        </p:txBody>
+      </p:sp>
+      <p:sp>
+        <p:nvSpPr>
+          <p:cNvPr id="25" name="TextBox 24"/>
+          <p:cNvSpPr txBox="1"/>
+          <p:nvPr/>
+        </p:nvSpPr>
+        <p:spPr>
+          <a:xfrm>
+            <a:off x="766911" y="5029498"/>
+            <a:ext cx="127706" cy="247650"/>
+          </a:xfrm>
+          <a:prstGeom prst="rect">
+            <a:avLst/>
+          </a:prstGeom>
+          <a:noFill/>
+        </p:spPr>
+        <p:txBody>
+          <a:bodyPr wrap="none" lIns="0" rIns="0" tIns="0" bIns="0" anchor="t">
+            <a:noAutofit/>
+          </a:bodyPr>
+          <a:lstStyle/>
+          <a:p>
+            <a:pPr algn="l">
+              <a:lnSpc>
+                <a:spcPts val="2025"/>
+              </a:lnSpc>
+              <a:spcBef>
+                <a:spcPts val="0"/>
+              </a:spcBef>
+              <a:spcAft>
+                <a:spcPts val="0"/>
+              </a:spcAft>
+            </a:pPr>
+            <a:r>
+              <a:rPr sz="1350" b="1" i="0">
+                <a:solidFill>
+                  <a:srgbClr val="B7C97A"/>
+                </a:solidFill>
+                <a:latin typeface="Yu Gothic"/>
+                <a:ea typeface="Yu Gothic"/>
+                <a:cs typeface="Yu Gothic"/>
+              </a:rPr>
+              <a:t>4</a:t>
+            </a:r>
+          </a:p>
+        </p:txBody>
+      </p:sp>
+      <p:sp>
+        <p:nvSpPr>
+          <p:cNvPr id="26" name="TextBox 25"/>
+          <p:cNvSpPr txBox="1"/>
+          <p:nvPr/>
+        </p:nvSpPr>
+        <p:spPr>
+          <a:xfrm>
+            <a:off x="1162050" y="5030391"/>
+            <a:ext cx="861060" cy="238125"/>
+          </a:xfrm>
+          <a:prstGeom prst="rect">
+            <a:avLst/>
+          </a:prstGeom>
+          <a:noFill/>
+        </p:spPr>
+        <p:txBody>
+          <a:bodyPr wrap="none" lIns="0" rIns="0" tIns="0" bIns="0" anchor="t">
+            <a:noAutofit/>
+          </a:bodyPr>
+          <a:lstStyle/>
+          <a:p>
+            <a:pPr algn="l">
+              <a:lnSpc>
+                <a:spcPts val="1785"/>
+              </a:lnSpc>
+              <a:spcBef>
+                <a:spcPts val="0"/>
+              </a:spcBef>
+              <a:spcAft>
+                <a:spcPts val="0"/>
+              </a:spcAft>
+            </a:pPr>
+            <a:r>
+              <a:rPr sz="1300" b="1" i="0">
+                <a:solidFill>
+                  <a:srgbClr val="ECEBE6"/>
+                </a:solidFill>
+                <a:latin typeface="Yu Gothic"/>
+                <a:ea typeface="Yu Gothic"/>
+                <a:cs typeface="Yu Gothic"/>
+              </a:rPr>
+              <a:t>応答を出す</a:t>
+            </a:r>
+          </a:p>
+        </p:txBody>
+      </p:sp>
+      <p:sp>
+        <p:nvSpPr>
+          <p:cNvPr id="27" name="TextBox 26"/>
+          <p:cNvSpPr txBox="1"/>
+          <p:nvPr/>
+        </p:nvSpPr>
+        <p:spPr>
+          <a:xfrm>
+            <a:off x="3162300" y="5045273"/>
+            <a:ext cx="3691235" cy="200025"/>
+          </a:xfrm>
+          <a:prstGeom prst="rect">
+            <a:avLst/>
+          </a:prstGeom>
+          <a:noFill/>
+        </p:spPr>
+        <p:txBody>
+          <a:bodyPr wrap="none" lIns="0" rIns="0" tIns="0" bIns="0" anchor="t">
+            <a:noAutofit/>
+          </a:bodyPr>
+          <a:lstStyle/>
+          <a:p>
+            <a:pPr algn="l">
+              <a:lnSpc>
+                <a:spcPts val="1743"/>
+              </a:lnSpc>
+              <a:spcBef>
+                <a:spcPts val="0"/>
+              </a:spcBef>
+              <a:spcAft>
+                <a:spcPts val="0"/>
+              </a:spcAft>
+            </a:pPr>
+            <a:r>
+              <a:rPr sz="1050" b="0" i="0">
+                <a:solidFill>
+                  <a:srgbClr val="B7C97A"/>
+                </a:solidFill>
+                <a:latin typeface="Yu Gothic"/>
+                <a:ea typeface="Yu Gothic"/>
+                <a:cs typeface="Yu Gothic"/>
+              </a:rPr>
+              <a:t>respond</a:t>
+            </a:r>
+            <a:r>
+              <a:rPr sz="1100" b="0" i="0">
+                <a:solidFill>
+                  <a:srgbClr val="ECEBE6"/>
+                </a:solidFill>
+                <a:latin typeface="Yu Gothic"/>
+                <a:ea typeface="Yu Gothic"/>
+                <a:cs typeface="Yu Gothic"/>
+              </a:rPr>
+              <a:t> で質問・説明・カード提案のどれか1つを返す</a:t>
+            </a:r>
+          </a:p>
+        </p:txBody>
+      </p:sp>
+      <p:sp>
+        <p:nvSpPr>
+          <p:cNvPr id="28" name="TextBox 27"/>
+          <p:cNvSpPr txBox="1"/>
+          <p:nvPr/>
+        </p:nvSpPr>
+        <p:spPr>
+          <a:xfrm>
+            <a:off x="766911" y="5959376"/>
+            <a:ext cx="127706" cy="247650"/>
+          </a:xfrm>
+          <a:prstGeom prst="rect">
+            <a:avLst/>
+          </a:prstGeom>
+          <a:noFill/>
+        </p:spPr>
+        <p:txBody>
+          <a:bodyPr wrap="none" lIns="0" rIns="0" tIns="0" bIns="0" anchor="t">
+            <a:noAutofit/>
+          </a:bodyPr>
+          <a:lstStyle/>
+          <a:p>
+            <a:pPr algn="l">
+              <a:lnSpc>
+                <a:spcPts val="2025"/>
+              </a:lnSpc>
+              <a:spcBef>
+                <a:spcPts val="0"/>
+              </a:spcBef>
+              <a:spcAft>
+                <a:spcPts val="0"/>
+              </a:spcAft>
+            </a:pPr>
+            <a:r>
+              <a:rPr sz="1350" b="1" i="0">
+                <a:solidFill>
+                  <a:srgbClr val="B7C97A"/>
+                </a:solidFill>
+                <a:latin typeface="Yu Gothic"/>
+                <a:ea typeface="Yu Gothic"/>
+                <a:cs typeface="Yu Gothic"/>
+              </a:rPr>
+              <a:t>5</a:t>
+            </a:r>
+          </a:p>
+        </p:txBody>
+      </p:sp>
+      <p:sp>
+        <p:nvSpPr>
+          <p:cNvPr id="29" name="TextBox 28"/>
+          <p:cNvSpPr txBox="1"/>
+          <p:nvPr/>
+        </p:nvSpPr>
+        <p:spPr>
+          <a:xfrm>
+            <a:off x="1162050" y="5960269"/>
+            <a:ext cx="1361313" cy="238125"/>
+          </a:xfrm>
+          <a:prstGeom prst="rect">
+            <a:avLst/>
+          </a:prstGeom>
+          <a:noFill/>
+        </p:spPr>
+        <p:txBody>
+          <a:bodyPr wrap="none" lIns="0" rIns="0" tIns="0" bIns="0" anchor="t">
+            <a:noAutofit/>
+          </a:bodyPr>
+          <a:lstStyle/>
+          <a:p>
+            <a:pPr algn="l">
+              <a:lnSpc>
+                <a:spcPts val="1785"/>
+              </a:lnSpc>
+              <a:spcBef>
+                <a:spcPts val="0"/>
+              </a:spcBef>
+              <a:spcAft>
+                <a:spcPts val="0"/>
+              </a:spcAft>
+            </a:pPr>
+            <a:r>
+              <a:rPr sz="1300" b="1" i="0">
+                <a:solidFill>
+                  <a:srgbClr val="ECEBE6"/>
+                </a:solidFill>
+                <a:latin typeface="Yu Gothic"/>
+                <a:ea typeface="Yu Gothic"/>
+                <a:cs typeface="Yu Gothic"/>
+              </a:rPr>
+              <a:t>検証して確定する</a:t>
+            </a:r>
+          </a:p>
+        </p:txBody>
+      </p:sp>
+      <p:sp>
+        <p:nvSpPr>
+          <p:cNvPr id="30" name="TextBox 29"/>
+          <p:cNvSpPr txBox="1"/>
+          <p:nvPr/>
+        </p:nvSpPr>
+        <p:spPr>
+          <a:xfrm>
+            <a:off x="3162300" y="5871270"/>
+            <a:ext cx="4199382" cy="421481"/>
+          </a:xfrm>
+          <a:prstGeom prst="rect">
+            <a:avLst/>
+          </a:prstGeom>
+          <a:noFill/>
+        </p:spPr>
+        <p:txBody>
+          <a:bodyPr wrap="none" lIns="0" rIns="0" tIns="0" bIns="0" anchor="t">
+            <a:noAutofit/>
+          </a:bodyPr>
+          <a:lstStyle/>
+          <a:p>
+            <a:pPr algn="l">
+              <a:lnSpc>
+                <a:spcPts val="1743"/>
+              </a:lnSpc>
+              <a:spcBef>
+                <a:spcPts val="0"/>
+              </a:spcBef>
+              <a:spcAft>
+                <a:spcPts val="0"/>
+              </a:spcAft>
+            </a:pPr>
+            <a:r>
+              <a:rPr sz="1100" b="0" i="0">
+                <a:solidFill>
+                  <a:srgbClr val="ECEBE6"/>
+                </a:solidFill>
+                <a:latin typeface="Yu Gothic"/>
+                <a:ea typeface="Yu Gothic"/>
+                <a:cs typeface="Yu Gothic"/>
+              </a:rPr>
+              <a:t>根拠・鮮度・必須条件を確かめて1回だけ確定し、</a:t>
+            </a:r>
+          </a:p>
+          <a:p>
+            <a:pPr algn="l">
+              <a:lnSpc>
+                <a:spcPts val="1743"/>
+              </a:lnSpc>
+              <a:spcBef>
+                <a:spcPts val="0"/>
+              </a:spcBef>
+              <a:spcAft>
+                <a:spcPts val="0"/>
+              </a:spcAft>
+            </a:pPr>
+            <a:r>
+              <a:rPr sz="1100" b="0" i="0">
+                <a:solidFill>
+                  <a:srgbClr val="ECEBE6"/>
+                </a:solidFill>
+                <a:latin typeface="Yu Gothic"/>
+                <a:ea typeface="Yu Gothic"/>
+                <a:cs typeface="Yu Gothic"/>
+              </a:rPr>
+              <a:t>アプリへ届ける</a:t>
+            </a:r>
+          </a:p>
+        </p:txBody>
+      </p:sp>
+      <p:sp>
+        <p:nvSpPr>
+          <p:cNvPr id="31" name="TextBox 30"/>
+          <p:cNvSpPr txBox="1"/>
+          <p:nvPr/>
+        </p:nvSpPr>
+        <p:spPr>
+          <a:xfrm>
+            <a:off x="7600950" y="1629073"/>
+            <a:ext cx="2907268" cy="247650"/>
+          </a:xfrm>
+          <a:prstGeom prst="rect">
+            <a:avLst/>
+          </a:prstGeom>
+          <a:noFill/>
+        </p:spPr>
+        <p:txBody>
+          <a:bodyPr wrap="none" lIns="0" rIns="0" tIns="0" bIns="0" anchor="t">
+            <a:noAutofit/>
+          </a:bodyPr>
+          <a:lstStyle/>
+          <a:p>
+            <a:pPr algn="l">
+              <a:lnSpc>
+                <a:spcPts val="2025"/>
+              </a:lnSpc>
+              <a:spcBef>
+                <a:spcPts val="0"/>
+              </a:spcBef>
+              <a:spcAft>
+                <a:spcPts val="0"/>
+              </a:spcAft>
+            </a:pPr>
+            <a:r>
+              <a:rPr sz="1350" b="1" i="0">
+                <a:solidFill>
+                  <a:srgbClr val="ECEBE6"/>
+                </a:solidFill>
+                <a:latin typeface="Yu Gothic"/>
+                <a:ea typeface="Yu Gothic"/>
+                <a:cs typeface="Yu Gothic"/>
+              </a:rPr>
+              <a:t>AI の回答を根拠に結びつける仕組み</a:t>
+            </a:r>
+          </a:p>
+        </p:txBody>
+      </p:sp>
+      <p:sp>
+        <p:nvSpPr>
+          <p:cNvPr id="32" name="TextBox 31"/>
+          <p:cNvSpPr txBox="1"/>
+          <p:nvPr/>
+        </p:nvSpPr>
+        <p:spPr>
+          <a:xfrm>
+            <a:off x="7772400" y="2200573"/>
+            <a:ext cx="3886200" cy="445740"/>
+          </a:xfrm>
+          <a:prstGeom prst="rect">
+            <a:avLst/>
+          </a:prstGeom>
+          <a:noFill/>
+        </p:spPr>
+        <p:txBody>
+          <a:bodyPr wrap="square" lIns="0" rIns="0" tIns="0" bIns="0" anchor="t">
+            <a:noAutofit/>
+          </a:bodyPr>
+          <a:lstStyle/>
+          <a:p>
+            <a:pPr algn="l" marL="147638" indent="-147638">
+              <a:lnSpc>
+                <a:spcPts val="1860"/>
+              </a:lnSpc>
+              <a:spcBef>
+                <a:spcPts val="0"/>
+              </a:spcBef>
+              <a:spcAft>
+                <a:spcPts val="0"/>
+              </a:spcAft>
+              <a:buSzPct val="100000"/>
+              <a:buFont typeface="Yu Gothic"/>
+              <a:buChar char="•"/>
+            </a:pPr>
+            <a:r>
+              <a:rPr sz="1150" b="0" i="0">
+                <a:solidFill>
+                  <a:srgbClr val="ECEBE6"/>
+                </a:solidFill>
+                <a:latin typeface="Yu Gothic"/>
+                <a:ea typeface="Yu Gothic"/>
+                <a:cs typeface="Yu Gothic"/>
+              </a:rPr>
+              <a:t>どのステップでも Tool の呼び出しを必須にし、</a:t>
+            </a:r>
+            <a:br/>
+            <a:r>
+              <a:rPr sz="1150" b="0" i="0">
+                <a:solidFill>
+                  <a:srgbClr val="ECEBE6"/>
+                </a:solidFill>
+                <a:latin typeface="Yu Gothic"/>
+                <a:ea typeface="Yu Gothic"/>
+                <a:cs typeface="Yu Gothic"/>
+              </a:rPr>
+              <a:t>文章だけの返答は確定させない</a:t>
+            </a:r>
+          </a:p>
+        </p:txBody>
+      </p:sp>
+      <p:sp>
+        <p:nvSpPr>
+          <p:cNvPr id="33" name="TextBox 32"/>
+          <p:cNvSpPr txBox="1"/>
+          <p:nvPr/>
+        </p:nvSpPr>
+        <p:spPr>
+          <a:xfrm>
+            <a:off x="7772400" y="2844403"/>
+            <a:ext cx="3886200" cy="445740"/>
+          </a:xfrm>
+          <a:prstGeom prst="rect">
+            <a:avLst/>
+          </a:prstGeom>
+          <a:noFill/>
+        </p:spPr>
+        <p:txBody>
+          <a:bodyPr wrap="square" lIns="0" rIns="0" tIns="0" bIns="0" anchor="t">
+            <a:noAutofit/>
+          </a:bodyPr>
+          <a:lstStyle/>
+          <a:p>
+            <a:pPr algn="l" marL="147638" indent="-147638">
+              <a:lnSpc>
+                <a:spcPts val="1860"/>
+              </a:lnSpc>
+              <a:spcBef>
+                <a:spcPts val="0"/>
+              </a:spcBef>
+              <a:spcAft>
+                <a:spcPts val="0"/>
+              </a:spcAft>
+              <a:buSzPct val="100000"/>
+              <a:buFont typeface="Yu Gothic"/>
+              <a:buChar char="•"/>
+            </a:pPr>
+            <a:r>
+              <a:rPr sz="1150" b="0" i="0">
+                <a:solidFill>
+                  <a:srgbClr val="ECEBE6"/>
+                </a:solidFill>
+                <a:latin typeface="Yu Gothic"/>
+                <a:ea typeface="Yu Gothic"/>
+                <a:cs typeface="Yu Gothic"/>
+              </a:rPr>
+              <a:t>1つのステップの中で、店舗情報の読み取りと</a:t>
+            </a:r>
+            <a:br/>
+            <a:r>
+              <a:rPr sz="1150" b="0" i="0">
+                <a:solidFill>
+                  <a:srgbClr val="ECEBE6"/>
+                </a:solidFill>
+                <a:latin typeface="Yu Gothic"/>
+                <a:ea typeface="Yu Gothic"/>
+                <a:cs typeface="Yu Gothic"/>
+              </a:rPr>
+              <a:t>応答の確定を混ぜない</a:t>
+            </a:r>
+          </a:p>
+        </p:txBody>
+      </p:sp>
+      <p:sp>
+        <p:nvSpPr>
+          <p:cNvPr id="34" name="TextBox 33"/>
+          <p:cNvSpPr txBox="1"/>
+          <p:nvPr/>
+        </p:nvSpPr>
+        <p:spPr>
+          <a:xfrm>
+            <a:off x="7772400" y="3488234"/>
+            <a:ext cx="3886200" cy="445740"/>
+          </a:xfrm>
+          <a:prstGeom prst="rect">
+            <a:avLst/>
+          </a:prstGeom>
+          <a:noFill/>
+        </p:spPr>
+        <p:txBody>
+          <a:bodyPr wrap="square" lIns="0" rIns="0" tIns="0" bIns="0" anchor="t">
+            <a:noAutofit/>
+          </a:bodyPr>
+          <a:lstStyle/>
+          <a:p>
+            <a:pPr algn="l" marL="147638" indent="-147638">
+              <a:lnSpc>
+                <a:spcPts val="1860"/>
+              </a:lnSpc>
+              <a:spcBef>
+                <a:spcPts val="0"/>
+              </a:spcBef>
+              <a:spcAft>
+                <a:spcPts val="0"/>
+              </a:spcAft>
+              <a:buSzPct val="100000"/>
+              <a:buFont typeface="Yu Gothic"/>
+              <a:buChar char="•"/>
+            </a:pPr>
+            <a:r>
+              <a:rPr sz="1150" b="0" i="0">
+                <a:solidFill>
+                  <a:srgbClr val="ECEBE6"/>
+                </a:solidFill>
+                <a:latin typeface="Yu Gothic"/>
+                <a:ea typeface="Yu Gothic"/>
+                <a:cs typeface="Yu Gothic"/>
+              </a:rPr>
+              <a:t>カードの営業時間や予算は、モデルの文章ではなく</a:t>
+            </a:r>
+            <a:br/>
+            <a:r>
+              <a:rPr sz="1150" b="0" i="0">
+                <a:solidFill>
+                  <a:srgbClr val="ECEBE6"/>
+                </a:solidFill>
+                <a:latin typeface="Yu Gothic"/>
+                <a:ea typeface="Yu Gothic"/>
+                <a:cs typeface="Yu Gothic"/>
+              </a:rPr>
+              <a:t>取得した店舗情報から付ける</a:t>
+            </a:r>
+          </a:p>
+        </p:txBody>
+      </p:sp>
+      <p:sp>
+        <p:nvSpPr>
+          <p:cNvPr id="35" name="TextBox 34"/>
+          <p:cNvSpPr txBox="1"/>
+          <p:nvPr/>
+        </p:nvSpPr>
+        <p:spPr>
+          <a:xfrm>
+            <a:off x="7772400" y="4132064"/>
+            <a:ext cx="3482280" cy="209550"/>
+          </a:xfrm>
+          <a:prstGeom prst="rect">
+            <a:avLst/>
+          </a:prstGeom>
+          <a:noFill/>
+        </p:spPr>
+        <p:txBody>
+          <a:bodyPr wrap="none" lIns="0" rIns="0" tIns="0" bIns="0" anchor="t">
+            <a:noAutofit/>
+          </a:bodyPr>
+          <a:lstStyle/>
+          <a:p>
+            <a:pPr algn="l" marL="147638" indent="-147638">
+              <a:lnSpc>
+                <a:spcPts val="1860"/>
+              </a:lnSpc>
+              <a:spcBef>
+                <a:spcPts val="0"/>
+              </a:spcBef>
+              <a:spcAft>
+                <a:spcPts val="0"/>
+              </a:spcAft>
+              <a:buSzPct val="100000"/>
+              <a:buFont typeface="Yu Gothic"/>
+              <a:buChar char="•"/>
+            </a:pPr>
+            <a:r>
+              <a:rPr sz="1150" b="0" i="0">
+                <a:solidFill>
+                  <a:srgbClr val="ECEBE6"/>
+                </a:solidFill>
+                <a:latin typeface="Yu Gothic"/>
+                <a:ea typeface="Yu Gothic"/>
+                <a:cs typeface="Yu Gothic"/>
+              </a:rPr>
+              <a:t>検証に通らない応答は差し戻し、2回まで直させる</a:t>
+            </a:r>
+          </a:p>
+        </p:txBody>
+      </p:sp>
+      <p:sp>
+        <p:nvSpPr>
+          <p:cNvPr id="36" name="TextBox 35"/>
+          <p:cNvSpPr txBox="1"/>
+          <p:nvPr/>
+        </p:nvSpPr>
+        <p:spPr>
+          <a:xfrm>
+            <a:off x="609600" y="6481762"/>
+            <a:ext cx="295335" cy="200025"/>
+          </a:xfrm>
+          <a:prstGeom prst="rect">
+            <a:avLst/>
+          </a:prstGeom>
+          <a:noFill/>
+        </p:spPr>
+        <p:txBody>
+          <a:bodyPr wrap="none" lIns="0" rIns="0" tIns="0" bIns="0" anchor="t">
+            <a:noAutofit/>
+          </a:bodyPr>
+          <a:lstStyle/>
+          <a:p>
+            <a:pPr algn="l">
+              <a:lnSpc>
+                <a:spcPts val="1687"/>
+              </a:lnSpc>
+              <a:spcBef>
+                <a:spcPts val="0"/>
+              </a:spcBef>
+              <a:spcAft>
+                <a:spcPts val="0"/>
+              </a:spcAft>
+            </a:pPr>
+            <a:r>
+              <a:rPr sz="1100" b="1" i="0">
+                <a:solidFill>
+                  <a:srgbClr val="9A9993"/>
+                </a:solidFill>
+                <a:latin typeface="Yu Gothic"/>
+                <a:ea typeface="Yu Gothic"/>
+                <a:cs typeface="Yu Gothic"/>
+              </a:rPr>
+              <a:t>ima</a:t>
+            </a:r>
+          </a:p>
+        </p:txBody>
+      </p:sp>
+      <p:sp>
+        <p:nvSpPr>
+          <p:cNvPr id="37" name="TextBox 36"/>
+          <p:cNvSpPr txBox="1"/>
+          <p:nvPr/>
+        </p:nvSpPr>
+        <p:spPr>
+          <a:xfrm>
+            <a:off x="11513641" y="6491288"/>
+            <a:ext cx="90559" cy="180975"/>
+          </a:xfrm>
+          <a:prstGeom prst="rect">
+            <a:avLst/>
+          </a:prstGeom>
+          <a:noFill/>
+        </p:spPr>
+        <p:txBody>
+          <a:bodyPr wrap="none" lIns="0" rIns="0" tIns="0" bIns="0" anchor="t">
+            <a:noAutofit/>
+          </a:bodyPr>
+          <a:lstStyle/>
+          <a:p>
+            <a:pPr algn="l">
+              <a:lnSpc>
+                <a:spcPts val="1462"/>
+              </a:lnSpc>
+              <a:spcBef>
+                <a:spcPts val="0"/>
+              </a:spcBef>
+              <a:spcAft>
+                <a:spcPts val="0"/>
+              </a:spcAft>
+            </a:pPr>
+            <a:r>
+              <a:rPr sz="1000" b="0" i="0">
+                <a:solidFill>
+                  <a:srgbClr val="9A9993"/>
+                </a:solidFill>
+                <a:latin typeface="Yu Gothic"/>
+                <a:ea typeface="Yu Gothic"/>
+                <a:cs typeface="Yu Gothic"/>
+              </a:rPr>
+              <a:t>8</a:t>
+            </a:r>
+          </a:p>
+        </p:txBody>
+      </p:sp>
+    </p:spTree>
+  </p:cSld>
+  <p:clrMapOvr>
+    <a:masterClrMapping/>
+  </p:clrMapOvr>
+</p:sld>
+</file>
+
 <file path=ppt/theme/theme1.xml><?xml version="1.0" encoding="utf-8"?>
 <a:theme xmlns:a="http://schemas.openxmlformats.org/drawingml/2006/main" name="Office Theme">
   <a:themeElements>

--- a/docs/pitch/ima-pitch.pptx
+++ b/docs/pitch/ima-pitch.pptx
@@ -3698,7 +3698,7 @@
                 <a:ea typeface="Yu Gothic"/>
                 <a:cs typeface="Yu Gothic"/>
               </a:rPr>
-              <a:t>次は候補の見せ方と maru の会話を広げ、</a:t>
+              <a:t>次は候補を見比べやすくして maru との会話を増やし、</a:t>
             </a:r>
           </a:p>
           <a:p>
@@ -3722,7 +3722,7 @@
                 <a:ea typeface="Yu Gothic"/>
                 <a:cs typeface="Yu Gothic"/>
               </a:rPr>
-              <a:t>一軒めのあとの「二軒め」まで一緒に探せるようにする</a:t>
+              <a:t>一軒めのあとの二軒めまで一緒に探せるようにする</a:t>
             </a:r>
           </a:p>
         </p:txBody>
@@ -3881,7 +3881,7 @@
                 <a:ea typeface="Yu Gothic"/>
                 <a:cs typeface="Yu Gothic"/>
               </a:rPr>
-              <a:t>カードを出した回答の説明文を、</a:t>
+              <a:t>候補を出したときの説明文は、</a:t>
             </a:r>
             <a:br/>
             <a:r>
@@ -3893,7 +3893,7 @@
                 <a:ea typeface="Yu Gothic"/>
                 <a:cs typeface="Yu Gothic"/>
               </a:rPr>
-              <a:t>帯の下に畳む</a:t>
+              <a:t>カードの下に折りたたむ</a:t>
             </a:r>
           </a:p>
         </p:txBody>
@@ -3943,7 +3943,7 @@
                 <a:ea typeface="Yu Gothic"/>
                 <a:cs typeface="Yu Gothic"/>
               </a:rPr>
-              <a:t>店舗詳細シートを</a:t>
+              <a:t>店舗詳細の見た目を</a:t>
             </a:r>
             <a:br/>
             <a:r>
@@ -3955,7 +3955,7 @@
                 <a:ea typeface="Yu Gothic"/>
                 <a:cs typeface="Yu Gothic"/>
               </a:rPr>
-              <a:t>新しいカードのデザインにそろえる</a:t>
+              <a:t>候補カードのデザインにそろえる</a:t>
             </a:r>
           </a:p>
         </p:txBody>
@@ -4114,7 +4114,7 @@
                 <a:ea typeface="Yu Gothic"/>
                 <a:cs typeface="Yu Gothic"/>
               </a:rPr>
-              <a:t>結果が出たとき、maru が</a:t>
+              <a:t>結果が出たとき、maru が掲載情報から</a:t>
             </a:r>
             <a:br/>
             <a:r>
@@ -4249,7 +4249,7 @@
         <p:spPr>
           <a:xfrm>
             <a:off x="8140601" y="1629073"/>
-            <a:ext cx="1623822" cy="247650"/>
+            <a:ext cx="2331791" cy="247650"/>
           </a:xfrm>
           <a:prstGeom prst="rect">
             <a:avLst/>
@@ -4282,7 +4282,7 @@
                 <a:ea typeface="Yu Gothic"/>
                 <a:cs typeface="Yu Gothic"/>
               </a:rPr>
-              <a:t>次の一軒までつなぐ</a:t>
+              <a:t>探す前と決めたあとを整える</a:t>
             </a:r>
           </a:p>
         </p:txBody>
@@ -4332,7 +4332,7 @@
                 <a:ea typeface="Yu Gothic"/>
                 <a:cs typeface="Yu Gothic"/>
               </a:rPr>
-              <a:t>決定の演出と、「ただいま」から</a:t>
+              <a:t>一軒めを決めたあと、</a:t>
             </a:r>
             <a:br/>
             <a:r>
@@ -4344,7 +4344,7 @@
                 <a:ea typeface="Yu Gothic"/>
                 <a:cs typeface="Yu Gothic"/>
               </a:rPr>
-              <a:t>二軒めを探す流れを作る</a:t>
+              <a:t>続けて二軒めを探す流れを作る</a:t>
             </a:r>
           </a:p>
         </p:txBody>
@@ -4394,7 +4394,7 @@
                 <a:ea typeface="Yu Gothic"/>
                 <a:cs typeface="Yu Gothic"/>
               </a:rPr>
-              <a:t>候補が0件のとき、範囲を広げて</a:t>
+              <a:t>3km圏でも0件のとき、市内まで</a:t>
             </a:r>
             <a:br/>
             <a:r>
@@ -4406,7 +4406,7 @@
                 <a:ea typeface="Yu Gothic"/>
                 <a:cs typeface="Yu Gothic"/>
               </a:rPr>
-              <a:t>探し直すかを検討する</a:t>
+              <a:t>広げて探し直すかを検討する</a:t>
             </a:r>
           </a:p>
         </p:txBody>
@@ -11945,7 +11945,7 @@
         <p:spPr>
           <a:xfrm>
             <a:off x="3424238" y="1629073"/>
-            <a:ext cx="375666" cy="247650"/>
+            <a:ext cx="732282" cy="247650"/>
           </a:xfrm>
           <a:prstGeom prst="rect">
             <a:avLst/>
@@ -11978,7 +11978,7 @@
                 <a:ea typeface="Yu Gothic"/>
                 <a:cs typeface="Yu Gothic"/>
               </a:rPr>
-              <a:t>質問</a:t>
+              <a:t>質問画面</a:t>
             </a:r>
           </a:p>
         </p:txBody>
@@ -16463,7 +16463,7 @@
         </p:nvSpPr>
         <p:spPr>
           <a:xfrm>
-            <a:off x="5981700" y="4408289"/>
+            <a:off x="5981700" y="3336727"/>
             <a:ext cx="381000" cy="19050"/>
           </a:xfrm>
           <a:prstGeom prst="rect">
@@ -16490,7 +16490,7 @@
         </p:nvSpPr>
         <p:spPr>
           <a:xfrm>
-            <a:off x="6362700" y="4351139"/>
+            <a:off x="6362700" y="3279577"/>
             <a:ext cx="95250" cy="133350"/>
           </a:xfrm>
           <a:custGeom>
@@ -16535,8 +16535,80 @@
         </p:nvSpPr>
         <p:spPr>
           <a:xfrm>
+            <a:off x="5981700" y="5479703"/>
+            <a:ext cx="381000" cy="19050"/>
+          </a:xfrm>
+          <a:prstGeom prst="rect">
+            <a:avLst/>
+          </a:prstGeom>
+          <a:solidFill>
+            <a:srgbClr val="9A9993"/>
+          </a:solidFill>
+          <a:ln>
+            <a:noFill/>
+          </a:ln>
+        </p:spPr>
+        <p:txBody>
+          <a:bodyPr rtlCol="0" anchor="ctr"/>
+          <a:lstStyle/>
+          <a:p/>
+        </p:txBody>
+      </p:sp>
+      <p:sp>
+        <p:nvSpPr>
+          <p:cNvPr id="21" name="Freeform 20"/>
+          <p:cNvSpPr/>
+          <p:nvPr/>
+        </p:nvSpPr>
+        <p:spPr>
+          <a:xfrm>
+            <a:off x="6362700" y="5422553"/>
+            <a:ext cx="95250" cy="133350"/>
+          </a:xfrm>
+          <a:custGeom>
+            <a:avLst/>
+            <a:gdLst/>
+            <a:ahLst/>
+            <a:cxnLst/>
+            <a:rect l="l" t="t" r="r" b="b"/>
+            <a:pathLst>
+              <a:path w="95250" h="133350">
+                <a:moveTo>
+                  <a:pt x="0" y="0"/>
+                </a:moveTo>
+                <a:lnTo>
+                  <a:pt x="0" y="133350"/>
+                </a:lnTo>
+                <a:lnTo>
+                  <a:pt x="95250" y="66675"/>
+                </a:lnTo>
+                <a:close/>
+              </a:path>
+            </a:pathLst>
+          </a:custGeom>
+          <a:solidFill>
+            <a:srgbClr val="9A9993"/>
+          </a:solidFill>
+          <a:ln>
+            <a:noFill/>
+          </a:ln>
+        </p:spPr>
+        <p:txBody>
+          <a:bodyPr rtlCol="0" anchor="ctr"/>
+          <a:lstStyle/>
+          <a:p/>
+        </p:txBody>
+      </p:sp>
+      <p:sp>
+        <p:nvSpPr>
+          <p:cNvPr id="22" name="Rectangle 21"/>
+          <p:cNvSpPr/>
+          <p:nvPr/>
+        </p:nvSpPr>
+        <p:spPr>
+          <a:xfrm>
             <a:off x="6534150" y="2133898"/>
-            <a:ext cx="1771650" cy="4171652"/>
+            <a:ext cx="1771650" cy="2028676"/>
           </a:xfrm>
           <a:prstGeom prst="rect">
             <a:avLst/>
@@ -16556,7 +16628,7 @@
       </p:sp>
       <p:cxnSp>
         <p:nvCxnSpPr>
-          <p:cNvPr id="21" name="Connector 20"/>
+          <p:cNvPr id="23" name="Connector 22"/>
           <p:cNvCxnSpPr/>
           <p:nvPr/>
         </p:nvCxnSpPr>
@@ -16575,15 +16647,42 @@
           </a:ln>
         </p:spPr>
       </p:cxnSp>
+      <p:sp>
+        <p:nvSpPr>
+          <p:cNvPr id="24" name="Rectangle 23"/>
+          <p:cNvSpPr/>
+          <p:nvPr/>
+        </p:nvSpPr>
+        <p:spPr>
+          <a:xfrm>
+            <a:off x="6534150" y="4276874"/>
+            <a:ext cx="1771650" cy="2028676"/>
+          </a:xfrm>
+          <a:prstGeom prst="rect">
+            <a:avLst/>
+          </a:prstGeom>
+          <a:solidFill>
+            <a:srgbClr val="1C1C1E"/>
+          </a:solidFill>
+          <a:ln>
+            <a:noFill/>
+          </a:ln>
+        </p:spPr>
+        <p:txBody>
+          <a:bodyPr rtlCol="0" anchor="ctr"/>
+          <a:lstStyle/>
+          <a:p/>
+        </p:txBody>
+      </p:sp>
       <p:cxnSp>
         <p:nvCxnSpPr>
-          <p:cNvPr id="22" name="Connector 21"/>
+          <p:cNvPr id="25" name="Connector 24"/>
           <p:cNvCxnSpPr/>
           <p:nvPr/>
         </p:nvCxnSpPr>
         <p:spPr>
           <a:xfrm>
-            <a:off x="6686550" y="3677245"/>
+            <a:off x="6686550" y="5051673"/>
             <a:ext cx="1466850" cy="0"/>
           </a:xfrm>
           <a:prstGeom prst="line">
@@ -16598,7 +16697,7 @@
       </p:cxnSp>
       <p:cxnSp>
         <p:nvCxnSpPr>
-          <p:cNvPr id="23" name="Connector 22"/>
+          <p:cNvPr id="26" name="Connector 25"/>
           <p:cNvCxnSpPr/>
           <p:nvPr/>
         </p:nvCxnSpPr>
@@ -16619,7 +16718,7 @@
       </p:cxnSp>
       <p:sp>
         <p:nvSpPr>
-          <p:cNvPr id="24" name="Title"/>
+          <p:cNvPr id="27" name="Title"/>
           <p:cNvSpPr txBox="1"/>
           <p:nvPr/>
         </p:nvSpPr>
@@ -16659,7 +16758,7 @@
                 <a:ea typeface="Yu Gothic"/>
                 <a:cs typeface="Yu Gothic"/>
               </a:rPr>
-              <a:t>ima は iPhone アプリと Cloudflare Workers の2つで動き、</a:t>
+              <a:t>ima は iPhone アプリと Cloudflare Workers の2つをデプロイし、</a:t>
             </a:r>
           </a:p>
           <a:p>
@@ -16683,14 +16782,14 @@
                 <a:ea typeface="Yu Gothic"/>
                 <a:cs typeface="Yu Gothic"/>
               </a:rPr>
-              <a:t>会話・実行・保存を Durable Objects に分けて持つ</a:t>
-            </a:r>
-          </a:p>
-        </p:txBody>
-      </p:sp>
-      <p:sp>
-        <p:nvSpPr>
-          <p:cNvPr id="25" name="TextBox 24"/>
+              <a:t>会話・実行・保存・運用ログを別々の Durable Objects に持つ</a:t>
+            </a:r>
+          </a:p>
+        </p:txBody>
+      </p:sp>
+      <p:sp>
+        <p:nvSpPr>
+          <p:cNvPr id="28" name="TextBox 27"/>
           <p:cNvSpPr txBox="1"/>
           <p:nvPr/>
         </p:nvSpPr>
@@ -16737,7 +16836,7 @@
       </p:sp>
       <p:sp>
         <p:nvSpPr>
-          <p:cNvPr id="26" name="TextBox 25"/>
+          <p:cNvPr id="29" name="TextBox 28"/>
           <p:cNvSpPr txBox="1"/>
           <p:nvPr/>
         </p:nvSpPr>
@@ -16784,7 +16883,7 @@
       </p:sp>
       <p:sp>
         <p:nvSpPr>
-          <p:cNvPr id="27" name="TextBox 26"/>
+          <p:cNvPr id="30" name="TextBox 29"/>
           <p:cNvSpPr txBox="1"/>
           <p:nvPr/>
         </p:nvSpPr>
@@ -16855,7 +16954,7 @@
       </p:sp>
       <p:sp>
         <p:nvSpPr>
-          <p:cNvPr id="28" name="TextBox 27"/>
+          <p:cNvPr id="31" name="TextBox 30"/>
           <p:cNvSpPr txBox="1"/>
           <p:nvPr/>
         </p:nvSpPr>
@@ -16902,7 +17001,7 @@
       </p:sp>
       <p:sp>
         <p:nvSpPr>
-          <p:cNvPr id="29" name="TextBox 28"/>
+          <p:cNvPr id="32" name="TextBox 31"/>
           <p:cNvSpPr txBox="1"/>
           <p:nvPr/>
         </p:nvSpPr>
@@ -16949,7 +17048,7 @@
       </p:sp>
       <p:sp>
         <p:nvSpPr>
-          <p:cNvPr id="30" name="TextBox 29"/>
+          <p:cNvPr id="33" name="TextBox 32"/>
           <p:cNvSpPr txBox="1"/>
           <p:nvPr/>
         </p:nvSpPr>
@@ -16996,7 +17095,7 @@
       </p:sp>
       <p:sp>
         <p:nvSpPr>
-          <p:cNvPr id="31" name="TextBox 30"/>
+          <p:cNvPr id="34" name="TextBox 33"/>
           <p:cNvSpPr txBox="1"/>
           <p:nvPr/>
         </p:nvSpPr>
@@ -17043,7 +17142,7 @@
       </p:sp>
       <p:sp>
         <p:nvSpPr>
-          <p:cNvPr id="32" name="TextBox 31"/>
+          <p:cNvPr id="35" name="TextBox 34"/>
           <p:cNvSpPr txBox="1"/>
           <p:nvPr/>
         </p:nvSpPr>
@@ -17090,7 +17189,7 @@
       </p:sp>
       <p:sp>
         <p:nvSpPr>
-          <p:cNvPr id="33" name="TextBox 32"/>
+          <p:cNvPr id="36" name="TextBox 35"/>
           <p:cNvSpPr txBox="1"/>
           <p:nvPr/>
         </p:nvSpPr>
@@ -17137,7 +17236,7 @@
       </p:sp>
       <p:sp>
         <p:nvSpPr>
-          <p:cNvPr id="34" name="TextBox 33"/>
+          <p:cNvPr id="37" name="TextBox 36"/>
           <p:cNvSpPr txBox="1"/>
           <p:nvPr/>
         </p:nvSpPr>
@@ -17184,7 +17283,7 @@
       </p:sp>
       <p:sp>
         <p:nvSpPr>
-          <p:cNvPr id="35" name="TextBox 34"/>
+          <p:cNvPr id="38" name="TextBox 37"/>
           <p:cNvSpPr txBox="1"/>
           <p:nvPr/>
         </p:nvSpPr>
@@ -17231,7 +17330,7 @@
       </p:sp>
       <p:sp>
         <p:nvSpPr>
-          <p:cNvPr id="36" name="TextBox 35"/>
+          <p:cNvPr id="39" name="TextBox 38"/>
           <p:cNvSpPr txBox="1"/>
           <p:nvPr/>
         </p:nvSpPr>
@@ -17278,7 +17377,7 @@
       </p:sp>
       <p:sp>
         <p:nvSpPr>
-          <p:cNvPr id="37" name="TextBox 36"/>
+          <p:cNvPr id="40" name="TextBox 39"/>
           <p:cNvSpPr txBox="1"/>
           <p:nvPr/>
         </p:nvSpPr>
@@ -17349,7 +17448,7 @@
       </p:sp>
       <p:sp>
         <p:nvSpPr>
-          <p:cNvPr id="38" name="TextBox 37"/>
+          <p:cNvPr id="41" name="TextBox 40"/>
           <p:cNvSpPr txBox="1"/>
           <p:nvPr/>
         </p:nvSpPr>
@@ -17396,7 +17495,7 @@
       </p:sp>
       <p:sp>
         <p:nvSpPr>
-          <p:cNvPr id="39" name="TextBox 38"/>
+          <p:cNvPr id="42" name="TextBox 41"/>
           <p:cNvSpPr txBox="1"/>
           <p:nvPr/>
         </p:nvSpPr>
@@ -17467,7 +17566,7 @@
       </p:sp>
       <p:sp>
         <p:nvSpPr>
-          <p:cNvPr id="40" name="TextBox 39"/>
+          <p:cNvPr id="43" name="TextBox 42"/>
           <p:cNvSpPr txBox="1"/>
           <p:nvPr/>
         </p:nvSpPr>
@@ -17514,7 +17613,7 @@
       </p:sp>
       <p:sp>
         <p:nvSpPr>
-          <p:cNvPr id="41" name="TextBox 40"/>
+          <p:cNvPr id="44" name="TextBox 43"/>
           <p:cNvSpPr txBox="1"/>
           <p:nvPr/>
         </p:nvSpPr>
@@ -17561,7 +17660,7 @@
       </p:sp>
       <p:sp>
         <p:nvSpPr>
-          <p:cNvPr id="42" name="TextBox 41"/>
+          <p:cNvPr id="45" name="TextBox 44"/>
           <p:cNvSpPr txBox="1"/>
           <p:nvPr/>
         </p:nvSpPr>
@@ -17608,14 +17707,14 @@
       </p:sp>
       <p:sp>
         <p:nvSpPr>
-          <p:cNvPr id="43" name="TextBox 42"/>
+          <p:cNvPr id="46" name="TextBox 45"/>
           <p:cNvSpPr txBox="1"/>
           <p:nvPr/>
         </p:nvSpPr>
         <p:spPr>
           <a:xfrm>
             <a:off x="3400425" y="3999607"/>
-            <a:ext cx="1518416" cy="180975"/>
+            <a:ext cx="2105037" cy="180975"/>
           </a:xfrm>
           <a:prstGeom prst="rect">
             <a:avLst/>
@@ -17648,14 +17747,14 @@
                 <a:ea typeface="Yu Gothic"/>
                 <a:cs typeface="Yu Gothic"/>
               </a:rPr>
-              <a:t>今夜の会話実行（Think）</a:t>
-            </a:r>
-          </a:p>
-        </p:txBody>
-      </p:sp>
-      <p:sp>
-        <p:nvSpPr>
-          <p:cNvPr id="44" name="TextBox 43"/>
+              <a:t>会話の実行（Think・当日5時まで）</a:t>
+            </a:r>
+          </a:p>
+        </p:txBody>
+      </p:sp>
+      <p:sp>
+        <p:nvSpPr>
+          <p:cNvPr id="47" name="TextBox 46"/>
           <p:cNvSpPr txBox="1"/>
           <p:nvPr/>
         </p:nvSpPr>
@@ -17702,7 +17801,7 @@
       </p:sp>
       <p:sp>
         <p:nvSpPr>
-          <p:cNvPr id="45" name="TextBox 44"/>
+          <p:cNvPr id="48" name="TextBox 47"/>
           <p:cNvSpPr txBox="1"/>
           <p:nvPr/>
         </p:nvSpPr>
@@ -17749,7 +17848,7 @@
       </p:sp>
       <p:sp>
         <p:nvSpPr>
-          <p:cNvPr id="46" name="TextBox 45"/>
+          <p:cNvPr id="49" name="TextBox 48"/>
           <p:cNvSpPr txBox="1"/>
           <p:nvPr/>
         </p:nvSpPr>
@@ -17796,7 +17895,7 @@
       </p:sp>
       <p:sp>
         <p:nvSpPr>
-          <p:cNvPr id="47" name="TextBox 46"/>
+          <p:cNvPr id="50" name="TextBox 49"/>
           <p:cNvSpPr txBox="1"/>
           <p:nvPr/>
         </p:nvSpPr>
@@ -17843,14 +17942,14 @@
       </p:sp>
       <p:sp>
         <p:nvSpPr>
-          <p:cNvPr id="48" name="TextBox 47"/>
+          <p:cNvPr id="51" name="TextBox 50"/>
           <p:cNvSpPr txBox="1"/>
           <p:nvPr/>
         </p:nvSpPr>
         <p:spPr>
           <a:xfrm>
-            <a:off x="5958010" y="3945434"/>
-            <a:ext cx="523482" cy="321915"/>
+            <a:off x="5929220" y="2873871"/>
+            <a:ext cx="581061" cy="321915"/>
           </a:xfrm>
           <a:prstGeom prst="rect">
             <a:avLst/>
@@ -17883,7 +17982,7 @@
                 <a:ea typeface="Yu Gothic"/>
                 <a:cs typeface="Yu Gothic"/>
               </a:rPr>
-              <a:t>Tool から</a:t>
+              <a:t>ThreadDO</a:t>
             </a:r>
           </a:p>
           <a:p>
@@ -17907,21 +18006,21 @@
                 <a:ea typeface="Yu Gothic"/>
                 <a:cs typeface="Yu Gothic"/>
               </a:rPr>
-              <a:t>呼び出す</a:t>
-            </a:r>
-          </a:p>
-        </p:txBody>
-      </p:sp>
-      <p:sp>
-        <p:nvSpPr>
-          <p:cNvPr id="49" name="TextBox 48"/>
+              <a:t>が呼ぶ</a:t>
+            </a:r>
+          </a:p>
+        </p:txBody>
+      </p:sp>
+      <p:sp>
+        <p:nvSpPr>
+          <p:cNvPr id="52" name="TextBox 51"/>
           <p:cNvSpPr txBox="1"/>
           <p:nvPr/>
         </p:nvSpPr>
         <p:spPr>
           <a:xfrm>
-            <a:off x="6686550" y="2286298"/>
-            <a:ext cx="708291" cy="247650"/>
+            <a:off x="6017446" y="5016847"/>
+            <a:ext cx="404610" cy="321915"/>
           </a:xfrm>
           <a:prstGeom prst="rect">
             <a:avLst/>
@@ -17934,41 +18033,65 @@
           </a:bodyPr>
           <a:lstStyle/>
           <a:p>
-            <a:pPr algn="l">
-              <a:lnSpc>
-                <a:spcPts val="2025"/>
-              </a:lnSpc>
-              <a:spcBef>
-                <a:spcPts val="0"/>
-              </a:spcBef>
-              <a:spcAft>
-                <a:spcPts val="0"/>
-              </a:spcAft>
-            </a:pPr>
-            <a:r>
-              <a:rPr sz="1350" b="1" i="0">
-                <a:solidFill>
-                  <a:srgbClr val="ECEBE6"/>
-                </a:solidFill>
-                <a:latin typeface="Yu Gothic"/>
-                <a:ea typeface="Yu Gothic"/>
-                <a:cs typeface="Yu Gothic"/>
-              </a:rPr>
-              <a:t>外部 API</a:t>
-            </a:r>
-          </a:p>
-        </p:txBody>
-      </p:sp>
-      <p:sp>
-        <p:nvSpPr>
-          <p:cNvPr id="50" name="TextBox 49"/>
+            <a:pPr algn="ctr">
+              <a:lnSpc>
+                <a:spcPts val="1260"/>
+              </a:lnSpc>
+              <a:spcBef>
+                <a:spcPts val="0"/>
+              </a:spcBef>
+              <a:spcAft>
+                <a:spcPts val="0"/>
+              </a:spcAft>
+            </a:pPr>
+            <a:r>
+              <a:rPr sz="900" b="0" i="0">
+                <a:solidFill>
+                  <a:srgbClr val="9A9993"/>
+                </a:solidFill>
+                <a:latin typeface="Yu Gothic"/>
+                <a:ea typeface="Yu Gothic"/>
+                <a:cs typeface="Yu Gothic"/>
+              </a:rPr>
+              <a:t>Tool が</a:t>
+            </a:r>
+          </a:p>
+          <a:p>
+            <a:pPr algn="ctr">
+              <a:lnSpc>
+                <a:spcPts val="1260"/>
+              </a:lnSpc>
+              <a:spcBef>
+                <a:spcPts val="0"/>
+              </a:spcBef>
+              <a:spcAft>
+                <a:spcPts val="0"/>
+              </a:spcAft>
+            </a:pPr>
+            <a:r>
+              <a:rPr sz="900" b="0" i="0">
+                <a:solidFill>
+                  <a:srgbClr val="9A9993"/>
+                </a:solidFill>
+                <a:latin typeface="Yu Gothic"/>
+                <a:ea typeface="Yu Gothic"/>
+                <a:cs typeface="Yu Gothic"/>
+              </a:rPr>
+              <a:t>呼ぶ</a:t>
+            </a:r>
+          </a:p>
+        </p:txBody>
+      </p:sp>
+      <p:sp>
+        <p:nvSpPr>
+          <p:cNvPr id="53" name="TextBox 52"/>
           <p:cNvSpPr txBox="1"/>
           <p:nvPr/>
         </p:nvSpPr>
         <p:spPr>
           <a:xfrm>
-            <a:off x="6686550" y="2619673"/>
-            <a:ext cx="1537609" cy="180975"/>
+            <a:off x="6686550" y="2286298"/>
+            <a:ext cx="662321" cy="247650"/>
           </a:xfrm>
           <a:prstGeom prst="rect">
             <a:avLst/>
@@ -17983,39 +18106,39 @@
           <a:p>
             <a:pPr algn="l">
               <a:lnSpc>
-                <a:spcPts val="1413"/>
-              </a:lnSpc>
-              <a:spcBef>
-                <a:spcPts val="0"/>
-              </a:spcBef>
-              <a:spcAft>
-                <a:spcPts val="0"/>
-              </a:spcAft>
-            </a:pPr>
-            <a:r>
-              <a:rPr sz="1000" b="0" i="0">
-                <a:solidFill>
-                  <a:srgbClr val="9A9993"/>
-                </a:solidFill>
-                <a:latin typeface="Yu Gothic"/>
-                <a:ea typeface="Yu Gothic"/>
-                <a:cs typeface="Yu Gothic"/>
-              </a:rPr>
-              <a:t>キーは Worker だけが持つ</a:t>
-            </a:r>
-          </a:p>
-        </p:txBody>
-      </p:sp>
-      <p:sp>
-        <p:nvSpPr>
-          <p:cNvPr id="51" name="TextBox 50"/>
+                <a:spcPts val="2025"/>
+              </a:lnSpc>
+              <a:spcBef>
+                <a:spcPts val="0"/>
+              </a:spcBef>
+              <a:spcAft>
+                <a:spcPts val="0"/>
+              </a:spcAft>
+            </a:pPr>
+            <a:r>
+              <a:rPr sz="1350" b="1" i="0">
+                <a:solidFill>
+                  <a:srgbClr val="ECEBE6"/>
+                </a:solidFill>
+                <a:latin typeface="Yu Gothic"/>
+                <a:ea typeface="Yu Gothic"/>
+                <a:cs typeface="Yu Gothic"/>
+              </a:rPr>
+              <a:t>OpenAI</a:t>
+            </a:r>
+          </a:p>
+        </p:txBody>
+      </p:sp>
+      <p:sp>
+        <p:nvSpPr>
+          <p:cNvPr id="54" name="TextBox 53"/>
           <p:cNvSpPr txBox="1"/>
           <p:nvPr/>
         </p:nvSpPr>
         <p:spPr>
           <a:xfrm>
-            <a:off x="6686550" y="2999184"/>
-            <a:ext cx="519303" cy="190500"/>
+            <a:off x="6686550" y="2619673"/>
+            <a:ext cx="503051" cy="180975"/>
           </a:xfrm>
           <a:prstGeom prst="rect">
             <a:avLst/>
@@ -18030,39 +18153,39 @@
           <a:p>
             <a:pPr algn="l">
               <a:lnSpc>
-                <a:spcPts val="1575"/>
-              </a:lnSpc>
-              <a:spcBef>
-                <a:spcPts val="0"/>
-              </a:spcBef>
-              <a:spcAft>
-                <a:spcPts val="0"/>
-              </a:spcAft>
-            </a:pPr>
-            <a:r>
-              <a:rPr sz="1050" b="1" i="0">
-                <a:solidFill>
-                  <a:srgbClr val="ECEBE6"/>
-                </a:solidFill>
-                <a:latin typeface="Yu Gothic"/>
-                <a:ea typeface="Yu Gothic"/>
-                <a:cs typeface="Yu Gothic"/>
-              </a:rPr>
-              <a:t>OpenAI</a:t>
-            </a:r>
-          </a:p>
-        </p:txBody>
-      </p:sp>
-      <p:sp>
-        <p:nvSpPr>
-          <p:cNvPr id="52" name="TextBox 51"/>
+                <a:spcPts val="1413"/>
+              </a:lnSpc>
+              <a:spcBef>
+                <a:spcPts val="0"/>
+              </a:spcBef>
+              <a:spcAft>
+                <a:spcPts val="0"/>
+              </a:spcAft>
+            </a:pPr>
+            <a:r>
+              <a:rPr sz="1000" b="0" i="0">
+                <a:solidFill>
+                  <a:srgbClr val="9A9993"/>
+                </a:solidFill>
+                <a:latin typeface="Yu Gothic"/>
+                <a:ea typeface="Yu Gothic"/>
+                <a:cs typeface="Yu Gothic"/>
+              </a:rPr>
+              <a:t>外部 API</a:t>
+            </a:r>
+          </a:p>
+        </p:txBody>
+      </p:sp>
+      <p:sp>
+        <p:nvSpPr>
+          <p:cNvPr id="55" name="TextBox 54"/>
           <p:cNvSpPr txBox="1"/>
           <p:nvPr/>
         </p:nvSpPr>
         <p:spPr>
           <a:xfrm>
-            <a:off x="6686550" y="3208734"/>
-            <a:ext cx="1544574" cy="360462"/>
+            <a:off x="6686550" y="2999184"/>
+            <a:ext cx="853321" cy="190500"/>
           </a:xfrm>
           <a:prstGeom prst="rect">
             <a:avLst/>
@@ -18077,19 +18200,19 @@
           <a:p>
             <a:pPr algn="l">
               <a:lnSpc>
-                <a:spcPts val="1413"/>
-              </a:lnSpc>
-              <a:spcBef>
-                <a:spcPts val="0"/>
-              </a:spcBef>
-              <a:spcAft>
-                <a:spcPts val="0"/>
-              </a:spcAft>
-            </a:pPr>
-            <a:r>
-              <a:rPr sz="1000" b="0" i="0">
-                <a:solidFill>
-                  <a:srgbClr val="9A9993"/>
+                <a:spcPts val="1575"/>
+              </a:lnSpc>
+              <a:spcBef>
+                <a:spcPts val="0"/>
+              </a:spcBef>
+              <a:spcAft>
+                <a:spcPts val="0"/>
+              </a:spcAft>
+            </a:pPr>
+            <a:r>
+              <a:rPr sz="1050" b="1" i="0">
+                <a:solidFill>
+                  <a:srgbClr val="ECEBE6"/>
                 </a:solidFill>
                 <a:latin typeface="Yu Gothic"/>
                 <a:ea typeface="Yu Gothic"/>
@@ -18098,42 +18221,18 @@
               <a:t>gpt-5.6-luna</a:t>
             </a:r>
           </a:p>
-          <a:p>
-            <a:pPr algn="l">
-              <a:lnSpc>
-                <a:spcPts val="1413"/>
-              </a:lnSpc>
-              <a:spcBef>
-                <a:spcPts val="0"/>
-              </a:spcBef>
-              <a:spcAft>
-                <a:spcPts val="0"/>
-              </a:spcAft>
-            </a:pPr>
-            <a:r>
-              <a:rPr sz="1000" b="0" i="0">
-                <a:solidFill>
-                  <a:srgbClr val="9A9993"/>
-                </a:solidFill>
-                <a:latin typeface="Yu Gothic"/>
-                <a:ea typeface="Yu Gothic"/>
-                <a:cs typeface="Yu Gothic"/>
-              </a:rPr>
-              <a:t>（推論は low）</a:t>
-            </a:r>
-          </a:p>
-        </p:txBody>
-      </p:sp>
-      <p:sp>
-        <p:nvSpPr>
-          <p:cNvPr id="53" name="TextBox 52"/>
+        </p:txBody>
+      </p:sp>
+      <p:sp>
+        <p:nvSpPr>
+          <p:cNvPr id="56" name="TextBox 55"/>
           <p:cNvSpPr txBox="1"/>
           <p:nvPr/>
         </p:nvSpPr>
         <p:spPr>
           <a:xfrm>
-            <a:off x="6686550" y="3767733"/>
-            <a:ext cx="1544574" cy="381000"/>
+            <a:off x="6686550" y="3208734"/>
+            <a:ext cx="1252502" cy="180975"/>
           </a:xfrm>
           <a:prstGeom prst="rect">
             <a:avLst/>
@@ -18148,63 +18247,39 @@
           <a:p>
             <a:pPr algn="l">
               <a:lnSpc>
-                <a:spcPts val="1575"/>
-              </a:lnSpc>
-              <a:spcBef>
-                <a:spcPts val="0"/>
-              </a:spcBef>
-              <a:spcAft>
-                <a:spcPts val="0"/>
-              </a:spcAft>
-            </a:pPr>
-            <a:r>
-              <a:rPr sz="1050" b="1" i="0">
-                <a:solidFill>
-                  <a:srgbClr val="ECEBE6"/>
-                </a:solidFill>
-                <a:latin typeface="Yu Gothic"/>
-                <a:ea typeface="Yu Gothic"/>
-                <a:cs typeface="Yu Gothic"/>
-              </a:rPr>
-              <a:t>ホットペッパー</a:t>
-            </a:r>
-          </a:p>
-          <a:p>
-            <a:pPr algn="l">
-              <a:lnSpc>
-                <a:spcPts val="1575"/>
-              </a:lnSpc>
-              <a:spcBef>
-                <a:spcPts val="0"/>
-              </a:spcBef>
-              <a:spcAft>
-                <a:spcPts val="0"/>
-              </a:spcAft>
-            </a:pPr>
-            <a:r>
-              <a:rPr sz="1050" b="1" i="0">
-                <a:solidFill>
-                  <a:srgbClr val="ECEBE6"/>
-                </a:solidFill>
-                <a:latin typeface="Yu Gothic"/>
-                <a:ea typeface="Yu Gothic"/>
-                <a:cs typeface="Yu Gothic"/>
-              </a:rPr>
-              <a:t>グルメサーチAPI</a:t>
-            </a:r>
-          </a:p>
-        </p:txBody>
-      </p:sp>
-      <p:sp>
-        <p:nvSpPr>
-          <p:cNvPr id="54" name="TextBox 53"/>
+                <a:spcPts val="1413"/>
+              </a:lnSpc>
+              <a:spcBef>
+                <a:spcPts val="0"/>
+              </a:spcBef>
+              <a:spcAft>
+                <a:spcPts val="0"/>
+              </a:spcAft>
+            </a:pPr>
+            <a:r>
+              <a:rPr sz="1000" b="0" i="0">
+                <a:solidFill>
+                  <a:srgbClr val="9A9993"/>
+                </a:solidFill>
+                <a:latin typeface="Yu Gothic"/>
+                <a:ea typeface="Yu Gothic"/>
+                <a:cs typeface="Yu Gothic"/>
+              </a:rPr>
+              <a:t>reasoning effort: low</a:t>
+            </a:r>
+          </a:p>
+        </p:txBody>
+      </p:sp>
+      <p:sp>
+        <p:nvSpPr>
+          <p:cNvPr id="57" name="TextBox 56"/>
           <p:cNvSpPr txBox="1"/>
           <p:nvPr/>
         </p:nvSpPr>
         <p:spPr>
           <a:xfrm>
-            <a:off x="6686550" y="4167783"/>
-            <a:ext cx="1435763" cy="180975"/>
+            <a:off x="6686550" y="4429274"/>
+            <a:ext cx="1267206" cy="247650"/>
           </a:xfrm>
           <a:prstGeom prst="rect">
             <a:avLst/>
@@ -18219,39 +18294,39 @@
           <a:p>
             <a:pPr algn="l">
               <a:lnSpc>
-                <a:spcPts val="1413"/>
-              </a:lnSpc>
-              <a:spcBef>
-                <a:spcPts val="0"/>
-              </a:spcBef>
-              <a:spcAft>
-                <a:spcPts val="0"/>
-              </a:spcAft>
-            </a:pPr>
-            <a:r>
-              <a:rPr sz="1000" b="0" i="0">
-                <a:solidFill>
-                  <a:srgbClr val="9A9993"/>
-                </a:solidFill>
-                <a:latin typeface="Yu Gothic"/>
-                <a:ea typeface="Yu Gothic"/>
-                <a:cs typeface="Yu Gothic"/>
-              </a:rPr>
-              <a:t>店舗の検索・詳細・写真</a:t>
-            </a:r>
-          </a:p>
-        </p:txBody>
-      </p:sp>
-      <p:sp>
-        <p:nvSpPr>
-          <p:cNvPr id="55" name="TextBox 54"/>
+                <a:spcPts val="2025"/>
+              </a:lnSpc>
+              <a:spcBef>
+                <a:spcPts val="0"/>
+              </a:spcBef>
+              <a:spcAft>
+                <a:spcPts val="0"/>
+              </a:spcAft>
+            </a:pPr>
+            <a:r>
+              <a:rPr sz="1350" b="1" i="0">
+                <a:solidFill>
+                  <a:srgbClr val="ECEBE6"/>
+                </a:solidFill>
+                <a:latin typeface="Yu Gothic"/>
+                <a:ea typeface="Yu Gothic"/>
+                <a:cs typeface="Yu Gothic"/>
+              </a:rPr>
+              <a:t>ホットペッパー</a:t>
+            </a:r>
+          </a:p>
+        </p:txBody>
+      </p:sp>
+      <p:sp>
+        <p:nvSpPr>
+          <p:cNvPr id="58" name="TextBox 57"/>
           <p:cNvSpPr txBox="1"/>
           <p:nvPr/>
         </p:nvSpPr>
         <p:spPr>
           <a:xfrm>
-            <a:off x="8686800" y="1629073"/>
-            <a:ext cx="1623822" cy="247650"/>
+            <a:off x="6686550" y="4762649"/>
+            <a:ext cx="503051" cy="180975"/>
           </a:xfrm>
           <a:prstGeom prst="rect">
             <a:avLst/>
@@ -18266,6 +18341,147 @@
           <a:p>
             <a:pPr algn="l">
               <a:lnSpc>
+                <a:spcPts val="1413"/>
+              </a:lnSpc>
+              <a:spcBef>
+                <a:spcPts val="0"/>
+              </a:spcBef>
+              <a:spcAft>
+                <a:spcPts val="0"/>
+              </a:spcAft>
+            </a:pPr>
+            <a:r>
+              <a:rPr sz="1000" b="0" i="0">
+                <a:solidFill>
+                  <a:srgbClr val="9A9993"/>
+                </a:solidFill>
+                <a:latin typeface="Yu Gothic"/>
+                <a:ea typeface="Yu Gothic"/>
+                <a:cs typeface="Yu Gothic"/>
+              </a:rPr>
+              <a:t>外部 API</a:t>
+            </a:r>
+          </a:p>
+        </p:txBody>
+      </p:sp>
+      <p:sp>
+        <p:nvSpPr>
+          <p:cNvPr id="59" name="TextBox 58"/>
+          <p:cNvSpPr txBox="1"/>
+          <p:nvPr/>
+        </p:nvSpPr>
+        <p:spPr>
+          <a:xfrm>
+            <a:off x="6686550" y="5142161"/>
+            <a:ext cx="1078373" cy="190500"/>
+          </a:xfrm>
+          <a:prstGeom prst="rect">
+            <a:avLst/>
+          </a:prstGeom>
+          <a:noFill/>
+        </p:spPr>
+        <p:txBody>
+          <a:bodyPr wrap="none" lIns="0" rIns="0" tIns="0" bIns="0" anchor="t">
+            <a:noAutofit/>
+          </a:bodyPr>
+          <a:lstStyle/>
+          <a:p>
+            <a:pPr algn="l">
+              <a:lnSpc>
+                <a:spcPts val="1575"/>
+              </a:lnSpc>
+              <a:spcBef>
+                <a:spcPts val="0"/>
+              </a:spcBef>
+              <a:spcAft>
+                <a:spcPts val="0"/>
+              </a:spcAft>
+            </a:pPr>
+            <a:r>
+              <a:rPr sz="1050" b="1" i="0">
+                <a:solidFill>
+                  <a:srgbClr val="ECEBE6"/>
+                </a:solidFill>
+                <a:latin typeface="Yu Gothic"/>
+                <a:ea typeface="Yu Gothic"/>
+                <a:cs typeface="Yu Gothic"/>
+              </a:rPr>
+              <a:t>グルメサーチAPI</a:t>
+            </a:r>
+          </a:p>
+        </p:txBody>
+      </p:sp>
+      <p:sp>
+        <p:nvSpPr>
+          <p:cNvPr id="60" name="TextBox 59"/>
+          <p:cNvSpPr txBox="1"/>
+          <p:nvPr/>
+        </p:nvSpPr>
+        <p:spPr>
+          <a:xfrm>
+            <a:off x="6686550" y="5351711"/>
+            <a:ext cx="1435763" cy="180975"/>
+          </a:xfrm>
+          <a:prstGeom prst="rect">
+            <a:avLst/>
+          </a:prstGeom>
+          <a:noFill/>
+        </p:spPr>
+        <p:txBody>
+          <a:bodyPr wrap="none" lIns="0" rIns="0" tIns="0" bIns="0" anchor="t">
+            <a:noAutofit/>
+          </a:bodyPr>
+          <a:lstStyle/>
+          <a:p>
+            <a:pPr algn="l">
+              <a:lnSpc>
+                <a:spcPts val="1413"/>
+              </a:lnSpc>
+              <a:spcBef>
+                <a:spcPts val="0"/>
+              </a:spcBef>
+              <a:spcAft>
+                <a:spcPts val="0"/>
+              </a:spcAft>
+            </a:pPr>
+            <a:r>
+              <a:rPr sz="1000" b="0" i="0">
+                <a:solidFill>
+                  <a:srgbClr val="9A9993"/>
+                </a:solidFill>
+                <a:latin typeface="Yu Gothic"/>
+                <a:ea typeface="Yu Gothic"/>
+                <a:cs typeface="Yu Gothic"/>
+              </a:rPr>
+              <a:t>店舗の検索・詳細・写真</a:t>
+            </a:r>
+          </a:p>
+        </p:txBody>
+      </p:sp>
+      <p:sp>
+        <p:nvSpPr>
+          <p:cNvPr id="61" name="TextBox 60"/>
+          <p:cNvSpPr txBox="1"/>
+          <p:nvPr/>
+        </p:nvSpPr>
+        <p:spPr>
+          <a:xfrm>
+            <a:off x="8686800" y="1629073"/>
+            <a:ext cx="1623822" cy="247650"/>
+          </a:xfrm>
+          <a:prstGeom prst="rect">
+            <a:avLst/>
+          </a:prstGeom>
+          <a:noFill/>
+        </p:spPr>
+        <p:txBody>
+          <a:bodyPr wrap="none" lIns="0" rIns="0" tIns="0" bIns="0" anchor="t">
+            <a:noAutofit/>
+          </a:bodyPr>
+          <a:lstStyle/>
+          <a:p>
+            <a:pPr algn="l">
+              <a:lnSpc>
                 <a:spcPts val="2025"/>
               </a:lnSpc>
               <a:spcBef>
@@ -18291,14 +18507,14 @@
       </p:sp>
       <p:sp>
         <p:nvSpPr>
-          <p:cNvPr id="56" name="TextBox 55"/>
+          <p:cNvPr id="62" name="TextBox 61"/>
           <p:cNvSpPr txBox="1"/>
           <p:nvPr/>
         </p:nvSpPr>
         <p:spPr>
           <a:xfrm>
             <a:off x="8858250" y="2200573"/>
-            <a:ext cx="2784062" cy="445740"/>
+            <a:ext cx="2784062" cy="681930"/>
           </a:xfrm>
           <a:prstGeom prst="rect">
             <a:avLst/>
@@ -18334,7 +18550,7 @@
                 <a:ea typeface="Yu Gothic"/>
                 <a:cs typeface="Yu Gothic"/>
               </a:rPr>
-              <a:t>会話と保存の正はサーバーに置き、</a:t>
+              <a:t>会話と保存の元データは</a:t>
             </a:r>
             <a:br/>
             <a:r>
@@ -18346,20 +18562,32 @@
                 <a:ea typeface="Yu Gothic"/>
                 <a:cs typeface="Yu Gothic"/>
               </a:rPr>
-              <a:t>端末の SQLite はキャッシュに留める</a:t>
-            </a:r>
-          </a:p>
-        </p:txBody>
-      </p:sp>
-      <p:sp>
-        <p:nvSpPr>
-          <p:cNvPr id="57" name="TextBox 56"/>
+              <a:t>サーバーに置き、端末の SQLite は</a:t>
+            </a:r>
+            <a:br/>
+            <a:r>
+              <a:rPr sz="1150" b="0" i="0">
+                <a:solidFill>
+                  <a:srgbClr val="ECEBE6"/>
+                </a:solidFill>
+                <a:latin typeface="Yu Gothic"/>
+                <a:ea typeface="Yu Gothic"/>
+                <a:cs typeface="Yu Gothic"/>
+              </a:rPr>
+              <a:t>キャッシュに留める</a:t>
+            </a:r>
+          </a:p>
+        </p:txBody>
+      </p:sp>
+      <p:sp>
+        <p:nvSpPr>
+          <p:cNvPr id="63" name="TextBox 62"/>
           <p:cNvSpPr txBox="1"/>
           <p:nvPr/>
         </p:nvSpPr>
         <p:spPr>
           <a:xfrm>
-            <a:off x="8858250" y="2844403"/>
+            <a:off x="8858250" y="3080593"/>
             <a:ext cx="2784062" cy="681930"/>
           </a:xfrm>
           <a:prstGeom prst="rect">
@@ -18396,7 +18624,7 @@
                 <a:ea typeface="Yu Gothic"/>
                 <a:cs typeface="Yu Gothic"/>
               </a:rPr>
-              <a:t>生成は実行単位で受け付け、</a:t>
+              <a:t>サーバーは生成を受け付けると</a:t>
             </a:r>
             <a:br/>
             <a:r>
@@ -18408,7 +18636,7 @@
                 <a:ea typeface="Yu Gothic"/>
                 <a:cs typeface="Yu Gothic"/>
               </a:rPr>
-              <a:t>通信が切れても同じ実行を</a:t>
+              <a:t>実行 ID を返し、通信が切れても</a:t>
             </a:r>
             <a:br/>
             <a:r>
@@ -18420,20 +18648,20 @@
                 <a:ea typeface="Yu Gothic"/>
                 <a:cs typeface="Yu Gothic"/>
               </a:rPr>
-              <a:t>再照会して結果を受け取る</a:t>
-            </a:r>
-          </a:p>
-        </p:txBody>
-      </p:sp>
-      <p:sp>
-        <p:nvSpPr>
-          <p:cNvPr id="58" name="TextBox 57"/>
+              <a:t>アプリはその ID で結果を取り直す</a:t>
+            </a:r>
+          </a:p>
+        </p:txBody>
+      </p:sp>
+      <p:sp>
+        <p:nvSpPr>
+          <p:cNvPr id="64" name="TextBox 63"/>
           <p:cNvSpPr txBox="1"/>
           <p:nvPr/>
         </p:nvSpPr>
         <p:spPr>
           <a:xfrm>
-            <a:off x="8858250" y="3724424"/>
+            <a:off x="8858250" y="3960614"/>
             <a:ext cx="2784062" cy="445740"/>
           </a:xfrm>
           <a:prstGeom prst="rect">
@@ -18470,7 +18698,7 @@
                 <a:ea typeface="Yu Gothic"/>
                 <a:cs typeface="Yu Gothic"/>
               </a:rPr>
-              <a:t>会話と保存はユーザーごとの Durable</a:t>
+              <a:t>会話と保存はユーザーごとの</a:t>
             </a:r>
             <a:br/>
             <a:r>
@@ -18482,20 +18710,20 @@
                 <a:ea typeface="Yu Gothic"/>
                 <a:cs typeface="Yu Gothic"/>
               </a:rPr>
-              <a:t>Object に分け、他人の会話と混ぜない</a:t>
-            </a:r>
-          </a:p>
-        </p:txBody>
-      </p:sp>
-      <p:sp>
-        <p:nvSpPr>
-          <p:cNvPr id="59" name="TextBox 58"/>
+              <a:t>Durable Object に分けて持つ</a:t>
+            </a:r>
+          </a:p>
+        </p:txBody>
+      </p:sp>
+      <p:sp>
+        <p:nvSpPr>
+          <p:cNvPr id="65" name="TextBox 64"/>
           <p:cNvSpPr txBox="1"/>
           <p:nvPr/>
         </p:nvSpPr>
         <p:spPr>
           <a:xfrm>
-            <a:off x="8858250" y="4368254"/>
+            <a:off x="8858250" y="4604445"/>
             <a:ext cx="2784062" cy="445740"/>
           </a:xfrm>
           <a:prstGeom prst="rect">
@@ -18551,7 +18779,7 @@
       </p:sp>
       <p:sp>
         <p:nvSpPr>
-          <p:cNvPr id="60" name="TextBox 59"/>
+          <p:cNvPr id="66" name="TextBox 65"/>
           <p:cNvSpPr txBox="1"/>
           <p:nvPr/>
         </p:nvSpPr>
@@ -18598,7 +18826,7 @@
       </p:sp>
       <p:sp>
         <p:nvSpPr>
-          <p:cNvPr id="61" name="TextBox 60"/>
+          <p:cNvPr id="67" name="TextBox 66"/>
           <p:cNvSpPr txBox="1"/>
           <p:nvPr/>
         </p:nvSpPr>
@@ -18749,7 +18977,7 @@
         </p:nvSpPr>
         <p:spPr>
           <a:xfrm>
-            <a:off x="752475" y="2740521"/>
+            <a:off x="752475" y="2742307"/>
             <a:ext cx="133350" cy="85725"/>
           </a:xfrm>
           <a:custGeom>
@@ -18794,7 +19022,7 @@
         </p:nvSpPr>
         <p:spPr>
           <a:xfrm>
-            <a:off x="609600" y="3044726"/>
+            <a:off x="609600" y="3048298"/>
             <a:ext cx="419100" cy="419100"/>
           </a:xfrm>
           <a:prstGeom prst="rect">
@@ -18821,7 +19049,7 @@
         </p:nvSpPr>
         <p:spPr>
           <a:xfrm>
-            <a:off x="752475" y="3682305"/>
+            <a:off x="752475" y="3687663"/>
             <a:ext cx="133350" cy="85725"/>
           </a:xfrm>
           <a:custGeom>
@@ -18866,7 +19094,7 @@
         </p:nvSpPr>
         <p:spPr>
           <a:xfrm>
-            <a:off x="609600" y="4000202"/>
+            <a:off x="609600" y="4000500"/>
             <a:ext cx="419100" cy="419100"/>
           </a:xfrm>
           <a:prstGeom prst="rect">
@@ -18893,7 +19121,7 @@
         </p:nvSpPr>
         <p:spPr>
           <a:xfrm>
-            <a:off x="752475" y="4651474"/>
+            <a:off x="752475" y="4646712"/>
             <a:ext cx="133350" cy="85725"/>
           </a:xfrm>
           <a:custGeom>
@@ -18938,7 +19166,7 @@
         </p:nvSpPr>
         <p:spPr>
           <a:xfrm>
-            <a:off x="609600" y="4943773"/>
+            <a:off x="609600" y="4940796"/>
             <a:ext cx="419100" cy="419100"/>
           </a:xfrm>
           <a:prstGeom prst="rect">
@@ -18965,7 +19193,7 @@
         </p:nvSpPr>
         <p:spPr>
           <a:xfrm>
-            <a:off x="752475" y="5569446"/>
+            <a:off x="752475" y="5568255"/>
             <a:ext cx="133350" cy="85725"/>
           </a:xfrm>
           <a:custGeom>
@@ -19010,7 +19238,7 @@
         </p:nvSpPr>
         <p:spPr>
           <a:xfrm>
-            <a:off x="609600" y="5873651"/>
+            <a:off x="609600" y="5874246"/>
             <a:ext cx="419100" cy="419100"/>
           </a:xfrm>
           <a:prstGeom prst="rect">
@@ -19116,7 +19344,7 @@
                 <a:ea typeface="Yu Gothic"/>
                 <a:cs typeface="Yu Gothic"/>
               </a:rPr>
-              <a:t>応答は respond で1回だけ確定させる</a:t>
+              <a:t>検証に通った応答だけを1回確定させる</a:t>
             </a:r>
           </a:p>
         </p:txBody>
@@ -19317,7 +19545,7 @@
         </p:nvSpPr>
         <p:spPr>
           <a:xfrm>
-            <a:off x="766911" y="3130451"/>
+            <a:off x="766911" y="3134023"/>
             <a:ext cx="127706" cy="247650"/>
           </a:xfrm>
           <a:prstGeom prst="rect">
@@ -19364,7 +19592,7 @@
         </p:nvSpPr>
         <p:spPr>
           <a:xfrm>
-            <a:off x="1162050" y="3131344"/>
+            <a:off x="1162050" y="3134916"/>
             <a:ext cx="1019401" cy="238125"/>
           </a:xfrm>
           <a:prstGeom prst="rect">
@@ -19411,7 +19639,7 @@
         </p:nvSpPr>
         <p:spPr>
           <a:xfrm>
-            <a:off x="3162300" y="3042345"/>
+            <a:off x="3162300" y="3045916"/>
             <a:ext cx="4199382" cy="421481"/>
           </a:xfrm>
           <a:prstGeom prst="rect">
@@ -19445,7 +19673,7 @@
                 <a:ea typeface="Yu Gothic"/>
                 <a:cs typeface="Yu Gothic"/>
               </a:rPr>
-              <a:t>ThreadDO の Think がモデルを呼ぶ</a:t>
+              <a:t>ThreadDO で Cloudflare の Think SDK がモデルを呼ぶ</a:t>
             </a:r>
           </a:p>
           <a:p>
@@ -19469,7 +19697,7 @@
                 <a:ea typeface="Yu Gothic"/>
                 <a:cs typeface="Yu Gothic"/>
               </a:rPr>
-              <a:t>（1回の発言につき最大6ステップ・60秒）</a:t>
+              <a:t>（1回の発言につきモデル呼び出し最大6回・60秒）</a:t>
             </a:r>
           </a:p>
         </p:txBody>
@@ -19482,7 +19710,7 @@
         </p:nvSpPr>
         <p:spPr>
           <a:xfrm>
-            <a:off x="766911" y="4085927"/>
+            <a:off x="766911" y="4086225"/>
             <a:ext cx="127706" cy="247650"/>
           </a:xfrm>
           <a:prstGeom prst="rect">
@@ -19529,7 +19757,7 @@
         </p:nvSpPr>
         <p:spPr>
           <a:xfrm>
-            <a:off x="1162050" y="4086820"/>
+            <a:off x="1162050" y="4087118"/>
             <a:ext cx="1534668" cy="238125"/>
           </a:xfrm>
           <a:prstGeom prst="rect">
@@ -19576,7 +19804,7 @@
         </p:nvSpPr>
         <p:spPr>
           <a:xfrm>
-            <a:off x="3162300" y="3984129"/>
+            <a:off x="3162300" y="3991273"/>
             <a:ext cx="4199382" cy="435173"/>
           </a:xfrm>
           <a:prstGeom prst="rect">
@@ -19623,6 +19851,28 @@
               </a:rPr>
               <a:t> で探し、</a:t>
             </a:r>
+            <a:r>
+              <a:rPr sz="1050" b="0" i="0">
+                <a:solidFill>
+                  <a:srgbClr val="B7C97A"/>
+                </a:solidFill>
+                <a:latin typeface="Yu Gothic"/>
+                <a:ea typeface="Yu Gothic"/>
+                <a:cs typeface="Yu Gothic"/>
+              </a:rPr>
+              <a:t>get_place_details</a:t>
+            </a:r>
+            <a:r>
+              <a:rPr sz="1100" b="0" i="0">
+                <a:solidFill>
+                  <a:srgbClr val="ECEBE6"/>
+                </a:solidFill>
+                <a:latin typeface="Yu Gothic"/>
+                <a:ea typeface="Yu Gothic"/>
+                <a:cs typeface="Yu Gothic"/>
+              </a:rPr>
+              <a:t> で</a:t>
+            </a:r>
           </a:p>
           <a:p>
             <a:pPr algn="l">
@@ -19637,17 +19887,6 @@
               </a:spcAft>
             </a:pPr>
             <a:r>
-              <a:rPr sz="1050" b="0" i="0">
-                <a:solidFill>
-                  <a:srgbClr val="B7C97A"/>
-                </a:solidFill>
-                <a:latin typeface="Yu Gothic"/>
-                <a:ea typeface="Yu Gothic"/>
-                <a:cs typeface="Yu Gothic"/>
-              </a:rPr>
-              <a:t>get_place_details</a:t>
-            </a:r>
-            <a:r>
               <a:rPr sz="1100" b="0" i="0">
                 <a:solidFill>
                   <a:srgbClr val="ECEBE6"/>
@@ -19656,7 +19895,7 @@
                 <a:ea typeface="Yu Gothic"/>
                 <a:cs typeface="Yu Gothic"/>
               </a:rPr>
-              <a:t> で詳細を取り直す</a:t>
+              <a:t>詳細を取り直す（必要なだけ手順2から繰り返す）</a:t>
             </a:r>
           </a:p>
         </p:txBody>
@@ -19669,7 +19908,7 @@
         </p:nvSpPr>
         <p:spPr>
           <a:xfrm>
-            <a:off x="766911" y="5029498"/>
+            <a:off x="766911" y="5026521"/>
             <a:ext cx="127706" cy="247650"/>
           </a:xfrm>
           <a:prstGeom prst="rect">
@@ -19716,7 +19955,7 @@
         </p:nvSpPr>
         <p:spPr>
           <a:xfrm>
-            <a:off x="1162050" y="5030391"/>
+            <a:off x="1162050" y="5027414"/>
             <a:ext cx="861060" cy="238125"/>
           </a:xfrm>
           <a:prstGeom prst="rect">
@@ -19763,7 +20002,7 @@
         </p:nvSpPr>
         <p:spPr>
           <a:xfrm>
-            <a:off x="3162300" y="5045273"/>
+            <a:off x="3162300" y="5042297"/>
             <a:ext cx="3691235" cy="200025"/>
           </a:xfrm>
           <a:prstGeom prst="rect">
@@ -19821,7 +20060,7 @@
         </p:nvSpPr>
         <p:spPr>
           <a:xfrm>
-            <a:off x="766911" y="5959376"/>
+            <a:off x="766911" y="5959971"/>
             <a:ext cx="127706" cy="247650"/>
           </a:xfrm>
           <a:prstGeom prst="rect">
@@ -19868,7 +20107,7 @@
         </p:nvSpPr>
         <p:spPr>
           <a:xfrm>
-            <a:off x="1162050" y="5960269"/>
+            <a:off x="1162050" y="5960864"/>
             <a:ext cx="1361313" cy="238125"/>
           </a:xfrm>
           <a:prstGeom prst="rect">
@@ -19915,7 +20154,7 @@
         </p:nvSpPr>
         <p:spPr>
           <a:xfrm>
-            <a:off x="3162300" y="5871270"/>
+            <a:off x="3162300" y="5871865"/>
             <a:ext cx="4199382" cy="421481"/>
           </a:xfrm>
           <a:prstGeom prst="rect">
@@ -19949,7 +20188,7 @@
                 <a:ea typeface="Yu Gothic"/>
                 <a:cs typeface="Yu Gothic"/>
               </a:rPr>
-              <a:t>根拠・鮮度・必須条件を確かめて1回だけ確定し、</a:t>
+              <a:t>根拠・情報の新しさ・必須条件を確かめて確定する</a:t>
             </a:r>
           </a:p>
           <a:p>
@@ -19973,7 +20212,7 @@
                 <a:ea typeface="Yu Gothic"/>
                 <a:cs typeface="Yu Gothic"/>
               </a:rPr>
-              <a:t>アプリへ届ける</a:t>
+              <a:t>（通らなければ手順4へ差し戻し、2回まで直させる）</a:t>
             </a:r>
           </a:p>
         </p:txBody>
@@ -20020,7 +20259,7 @@
                 <a:ea typeface="Yu Gothic"/>
                 <a:cs typeface="Yu Gothic"/>
               </a:rPr>
-              <a:t>AI の回答を根拠に結びつける仕組み</a:t>
+              <a:t>AI の応答を根拠に結びつける仕組み</a:t>
             </a:r>
           </a:p>
         </p:txBody>
@@ -20070,7 +20309,7 @@
                 <a:ea typeface="Yu Gothic"/>
                 <a:cs typeface="Yu Gothic"/>
               </a:rPr>
-              <a:t>どのステップでも Tool の呼び出しを必須にし、</a:t>
+              <a:t>モデルを呼ぶたびに Tool の呼び出しを必須にし、</a:t>
             </a:r>
             <a:br/>
             <a:r>
@@ -20082,7 +20321,7 @@
                 <a:ea typeface="Yu Gothic"/>
                 <a:cs typeface="Yu Gothic"/>
               </a:rPr>
-              <a:t>文章だけの返答は確定させない</a:t>
+              <a:t>文章だけの応答は確定させない</a:t>
             </a:r>
           </a:p>
         </p:txBody>
@@ -20132,7 +20371,7 @@
                 <a:ea typeface="Yu Gothic"/>
                 <a:cs typeface="Yu Gothic"/>
               </a:rPr>
-              <a:t>1つのステップの中で、店舗情報の読み取りと</a:t>
+              <a:t>店舗情報を読み取ったのと同じ呼び出しでは、</a:t>
             </a:r>
             <a:br/>
             <a:r>
@@ -20144,7 +20383,7 @@
                 <a:ea typeface="Yu Gothic"/>
                 <a:cs typeface="Yu Gothic"/>
               </a:rPr>
-              <a:t>応答の確定を混ぜない</a:t>
+              <a:t>応答を確定させない</a:t>
             </a:r>
           </a:p>
         </p:txBody>
@@ -20220,7 +20459,7 @@
         <p:spPr>
           <a:xfrm>
             <a:off x="7772400" y="4132064"/>
-            <a:ext cx="3482280" cy="209550"/>
+            <a:ext cx="3088053" cy="209550"/>
           </a:xfrm>
           <a:prstGeom prst="rect">
             <a:avLst/>
@@ -20256,7 +20495,7 @@
                 <a:ea typeface="Yu Gothic"/>
                 <a:cs typeface="Yu Gothic"/>
               </a:rPr>
-              <a:t>検証に通らない応答は差し戻し、2回まで直させる</a:t>
+              <a:t>確定した応答だけを、SSE でアプリへ届ける</a:t>
             </a:r>
           </a:p>
         </p:txBody>

--- a/docs/pitch/ima-pitch.pptx
+++ b/docs/pitch/ima-pitch.pptx
@@ -6206,7 +6206,7 @@
         <p:spPr>
           <a:xfrm>
             <a:off x="609600" y="6143625"/>
-            <a:ext cx="5481745" cy="161925"/>
+            <a:ext cx="5534989" cy="161925"/>
           </a:xfrm>
           <a:prstGeom prst="rect">
             <a:avLst/>
@@ -6239,7 +6239,7 @@
                 <a:ea typeface="Yu Gothic"/>
                 <a:cs typeface="Yu Gothic"/>
               </a:rPr>
-              <a:t>吹き出しとカードの文面は説明用の例店舗データ：Powered by </a:t>
+              <a:t>吹き出しとカードの文面は説明用の例／店舗データ：Powered by </a:t>
             </a:r>
             <a:r>
               <a:rPr sz="900" b="0" i="0" u="sng">
@@ -7902,7 +7902,7 @@
         <p:spPr>
           <a:xfrm>
             <a:off x="609600" y="428625"/>
-            <a:ext cx="7928062" cy="438150"/>
+            <a:ext cx="7915370" cy="438150"/>
           </a:xfrm>
           <a:prstGeom prst="rect">
             <a:avLst/>
@@ -7935,7 +7935,7 @@
                 <a:ea typeface="Yu Gothic"/>
                 <a:cs typeface="Yu Gothic"/>
               </a:rPr>
-              <a:t>画面は、起動から店舗詳細まで会話の流れに沿って進む</a:t>
+              <a:t>起動から店舗詳細まで、画面は会話の流れに沿って進む</a:t>
             </a:r>
           </a:p>
         </p:txBody>
@@ -14538,7 +14538,7 @@
       <p:grpSpPr/>
       <p:pic>
         <p:nvPicPr>
-          <p:cNvPr id="2" name="Picture 1" descr="img_9_26.png"/>
+          <p:cNvPr id="2" name="Picture 1" descr="img_3_4.png"/>
           <p:cNvPicPr>
             <a:picLocks noChangeAspect="1"/>
           </p:cNvPicPr>
@@ -14560,16 +14560,91 @@
           </a:prstGeom>
         </p:spPr>
       </p:pic>
+      <p:pic>
+        <p:nvPicPr>
+          <p:cNvPr id="3" name="Picture 2" descr="img_9_27.png"/>
+          <p:cNvPicPr>
+            <a:picLocks noChangeAspect="1"/>
+          </p:cNvPicPr>
+          <p:nvPr/>
+        </p:nvPicPr>
+        <p:blipFill>
+          <a:blip r:embed="rId3"/>
+          <a:stretch>
+            <a:fillRect/>
+          </a:stretch>
+        </p:blipFill>
+        <p:spPr>
+          <a:xfrm>
+            <a:off x="609600" y="1390650"/>
+            <a:ext cx="10972800" cy="4191000"/>
+          </a:xfrm>
+          <a:prstGeom prst="rect">
+            <a:avLst/>
+          </a:prstGeom>
+        </p:spPr>
+      </p:pic>
+      <p:sp>
+        <p:nvSpPr>
+          <p:cNvPr id="4" name="Rectangle 3"/>
+          <p:cNvSpPr/>
+          <p:nvPr/>
+        </p:nvSpPr>
+        <p:spPr>
+          <a:xfrm>
+            <a:off x="4905375" y="2438400"/>
+            <a:ext cx="2381250" cy="2286000"/>
+          </a:xfrm>
+          <a:prstGeom prst="rect">
+            <a:avLst/>
+          </a:prstGeom>
+          <a:noFill/>
+          <a:ln w="9525">
+            <a:solidFill>
+              <a:srgbClr val="6B6A66"/>
+            </a:solidFill>
+          </a:ln>
+        </p:spPr>
+        <p:txBody>
+          <a:bodyPr rtlCol="0" anchor="ctr"/>
+          <a:lstStyle/>
+          <a:p/>
+        </p:txBody>
+      </p:sp>
+      <p:pic>
+        <p:nvPicPr>
+          <p:cNvPr id="5" name="Picture 4" descr="img_9_28.png"/>
+          <p:cNvPicPr>
+            <a:picLocks noChangeAspect="1"/>
+          </p:cNvPicPr>
+          <p:nvPr/>
+        </p:nvPicPr>
+        <p:blipFill>
+          <a:blip r:embed="rId4"/>
+          <a:stretch>
+            <a:fillRect/>
+          </a:stretch>
+        </p:blipFill>
+        <p:spPr>
+          <a:xfrm>
+            <a:off x="5753100" y="2708970"/>
+            <a:ext cx="685800" cy="839986"/>
+          </a:xfrm>
+          <a:prstGeom prst="rect">
+            <a:avLst/>
+          </a:prstGeom>
+        </p:spPr>
+      </p:pic>
       <p:cxnSp>
         <p:nvCxnSpPr>
-          <p:cNvPr id="3" name="Connector 2"/>
+          <p:cNvPr id="6" name="Connector 5"/>
           <p:cNvCxnSpPr/>
           <p:nvPr/>
         </p:nvCxnSpPr>
         <p:spPr>
           <a:xfrm>
-            <a:off x="4286250" y="2218730"/>
-            <a:ext cx="7296150" cy="0"/>
+            <a:off x="609600" y="1400175"/>
+            <a:ext cx="3448050" cy="0"/>
           </a:xfrm>
           <a:prstGeom prst="line">
             <a:avLst/>
@@ -14581,58 +14656,187 @@
           </a:ln>
         </p:spPr>
       </p:cxnSp>
+      <p:sp>
+        <p:nvSpPr>
+          <p:cNvPr id="7" name="Rectangle 6"/>
+          <p:cNvSpPr/>
+          <p:nvPr/>
+        </p:nvSpPr>
+        <p:spPr>
+          <a:xfrm>
+            <a:off x="609600" y="1890712"/>
+            <a:ext cx="247650" cy="247650"/>
+          </a:xfrm>
+          <a:prstGeom prst="rect">
+            <a:avLst/>
+          </a:prstGeom>
+          <a:solidFill>
+            <a:srgbClr val="B7C97A"/>
+          </a:solidFill>
+          <a:ln>
+            <a:noFill/>
+          </a:ln>
+        </p:spPr>
+        <p:txBody>
+          <a:bodyPr rtlCol="0" anchor="ctr"/>
+          <a:lstStyle/>
+          <a:p/>
+        </p:txBody>
+      </p:sp>
       <p:cxnSp>
         <p:nvCxnSpPr>
-          <p:cNvPr id="4" name="Connector 3"/>
+          <p:cNvPr id="8" name="Connector 7"/>
           <p:cNvCxnSpPr/>
           <p:nvPr/>
         </p:nvCxnSpPr>
         <p:spPr>
           <a:xfrm>
-            <a:off x="4286250" y="3227189"/>
-            <a:ext cx="7296150" cy="0"/>
+            <a:off x="8134350" y="1400175"/>
+            <a:ext cx="3448050" cy="0"/>
           </a:xfrm>
           <a:prstGeom prst="line">
             <a:avLst/>
           </a:prstGeom>
-          <a:ln w="9525">
+          <a:ln w="19050">
             <a:solidFill>
-              <a:srgbClr val="2A2A2E"/>
+              <a:srgbClr val="ECEBE6"/>
             </a:solidFill>
           </a:ln>
         </p:spPr>
       </p:cxnSp>
+      <p:sp>
+        <p:nvSpPr>
+          <p:cNvPr id="9" name="Rectangle 8"/>
+          <p:cNvSpPr/>
+          <p:nvPr/>
+        </p:nvSpPr>
+        <p:spPr>
+          <a:xfrm>
+            <a:off x="8134350" y="1890712"/>
+            <a:ext cx="247650" cy="247650"/>
+          </a:xfrm>
+          <a:prstGeom prst="rect">
+            <a:avLst/>
+          </a:prstGeom>
+          <a:solidFill>
+            <a:srgbClr val="B7C97A"/>
+          </a:solidFill>
+          <a:ln>
+            <a:noFill/>
+          </a:ln>
+        </p:spPr>
+        <p:txBody>
+          <a:bodyPr rtlCol="0" anchor="ctr"/>
+          <a:lstStyle/>
+          <a:p/>
+        </p:txBody>
+      </p:sp>
       <p:cxnSp>
         <p:nvCxnSpPr>
-          <p:cNvPr id="5" name="Connector 4"/>
+          <p:cNvPr id="10" name="Connector 9"/>
           <p:cNvCxnSpPr/>
           <p:nvPr/>
         </p:nvCxnSpPr>
         <p:spPr>
           <a:xfrm>
-            <a:off x="4286250" y="4230886"/>
-            <a:ext cx="7296150" cy="0"/>
+            <a:off x="609600" y="3914775"/>
+            <a:ext cx="3448050" cy="0"/>
           </a:xfrm>
           <a:prstGeom prst="line">
             <a:avLst/>
           </a:prstGeom>
-          <a:ln w="9525">
+          <a:ln w="19050">
             <a:solidFill>
-              <a:srgbClr val="2A2A2E"/>
+              <a:srgbClr val="ECEBE6"/>
             </a:solidFill>
           </a:ln>
         </p:spPr>
       </p:cxnSp>
       <p:sp>
         <p:nvSpPr>
-          <p:cNvPr id="6" name="Title"/>
+          <p:cNvPr id="11" name="Rectangle 10"/>
+          <p:cNvSpPr/>
+          <p:nvPr/>
+        </p:nvSpPr>
+        <p:spPr>
+          <a:xfrm>
+            <a:off x="609600" y="4405312"/>
+            <a:ext cx="247650" cy="247650"/>
+          </a:xfrm>
+          <a:prstGeom prst="rect">
+            <a:avLst/>
+          </a:prstGeom>
+          <a:solidFill>
+            <a:srgbClr val="B7C97A"/>
+          </a:solidFill>
+          <a:ln>
+            <a:noFill/>
+          </a:ln>
+        </p:spPr>
+        <p:txBody>
+          <a:bodyPr rtlCol="0" anchor="ctr"/>
+          <a:lstStyle/>
+          <a:p/>
+        </p:txBody>
+      </p:sp>
+      <p:cxnSp>
+        <p:nvCxnSpPr>
+          <p:cNvPr id="12" name="Connector 11"/>
+          <p:cNvCxnSpPr/>
+          <p:nvPr/>
+        </p:nvCxnSpPr>
+        <p:spPr>
+          <a:xfrm>
+            <a:off x="8134350" y="3914775"/>
+            <a:ext cx="3448050" cy="0"/>
+          </a:xfrm>
+          <a:prstGeom prst="line">
+            <a:avLst/>
+          </a:prstGeom>
+          <a:ln w="19050">
+            <a:solidFill>
+              <a:srgbClr val="ECEBE6"/>
+            </a:solidFill>
+          </a:ln>
+        </p:spPr>
+      </p:cxnSp>
+      <p:sp>
+        <p:nvSpPr>
+          <p:cNvPr id="13" name="Rectangle 12"/>
+          <p:cNvSpPr/>
+          <p:nvPr/>
+        </p:nvSpPr>
+        <p:spPr>
+          <a:xfrm>
+            <a:off x="8134350" y="4405312"/>
+            <a:ext cx="247650" cy="247650"/>
+          </a:xfrm>
+          <a:prstGeom prst="rect">
+            <a:avLst/>
+          </a:prstGeom>
+          <a:solidFill>
+            <a:srgbClr val="1C1C1E"/>
+          </a:solidFill>
+          <a:ln>
+            <a:noFill/>
+          </a:ln>
+        </p:spPr>
+        <p:txBody>
+          <a:bodyPr rtlCol="0" anchor="ctr"/>
+          <a:lstStyle/>
+          <a:p/>
+        </p:txBody>
+      </p:sp>
+      <p:sp>
+        <p:nvSpPr>
+          <p:cNvPr id="14" name="Title"/>
           <p:cNvSpPr txBox="1"/>
           <p:nvPr/>
         </p:nvSpPr>
         <p:spPr>
           <a:xfrm>
             <a:off x="609600" y="428625"/>
-            <a:ext cx="8924389" cy="438150"/>
+            <a:ext cx="8894981" cy="438150"/>
           </a:xfrm>
           <a:prstGeom prst="rect">
             <a:avLst/>
@@ -14665,46 +14869,46 @@
                 <a:ea typeface="Yu Gothic"/>
                 <a:cs typeface="Yu Gothic"/>
               </a:rPr>
-              <a:t>次は maru と話しながら、二軒めまで一緒に探せるようにする</a:t>
-            </a:r>
-          </a:p>
-        </p:txBody>
-      </p:sp>
-      <p:sp>
-        <p:nvSpPr>
-          <p:cNvPr id="7" name="TextBox 6"/>
-          <p:cNvSpPr txBox="1"/>
-          <p:nvPr/>
-        </p:nvSpPr>
-        <p:spPr>
-          <a:xfrm>
-            <a:off x="609600" y="2671911"/>
-            <a:ext cx="3288030" cy="1687711"/>
-          </a:xfrm>
-          <a:prstGeom prst="rect">
-            <a:avLst/>
-          </a:prstGeom>
-          <a:noFill/>
-        </p:spPr>
-        <p:txBody>
-          <a:bodyPr wrap="none" lIns="0" rIns="0" tIns="0" bIns="0" anchor="t">
-            <a:noAutofit/>
-          </a:bodyPr>
-          <a:lstStyle/>
-          <a:p>
-            <a:pPr algn="l">
-              <a:lnSpc>
-                <a:spcPts val="5865"/>
-              </a:lnSpc>
-              <a:spcBef>
-                <a:spcPts val="0"/>
-              </a:spcBef>
-              <a:spcAft>
-                <a:spcPts val="0"/>
-              </a:spcAft>
-            </a:pPr>
-            <a:r>
-              <a:rPr sz="5100" b="1" i="0">
+              <a:t>曖昧な一言からその人に合う店を選び、共有までつなげていく</a:t>
+            </a:r>
+          </a:p>
+        </p:txBody>
+      </p:sp>
+      <p:sp>
+        <p:nvSpPr>
+          <p:cNvPr id="15" name="TextBox 14"/>
+          <p:cNvSpPr txBox="1"/>
+          <p:nvPr/>
+        </p:nvSpPr>
+        <p:spPr>
+          <a:xfrm>
+            <a:off x="5632966" y="3663255"/>
+            <a:ext cx="926068" cy="247650"/>
+          </a:xfrm>
+          <a:prstGeom prst="rect">
+            <a:avLst/>
+          </a:prstGeom>
+          <a:noFill/>
+        </p:spPr>
+        <p:txBody>
+          <a:bodyPr wrap="none" lIns="0" rIns="0" tIns="0" bIns="0" anchor="t">
+            <a:noAutofit/>
+          </a:bodyPr>
+          <a:lstStyle/>
+          <a:p>
+            <a:pPr algn="ctr">
+              <a:lnSpc>
+                <a:spcPts val="2025"/>
+              </a:lnSpc>
+              <a:spcBef>
+                <a:spcPts val="0"/>
+              </a:spcBef>
+              <a:spcAft>
+                <a:spcPts val="0"/>
+              </a:spcAft>
+            </a:pPr>
+            <a:r>
+              <a:rPr sz="1350" b="1" i="0">
                 <a:solidFill>
                   <a:srgbClr val="ECEBE6"/>
                 </a:solidFill>
@@ -14712,23 +14916,164 @@
                 <a:ea typeface="Yu Gothic"/>
                 <a:cs typeface="Yu Gothic"/>
               </a:rPr>
-              <a:t>これから</a:t>
-            </a:r>
-          </a:p>
-          <a:p>
-            <a:pPr algn="l">
-              <a:lnSpc>
-                <a:spcPts val="5865"/>
-              </a:lnSpc>
-              <a:spcBef>
-                <a:spcPts val="0"/>
-              </a:spcBef>
-              <a:spcAft>
-                <a:spcPts val="0"/>
-              </a:spcAft>
-            </a:pPr>
-            <a:r>
-              <a:rPr sz="5100" b="1" i="0">
+              <a:t>いまの ima</a:t>
+            </a:r>
+          </a:p>
+        </p:txBody>
+      </p:sp>
+      <p:sp>
+        <p:nvSpPr>
+          <p:cNvPr id="16" name="TextBox 15"/>
+          <p:cNvSpPr txBox="1"/>
+          <p:nvPr/>
+        </p:nvSpPr>
+        <p:spPr>
+          <a:xfrm>
+            <a:off x="5125751" y="4025205"/>
+            <a:ext cx="1940350" cy="414338"/>
+          </a:xfrm>
+          <a:prstGeom prst="rect">
+            <a:avLst/>
+          </a:prstGeom>
+          <a:noFill/>
+        </p:spPr>
+        <p:txBody>
+          <a:bodyPr wrap="none" lIns="0" rIns="0" tIns="0" bIns="0" anchor="t">
+            <a:noAutofit/>
+          </a:bodyPr>
+          <a:lstStyle/>
+          <a:p>
+            <a:pPr algn="ctr">
+              <a:lnSpc>
+                <a:spcPts val="1687"/>
+              </a:lnSpc>
+              <a:spcBef>
+                <a:spcPts val="0"/>
+              </a:spcBef>
+              <a:spcAft>
+                <a:spcPts val="0"/>
+              </a:spcAft>
+            </a:pPr>
+            <a:r>
+              <a:rPr sz="1100" b="0" i="0">
+                <a:solidFill>
+                  <a:srgbClr val="9A9993"/>
+                </a:solidFill>
+                <a:latin typeface="Yu Gothic"/>
+                <a:ea typeface="Yu Gothic"/>
+                <a:cs typeface="Yu Gothic"/>
+              </a:rPr>
+              <a:t>希望を伝えると、理由付きで</a:t>
+            </a:r>
+          </a:p>
+          <a:p>
+            <a:pPr algn="ctr">
+              <a:lnSpc>
+                <a:spcPts val="1687"/>
+              </a:lnSpc>
+              <a:spcBef>
+                <a:spcPts val="0"/>
+              </a:spcBef>
+              <a:spcAft>
+                <a:spcPts val="0"/>
+              </a:spcAft>
+            </a:pPr>
+            <a:r>
+              <a:rPr sz="1100" b="0" i="0">
+                <a:solidFill>
+                  <a:srgbClr val="9A9993"/>
+                </a:solidFill>
+                <a:latin typeface="Yu Gothic"/>
+                <a:ea typeface="Yu Gothic"/>
+                <a:cs typeface="Yu Gothic"/>
+              </a:rPr>
+              <a:t>3件以内に絞る</a:t>
+            </a:r>
+          </a:p>
+        </p:txBody>
+      </p:sp>
+      <p:sp>
+        <p:nvSpPr>
+          <p:cNvPr id="17" name="TextBox 16"/>
+          <p:cNvSpPr txBox="1"/>
+          <p:nvPr/>
+        </p:nvSpPr>
+        <p:spPr>
+          <a:xfrm>
+            <a:off x="609600" y="1562100"/>
+            <a:ext cx="1956602" cy="190500"/>
+          </a:xfrm>
+          <a:prstGeom prst="rect">
+            <a:avLst/>
+          </a:prstGeom>
+          <a:noFill/>
+        </p:spPr>
+        <p:txBody>
+          <a:bodyPr wrap="none" lIns="0" rIns="0" tIns="0" bIns="0" anchor="t">
+            <a:noAutofit/>
+          </a:bodyPr>
+          <a:lstStyle/>
+          <a:p>
+            <a:pPr algn="l">
+              <a:lnSpc>
+                <a:spcPts val="1575"/>
+              </a:lnSpc>
+              <a:spcBef>
+                <a:spcPts val="0"/>
+              </a:spcBef>
+              <a:spcAft>
+                <a:spcPts val="0"/>
+              </a:spcAft>
+            </a:pPr>
+            <a:r>
+              <a:rPr sz="1050" b="1" i="0">
+                <a:solidFill>
+                  <a:srgbClr val="B7C97A"/>
+                </a:solidFill>
+                <a:latin typeface="Yu Gothic"/>
+                <a:ea typeface="Yu Gothic"/>
+                <a:cs typeface="Yu Gothic"/>
+              </a:rPr>
+              <a:t>プロンプトの上手さに頼らない</a:t>
+            </a:r>
+          </a:p>
+        </p:txBody>
+      </p:sp>
+      <p:sp>
+        <p:nvSpPr>
+          <p:cNvPr id="18" name="TextBox 17"/>
+          <p:cNvSpPr txBox="1"/>
+          <p:nvPr/>
+        </p:nvSpPr>
+        <p:spPr>
+          <a:xfrm>
+            <a:off x="971550" y="1847850"/>
+            <a:ext cx="2871978" cy="333375"/>
+          </a:xfrm>
+          <a:prstGeom prst="rect">
+            <a:avLst/>
+          </a:prstGeom>
+          <a:noFill/>
+        </p:spPr>
+        <p:txBody>
+          <a:bodyPr wrap="none" lIns="0" rIns="0" tIns="0" bIns="0" anchor="t">
+            <a:noAutofit/>
+          </a:bodyPr>
+          <a:lstStyle/>
+          <a:p>
+            <a:pPr algn="l">
+              <a:lnSpc>
+                <a:spcPts val="2700"/>
+              </a:lnSpc>
+              <a:spcBef>
+                <a:spcPts val="0"/>
+              </a:spcBef>
+              <a:spcAft>
+                <a:spcPts val="0"/>
+              </a:spcAft>
+            </a:pPr>
+            <a:r>
+              <a:rPr sz="1800" b="1" i="0">
                 <a:solidFill>
                   <a:srgbClr val="ECEBE6"/>
                 </a:solidFill>
@@ -14736,21 +15081,68 @@
                 <a:ea typeface="Yu Gothic"/>
                 <a:cs typeface="Yu Gothic"/>
               </a:rPr>
-              <a:t>作るもの</a:t>
-            </a:r>
-          </a:p>
-        </p:txBody>
-      </p:sp>
-      <p:sp>
-        <p:nvSpPr>
-          <p:cNvPr id="8" name="TextBox 7"/>
-          <p:cNvSpPr txBox="1"/>
-          <p:nvPr/>
-        </p:nvSpPr>
-        <p:spPr>
-          <a:xfrm>
-            <a:off x="609600" y="4418558"/>
-            <a:ext cx="2803874" cy="228600"/>
+              <a:t>曖昧な一言から意図を汲む</a:t>
+            </a:r>
+          </a:p>
+        </p:txBody>
+      </p:sp>
+      <p:sp>
+        <p:nvSpPr>
+          <p:cNvPr id="19" name="TextBox 18"/>
+          <p:cNvSpPr txBox="1"/>
+          <p:nvPr/>
+        </p:nvSpPr>
+        <p:spPr>
+          <a:xfrm>
+            <a:off x="689818" y="1914525"/>
+            <a:ext cx="109597" cy="200025"/>
+          </a:xfrm>
+          <a:prstGeom prst="rect">
+            <a:avLst/>
+          </a:prstGeom>
+          <a:noFill/>
+        </p:spPr>
+        <p:txBody>
+          <a:bodyPr wrap="none" lIns="0" rIns="0" tIns="0" bIns="0" anchor="t">
+            <a:noAutofit/>
+          </a:bodyPr>
+          <a:lstStyle/>
+          <a:p>
+            <a:pPr algn="l">
+              <a:lnSpc>
+                <a:spcPts val="1125"/>
+              </a:lnSpc>
+              <a:spcBef>
+                <a:spcPts val="0"/>
+              </a:spcBef>
+              <a:spcAft>
+                <a:spcPts val="0"/>
+              </a:spcAft>
+            </a:pPr>
+            <a:r>
+              <a:rPr sz="1100" b="1" i="0">
+                <a:solidFill>
+                  <a:srgbClr val="161616"/>
+                </a:solidFill>
+                <a:latin typeface="Yu Gothic"/>
+                <a:ea typeface="Yu Gothic"/>
+                <a:cs typeface="Yu Gothic"/>
+              </a:rPr>
+              <a:t>1</a:t>
+            </a:r>
+          </a:p>
+        </p:txBody>
+      </p:sp>
+      <p:sp>
+        <p:nvSpPr>
+          <p:cNvPr id="20" name="TextBox 19"/>
+          <p:cNvSpPr txBox="1"/>
+          <p:nvPr/>
+        </p:nvSpPr>
+        <p:spPr>
+          <a:xfrm>
+            <a:off x="609600" y="2276475"/>
+            <a:ext cx="3605022" cy="716161"/>
           </a:xfrm>
           <a:prstGeom prst="rect">
             <a:avLst/>
@@ -14783,46 +15175,141 @@
                 <a:ea typeface="Yu Gothic"/>
                 <a:cs typeface="Yu Gothic"/>
               </a:rPr>
-              <a:t>GitHub Issues で管理している改善から</a:t>
-            </a:r>
-          </a:p>
-        </p:txBody>
-      </p:sp>
-      <p:sp>
-        <p:nvSpPr>
-          <p:cNvPr id="9" name="TextBox 8"/>
-          <p:cNvSpPr txBox="1"/>
-          <p:nvPr/>
-        </p:nvSpPr>
-        <p:spPr>
-          <a:xfrm>
-            <a:off x="4286250" y="2428280"/>
-            <a:ext cx="1980593" cy="304800"/>
-          </a:xfrm>
-          <a:prstGeom prst="rect">
-            <a:avLst/>
-          </a:prstGeom>
-          <a:noFill/>
-        </p:spPr>
-        <p:txBody>
-          <a:bodyPr wrap="none" lIns="0" rIns="0" tIns="0" bIns="0" anchor="t">
-            <a:noAutofit/>
-          </a:bodyPr>
-          <a:lstStyle/>
-          <a:p>
-            <a:pPr algn="l">
-              <a:lnSpc>
-                <a:spcPts val="2310"/>
-              </a:lnSpc>
-              <a:spcBef>
-                <a:spcPts val="0"/>
-              </a:spcBef>
-              <a:spcAft>
-                <a:spcPts val="0"/>
-              </a:spcAft>
-            </a:pPr>
-            <a:r>
-              <a:rPr sz="1650" b="1" i="0">
+              <a:t>「いい感じのとこ」のような抽象的な</a:t>
+            </a:r>
+          </a:p>
+          <a:p>
+            <a:pPr algn="l">
+              <a:lnSpc>
+                <a:spcPts val="1920"/>
+              </a:lnSpc>
+              <a:spcBef>
+                <a:spcPts val="0"/>
+              </a:spcBef>
+              <a:spcAft>
+                <a:spcPts val="0"/>
+              </a:spcAft>
+            </a:pPr>
+            <a:r>
+              <a:rPr sz="1200" b="0" i="0">
+                <a:solidFill>
+                  <a:srgbClr val="9A9993"/>
+                </a:solidFill>
+                <a:latin typeface="Yu Gothic"/>
+                <a:ea typeface="Yu Gothic"/>
+                <a:cs typeface="Yu Gothic"/>
+              </a:rPr>
+              <a:t>言葉からも、エージェントが意図を</a:t>
+            </a:r>
+          </a:p>
+          <a:p>
+            <a:pPr algn="l">
+              <a:lnSpc>
+                <a:spcPts val="1920"/>
+              </a:lnSpc>
+              <a:spcBef>
+                <a:spcPts val="0"/>
+              </a:spcBef>
+              <a:spcAft>
+                <a:spcPts val="0"/>
+              </a:spcAft>
+            </a:pPr>
+            <a:r>
+              <a:rPr sz="1200" b="0" i="0">
+                <a:solidFill>
+                  <a:srgbClr val="9A9993"/>
+                </a:solidFill>
+                <a:latin typeface="Yu Gothic"/>
+                <a:ea typeface="Yu Gothic"/>
+                <a:cs typeface="Yu Gothic"/>
+              </a:rPr>
+              <a:t>読み取って提案する</a:t>
+            </a:r>
+          </a:p>
+        </p:txBody>
+      </p:sp>
+      <p:sp>
+        <p:nvSpPr>
+          <p:cNvPr id="21" name="TextBox 20"/>
+          <p:cNvSpPr txBox="1"/>
+          <p:nvPr/>
+        </p:nvSpPr>
+        <p:spPr>
+          <a:xfrm>
+            <a:off x="8134350" y="1562100"/>
+            <a:ext cx="1956602" cy="190500"/>
+          </a:xfrm>
+          <a:prstGeom prst="rect">
+            <a:avLst/>
+          </a:prstGeom>
+          <a:noFill/>
+        </p:spPr>
+        <p:txBody>
+          <a:bodyPr wrap="none" lIns="0" rIns="0" tIns="0" bIns="0" anchor="t">
+            <a:noAutofit/>
+          </a:bodyPr>
+          <a:lstStyle/>
+          <a:p>
+            <a:pPr algn="l">
+              <a:lnSpc>
+                <a:spcPts val="1575"/>
+              </a:lnSpc>
+              <a:spcBef>
+                <a:spcPts val="0"/>
+              </a:spcBef>
+              <a:spcAft>
+                <a:spcPts val="0"/>
+              </a:spcAft>
+            </a:pPr>
+            <a:r>
+              <a:rPr sz="1050" b="1" i="0">
+                <a:solidFill>
+                  <a:srgbClr val="B7C97A"/>
+                </a:solidFill>
+                <a:latin typeface="Yu Gothic"/>
+                <a:ea typeface="Yu Gothic"/>
+                <a:cs typeface="Yu Gothic"/>
+              </a:rPr>
+              <a:t>コンテキストの構造を設計する</a:t>
+            </a:r>
+          </a:p>
+        </p:txBody>
+      </p:sp>
+      <p:sp>
+        <p:nvSpPr>
+          <p:cNvPr id="22" name="TextBox 21"/>
+          <p:cNvSpPr txBox="1"/>
+          <p:nvPr/>
+        </p:nvSpPr>
+        <p:spPr>
+          <a:xfrm>
+            <a:off x="8496300" y="1847850"/>
+            <a:ext cx="2396490" cy="333375"/>
+          </a:xfrm>
+          <a:prstGeom prst="rect">
+            <a:avLst/>
+          </a:prstGeom>
+          <a:noFill/>
+        </p:spPr>
+        <p:txBody>
+          <a:bodyPr wrap="none" lIns="0" rIns="0" tIns="0" bIns="0" anchor="t">
+            <a:noAutofit/>
+          </a:bodyPr>
+          <a:lstStyle/>
+          <a:p>
+            <a:pPr algn="l">
+              <a:lnSpc>
+                <a:spcPts val="2700"/>
+              </a:lnSpc>
+              <a:spcBef>
+                <a:spcPts val="0"/>
+              </a:spcBef>
+              <a:spcAft>
+                <a:spcPts val="0"/>
+              </a:spcAft>
+            </a:pPr>
+            <a:r>
+              <a:rPr sz="1800" b="1" i="0">
                 <a:solidFill>
                   <a:srgbClr val="ECEBE6"/>
                 </a:solidFill>
@@ -14830,49 +15317,235 @@
                 <a:ea typeface="Yu Gothic"/>
                 <a:cs typeface="Yu Gothic"/>
               </a:rPr>
-              <a:t>候補を見比べやすく</a:t>
-            </a:r>
-          </a:p>
-        </p:txBody>
-      </p:sp>
-      <p:sp>
-        <p:nvSpPr>
-          <p:cNvPr id="10" name="TextBox 9"/>
-          <p:cNvSpPr txBox="1"/>
-          <p:nvPr/>
-        </p:nvSpPr>
-        <p:spPr>
-          <a:xfrm>
-            <a:off x="7067550" y="2447330"/>
-            <a:ext cx="3143774" cy="238125"/>
-          </a:xfrm>
-          <a:prstGeom prst="rect">
-            <a:avLst/>
-          </a:prstGeom>
-          <a:noFill/>
-        </p:spPr>
-        <p:txBody>
-          <a:bodyPr wrap="none" lIns="0" rIns="0" tIns="0" bIns="0" anchor="t">
-            <a:noAutofit/>
-          </a:bodyPr>
-          <a:lstStyle/>
-          <a:p>
-            <a:pPr algn="l" marL="161925" indent="-161925">
-              <a:lnSpc>
-                <a:spcPts val="2039"/>
-              </a:lnSpc>
-              <a:spcBef>
-                <a:spcPts val="0"/>
-              </a:spcBef>
-              <a:spcAft>
-                <a:spcPts val="0"/>
-              </a:spcAft>
-              <a:buSzPct val="100000"/>
-              <a:buFont typeface="Yu Gothic"/>
-              <a:buChar char="•"/>
-            </a:pPr>
-            <a:r>
-              <a:rPr sz="1300" b="0" i="0">
+              <a:t>その人に合う店を選ぶ</a:t>
+            </a:r>
+          </a:p>
+        </p:txBody>
+      </p:sp>
+      <p:sp>
+        <p:nvSpPr>
+          <p:cNvPr id="23" name="TextBox 22"/>
+          <p:cNvSpPr txBox="1"/>
+          <p:nvPr/>
+        </p:nvSpPr>
+        <p:spPr>
+          <a:xfrm>
+            <a:off x="8214568" y="1914525"/>
+            <a:ext cx="109597" cy="200025"/>
+          </a:xfrm>
+          <a:prstGeom prst="rect">
+            <a:avLst/>
+          </a:prstGeom>
+          <a:noFill/>
+        </p:spPr>
+        <p:txBody>
+          <a:bodyPr wrap="none" lIns="0" rIns="0" tIns="0" bIns="0" anchor="t">
+            <a:noAutofit/>
+          </a:bodyPr>
+          <a:lstStyle/>
+          <a:p>
+            <a:pPr algn="l">
+              <a:lnSpc>
+                <a:spcPts val="1125"/>
+              </a:lnSpc>
+              <a:spcBef>
+                <a:spcPts val="0"/>
+              </a:spcBef>
+              <a:spcAft>
+                <a:spcPts val="0"/>
+              </a:spcAft>
+            </a:pPr>
+            <a:r>
+              <a:rPr sz="1100" b="1" i="0">
+                <a:solidFill>
+                  <a:srgbClr val="161616"/>
+                </a:solidFill>
+                <a:latin typeface="Yu Gothic"/>
+                <a:ea typeface="Yu Gothic"/>
+                <a:cs typeface="Yu Gothic"/>
+              </a:rPr>
+              <a:t>2</a:t>
+            </a:r>
+          </a:p>
+        </p:txBody>
+      </p:sp>
+      <p:sp>
+        <p:nvSpPr>
+          <p:cNvPr id="24" name="TextBox 23"/>
+          <p:cNvSpPr txBox="1"/>
+          <p:nvPr/>
+        </p:nvSpPr>
+        <p:spPr>
+          <a:xfrm>
+            <a:off x="8134350" y="2276475"/>
+            <a:ext cx="3605022" cy="716161"/>
+          </a:xfrm>
+          <a:prstGeom prst="rect">
+            <a:avLst/>
+          </a:prstGeom>
+          <a:noFill/>
+        </p:spPr>
+        <p:txBody>
+          <a:bodyPr wrap="none" lIns="0" rIns="0" tIns="0" bIns="0" anchor="t">
+            <a:noAutofit/>
+          </a:bodyPr>
+          <a:lstStyle/>
+          <a:p>
+            <a:pPr algn="l">
+              <a:lnSpc>
+                <a:spcPts val="1920"/>
+              </a:lnSpc>
+              <a:spcBef>
+                <a:spcPts val="0"/>
+              </a:spcBef>
+              <a:spcAft>
+                <a:spcPts val="0"/>
+              </a:spcAft>
+            </a:pPr>
+            <a:r>
+              <a:rPr sz="1200" b="0" i="0">
+                <a:solidFill>
+                  <a:srgbClr val="9A9993"/>
+                </a:solidFill>
+                <a:latin typeface="Yu Gothic"/>
+                <a:ea typeface="Yu Gothic"/>
+                <a:cs typeface="Yu Gothic"/>
+              </a:rPr>
+              <a:t>好みや同行者、これまでの決定を</a:t>
+            </a:r>
+          </a:p>
+          <a:p>
+            <a:pPr algn="l">
+              <a:lnSpc>
+                <a:spcPts val="1920"/>
+              </a:lnSpc>
+              <a:spcBef>
+                <a:spcPts val="0"/>
+              </a:spcBef>
+              <a:spcAft>
+                <a:spcPts val="0"/>
+              </a:spcAft>
+            </a:pPr>
+            <a:r>
+              <a:rPr sz="1200" b="0" i="0">
+                <a:solidFill>
+                  <a:srgbClr val="9A9993"/>
+                </a:solidFill>
+                <a:latin typeface="Yu Gothic"/>
+                <a:ea typeface="Yu Gothic"/>
+                <a:cs typeface="Yu Gothic"/>
+              </a:rPr>
+              <a:t>構造化して渡し、パーソナライズ</a:t>
+            </a:r>
+          </a:p>
+          <a:p>
+            <a:pPr algn="l">
+              <a:lnSpc>
+                <a:spcPts val="1920"/>
+              </a:lnSpc>
+              <a:spcBef>
+                <a:spcPts val="0"/>
+              </a:spcBef>
+              <a:spcAft>
+                <a:spcPts val="0"/>
+              </a:spcAft>
+            </a:pPr>
+            <a:r>
+              <a:rPr sz="1200" b="0" i="0">
+                <a:solidFill>
+                  <a:srgbClr val="9A9993"/>
+                </a:solidFill>
+                <a:latin typeface="Yu Gothic"/>
+                <a:ea typeface="Yu Gothic"/>
+                <a:cs typeface="Yu Gothic"/>
+              </a:rPr>
+              <a:t>された意味のある店を提案する</a:t>
+            </a:r>
+          </a:p>
+        </p:txBody>
+      </p:sp>
+      <p:sp>
+        <p:nvSpPr>
+          <p:cNvPr id="25" name="TextBox 24"/>
+          <p:cNvSpPr txBox="1"/>
+          <p:nvPr/>
+        </p:nvSpPr>
+        <p:spPr>
+          <a:xfrm>
+            <a:off x="609600" y="4076700"/>
+            <a:ext cx="2511338" cy="190500"/>
+          </a:xfrm>
+          <a:prstGeom prst="rect">
+            <a:avLst/>
+          </a:prstGeom>
+          <a:noFill/>
+        </p:spPr>
+        <p:txBody>
+          <a:bodyPr wrap="none" lIns="0" rIns="0" tIns="0" bIns="0" anchor="t">
+            <a:noAutofit/>
+          </a:bodyPr>
+          <a:lstStyle/>
+          <a:p>
+            <a:pPr algn="l">
+              <a:lnSpc>
+                <a:spcPts val="1575"/>
+              </a:lnSpc>
+              <a:spcBef>
+                <a:spcPts val="0"/>
+              </a:spcBef>
+              <a:spcAft>
+                <a:spcPts val="0"/>
+              </a:spcAft>
+            </a:pPr>
+            <a:r>
+              <a:rPr sz="1050" b="1" i="0">
+                <a:solidFill>
+                  <a:srgbClr val="B7C97A"/>
+                </a:solidFill>
+                <a:latin typeface="Yu Gothic"/>
+                <a:ea typeface="Yu Gothic"/>
+                <a:cs typeface="Yu Gothic"/>
+              </a:rPr>
+              <a:t>ほかのアプリやプラットフォームと連携</a:t>
+            </a:r>
+          </a:p>
+        </p:txBody>
+      </p:sp>
+      <p:sp>
+        <p:nvSpPr>
+          <p:cNvPr id="26" name="TextBox 25"/>
+          <p:cNvSpPr txBox="1"/>
+          <p:nvPr/>
+        </p:nvSpPr>
+        <p:spPr>
+          <a:xfrm>
+            <a:off x="971550" y="4362450"/>
+            <a:ext cx="2634234" cy="333375"/>
+          </a:xfrm>
+          <a:prstGeom prst="rect">
+            <a:avLst/>
+          </a:prstGeom>
+          <a:noFill/>
+        </p:spPr>
+        <p:txBody>
+          <a:bodyPr wrap="none" lIns="0" rIns="0" tIns="0" bIns="0" anchor="t">
+            <a:noAutofit/>
+          </a:bodyPr>
+          <a:lstStyle/>
+          <a:p>
+            <a:pPr algn="l">
+              <a:lnSpc>
+                <a:spcPts val="2700"/>
+              </a:lnSpc>
+              <a:spcBef>
+                <a:spcPts val="0"/>
+              </a:spcBef>
+              <a:spcAft>
+                <a:spcPts val="0"/>
+              </a:spcAft>
+            </a:pPr>
+            <a:r>
+              <a:rPr sz="1800" b="1" i="0">
                 <a:solidFill>
                   <a:srgbClr val="ECEBE6"/>
                 </a:solidFill>
@@ -14880,49 +15553,211 @@
                 <a:ea typeface="Yu Gothic"/>
                 <a:cs typeface="Yu Gothic"/>
               </a:rPr>
-              <a:t>候補カードを横スワイプで1枚ずつ見せる</a:t>
-            </a:r>
-          </a:p>
-        </p:txBody>
-      </p:sp>
-      <p:sp>
-        <p:nvSpPr>
-          <p:cNvPr id="11" name="TextBox 10"/>
-          <p:cNvSpPr txBox="1"/>
-          <p:nvPr/>
-        </p:nvSpPr>
-        <p:spPr>
-          <a:xfrm>
-            <a:off x="7067550" y="2763441"/>
-            <a:ext cx="2545080" cy="238125"/>
-          </a:xfrm>
-          <a:prstGeom prst="rect">
-            <a:avLst/>
-          </a:prstGeom>
-          <a:noFill/>
-        </p:spPr>
-        <p:txBody>
-          <a:bodyPr wrap="none" lIns="0" rIns="0" tIns="0" bIns="0" anchor="t">
-            <a:noAutofit/>
-          </a:bodyPr>
-          <a:lstStyle/>
-          <a:p>
-            <a:pPr algn="l" marL="161925" indent="-161925">
-              <a:lnSpc>
-                <a:spcPts val="2039"/>
-              </a:lnSpc>
-              <a:spcBef>
-                <a:spcPts val="0"/>
-              </a:spcBef>
-              <a:spcAft>
-                <a:spcPts val="0"/>
-              </a:spcAft>
-              <a:buSzPct val="100000"/>
-              <a:buFont typeface="Yu Gothic"/>
-              <a:buChar char="•"/>
-            </a:pPr>
-            <a:r>
-              <a:rPr sz="1300" b="0" i="0">
+              <a:t>提案をそのまま共有する</a:t>
+            </a:r>
+          </a:p>
+        </p:txBody>
+      </p:sp>
+      <p:sp>
+        <p:nvSpPr>
+          <p:cNvPr id="27" name="TextBox 26"/>
+          <p:cNvSpPr txBox="1"/>
+          <p:nvPr/>
+        </p:nvSpPr>
+        <p:spPr>
+          <a:xfrm>
+            <a:off x="689818" y="4429125"/>
+            <a:ext cx="109597" cy="200025"/>
+          </a:xfrm>
+          <a:prstGeom prst="rect">
+            <a:avLst/>
+          </a:prstGeom>
+          <a:noFill/>
+        </p:spPr>
+        <p:txBody>
+          <a:bodyPr wrap="none" lIns="0" rIns="0" tIns="0" bIns="0" anchor="t">
+            <a:noAutofit/>
+          </a:bodyPr>
+          <a:lstStyle/>
+          <a:p>
+            <a:pPr algn="l">
+              <a:lnSpc>
+                <a:spcPts val="1125"/>
+              </a:lnSpc>
+              <a:spcBef>
+                <a:spcPts val="0"/>
+              </a:spcBef>
+              <a:spcAft>
+                <a:spcPts val="0"/>
+              </a:spcAft>
+            </a:pPr>
+            <a:r>
+              <a:rPr sz="1100" b="1" i="0">
+                <a:solidFill>
+                  <a:srgbClr val="161616"/>
+                </a:solidFill>
+                <a:latin typeface="Yu Gothic"/>
+                <a:ea typeface="Yu Gothic"/>
+                <a:cs typeface="Yu Gothic"/>
+              </a:rPr>
+              <a:t>3</a:t>
+            </a:r>
+          </a:p>
+        </p:txBody>
+      </p:sp>
+      <p:sp>
+        <p:nvSpPr>
+          <p:cNvPr id="28" name="TextBox 27"/>
+          <p:cNvSpPr txBox="1"/>
+          <p:nvPr/>
+        </p:nvSpPr>
+        <p:spPr>
+          <a:xfrm>
+            <a:off x="609600" y="4791075"/>
+            <a:ext cx="3605022" cy="472380"/>
+          </a:xfrm>
+          <a:prstGeom prst="rect">
+            <a:avLst/>
+          </a:prstGeom>
+          <a:noFill/>
+        </p:spPr>
+        <p:txBody>
+          <a:bodyPr wrap="none" lIns="0" rIns="0" tIns="0" bIns="0" anchor="t">
+            <a:noAutofit/>
+          </a:bodyPr>
+          <a:lstStyle/>
+          <a:p>
+            <a:pPr algn="l">
+              <a:lnSpc>
+                <a:spcPts val="1920"/>
+              </a:lnSpc>
+              <a:spcBef>
+                <a:spcPts val="0"/>
+              </a:spcBef>
+              <a:spcAft>
+                <a:spcPts val="0"/>
+              </a:spcAft>
+            </a:pPr>
+            <a:r>
+              <a:rPr sz="1200" b="0" i="0">
+                <a:solidFill>
+                  <a:srgbClr val="9A9993"/>
+                </a:solidFill>
+                <a:latin typeface="Yu Gothic"/>
+                <a:ea typeface="Yu Gothic"/>
+                <a:cs typeface="Yu Gothic"/>
+              </a:rPr>
+              <a:t>エージェントが選んだ店と理由を、</a:t>
+            </a:r>
+          </a:p>
+          <a:p>
+            <a:pPr algn="l">
+              <a:lnSpc>
+                <a:spcPts val="1920"/>
+              </a:lnSpc>
+              <a:spcBef>
+                <a:spcPts val="0"/>
+              </a:spcBef>
+              <a:spcAft>
+                <a:spcPts val="0"/>
+              </a:spcAft>
+            </a:pPr>
+            <a:r>
+              <a:rPr sz="1200" b="0" i="0">
+                <a:solidFill>
+                  <a:srgbClr val="9A9993"/>
+                </a:solidFill>
+                <a:latin typeface="Yu Gothic"/>
+                <a:ea typeface="Yu Gothic"/>
+                <a:cs typeface="Yu Gothic"/>
+              </a:rPr>
+              <a:t>同行者へ渡しやすくする</a:t>
+            </a:r>
+          </a:p>
+        </p:txBody>
+      </p:sp>
+      <p:sp>
+        <p:nvSpPr>
+          <p:cNvPr id="29" name="TextBox 28"/>
+          <p:cNvSpPr txBox="1"/>
+          <p:nvPr/>
+        </p:nvSpPr>
+        <p:spPr>
+          <a:xfrm>
+            <a:off x="8134350" y="4076700"/>
+            <a:ext cx="573786" cy="190500"/>
+          </a:xfrm>
+          <a:prstGeom prst="rect">
+            <a:avLst/>
+          </a:prstGeom>
+          <a:noFill/>
+        </p:spPr>
+        <p:txBody>
+          <a:bodyPr wrap="none" lIns="0" rIns="0" tIns="0" bIns="0" anchor="t">
+            <a:noAutofit/>
+          </a:bodyPr>
+          <a:lstStyle/>
+          <a:p>
+            <a:pPr algn="l">
+              <a:lnSpc>
+                <a:spcPts val="1575"/>
+              </a:lnSpc>
+              <a:spcBef>
+                <a:spcPts val="0"/>
+              </a:spcBef>
+              <a:spcAft>
+                <a:spcPts val="0"/>
+              </a:spcAft>
+            </a:pPr>
+            <a:r>
+              <a:rPr sz="1050" b="1" i="0">
+                <a:solidFill>
+                  <a:srgbClr val="B7C97A"/>
+                </a:solidFill>
+                <a:latin typeface="Yu Gothic"/>
+                <a:ea typeface="Yu Gothic"/>
+                <a:cs typeface="Yu Gothic"/>
+              </a:rPr>
+              <a:t>スケール</a:t>
+            </a:r>
+          </a:p>
+        </p:txBody>
+      </p:sp>
+      <p:sp>
+        <p:nvSpPr>
+          <p:cNvPr id="30" name="TextBox 29"/>
+          <p:cNvSpPr txBox="1"/>
+          <p:nvPr/>
+        </p:nvSpPr>
+        <p:spPr>
+          <a:xfrm>
+            <a:off x="8496300" y="4362450"/>
+            <a:ext cx="2389370" cy="333375"/>
+          </a:xfrm>
+          <a:prstGeom prst="rect">
+            <a:avLst/>
+          </a:prstGeom>
+          <a:noFill/>
+        </p:spPr>
+        <p:txBody>
+          <a:bodyPr wrap="none" lIns="0" rIns="0" tIns="0" bIns="0" anchor="t">
+            <a:noAutofit/>
+          </a:bodyPr>
+          <a:lstStyle/>
+          <a:p>
+            <a:pPr algn="l">
+              <a:lnSpc>
+                <a:spcPts val="2700"/>
+              </a:lnSpc>
+              <a:spcBef>
+                <a:spcPts val="0"/>
+              </a:spcBef>
+              <a:spcAft>
+                <a:spcPts val="0"/>
+              </a:spcAft>
+            </a:pPr>
+            <a:r>
+              <a:rPr sz="1800" b="1" i="0">
                 <a:solidFill>
                   <a:srgbClr val="ECEBE6"/>
                 </a:solidFill>
@@ -14930,315 +15765,139 @@
                 <a:ea typeface="Yu Gothic"/>
                 <a:cs typeface="Yu Gothic"/>
               </a:rPr>
-              <a:t>説明文はカードの下に折りたたむ</a:t>
-            </a:r>
-          </a:p>
-        </p:txBody>
-      </p:sp>
-      <p:sp>
-        <p:nvSpPr>
-          <p:cNvPr id="12" name="TextBox 11"/>
-          <p:cNvSpPr txBox="1"/>
-          <p:nvPr/>
-        </p:nvSpPr>
-        <p:spPr>
-          <a:xfrm>
-            <a:off x="4286250" y="3431977"/>
-            <a:ext cx="2385036" cy="304800"/>
-          </a:xfrm>
-          <a:prstGeom prst="rect">
-            <a:avLst/>
-          </a:prstGeom>
-          <a:noFill/>
-        </p:spPr>
-        <p:txBody>
-          <a:bodyPr wrap="none" lIns="0" rIns="0" tIns="0" bIns="0" anchor="t">
-            <a:noAutofit/>
-          </a:bodyPr>
-          <a:lstStyle/>
-          <a:p>
-            <a:pPr algn="l">
-              <a:lnSpc>
-                <a:spcPts val="2310"/>
-              </a:lnSpc>
-              <a:spcBef>
-                <a:spcPts val="0"/>
-              </a:spcBef>
-              <a:spcAft>
-                <a:spcPts val="0"/>
-              </a:spcAft>
-            </a:pPr>
-            <a:r>
-              <a:rPr sz="1650" b="1" i="0">
-                <a:solidFill>
-                  <a:srgbClr val="ECEBE6"/>
-                </a:solidFill>
-                <a:latin typeface="Yu Gothic"/>
-                <a:ea typeface="Yu Gothic"/>
-                <a:cs typeface="Yu Gothic"/>
-              </a:rPr>
-              <a:t>maru と話しながら選ぶ</a:t>
-            </a:r>
-          </a:p>
-        </p:txBody>
-      </p:sp>
-      <p:sp>
-        <p:nvSpPr>
-          <p:cNvPr id="13" name="TextBox 12"/>
-          <p:cNvSpPr txBox="1"/>
-          <p:nvPr/>
-        </p:nvSpPr>
-        <p:spPr>
-          <a:xfrm>
-            <a:off x="7067550" y="3451027"/>
-            <a:ext cx="3375636" cy="238125"/>
-          </a:xfrm>
-          <a:prstGeom prst="rect">
-            <a:avLst/>
-          </a:prstGeom>
-          <a:noFill/>
-        </p:spPr>
-        <p:txBody>
-          <a:bodyPr wrap="none" lIns="0" rIns="0" tIns="0" bIns="0" anchor="t">
-            <a:noAutofit/>
-          </a:bodyPr>
-          <a:lstStyle/>
-          <a:p>
-            <a:pPr algn="l" marL="161925" indent="-161925">
-              <a:lnSpc>
-                <a:spcPts val="2039"/>
-              </a:lnSpc>
-              <a:spcBef>
-                <a:spcPts val="0"/>
-              </a:spcBef>
-              <a:spcAft>
-                <a:spcPts val="0"/>
-              </a:spcAft>
-              <a:buSzPct val="100000"/>
-              <a:buFont typeface="Yu Gothic"/>
-              <a:buChar char="•"/>
-            </a:pPr>
-            <a:r>
-              <a:rPr sz="1300" b="0" i="0">
-                <a:solidFill>
-                  <a:srgbClr val="ECEBE6"/>
-                </a:solidFill>
-                <a:latin typeface="Yu Gothic"/>
-                <a:ea typeface="Yu Gothic"/>
-                <a:cs typeface="Yu Gothic"/>
-              </a:rPr>
-              <a:t>いま見ている候補の選定理由を maru が話す</a:t>
-            </a:r>
-          </a:p>
-        </p:txBody>
-      </p:sp>
-      <p:sp>
-        <p:nvSpPr>
-          <p:cNvPr id="14" name="TextBox 13"/>
-          <p:cNvSpPr txBox="1"/>
-          <p:nvPr/>
-        </p:nvSpPr>
-        <p:spPr>
-          <a:xfrm>
-            <a:off x="7067550" y="3767138"/>
-            <a:ext cx="3540478" cy="238125"/>
-          </a:xfrm>
-          <a:prstGeom prst="rect">
-            <a:avLst/>
-          </a:prstGeom>
-          <a:noFill/>
-        </p:spPr>
-        <p:txBody>
-          <a:bodyPr wrap="none" lIns="0" rIns="0" tIns="0" bIns="0" anchor="t">
-            <a:noAutofit/>
-          </a:bodyPr>
-          <a:lstStyle/>
-          <a:p>
-            <a:pPr algn="l" marL="161925" indent="-161925">
-              <a:lnSpc>
-                <a:spcPts val="2039"/>
-              </a:lnSpc>
-              <a:spcBef>
-                <a:spcPts val="0"/>
-              </a:spcBef>
-              <a:spcAft>
-                <a:spcPts val="0"/>
-              </a:spcAft>
-              <a:buSzPct val="100000"/>
-              <a:buFont typeface="Yu Gothic"/>
-              <a:buChar char="•"/>
-            </a:pPr>
-            <a:r>
-              <a:rPr sz="1300" b="0" i="0">
-                <a:solidFill>
-                  <a:srgbClr val="ECEBE6"/>
-                </a:solidFill>
-                <a:latin typeface="Yu Gothic"/>
-                <a:ea typeface="Yu Gothic"/>
-                <a:cs typeface="Yu Gothic"/>
-              </a:rPr>
-              <a:t>お店の雰囲気を掲載情報からひとことで伝える</a:t>
-            </a:r>
-          </a:p>
-        </p:txBody>
-      </p:sp>
-      <p:sp>
-        <p:nvSpPr>
-          <p:cNvPr id="15" name="TextBox 14"/>
-          <p:cNvSpPr txBox="1"/>
-          <p:nvPr/>
-        </p:nvSpPr>
-        <p:spPr>
-          <a:xfrm>
-            <a:off x="4286250" y="4435673"/>
-            <a:ext cx="1980593" cy="304800"/>
-          </a:xfrm>
-          <a:prstGeom prst="rect">
-            <a:avLst/>
-          </a:prstGeom>
-          <a:noFill/>
-        </p:spPr>
-        <p:txBody>
-          <a:bodyPr wrap="none" lIns="0" rIns="0" tIns="0" bIns="0" anchor="t">
-            <a:noAutofit/>
-          </a:bodyPr>
-          <a:lstStyle/>
-          <a:p>
-            <a:pPr algn="l">
-              <a:lnSpc>
-                <a:spcPts val="2310"/>
-              </a:lnSpc>
-              <a:spcBef>
-                <a:spcPts val="0"/>
-              </a:spcBef>
-              <a:spcAft>
-                <a:spcPts val="0"/>
-              </a:spcAft>
-            </a:pPr>
-            <a:r>
-              <a:rPr sz="1650" b="1" i="0">
-                <a:solidFill>
-                  <a:srgbClr val="ECEBE6"/>
-                </a:solidFill>
-                <a:latin typeface="Yu Gothic"/>
-                <a:ea typeface="Yu Gothic"/>
-                <a:cs typeface="Yu Gothic"/>
-              </a:rPr>
-              <a:t>探す前と決めたあと</a:t>
-            </a:r>
-          </a:p>
-        </p:txBody>
-      </p:sp>
-      <p:sp>
-        <p:nvSpPr>
-          <p:cNvPr id="16" name="TextBox 15"/>
-          <p:cNvSpPr txBox="1"/>
-          <p:nvPr/>
-        </p:nvSpPr>
-        <p:spPr>
-          <a:xfrm>
-            <a:off x="7067550" y="4454723"/>
-            <a:ext cx="3212032" cy="238125"/>
-          </a:xfrm>
-          <a:prstGeom prst="rect">
-            <a:avLst/>
-          </a:prstGeom>
-          <a:noFill/>
-        </p:spPr>
-        <p:txBody>
-          <a:bodyPr wrap="none" lIns="0" rIns="0" tIns="0" bIns="0" anchor="t">
-            <a:noAutofit/>
-          </a:bodyPr>
-          <a:lstStyle/>
-          <a:p>
-            <a:pPr algn="l" marL="161925" indent="-161925">
-              <a:lnSpc>
-                <a:spcPts val="2039"/>
-              </a:lnSpc>
-              <a:spcBef>
-                <a:spcPts val="0"/>
-              </a:spcBef>
-              <a:spcAft>
-                <a:spcPts val="0"/>
-              </a:spcAft>
-              <a:buSzPct val="100000"/>
-              <a:buFont typeface="Yu Gothic"/>
-              <a:buChar char="•"/>
-            </a:pPr>
-            <a:r>
-              <a:rPr sz="1300" b="0" i="0">
-                <a:solidFill>
-                  <a:srgbClr val="ECEBE6"/>
-                </a:solidFill>
-                <a:latin typeface="Yu Gothic"/>
-                <a:ea typeface="Yu Gothic"/>
-                <a:cs typeface="Yu Gothic"/>
-              </a:rPr>
-              <a:t>一軒めを決めたあと、続けて二軒めを探す</a:t>
-            </a:r>
-          </a:p>
-        </p:txBody>
-      </p:sp>
-      <p:sp>
-        <p:nvSpPr>
-          <p:cNvPr id="17" name="TextBox 16"/>
-          <p:cNvSpPr txBox="1"/>
-          <p:nvPr/>
-        </p:nvSpPr>
-        <p:spPr>
-          <a:xfrm>
-            <a:off x="7067550" y="4770834"/>
-            <a:ext cx="3387090" cy="238125"/>
-          </a:xfrm>
-          <a:prstGeom prst="rect">
-            <a:avLst/>
-          </a:prstGeom>
-          <a:noFill/>
-        </p:spPr>
-        <p:txBody>
-          <a:bodyPr wrap="none" lIns="0" rIns="0" tIns="0" bIns="0" anchor="t">
-            <a:noAutofit/>
-          </a:bodyPr>
-          <a:lstStyle/>
-          <a:p>
-            <a:pPr algn="l" marL="161925" indent="-161925">
-              <a:lnSpc>
-                <a:spcPts val="2039"/>
-              </a:lnSpc>
-              <a:spcBef>
-                <a:spcPts val="0"/>
-              </a:spcBef>
-              <a:spcAft>
-                <a:spcPts val="0"/>
-              </a:spcAft>
-              <a:buSzPct val="100000"/>
-              <a:buFont typeface="Yu Gothic"/>
-              <a:buChar char="•"/>
-            </a:pPr>
-            <a:r>
-              <a:rPr sz="1300" b="0" i="0">
-                <a:solidFill>
-                  <a:srgbClr val="ECEBE6"/>
-                </a:solidFill>
-                <a:latin typeface="Yu Gothic"/>
-                <a:ea typeface="Yu Gothic"/>
-                <a:cs typeface="Yu Gothic"/>
-              </a:rPr>
-              <a:t>位置情報の許可状態を見せ、設定へ案内する</a:t>
-            </a:r>
-          </a:p>
-        </p:txBody>
-      </p:sp>
-      <p:sp>
-        <p:nvSpPr>
-          <p:cNvPr id="18" name="TextBox 17"/>
+              <a:t>サービスとして広げる</a:t>
+            </a:r>
+          </a:p>
+        </p:txBody>
+      </p:sp>
+      <p:sp>
+        <p:nvSpPr>
+          <p:cNvPr id="31" name="TextBox 30"/>
+          <p:cNvSpPr txBox="1"/>
+          <p:nvPr/>
+        </p:nvSpPr>
+        <p:spPr>
+          <a:xfrm>
+            <a:off x="8186589" y="4429125"/>
+            <a:ext cx="167795" cy="200025"/>
+          </a:xfrm>
+          <a:prstGeom prst="rect">
+            <a:avLst/>
+          </a:prstGeom>
+          <a:noFill/>
+        </p:spPr>
+        <p:txBody>
+          <a:bodyPr wrap="none" lIns="0" rIns="0" tIns="0" bIns="0" anchor="t">
+            <a:noAutofit/>
+          </a:bodyPr>
+          <a:lstStyle/>
+          <a:p>
+            <a:pPr algn="l">
+              <a:lnSpc>
+                <a:spcPts val="1125"/>
+              </a:lnSpc>
+              <a:spcBef>
+                <a:spcPts val="0"/>
+              </a:spcBef>
+              <a:spcAft>
+                <a:spcPts val="0"/>
+              </a:spcAft>
+            </a:pPr>
+            <a:r>
+              <a:rPr sz="1100" b="1" i="0">
+                <a:solidFill>
+                  <a:srgbClr val="B7C97A"/>
+                </a:solidFill>
+                <a:latin typeface="Yu Gothic"/>
+                <a:ea typeface="Yu Gothic"/>
+                <a:cs typeface="Yu Gothic"/>
+              </a:rPr>
+              <a:t>＋</a:t>
+            </a:r>
+          </a:p>
+        </p:txBody>
+      </p:sp>
+      <p:sp>
+        <p:nvSpPr>
+          <p:cNvPr id="32" name="TextBox 31"/>
+          <p:cNvSpPr txBox="1"/>
+          <p:nvPr/>
+        </p:nvSpPr>
+        <p:spPr>
+          <a:xfrm>
+            <a:off x="8134350" y="4791075"/>
+            <a:ext cx="3605022" cy="472380"/>
+          </a:xfrm>
+          <a:prstGeom prst="rect">
+            <a:avLst/>
+          </a:prstGeom>
+          <a:noFill/>
+        </p:spPr>
+        <p:txBody>
+          <a:bodyPr wrap="none" lIns="0" rIns="0" tIns="0" bIns="0" anchor="t">
+            <a:noAutofit/>
+          </a:bodyPr>
+          <a:lstStyle/>
+          <a:p>
+            <a:pPr algn="l">
+              <a:lnSpc>
+                <a:spcPts val="1920"/>
+              </a:lnSpc>
+              <a:spcBef>
+                <a:spcPts val="0"/>
+              </a:spcBef>
+              <a:spcAft>
+                <a:spcPts val="0"/>
+              </a:spcAft>
+            </a:pPr>
+            <a:r>
+              <a:rPr sz="1200" b="0" i="0">
+                <a:solidFill>
+                  <a:srgbClr val="9A9993"/>
+                </a:solidFill>
+                <a:latin typeface="Yu Gothic"/>
+                <a:ea typeface="Yu Gothic"/>
+                <a:cs typeface="Yu Gothic"/>
+              </a:rPr>
+              <a:t>個人の検証版から、</a:t>
+            </a:r>
+          </a:p>
+          <a:p>
+            <a:pPr algn="l">
+              <a:lnSpc>
+                <a:spcPts val="1920"/>
+              </a:lnSpc>
+              <a:spcBef>
+                <a:spcPts val="0"/>
+              </a:spcBef>
+              <a:spcAft>
+                <a:spcPts val="0"/>
+              </a:spcAft>
+            </a:pPr>
+            <a:r>
+              <a:rPr sz="1200" b="0" i="0">
+                <a:solidFill>
+                  <a:srgbClr val="9A9993"/>
+                </a:solidFill>
+                <a:latin typeface="Yu Gothic"/>
+                <a:ea typeface="Yu Gothic"/>
+                <a:cs typeface="Yu Gothic"/>
+              </a:rPr>
+              <a:t>誰でも使える公開サービスへ</a:t>
+            </a:r>
+          </a:p>
+        </p:txBody>
+      </p:sp>
+      <p:sp>
+        <p:nvSpPr>
+          <p:cNvPr id="33" name="TextBox 32"/>
           <p:cNvSpPr txBox="1"/>
           <p:nvPr/>
         </p:nvSpPr>
         <p:spPr>
           <a:xfrm>
             <a:off x="609600" y="6143625"/>
-            <a:ext cx="4722233" cy="161925"/>
+            <a:ext cx="8276320" cy="161925"/>
           </a:xfrm>
           <a:prstGeom prst="rect">
             <a:avLst/>
@@ -15271,14 +15930,14 @@
                 <a:ea typeface="Yu Gothic"/>
                 <a:cs typeface="Yu Gothic"/>
               </a:rPr>
-              <a:t>本資料は consulting-pptx-skill（github.com/carnot-tech/consulting-pptx-skill）で作成</a:t>
-            </a:r>
-          </a:p>
-        </p:txBody>
-      </p:sp>
-      <p:sp>
-        <p:nvSpPr>
-          <p:cNvPr id="19" name="TextBox 18"/>
+              <a:t>番号は「外出中の『次どこ行く？』」のページのつまずきに対応／本資料は consulting-pptx-skill（github.com/carnot-tech/consulting-pptx-skill）で作成</a:t>
+            </a:r>
+          </a:p>
+        </p:txBody>
+      </p:sp>
+      <p:sp>
+        <p:nvSpPr>
+          <p:cNvPr id="34" name="TextBox 33"/>
           <p:cNvSpPr txBox="1"/>
           <p:nvPr/>
         </p:nvSpPr>
@@ -15325,7 +15984,7 @@
       </p:sp>
       <p:sp>
         <p:nvSpPr>
-          <p:cNvPr id="20" name="TextBox 19"/>
+          <p:cNvPr id="35" name="TextBox 34"/>
           <p:cNvSpPr txBox="1"/>
           <p:nvPr/>
         </p:nvSpPr>

--- a/docs/pitch/ima-pitch.pptx
+++ b/docs/pitch/ima-pitch.pptx
@@ -5,7 +5,7 @@
     <p:sldMasterId id="2147483648" r:id="rId1"/>
   </p:sldMasterIdLst>
   <p:sldIdLst>
-    <p:sldId id="267" r:id="rId14"/>
+    <p:sldId id="268" r:id="rId2"/>
     <p:sldId id="257" r:id="rId3"/>
     <p:sldId id="266" r:id="rId4"/>
     <p:sldId id="265" r:id="rId5"/>
@@ -15044,36 +15044,9 @@
           <a:p/>
         </p:txBody>
       </p:sp>
-      <p:sp>
-        <p:nvSpPr>
-          <p:cNvPr id="14" name="Rectangle 13"/>
-          <p:cNvSpPr/>
-          <p:nvPr/>
-        </p:nvSpPr>
-        <p:spPr>
-          <a:xfrm>
-            <a:off x="9525000" y="1390650"/>
-            <a:ext cx="1943100" cy="4059585"/>
-          </a:xfrm>
-          <a:prstGeom prst="rect">
-            <a:avLst/>
-          </a:prstGeom>
-          <a:solidFill>
-            <a:srgbClr val="2A2A2E"/>
-          </a:solidFill>
-          <a:ln>
-            <a:noFill/>
-          </a:ln>
-        </p:spPr>
-        <p:txBody>
-          <a:bodyPr rtlCol="0" anchor="ctr"/>
-          <a:lstStyle/>
-          <a:p/>
-        </p:txBody>
-      </p:sp>
       <p:pic>
         <p:nvPicPr>
-          <p:cNvPr id="15" name="Picture 14" descr="img_1_3.png"/>
+          <p:cNvPr id="14" name="Picture 13" descr="img_1_3.png"/>
           <p:cNvPicPr>
             <a:picLocks noChangeAspect="1"/>
           </p:cNvPicPr>
@@ -15087,8 +15060,8 @@
         </p:blipFill>
         <p:spPr>
           <a:xfrm>
-            <a:off x="9591675" y="1457325"/>
-            <a:ext cx="1809750" cy="3926235"/>
+            <a:off x="8286750" y="1047750"/>
+            <a:ext cx="2301627" cy="5219700"/>
           </a:xfrm>
           <a:prstGeom prst="rect">
             <a:avLst/>
@@ -15097,58 +15070,7 @@
       </p:pic>
       <p:sp>
         <p:nvSpPr>
-          <p:cNvPr id="16" name="Rectangle 15"/>
-          <p:cNvSpPr/>
-          <p:nvPr/>
-        </p:nvSpPr>
-        <p:spPr>
-          <a:xfrm>
-            <a:off x="7696200" y="1866900"/>
-            <a:ext cx="2038350" cy="4486721"/>
-          </a:xfrm>
-          <a:prstGeom prst="rect">
-            <a:avLst/>
-          </a:prstGeom>
-          <a:solidFill>
-            <a:srgbClr val="2A2A2E"/>
-          </a:solidFill>
-          <a:ln>
-            <a:noFill/>
-          </a:ln>
-        </p:spPr>
-        <p:txBody>
-          <a:bodyPr rtlCol="0" anchor="ctr"/>
-          <a:lstStyle/>
-          <a:p/>
-        </p:txBody>
-      </p:sp>
-      <p:pic>
-        <p:nvPicPr>
-          <p:cNvPr id="17" name="Picture 16" descr="img_1_4.png"/>
-          <p:cNvPicPr>
-            <a:picLocks noChangeAspect="1"/>
-          </p:cNvPicPr>
-          <p:nvPr/>
-        </p:nvPicPr>
-        <p:blipFill>
-          <a:blip r:embed="rId5"/>
-          <a:stretch>
-            <a:fillRect/>
-          </a:stretch>
-        </p:blipFill>
-        <p:spPr>
-          <a:xfrm>
-            <a:off x="7762875" y="1933575"/>
-            <a:ext cx="1905000" cy="4353371"/>
-          </a:xfrm>
-          <a:prstGeom prst="rect">
-            <a:avLst/>
-          </a:prstGeom>
-        </p:spPr>
-      </p:pic>
-      <p:sp>
-        <p:nvSpPr>
-          <p:cNvPr id="18" name="TextBox 17"/>
+          <p:cNvPr id="15" name="TextBox 14"/>
           <p:cNvSpPr txBox="1"/>
           <p:nvPr/>
         </p:nvSpPr>
@@ -15195,7 +15117,7 @@
       </p:sp>
       <p:sp>
         <p:nvSpPr>
-          <p:cNvPr id="19" name="TextBox 18"/>
+          <p:cNvPr id="16" name="TextBox 15"/>
           <p:cNvSpPr txBox="1"/>
           <p:nvPr/>
         </p:nvSpPr>
@@ -15242,7 +15164,7 @@
       </p:sp>
       <p:sp>
         <p:nvSpPr>
-          <p:cNvPr id="20" name="Title"/>
+          <p:cNvPr id="17" name="Title"/>
           <p:cNvSpPr txBox="1"/>
           <p:nvPr/>
         </p:nvSpPr>
@@ -15313,7 +15235,7 @@
       </p:sp>
       <p:sp>
         <p:nvSpPr>
-          <p:cNvPr id="21" name="TextBox 20"/>
+          <p:cNvPr id="18" name="TextBox 17"/>
           <p:cNvSpPr txBox="1"/>
           <p:nvPr/>
         </p:nvSpPr>
@@ -15384,7 +15306,7 @@
       </p:sp>
       <p:sp>
         <p:nvSpPr>
-          <p:cNvPr id="22" name="TextBox 21"/>
+          <p:cNvPr id="19" name="TextBox 18"/>
           <p:cNvSpPr txBox="1"/>
           <p:nvPr/>
         </p:nvSpPr>
@@ -15431,7 +15353,7 @@
       </p:sp>
       <p:sp>
         <p:nvSpPr>
-          <p:cNvPr id="23" name="TextBox 22"/>
+          <p:cNvPr id="20" name="TextBox 19"/>
           <p:cNvSpPr txBox="1"/>
           <p:nvPr/>
         </p:nvSpPr>
@@ -15478,7 +15400,7 @@
       </p:sp>
       <p:sp>
         <p:nvSpPr>
-          <p:cNvPr id="24" name="TextBox 23"/>
+          <p:cNvPr id="21" name="TextBox 20"/>
           <p:cNvSpPr txBox="1"/>
           <p:nvPr/>
         </p:nvSpPr>
@@ -15549,7 +15471,7 @@
       </p:sp>
       <p:sp>
         <p:nvSpPr>
-          <p:cNvPr id="25" name="TextBox 24"/>
+          <p:cNvPr id="22" name="TextBox 21"/>
           <p:cNvSpPr txBox="1"/>
           <p:nvPr/>
         </p:nvSpPr>
@@ -15596,7 +15518,7 @@
       </p:sp>
       <p:sp>
         <p:nvSpPr>
-          <p:cNvPr id="26" name="TextBox 25"/>
+          <p:cNvPr id="23" name="TextBox 22"/>
           <p:cNvSpPr txBox="1"/>
           <p:nvPr/>
         </p:nvSpPr>
@@ -15643,7 +15565,7 @@
       </p:sp>
       <p:sp>
         <p:nvSpPr>
-          <p:cNvPr id="27" name="TextBox 26"/>
+          <p:cNvPr id="24" name="TextBox 23"/>
           <p:cNvSpPr txBox="1"/>
           <p:nvPr/>
         </p:nvSpPr>
@@ -15714,7 +15636,7 @@
       </p:sp>
       <p:sp>
         <p:nvSpPr>
-          <p:cNvPr id="28" name="TextBox 27"/>
+          <p:cNvPr id="25" name="TextBox 24"/>
           <p:cNvSpPr txBox="1"/>
           <p:nvPr/>
         </p:nvSpPr>
@@ -15761,7 +15683,7 @@
       </p:sp>
       <p:sp>
         <p:nvSpPr>
-          <p:cNvPr id="29" name="TextBox 28"/>
+          <p:cNvPr id="26" name="TextBox 25"/>
           <p:cNvSpPr txBox="1"/>
           <p:nvPr/>
         </p:nvSpPr>
@@ -15808,7 +15730,7 @@
       </p:sp>
       <p:sp>
         <p:nvSpPr>
-          <p:cNvPr id="30" name="TextBox 29"/>
+          <p:cNvPr id="27" name="TextBox 26"/>
           <p:cNvSpPr txBox="1"/>
           <p:nvPr/>
         </p:nvSpPr>
@@ -15879,7 +15801,7 @@
       </p:sp>
       <p:sp>
         <p:nvSpPr>
-          <p:cNvPr id="31" name="TextBox 30"/>
+          <p:cNvPr id="28" name="TextBox 27"/>
           <p:cNvSpPr txBox="1"/>
           <p:nvPr/>
         </p:nvSpPr>
@@ -15926,7 +15848,7 @@
       </p:sp>
       <p:sp>
         <p:nvSpPr>
-          <p:cNvPr id="32" name="TextBox 31"/>
+          <p:cNvPr id="29" name="TextBox 28"/>
           <p:cNvSpPr txBox="1"/>
           <p:nvPr/>
         </p:nvSpPr>
@@ -15973,7 +15895,7 @@
       </p:sp>
       <p:sp>
         <p:nvSpPr>
-          <p:cNvPr id="33" name="TextBox 32"/>
+          <p:cNvPr id="30" name="TextBox 29"/>
           <p:cNvSpPr txBox="1"/>
           <p:nvPr/>
         </p:nvSpPr>
@@ -16020,7 +15942,7 @@
       </p:sp>
       <p:sp>
         <p:nvSpPr>
-          <p:cNvPr id="34" name="TextBox 33"/>
+          <p:cNvPr id="31" name="TextBox 30"/>
           <p:cNvSpPr txBox="1"/>
           <p:nvPr/>
         </p:nvSpPr>
@@ -16067,7 +15989,7 @@
       </p:sp>
       <p:sp>
         <p:nvSpPr>
-          <p:cNvPr id="35" name="TextBox 34"/>
+          <p:cNvPr id="32" name="TextBox 31"/>
           <p:cNvSpPr txBox="1"/>
           <p:nvPr/>
         </p:nvSpPr>
@@ -16114,7 +16036,7 @@
       </p:sp>
       <p:sp>
         <p:nvSpPr>
-          <p:cNvPr id="36" name="TextBox 35"/>
+          <p:cNvPr id="33" name="TextBox 32"/>
           <p:cNvSpPr txBox="1"/>
           <p:nvPr/>
         </p:nvSpPr>

--- a/docs/pitch/ima-pitch.pptx
+++ b/docs/pitch/ima-pitch.pptx
@@ -3080,6 +3080,448 @@
 </p:sldMaster>
 </file>
 
+<file path=ppt/slides/slide1.xml><?xml version="1.0" encoding="utf-8"?>
+<p:sld xmlns:a="http://schemas.openxmlformats.org/drawingml/2006/main" xmlns:r="http://schemas.openxmlformats.org/officeDocument/2006/relationships" xmlns:p="http://schemas.openxmlformats.org/presentationml/2006/main">
+  <p:cSld>
+    <p:bg>
+      <p:bgPr>
+        <a:solidFill>
+          <a:srgbClr val="0C0C0D"/>
+        </a:solidFill>
+        <a:effectLst/>
+      </p:bgPr>
+    </p:bg>
+    <p:spTree>
+      <p:nvGrpSpPr>
+        <p:cNvPr id="1" name=""/>
+        <p:cNvGrpSpPr/>
+        <p:nvPr/>
+      </p:nvGrpSpPr>
+      <p:grpSpPr>
+        <a:xfrm>
+          <a:off x="0" y="0"/>
+          <a:ext cx="0" cy="0"/>
+          <a:chOff x="0" y="0"/>
+          <a:chExt cx="0" cy="0"/>
+        </a:xfrm>
+      </p:grpSpPr>
+      <p:pic>
+        <p:nvPicPr>
+          <p:cNvPr id="2" name="Picture 1" descr="img_1_1.png"/>
+          <p:cNvPicPr>
+            <a:picLocks noChangeAspect="1"/>
+          </p:cNvPicPr>
+          <p:nvPr/>
+        </p:nvPicPr>
+        <p:blipFill>
+          <a:blip r:embed="rId2"/>
+          <a:stretch>
+            <a:fillRect/>
+          </a:stretch>
+        </p:blipFill>
+        <p:spPr>
+          <a:xfrm>
+            <a:off x="10648950" y="209550"/>
+            <a:ext cx="1123950" cy="1123950"/>
+          </a:xfrm>
+          <a:prstGeom prst="rect">
+            <a:avLst/>
+          </a:prstGeom>
+        </p:spPr>
+      </p:pic>
+      <p:sp>
+        <p:nvSpPr>
+          <p:cNvPr id="3" name="Rectangle 2"/>
+          <p:cNvSpPr/>
+          <p:nvPr/>
+        </p:nvSpPr>
+        <p:spPr>
+          <a:xfrm>
+            <a:off x="8781901" y="533400"/>
+            <a:ext cx="1676549" cy="400050"/>
+          </a:xfrm>
+          <a:prstGeom prst="rect">
+            <a:avLst/>
+          </a:prstGeom>
+          <a:solidFill>
+            <a:srgbClr val="1C1C1E"/>
+          </a:solidFill>
+          <a:ln>
+            <a:noFill/>
+          </a:ln>
+        </p:spPr>
+        <p:txBody>
+          <a:bodyPr rtlCol="0" anchor="ctr"/>
+          <a:lstStyle/>
+          <a:p>
+            <a:endParaRPr/>
+          </a:p>
+        </p:txBody>
+      </p:sp>
+      <p:sp>
+        <p:nvSpPr>
+          <p:cNvPr id="4" name="Rectangle 3"/>
+          <p:cNvSpPr/>
+          <p:nvPr/>
+        </p:nvSpPr>
+        <p:spPr>
+          <a:xfrm>
+            <a:off x="10458450" y="742950"/>
+            <a:ext cx="114300" cy="95250"/>
+          </a:xfrm>
+          <a:prstGeom prst="rect">
+            <a:avLst/>
+          </a:prstGeom>
+          <a:solidFill>
+            <a:srgbClr val="1C1C1E"/>
+          </a:solidFill>
+          <a:ln>
+            <a:noFill/>
+          </a:ln>
+        </p:spPr>
+        <p:txBody>
+          <a:bodyPr rtlCol="0" anchor="ctr"/>
+          <a:lstStyle/>
+          <a:p>
+            <a:endParaRPr/>
+          </a:p>
+        </p:txBody>
+      </p:sp>
+      <p:sp>
+        <p:nvSpPr>
+          <p:cNvPr id="5" name="Rectangle 4"/>
+          <p:cNvSpPr/>
+          <p:nvPr/>
+        </p:nvSpPr>
+        <p:spPr>
+          <a:xfrm>
+            <a:off x="10572750" y="828675"/>
+            <a:ext cx="66675" cy="66675"/>
+          </a:xfrm>
+          <a:prstGeom prst="rect">
+            <a:avLst/>
+          </a:prstGeom>
+          <a:solidFill>
+            <a:srgbClr val="1C1C1E"/>
+          </a:solidFill>
+          <a:ln>
+            <a:noFill/>
+          </a:ln>
+        </p:spPr>
+        <p:txBody>
+          <a:bodyPr rtlCol="0" anchor="ctr"/>
+          <a:lstStyle/>
+          <a:p>
+            <a:endParaRPr/>
+          </a:p>
+        </p:txBody>
+      </p:sp>
+      <p:pic>
+        <p:nvPicPr>
+          <p:cNvPr id="7" name="Picture 6" descr="img_1_2.png"/>
+          <p:cNvPicPr>
+            <a:picLocks noChangeAspect="1"/>
+          </p:cNvPicPr>
+          <p:nvPr/>
+        </p:nvPicPr>
+        <p:blipFill>
+          <a:blip r:embed="rId3"/>
+          <a:stretch>
+            <a:fillRect/>
+          </a:stretch>
+        </p:blipFill>
+        <p:spPr>
+          <a:xfrm>
+            <a:off x="552450" y="962025"/>
+            <a:ext cx="2095500" cy="1329035"/>
+          </a:xfrm>
+          <a:prstGeom prst="rect">
+            <a:avLst/>
+          </a:prstGeom>
+        </p:spPr>
+      </p:pic>
+      <p:pic>
+        <p:nvPicPr>
+          <p:cNvPr id="14" name="Picture 13" descr="img_1_3.png"/>
+          <p:cNvPicPr>
+            <a:picLocks noChangeAspect="1"/>
+          </p:cNvPicPr>
+          <p:nvPr/>
+        </p:nvPicPr>
+        <p:blipFill>
+          <a:blip r:embed="rId5"/>
+          <a:stretch>
+            <a:fillRect/>
+          </a:stretch>
+        </p:blipFill>
+        <p:spPr>
+          <a:xfrm>
+            <a:off x="8266254" y="1047750"/>
+            <a:ext cx="2342618" cy="5219700"/>
+          </a:xfrm>
+          <a:prstGeom prst="rect">
+            <a:avLst/>
+          </a:prstGeom>
+        </p:spPr>
+      </p:pic>
+      <p:sp>
+        <p:nvSpPr>
+          <p:cNvPr id="15" name="TextBox 14"/>
+          <p:cNvSpPr txBox="1"/>
+          <p:nvPr/>
+        </p:nvSpPr>
+        <p:spPr>
+          <a:xfrm>
+            <a:off x="8934301" y="619125"/>
+            <a:ext cx="1445669" cy="228600"/>
+          </a:xfrm>
+          <a:prstGeom prst="rect">
+            <a:avLst/>
+          </a:prstGeom>
+          <a:noFill/>
+        </p:spPr>
+        <p:txBody>
+          <a:bodyPr wrap="none" lIns="0" tIns="0" rIns="0" bIns="0" anchor="t">
+            <a:noAutofit/>
+          </a:bodyPr>
+          <a:lstStyle/>
+          <a:p>
+            <a:pPr algn="l">
+              <a:lnSpc>
+                <a:spcPts val="1800"/>
+              </a:lnSpc>
+              <a:spcBef>
+                <a:spcPts val="0"/>
+              </a:spcBef>
+              <a:spcAft>
+                <a:spcPts val="0"/>
+              </a:spcAft>
+            </a:pPr>
+            <a:r>
+              <a:rPr sz="1200" b="1" i="0">
+                <a:solidFill>
+                  <a:srgbClr val="ECEBE6"/>
+                </a:solidFill>
+                <a:latin typeface="Yu Gothic"/>
+                <a:ea typeface="Yu Gothic"/>
+                <a:cs typeface="Yu Gothic"/>
+              </a:rPr>
+              <a:t>いっしょに探すわん</a:t>
+            </a:r>
+          </a:p>
+        </p:txBody>
+      </p:sp>
+      <p:sp>
+        <p:nvSpPr>
+          <p:cNvPr id="17" name="Title"/>
+          <p:cNvSpPr txBox="1"/>
+          <p:nvPr/>
+        </p:nvSpPr>
+        <p:spPr>
+          <a:xfrm>
+            <a:off x="609600" y="2491085"/>
+            <a:ext cx="6557010" cy="1030486"/>
+          </a:xfrm>
+          <a:prstGeom prst="rect">
+            <a:avLst/>
+          </a:prstGeom>
+          <a:noFill/>
+        </p:spPr>
+        <p:txBody>
+          <a:bodyPr wrap="none" lIns="0" tIns="0" rIns="0" bIns="0" anchor="t">
+            <a:noAutofit/>
+          </a:bodyPr>
+          <a:lstStyle/>
+          <a:p>
+            <a:pPr algn="l">
+              <a:lnSpc>
+                <a:spcPts val="3990"/>
+              </a:lnSpc>
+              <a:spcBef>
+                <a:spcPts val="0"/>
+              </a:spcBef>
+              <a:spcAft>
+                <a:spcPts val="0"/>
+              </a:spcAft>
+            </a:pPr>
+            <a:r>
+              <a:rPr sz="2850" b="1" i="0" dirty="0" err="1">
+                <a:solidFill>
+                  <a:srgbClr val="ECEBE6"/>
+                </a:solidFill>
+                <a:latin typeface="Yu Gothic"/>
+                <a:ea typeface="Yu Gothic"/>
+                <a:cs typeface="Yu Gothic"/>
+              </a:rPr>
+              <a:t>大切な人との「次どこ行く</a:t>
+            </a:r>
+            <a:r>
+              <a:rPr sz="2850" b="1" i="0" dirty="0">
+                <a:solidFill>
+                  <a:srgbClr val="ECEBE6"/>
+                </a:solidFill>
+                <a:latin typeface="Yu Gothic"/>
+                <a:ea typeface="Yu Gothic"/>
+                <a:cs typeface="Yu Gothic"/>
+              </a:rPr>
+              <a:t>？」</a:t>
+            </a:r>
+            <a:r>
+              <a:rPr sz="2850" b="1" i="0" dirty="0" err="1">
+                <a:solidFill>
+                  <a:srgbClr val="ECEBE6"/>
+                </a:solidFill>
+                <a:latin typeface="Yu Gothic"/>
+                <a:ea typeface="Yu Gothic"/>
+                <a:cs typeface="Yu Gothic"/>
+              </a:rPr>
+              <a:t>を</a:t>
+            </a:r>
+            <a:r>
+              <a:rPr sz="2850" b="1" i="0" dirty="0">
+                <a:solidFill>
+                  <a:srgbClr val="ECEBE6"/>
+                </a:solidFill>
+                <a:latin typeface="Yu Gothic"/>
+                <a:ea typeface="Yu Gothic"/>
+                <a:cs typeface="Yu Gothic"/>
+              </a:rPr>
+              <a:t>、</a:t>
+            </a:r>
+          </a:p>
+          <a:p>
+            <a:pPr algn="l">
+              <a:lnSpc>
+                <a:spcPts val="3990"/>
+              </a:lnSpc>
+              <a:spcBef>
+                <a:spcPts val="0"/>
+              </a:spcBef>
+              <a:spcAft>
+                <a:spcPts val="0"/>
+              </a:spcAft>
+            </a:pPr>
+            <a:r>
+              <a:rPr sz="2850" b="1" i="0" dirty="0" err="1">
+                <a:solidFill>
+                  <a:srgbClr val="ECEBE6"/>
+                </a:solidFill>
+                <a:latin typeface="Yu Gothic"/>
+                <a:ea typeface="Yu Gothic"/>
+                <a:cs typeface="Yu Gothic"/>
+              </a:rPr>
+              <a:t>ima</a:t>
+            </a:r>
+            <a:r>
+              <a:rPr sz="2850" b="1" i="0" dirty="0">
+                <a:solidFill>
+                  <a:srgbClr val="ECEBE6"/>
+                </a:solidFill>
+                <a:latin typeface="Yu Gothic"/>
+                <a:ea typeface="Yu Gothic"/>
+                <a:cs typeface="Yu Gothic"/>
+              </a:rPr>
+              <a:t> </a:t>
+            </a:r>
+            <a:r>
+              <a:rPr sz="2850" b="1" i="0" dirty="0" err="1">
+                <a:solidFill>
+                  <a:srgbClr val="ECEBE6"/>
+                </a:solidFill>
+                <a:latin typeface="Yu Gothic"/>
+                <a:ea typeface="Yu Gothic"/>
+                <a:cs typeface="Yu Gothic"/>
+              </a:rPr>
+              <a:t>に聞いて決める</a:t>
+            </a:r>
+            <a:endParaRPr sz="2850" b="1" i="0" dirty="0">
+              <a:solidFill>
+                <a:srgbClr val="ECEBE6"/>
+              </a:solidFill>
+              <a:latin typeface="Yu Gothic"/>
+              <a:ea typeface="Yu Gothic"/>
+              <a:cs typeface="Yu Gothic"/>
+            </a:endParaRPr>
+          </a:p>
+        </p:txBody>
+      </p:sp>
+      <p:sp>
+        <p:nvSpPr>
+          <p:cNvPr id="35" name="テキスト ボックス 34">
+            <a:extLst>
+              <a:ext uri="{FF2B5EF4-FFF2-40B4-BE49-F238E27FC236}">
+                <a16:creationId xmlns:a16="http://schemas.microsoft.com/office/drawing/2014/main" id="{36EC049C-7FD9-79CD-0C25-3AAEF690F1CF}"/>
+              </a:ext>
+            </a:extLst>
+          </p:cNvPr>
+          <p:cNvSpPr txBox="1"/>
+          <p:nvPr/>
+        </p:nvSpPr>
+        <p:spPr>
+          <a:xfrm>
+            <a:off x="552450" y="3922704"/>
+            <a:ext cx="2217274" cy="923330"/>
+          </a:xfrm>
+          <a:prstGeom prst="rect">
+            <a:avLst/>
+          </a:prstGeom>
+          <a:noFill/>
+        </p:spPr>
+        <p:txBody>
+          <a:bodyPr wrap="none" rtlCol="0">
+            <a:spAutoFit/>
+          </a:bodyPr>
+          <a:lstStyle/>
+          <a:p>
+            <a:r>
+              <a:rPr kumimoji="1" lang="ja-JP" altLang="en-US">
+                <a:solidFill>
+                  <a:schemeClr val="bg1"/>
+                </a:solidFill>
+              </a:rPr>
+              <a:t>開発者：</a:t>
+            </a:r>
+            <a:endParaRPr kumimoji="1" lang="en-US" altLang="ja-JP" dirty="0">
+              <a:solidFill>
+                <a:schemeClr val="bg1"/>
+              </a:solidFill>
+            </a:endParaRPr>
+          </a:p>
+          <a:p>
+            <a:r>
+              <a:rPr kumimoji="1" lang="ja-JP" altLang="en-US">
+                <a:solidFill>
+                  <a:schemeClr val="bg1"/>
+                </a:solidFill>
+              </a:rPr>
+              <a:t>フロントエンド：</a:t>
+            </a:r>
+            <a:endParaRPr kumimoji="1" lang="en-US" altLang="ja-JP" dirty="0">
+              <a:solidFill>
+                <a:schemeClr val="bg1"/>
+              </a:solidFill>
+            </a:endParaRPr>
+          </a:p>
+          <a:p>
+            <a:r>
+              <a:rPr kumimoji="1" lang="ja-JP" altLang="en-US">
+                <a:solidFill>
+                  <a:schemeClr val="bg1"/>
+                </a:solidFill>
+              </a:rPr>
+              <a:t>バックエンド・インフラ</a:t>
+            </a:r>
+          </a:p>
+        </p:txBody>
+      </p:sp>
+    </p:spTree>
+  </p:cSld>
+  <p:clrMapOvr>
+    <a:masterClrMapping/>
+  </p:clrMapOvr>
+</p:sld>
+</file>
+
 <file path=ppt/slides/slide2.xml><?xml version="1.0" encoding="utf-8"?>
 <p:sld xmlns:a="http://schemas.openxmlformats.org/drawingml/2006/main" xmlns:r="http://schemas.openxmlformats.org/officeDocument/2006/relationships" xmlns:p="http://schemas.openxmlformats.org/presentationml/2006/main">
   <p:cSld>
@@ -4466,48 +4908,6 @@
                 <a:cs typeface="Yu Gothic"/>
               </a:rPr>
               <a:t>1</a:t>
-            </a:r>
-          </a:p>
-        </p:txBody>
-      </p:sp>
-      <p:sp>
-        <p:nvSpPr>
-          <p:cNvPr id="38" name="Section label"/>
-          <p:cNvSpPr/>
-          <p:nvPr/>
-        </p:nvSpPr>
-        <p:spPr>
-          <a:xfrm>
-            <a:off x="609600" y="76200"/>
-            <a:ext cx="647700" cy="304800"/>
-          </a:xfrm>
-          <a:prstGeom prst="rect">
-            <a:avLst/>
-          </a:prstGeom>
-          <a:solidFill>
-            <a:srgbClr val="B7C97A"/>
-          </a:solidFill>
-          <a:ln>
-            <a:noFill/>
-          </a:ln>
-        </p:spPr>
-        <p:txBody>
-          <a:bodyPr wrap="none" lIns="133350" tIns="0" rIns="133350" bIns="0" rtlCol="0" anchor="ctr">
-            <a:noAutofit/>
-          </a:bodyPr>
-          <a:lstStyle/>
-          <a:p>
-            <a:pPr algn="l"/>
-            <a:r>
-              <a:rPr sz="1400" b="1">
-                <a:solidFill>
-                  <a:srgbClr val="161616"/>
-                </a:solidFill>
-                <a:latin typeface="Yu Gothic"/>
-                <a:ea typeface="Yu Gothic"/>
-                <a:cs typeface="Yu Gothic"/>
-              </a:rPr>
-              <a:t>課題</a:t>
             </a:r>
           </a:p>
         </p:txBody>
@@ -6418,56 +6818,6 @@
               </a:rPr>
               <a:t>2</a:t>
             </a:r>
-          </a:p>
-        </p:txBody>
-      </p:sp>
-      <p:sp>
-        <p:nvSpPr>
-          <p:cNvPr id="47" name="Section label"/>
-          <p:cNvSpPr/>
-          <p:nvPr/>
-        </p:nvSpPr>
-        <p:spPr>
-          <a:xfrm>
-            <a:off x="136525" y="230506"/>
-            <a:ext cx="828675" cy="304800"/>
-          </a:xfrm>
-          <a:prstGeom prst="rect">
-            <a:avLst/>
-          </a:prstGeom>
-          <a:solidFill>
-            <a:srgbClr val="B7C97A"/>
-          </a:solidFill>
-          <a:ln>
-            <a:noFill/>
-          </a:ln>
-        </p:spPr>
-        <p:txBody>
-          <a:bodyPr wrap="none" lIns="133350" tIns="0" rIns="133350" bIns="0" rtlCol="0" anchor="ctr">
-            <a:noAutofit/>
-          </a:bodyPr>
-          <a:lstStyle/>
-          <a:p>
-            <a:pPr algn="l"/>
-            <a:r>
-              <a:rPr sz="1400" b="1" dirty="0" err="1">
-                <a:solidFill>
-                  <a:srgbClr val="161616"/>
-                </a:solidFill>
-                <a:latin typeface="Yu Gothic"/>
-                <a:ea typeface="Yu Gothic"/>
-                <a:cs typeface="Yu Gothic"/>
-              </a:rPr>
-              <a:t>解決策</a:t>
-            </a:r>
-            <a:endParaRPr sz="1400" b="1" dirty="0">
-              <a:solidFill>
-                <a:srgbClr val="161616"/>
-              </a:solidFill>
-              <a:latin typeface="Yu Gothic"/>
-              <a:ea typeface="Yu Gothic"/>
-              <a:cs typeface="Yu Gothic"/>
-            </a:endParaRPr>
           </a:p>
         </p:txBody>
       </p:sp>
@@ -7034,7 +7384,7 @@
         </p:nvSpPr>
         <p:spPr>
           <a:xfrm>
-            <a:off x="609600" y="5314950"/>
+            <a:off x="1109394" y="5362133"/>
             <a:ext cx="772061" cy="257175"/>
           </a:xfrm>
           <a:prstGeom prst="rect">
@@ -7066,7 +7416,7 @@
               <a:defRPr/>
             </a:pPr>
             <a:r>
-              <a:rPr kumimoji="0" sz="1400" b="1" i="0" u="none" strike="noStrike" kern="1200" cap="none" spc="0" normalizeH="0" baseline="0" noProof="0">
+              <a:rPr kumimoji="0" sz="1400" b="1" i="0" u="none" strike="noStrike" kern="1200" cap="none" spc="0" normalizeH="0" baseline="0" noProof="0" dirty="0" err="1">
                 <a:ln>
                   <a:noFill/>
                 </a:ln>
@@ -7082,6 +7432,20 @@
               </a:rPr>
               <a:t>起動画面</a:t>
             </a:r>
+            <a:endParaRPr kumimoji="0" sz="1400" b="1" i="0" u="none" strike="noStrike" kern="1200" cap="none" spc="0" normalizeH="0" baseline="0" noProof="0" dirty="0">
+              <a:ln>
+                <a:noFill/>
+              </a:ln>
+              <a:solidFill>
+                <a:srgbClr val="ECEBE6"/>
+              </a:solidFill>
+              <a:effectLst/>
+              <a:uLnTx/>
+              <a:uFillTx/>
+              <a:latin typeface="Yu Gothic"/>
+              <a:ea typeface="Yu Gothic"/>
+              <a:cs typeface="Yu Gothic"/>
+            </a:endParaRPr>
           </a:p>
         </p:txBody>
       </p:sp>
@@ -7236,7 +7600,7 @@
         </p:nvSpPr>
         <p:spPr>
           <a:xfrm>
-            <a:off x="3438525" y="5314950"/>
+            <a:off x="4030807" y="5338762"/>
             <a:ext cx="772061" cy="257175"/>
           </a:xfrm>
           <a:prstGeom prst="rect">
@@ -7268,7 +7632,7 @@
               <a:defRPr/>
             </a:pPr>
             <a:r>
-              <a:rPr kumimoji="0" sz="1400" b="1" i="0" u="none" strike="noStrike" kern="1200" cap="none" spc="0" normalizeH="0" baseline="0" noProof="0">
+              <a:rPr kumimoji="0" sz="1400" b="1" i="0" u="none" strike="noStrike" kern="1200" cap="none" spc="0" normalizeH="0" baseline="0" noProof="0" dirty="0" err="1">
                 <a:ln>
                   <a:noFill/>
                 </a:ln>
@@ -7284,6 +7648,20 @@
               </a:rPr>
               <a:t>質問画面</a:t>
             </a:r>
+            <a:endParaRPr kumimoji="0" sz="1400" b="1" i="0" u="none" strike="noStrike" kern="1200" cap="none" spc="0" normalizeH="0" baseline="0" noProof="0" dirty="0">
+              <a:ln>
+                <a:noFill/>
+              </a:ln>
+              <a:solidFill>
+                <a:srgbClr val="ECEBE6"/>
+              </a:solidFill>
+              <a:effectLst/>
+              <a:uLnTx/>
+              <a:uFillTx/>
+              <a:latin typeface="Yu Gothic"/>
+              <a:ea typeface="Yu Gothic"/>
+              <a:cs typeface="Yu Gothic"/>
+            </a:endParaRPr>
           </a:p>
         </p:txBody>
       </p:sp>
@@ -7438,7 +7816,7 @@
         </p:nvSpPr>
         <p:spPr>
           <a:xfrm>
-            <a:off x="6267450" y="5314950"/>
+            <a:off x="6514183" y="5359959"/>
             <a:ext cx="1524917" cy="257175"/>
           </a:xfrm>
           <a:prstGeom prst="rect">
@@ -7640,7 +8018,7 @@
         </p:nvSpPr>
         <p:spPr>
           <a:xfrm>
-            <a:off x="9096375" y="5314950"/>
+            <a:off x="9750415" y="5359959"/>
             <a:ext cx="772061" cy="257175"/>
           </a:xfrm>
           <a:prstGeom prst="rect">
@@ -7881,48 +8259,6 @@
           </a:prstGeom>
         </p:spPr>
       </p:pic>
-      <p:sp>
-        <p:nvSpPr>
-          <p:cNvPr id="26" name="Section label"/>
-          <p:cNvSpPr/>
-          <p:nvPr/>
-        </p:nvSpPr>
-        <p:spPr>
-          <a:xfrm>
-            <a:off x="104775" y="125684"/>
-            <a:ext cx="1009650" cy="304800"/>
-          </a:xfrm>
-          <a:prstGeom prst="rect">
-            <a:avLst/>
-          </a:prstGeom>
-          <a:solidFill>
-            <a:srgbClr val="B7C97A"/>
-          </a:solidFill>
-          <a:ln>
-            <a:noFill/>
-          </a:ln>
-        </p:spPr>
-        <p:txBody>
-          <a:bodyPr wrap="none" lIns="133350" tIns="0" rIns="133350" bIns="0" rtlCol="0" anchor="ctr">
-            <a:noAutofit/>
-          </a:bodyPr>
-          <a:lstStyle/>
-          <a:p>
-            <a:pPr algn="l"/>
-            <a:r>
-              <a:rPr sz="1400" b="1">
-                <a:solidFill>
-                  <a:srgbClr val="161616"/>
-                </a:solidFill>
-                <a:latin typeface="Yu Gothic"/>
-                <a:ea typeface="Yu Gothic"/>
-                <a:cs typeface="Yu Gothic"/>
-              </a:rPr>
-              <a:t>主要画面</a:t>
-            </a:r>
-          </a:p>
-        </p:txBody>
-      </p:sp>
     </p:spTree>
     <p:extLst>
       <p:ext uri="{BB962C8B-B14F-4D97-AF65-F5344CB8AC3E}">
@@ -8113,7 +8449,7 @@
         </p:nvSpPr>
         <p:spPr>
           <a:xfrm>
-            <a:off x="609600" y="428625"/>
+            <a:off x="609600" y="703360"/>
             <a:ext cx="7915370" cy="438150"/>
           </a:xfrm>
           <a:prstGeom prst="rect">
@@ -8263,7 +8599,7 @@
         </p:nvSpPr>
         <p:spPr>
           <a:xfrm>
-            <a:off x="609600" y="5457825"/>
+            <a:off x="1128188" y="5640829"/>
             <a:ext cx="772061" cy="257175"/>
           </a:xfrm>
           <a:prstGeom prst="rect">
@@ -8289,7 +8625,7 @@
               </a:spcAft>
             </a:pPr>
             <a:r>
-              <a:rPr sz="1400" b="1" i="0">
+              <a:rPr sz="1400" b="1" i="0" dirty="0" err="1">
                 <a:solidFill>
                   <a:srgbClr val="ECEBE6"/>
                 </a:solidFill>
@@ -8298,148 +8634,6 @@
                 <a:cs typeface="Yu Gothic"/>
               </a:rPr>
               <a:t>起動画面</a:t>
-            </a:r>
-          </a:p>
-        </p:txBody>
-      </p:sp>
-      <p:sp>
-        <p:nvSpPr>
-          <p:cNvPr id="11" name="TextBox 10"/>
-          <p:cNvSpPr txBox="1"/>
-          <p:nvPr/>
-        </p:nvSpPr>
-        <p:spPr>
-          <a:xfrm>
-            <a:off x="3522345" y="3131790"/>
-            <a:ext cx="1604010" cy="577155"/>
-          </a:xfrm>
-          <a:prstGeom prst="rect">
-            <a:avLst/>
-          </a:prstGeom>
-          <a:noFill/>
-        </p:spPr>
-        <p:txBody>
-          <a:bodyPr wrap="none" lIns="0" tIns="0" rIns="0" bIns="0" anchor="t">
-            <a:noAutofit/>
-          </a:bodyPr>
-          <a:lstStyle/>
-          <a:p>
-            <a:pPr algn="ctr">
-              <a:lnSpc>
-                <a:spcPts val="1560"/>
-              </a:lnSpc>
-              <a:spcBef>
-                <a:spcPts val="0"/>
-              </a:spcBef>
-              <a:spcAft>
-                <a:spcPts val="0"/>
-              </a:spcAft>
-            </a:pPr>
-            <a:r>
-              <a:rPr sz="1000" b="0" i="0">
-                <a:solidFill>
-                  <a:srgbClr val="9A9993"/>
-                </a:solidFill>
-                <a:latin typeface="Yu Gothic"/>
-                <a:ea typeface="Yu Gothic"/>
-                <a:cs typeface="Yu Gothic"/>
-              </a:rPr>
-              <a:t>質問画面の</a:t>
-            </a:r>
-          </a:p>
-          <a:p>
-            <a:pPr algn="ctr">
-              <a:lnSpc>
-                <a:spcPts val="1560"/>
-              </a:lnSpc>
-              <a:spcBef>
-                <a:spcPts val="0"/>
-              </a:spcBef>
-              <a:spcAft>
-                <a:spcPts val="0"/>
-              </a:spcAft>
-            </a:pPr>
-            <a:r>
-              <a:rPr sz="1000" b="0" i="0">
-                <a:solidFill>
-                  <a:srgbClr val="9A9993"/>
-                </a:solidFill>
-                <a:latin typeface="Yu Gothic"/>
-                <a:ea typeface="Yu Gothic"/>
-                <a:cs typeface="Yu Gothic"/>
-              </a:rPr>
-              <a:t>スクリーンショット</a:t>
-            </a:r>
-          </a:p>
-          <a:p>
-            <a:pPr algn="ctr">
-              <a:lnSpc>
-                <a:spcPts val="1560"/>
-              </a:lnSpc>
-              <a:spcBef>
-                <a:spcPts val="0"/>
-              </a:spcBef>
-              <a:spcAft>
-                <a:spcPts val="0"/>
-              </a:spcAft>
-            </a:pPr>
-            <a:r>
-              <a:rPr sz="1000" b="0" i="0">
-                <a:solidFill>
-                  <a:srgbClr val="9A9993"/>
-                </a:solidFill>
-                <a:latin typeface="Yu Gothic"/>
-                <a:ea typeface="Yu Gothic"/>
-                <a:cs typeface="Yu Gothic"/>
-              </a:rPr>
-              <a:t>を入れる</a:t>
-            </a:r>
-          </a:p>
-        </p:txBody>
-      </p:sp>
-      <p:sp>
-        <p:nvSpPr>
-          <p:cNvPr id="12" name="TextBox 11"/>
-          <p:cNvSpPr txBox="1"/>
-          <p:nvPr/>
-        </p:nvSpPr>
-        <p:spPr>
-          <a:xfrm>
-            <a:off x="3438525" y="5457825"/>
-            <a:ext cx="772061" cy="257175"/>
-          </a:xfrm>
-          <a:prstGeom prst="rect">
-            <a:avLst/>
-          </a:prstGeom>
-          <a:noFill/>
-        </p:spPr>
-        <p:txBody>
-          <a:bodyPr wrap="none" lIns="0" tIns="0" rIns="0" bIns="0" anchor="t">
-            <a:noAutofit/>
-          </a:bodyPr>
-          <a:lstStyle/>
-          <a:p>
-            <a:pPr algn="l">
-              <a:lnSpc>
-                <a:spcPts val="2137"/>
-              </a:lnSpc>
-              <a:spcBef>
-                <a:spcPts val="0"/>
-              </a:spcBef>
-              <a:spcAft>
-                <a:spcPts val="0"/>
-              </a:spcAft>
-            </a:pPr>
-            <a:r>
-              <a:rPr sz="1400" b="1" i="0" dirty="0" err="1">
-                <a:solidFill>
-                  <a:srgbClr val="ECEBE6"/>
-                </a:solidFill>
-                <a:latin typeface="Yu Gothic"/>
-                <a:ea typeface="Yu Gothic"/>
-                <a:cs typeface="Yu Gothic"/>
-              </a:rPr>
-              <a:t>質問画面</a:t>
             </a:r>
             <a:endParaRPr sz="1400" b="1" i="0" dirty="0">
               <a:solidFill>
@@ -8454,13 +8648,13 @@
       </p:sp>
       <p:sp>
         <p:nvSpPr>
-          <p:cNvPr id="14" name="TextBox 13"/>
+          <p:cNvPr id="11" name="TextBox 10"/>
           <p:cNvSpPr txBox="1"/>
           <p:nvPr/>
         </p:nvSpPr>
         <p:spPr>
           <a:xfrm>
-            <a:off x="6351270" y="3131790"/>
+            <a:off x="3522345" y="3131790"/>
             <a:ext cx="1604010" cy="577155"/>
           </a:xfrm>
           <a:prstGeom prst="rect">
@@ -8494,7 +8688,7 @@
                 <a:ea typeface="Yu Gothic"/>
                 <a:cs typeface="Yu Gothic"/>
               </a:rPr>
-              <a:t>候補カードが並んだ</a:t>
+              <a:t>質問画面の</a:t>
             </a:r>
           </a:p>
           <a:p>
@@ -8518,7 +8712,7 @@
                 <a:ea typeface="Yu Gothic"/>
                 <a:cs typeface="Yu Gothic"/>
               </a:rPr>
-              <a:t>会話のスクリーンショット</a:t>
+              <a:t>スクリーンショット</a:t>
             </a:r>
           </a:p>
           <a:p>
@@ -8549,14 +8743,14 @@
       </p:sp>
       <p:sp>
         <p:nvSpPr>
-          <p:cNvPr id="15" name="TextBox 14"/>
+          <p:cNvPr id="12" name="TextBox 11"/>
           <p:cNvSpPr txBox="1"/>
           <p:nvPr/>
         </p:nvSpPr>
         <p:spPr>
           <a:xfrm>
-            <a:off x="6267450" y="5457825"/>
-            <a:ext cx="1524917" cy="257175"/>
+            <a:off x="4048125" y="5573274"/>
+            <a:ext cx="772061" cy="257175"/>
           </a:xfrm>
           <a:prstGeom prst="rect">
             <a:avLst/>
@@ -8581,7 +8775,7 @@
               </a:spcAft>
             </a:pPr>
             <a:r>
-              <a:rPr sz="1400" b="1" i="0">
+              <a:rPr sz="1400" b="1" i="0" dirty="0" err="1">
                 <a:solidFill>
                   <a:srgbClr val="ECEBE6"/>
                 </a:solidFill>
@@ -8589,20 +8783,28 @@
                 <a:ea typeface="Yu Gothic"/>
                 <a:cs typeface="Yu Gothic"/>
               </a:rPr>
-              <a:t>会話と候補カード</a:t>
-            </a:r>
-          </a:p>
-        </p:txBody>
-      </p:sp>
-      <p:sp>
-        <p:nvSpPr>
-          <p:cNvPr id="17" name="TextBox 16"/>
+              <a:t>質問画面</a:t>
+            </a:r>
+            <a:endParaRPr sz="1400" b="1" i="0" dirty="0">
+              <a:solidFill>
+                <a:srgbClr val="ECEBE6"/>
+              </a:solidFill>
+              <a:latin typeface="Yu Gothic"/>
+              <a:ea typeface="Yu Gothic"/>
+              <a:cs typeface="Yu Gothic"/>
+            </a:endParaRPr>
+          </a:p>
+        </p:txBody>
+      </p:sp>
+      <p:sp>
+        <p:nvSpPr>
+          <p:cNvPr id="14" name="TextBox 13"/>
           <p:cNvSpPr txBox="1"/>
           <p:nvPr/>
         </p:nvSpPr>
         <p:spPr>
           <a:xfrm>
-            <a:off x="9180195" y="3131790"/>
+            <a:off x="6351270" y="3131790"/>
             <a:ext cx="1604010" cy="577155"/>
           </a:xfrm>
           <a:prstGeom prst="rect">
@@ -8636,7 +8838,7 @@
                 <a:ea typeface="Yu Gothic"/>
                 <a:cs typeface="Yu Gothic"/>
               </a:rPr>
-              <a:t>店舗詳細の</a:t>
+              <a:t>候補カードが並んだ</a:t>
             </a:r>
           </a:p>
           <a:p>
@@ -8660,7 +8862,7 @@
                 <a:ea typeface="Yu Gothic"/>
                 <a:cs typeface="Yu Gothic"/>
               </a:rPr>
-              <a:t>スクリーンショット</a:t>
+              <a:t>会話のスクリーンショット</a:t>
             </a:r>
           </a:p>
           <a:p>
@@ -8691,14 +8893,14 @@
       </p:sp>
       <p:sp>
         <p:nvSpPr>
-          <p:cNvPr id="18" name="TextBox 17"/>
+          <p:cNvPr id="15" name="TextBox 14"/>
           <p:cNvSpPr txBox="1"/>
           <p:nvPr/>
         </p:nvSpPr>
         <p:spPr>
           <a:xfrm>
-            <a:off x="9096375" y="5457825"/>
-            <a:ext cx="772061" cy="257175"/>
+            <a:off x="6430363" y="5586412"/>
+            <a:ext cx="1524917" cy="257175"/>
           </a:xfrm>
           <a:prstGeom prst="rect">
             <a:avLst/>
@@ -8731,8 +8933,158 @@
                 <a:ea typeface="Yu Gothic"/>
                 <a:cs typeface="Yu Gothic"/>
               </a:rPr>
+              <a:t>会話と候補カード</a:t>
+            </a:r>
+          </a:p>
+        </p:txBody>
+      </p:sp>
+      <p:sp>
+        <p:nvSpPr>
+          <p:cNvPr id="17" name="TextBox 16"/>
+          <p:cNvSpPr txBox="1"/>
+          <p:nvPr/>
+        </p:nvSpPr>
+        <p:spPr>
+          <a:xfrm>
+            <a:off x="9180195" y="3131790"/>
+            <a:ext cx="1604010" cy="577155"/>
+          </a:xfrm>
+          <a:prstGeom prst="rect">
+            <a:avLst/>
+          </a:prstGeom>
+          <a:noFill/>
+        </p:spPr>
+        <p:txBody>
+          <a:bodyPr wrap="none" lIns="0" tIns="0" rIns="0" bIns="0" anchor="t">
+            <a:noAutofit/>
+          </a:bodyPr>
+          <a:lstStyle/>
+          <a:p>
+            <a:pPr algn="ctr">
+              <a:lnSpc>
+                <a:spcPts val="1560"/>
+              </a:lnSpc>
+              <a:spcBef>
+                <a:spcPts val="0"/>
+              </a:spcBef>
+              <a:spcAft>
+                <a:spcPts val="0"/>
+              </a:spcAft>
+            </a:pPr>
+            <a:r>
+              <a:rPr sz="1000" b="0" i="0">
+                <a:solidFill>
+                  <a:srgbClr val="9A9993"/>
+                </a:solidFill>
+                <a:latin typeface="Yu Gothic"/>
+                <a:ea typeface="Yu Gothic"/>
+                <a:cs typeface="Yu Gothic"/>
+              </a:rPr>
+              <a:t>店舗詳細の</a:t>
+            </a:r>
+          </a:p>
+          <a:p>
+            <a:pPr algn="ctr">
+              <a:lnSpc>
+                <a:spcPts val="1560"/>
+              </a:lnSpc>
+              <a:spcBef>
+                <a:spcPts val="0"/>
+              </a:spcBef>
+              <a:spcAft>
+                <a:spcPts val="0"/>
+              </a:spcAft>
+            </a:pPr>
+            <a:r>
+              <a:rPr sz="1000" b="0" i="0">
+                <a:solidFill>
+                  <a:srgbClr val="9A9993"/>
+                </a:solidFill>
+                <a:latin typeface="Yu Gothic"/>
+                <a:ea typeface="Yu Gothic"/>
+                <a:cs typeface="Yu Gothic"/>
+              </a:rPr>
+              <a:t>スクリーンショット</a:t>
+            </a:r>
+          </a:p>
+          <a:p>
+            <a:pPr algn="ctr">
+              <a:lnSpc>
+                <a:spcPts val="1560"/>
+              </a:lnSpc>
+              <a:spcBef>
+                <a:spcPts val="0"/>
+              </a:spcBef>
+              <a:spcAft>
+                <a:spcPts val="0"/>
+              </a:spcAft>
+            </a:pPr>
+            <a:r>
+              <a:rPr sz="1000" b="0" i="0">
+                <a:solidFill>
+                  <a:srgbClr val="9A9993"/>
+                </a:solidFill>
+                <a:latin typeface="Yu Gothic"/>
+                <a:ea typeface="Yu Gothic"/>
+                <a:cs typeface="Yu Gothic"/>
+              </a:rPr>
+              <a:t>を入れる</a:t>
+            </a:r>
+          </a:p>
+        </p:txBody>
+      </p:sp>
+      <p:sp>
+        <p:nvSpPr>
+          <p:cNvPr id="18" name="TextBox 17"/>
+          <p:cNvSpPr txBox="1"/>
+          <p:nvPr/>
+        </p:nvSpPr>
+        <p:spPr>
+          <a:xfrm>
+            <a:off x="9596169" y="5552252"/>
+            <a:ext cx="772061" cy="257175"/>
+          </a:xfrm>
+          <a:prstGeom prst="rect">
+            <a:avLst/>
+          </a:prstGeom>
+          <a:noFill/>
+        </p:spPr>
+        <p:txBody>
+          <a:bodyPr wrap="none" lIns="0" tIns="0" rIns="0" bIns="0" anchor="t">
+            <a:noAutofit/>
+          </a:bodyPr>
+          <a:lstStyle/>
+          <a:p>
+            <a:pPr algn="l">
+              <a:lnSpc>
+                <a:spcPts val="2137"/>
+              </a:lnSpc>
+              <a:spcBef>
+                <a:spcPts val="0"/>
+              </a:spcBef>
+              <a:spcAft>
+                <a:spcPts val="0"/>
+              </a:spcAft>
+            </a:pPr>
+            <a:r>
+              <a:rPr sz="1400" b="1" i="0" dirty="0" err="1">
+                <a:solidFill>
+                  <a:srgbClr val="ECEBE6"/>
+                </a:solidFill>
+                <a:latin typeface="Yu Gothic"/>
+                <a:ea typeface="Yu Gothic"/>
+                <a:cs typeface="Yu Gothic"/>
+              </a:rPr>
               <a:t>店舗詳細</a:t>
             </a:r>
+            <a:endParaRPr sz="1400" b="1" i="0" dirty="0">
+              <a:solidFill>
+                <a:srgbClr val="ECEBE6"/>
+              </a:solidFill>
+              <a:latin typeface="Yu Gothic"/>
+              <a:ea typeface="Yu Gothic"/>
+              <a:cs typeface="Yu Gothic"/>
+            </a:endParaRPr>
           </a:p>
         </p:txBody>
       </p:sp>
@@ -8852,56 +9204,104 @@
         </p:blipFill>
         <p:spPr>
           <a:xfrm>
-            <a:off x="609600" y="1524891"/>
-            <a:ext cx="1771650" cy="3845876"/>
+            <a:off x="591929" y="1453368"/>
+            <a:ext cx="1844580" cy="4004191"/>
           </a:xfrm>
           <a:prstGeom prst="rect">
             <a:avLst/>
           </a:prstGeom>
         </p:spPr>
       </p:pic>
-      <p:sp>
-        <p:nvSpPr>
-          <p:cNvPr id="24" name="Section label"/>
-          <p:cNvSpPr/>
-          <p:nvPr/>
-        </p:nvSpPr>
-        <p:spPr>
-          <a:xfrm>
-            <a:off x="609600" y="76200"/>
-            <a:ext cx="1371600" cy="304800"/>
-          </a:xfrm>
-          <a:prstGeom prst="rect">
-            <a:avLst/>
-          </a:prstGeom>
-          <a:solidFill>
-            <a:srgbClr val="B7C97A"/>
-          </a:solidFill>
-          <a:ln>
-            <a:noFill/>
-          </a:ln>
-        </p:spPr>
-        <p:txBody>
-          <a:bodyPr wrap="none" lIns="133350" tIns="0" rIns="133350" bIns="0" rtlCol="0" anchor="ctr">
-            <a:noAutofit/>
-          </a:bodyPr>
-          <a:lstStyle/>
-          <a:p>
-            <a:pPr algn="l"/>
-            <a:r>
-              <a:rPr sz="1400" b="1">
-                <a:solidFill>
-                  <a:srgbClr val="161616"/>
-                </a:solidFill>
-                <a:latin typeface="Yu Gothic"/>
-                <a:ea typeface="Yu Gothic"/>
-                <a:cs typeface="Yu Gothic"/>
-              </a:rPr>
-              <a:t>ユーザー体験</a:t>
-            </a:r>
-          </a:p>
-        </p:txBody>
-      </p:sp>
+      <p:pic>
+        <p:nvPicPr>
+          <p:cNvPr id="13" name="図 12">
+            <a:extLst>
+              <a:ext uri="{FF2B5EF4-FFF2-40B4-BE49-F238E27FC236}">
+                <a16:creationId xmlns:a16="http://schemas.microsoft.com/office/drawing/2014/main" id="{DC8942D1-8753-FA9C-05AC-E0591C0E104F}"/>
+              </a:ext>
+            </a:extLst>
+          </p:cNvPr>
+          <p:cNvPicPr>
+            <a:picLocks noChangeAspect="1"/>
+          </p:cNvPicPr>
+          <p:nvPr/>
+        </p:nvPicPr>
+        <p:blipFill>
+          <a:blip r:embed="rId4"/>
+          <a:stretch>
+            <a:fillRect/>
+          </a:stretch>
+        </p:blipFill>
+        <p:spPr>
+          <a:xfrm>
+            <a:off x="3363501" y="1453368"/>
+            <a:ext cx="1871534" cy="4004456"/>
+          </a:xfrm>
+          <a:prstGeom prst="rect">
+            <a:avLst/>
+          </a:prstGeom>
+        </p:spPr>
+      </p:pic>
+      <p:pic>
+        <p:nvPicPr>
+          <p:cNvPr id="25" name="図 24">
+            <a:extLst>
+              <a:ext uri="{FF2B5EF4-FFF2-40B4-BE49-F238E27FC236}">
+                <a16:creationId xmlns:a16="http://schemas.microsoft.com/office/drawing/2014/main" id="{74B759DE-BACF-E12F-36A8-80659D5D30D4}"/>
+              </a:ext>
+            </a:extLst>
+          </p:cNvPr>
+          <p:cNvPicPr>
+            <a:picLocks noChangeAspect="1"/>
+          </p:cNvPicPr>
+          <p:nvPr/>
+        </p:nvPicPr>
+        <p:blipFill>
+          <a:blip r:embed="rId5"/>
+          <a:stretch>
+            <a:fillRect/>
+          </a:stretch>
+        </p:blipFill>
+        <p:spPr>
+          <a:xfrm>
+            <a:off x="6192426" y="1453368"/>
+            <a:ext cx="1867013" cy="4004457"/>
+          </a:xfrm>
+          <a:prstGeom prst="rect">
+            <a:avLst/>
+          </a:prstGeom>
+        </p:spPr>
+      </p:pic>
+      <p:pic>
+        <p:nvPicPr>
+          <p:cNvPr id="27" name="図 26">
+            <a:extLst>
+              <a:ext uri="{FF2B5EF4-FFF2-40B4-BE49-F238E27FC236}">
+                <a16:creationId xmlns:a16="http://schemas.microsoft.com/office/drawing/2014/main" id="{81BC9560-96DA-A74D-B2A3-9E8CAC733536}"/>
+              </a:ext>
+            </a:extLst>
+          </p:cNvPr>
+          <p:cNvPicPr>
+            <a:picLocks noChangeAspect="1"/>
+          </p:cNvPicPr>
+          <p:nvPr/>
+        </p:nvPicPr>
+        <p:blipFill>
+          <a:blip r:embed="rId6"/>
+          <a:stretch>
+            <a:fillRect/>
+          </a:stretch>
+        </p:blipFill>
+        <p:spPr>
+          <a:xfrm>
+            <a:off x="9040810" y="1400175"/>
+            <a:ext cx="1844580" cy="3988839"/>
+          </a:xfrm>
+          <a:prstGeom prst="rect">
+            <a:avLst/>
+          </a:prstGeom>
+        </p:spPr>
+      </p:pic>
     </p:spTree>
   </p:cSld>
   <p:clrMapOvr>
@@ -10563,48 +10963,6 @@
           </a:p>
         </p:txBody>
       </p:sp>
-      <p:sp>
-        <p:nvSpPr>
-          <p:cNvPr id="48" name="Section label"/>
-          <p:cNvSpPr/>
-          <p:nvPr/>
-        </p:nvSpPr>
-        <p:spPr>
-          <a:xfrm>
-            <a:off x="609600" y="76200"/>
-            <a:ext cx="1733550" cy="304800"/>
-          </a:xfrm>
-          <a:prstGeom prst="rect">
-            <a:avLst/>
-          </a:prstGeom>
-          <a:solidFill>
-            <a:srgbClr val="B7C97A"/>
-          </a:solidFill>
-          <a:ln>
-            <a:noFill/>
-          </a:ln>
-        </p:spPr>
-        <p:txBody>
-          <a:bodyPr wrap="none" lIns="133350" tIns="0" rIns="133350" bIns="0" rtlCol="0" anchor="ctr">
-            <a:noAutofit/>
-          </a:bodyPr>
-          <a:lstStyle/>
-          <a:p>
-            <a:pPr algn="l"/>
-            <a:r>
-              <a:rPr sz="1400" b="1">
-                <a:solidFill>
-                  <a:srgbClr val="161616"/>
-                </a:solidFill>
-                <a:latin typeface="Yu Gothic"/>
-                <a:ea typeface="Yu Gothic"/>
-                <a:cs typeface="Yu Gothic"/>
-              </a:rPr>
-              <a:t>AI の振る舞い</a:t>
-            </a:r>
-          </a:p>
-        </p:txBody>
-      </p:sp>
     </p:spTree>
   </p:cSld>
   <p:clrMapOvr>
@@ -13080,48 +13438,6 @@
           </a:p>
         </p:txBody>
       </p:sp>
-      <p:sp>
-        <p:nvSpPr>
-          <p:cNvPr id="68" name="Section label"/>
-          <p:cNvSpPr/>
-          <p:nvPr/>
-        </p:nvSpPr>
-        <p:spPr>
-          <a:xfrm>
-            <a:off x="609600" y="76200"/>
-            <a:ext cx="1009650" cy="304800"/>
-          </a:xfrm>
-          <a:prstGeom prst="rect">
-            <a:avLst/>
-          </a:prstGeom>
-          <a:solidFill>
-            <a:srgbClr val="B7C97A"/>
-          </a:solidFill>
-          <a:ln>
-            <a:noFill/>
-          </a:ln>
-        </p:spPr>
-        <p:txBody>
-          <a:bodyPr wrap="none" lIns="133350" tIns="0" rIns="133350" bIns="0" rtlCol="0" anchor="ctr">
-            <a:noAutofit/>
-          </a:bodyPr>
-          <a:lstStyle/>
-          <a:p>
-            <a:pPr algn="l"/>
-            <a:r>
-              <a:rPr sz="1400" b="1">
-                <a:solidFill>
-                  <a:srgbClr val="161616"/>
-                </a:solidFill>
-                <a:latin typeface="Yu Gothic"/>
-                <a:ea typeface="Yu Gothic"/>
-                <a:cs typeface="Yu Gothic"/>
-              </a:rPr>
-              <a:t>技術構成</a:t>
-            </a:r>
-          </a:p>
-        </p:txBody>
-      </p:sp>
     </p:spTree>
   </p:cSld>
   <p:clrMapOvr>
@@ -14519,14 +14835,14 @@
       </p:sp>
       <p:sp>
         <p:nvSpPr>
-          <p:cNvPr id="33" name="TextBox 32"/>
+          <p:cNvPr id="34" name="TextBox 33"/>
           <p:cNvSpPr txBox="1"/>
           <p:nvPr/>
         </p:nvSpPr>
         <p:spPr>
           <a:xfrm>
-            <a:off x="609600" y="6143625"/>
-            <a:ext cx="8276320" cy="161925"/>
+            <a:off x="609600" y="6481762"/>
+            <a:ext cx="295335" cy="200025"/>
           </a:xfrm>
           <a:prstGeom prst="rect">
             <a:avLst/>
@@ -14541,17 +14857,17 @@
           <a:p>
             <a:pPr algn="l">
               <a:lnSpc>
-                <a:spcPts val="1350"/>
-              </a:lnSpc>
-              <a:spcBef>
-                <a:spcPts val="0"/>
-              </a:spcBef>
-              <a:spcAft>
-                <a:spcPts val="0"/>
-              </a:spcAft>
-            </a:pPr>
-            <a:r>
-              <a:rPr sz="900" b="0" i="0">
+                <a:spcPts val="1687"/>
+              </a:lnSpc>
+              <a:spcBef>
+                <a:spcPts val="0"/>
+              </a:spcBef>
+              <a:spcAft>
+                <a:spcPts val="0"/>
+              </a:spcAft>
+            </a:pPr>
+            <a:r>
+              <a:rPr sz="1100" b="1" i="0">
                 <a:solidFill>
                   <a:srgbClr val="9A9993"/>
                 </a:solidFill>
@@ -14559,21 +14875,21 @@
                 <a:ea typeface="Yu Gothic"/>
                 <a:cs typeface="Yu Gothic"/>
               </a:rPr>
-              <a:t>番号は「外出中の『次どこ行く？』」のページのつまずきに対応／本資料は consulting-pptx-skill（github.com/carnot-tech/consulting-pptx-skill）で作成</a:t>
-            </a:r>
-          </a:p>
-        </p:txBody>
-      </p:sp>
-      <p:sp>
-        <p:nvSpPr>
-          <p:cNvPr id="34" name="TextBox 33"/>
+              <a:t>ima</a:t>
+            </a:r>
+          </a:p>
+        </p:txBody>
+      </p:sp>
+      <p:sp>
+        <p:nvSpPr>
+          <p:cNvPr id="35" name="TextBox 34"/>
           <p:cNvSpPr txBox="1"/>
           <p:nvPr/>
         </p:nvSpPr>
         <p:spPr>
           <a:xfrm>
-            <a:off x="609600" y="6481762"/>
-            <a:ext cx="295335" cy="200025"/>
+            <a:off x="11513641" y="6491288"/>
+            <a:ext cx="90559" cy="180975"/>
           </a:xfrm>
           <a:prstGeom prst="rect">
             <a:avLst/>
@@ -14588,17 +14904,17 @@
           <a:p>
             <a:pPr algn="l">
               <a:lnSpc>
-                <a:spcPts val="1687"/>
-              </a:lnSpc>
-              <a:spcBef>
-                <a:spcPts val="0"/>
-              </a:spcBef>
-              <a:spcAft>
-                <a:spcPts val="0"/>
-              </a:spcAft>
-            </a:pPr>
-            <a:r>
-              <a:rPr sz="1100" b="1" i="0">
+                <a:spcPts val="1462"/>
+              </a:lnSpc>
+              <a:spcBef>
+                <a:spcPts val="0"/>
+              </a:spcBef>
+              <a:spcAft>
+                <a:spcPts val="0"/>
+              </a:spcAft>
+            </a:pPr>
+            <a:r>
+              <a:rPr sz="1000" b="0" i="0">
                 <a:solidFill>
                   <a:srgbClr val="9A9993"/>
                 </a:solidFill>
@@ -14606,1477 +14922,7 @@
                 <a:ea typeface="Yu Gothic"/>
                 <a:cs typeface="Yu Gothic"/>
               </a:rPr>
-              <a:t>ima</a:t>
-            </a:r>
-          </a:p>
-        </p:txBody>
-      </p:sp>
-      <p:sp>
-        <p:nvSpPr>
-          <p:cNvPr id="35" name="TextBox 34"/>
-          <p:cNvSpPr txBox="1"/>
-          <p:nvPr/>
-        </p:nvSpPr>
-        <p:spPr>
-          <a:xfrm>
-            <a:off x="11513641" y="6491288"/>
-            <a:ext cx="90559" cy="180975"/>
-          </a:xfrm>
-          <a:prstGeom prst="rect">
-            <a:avLst/>
-          </a:prstGeom>
-          <a:noFill/>
-        </p:spPr>
-        <p:txBody>
-          <a:bodyPr wrap="none" lIns="0" tIns="0" rIns="0" bIns="0" anchor="t">
-            <a:noAutofit/>
-          </a:bodyPr>
-          <a:lstStyle/>
-          <a:p>
-            <a:pPr algn="l">
-              <a:lnSpc>
-                <a:spcPts val="1462"/>
-              </a:lnSpc>
-              <a:spcBef>
-                <a:spcPts val="0"/>
-              </a:spcBef>
-              <a:spcAft>
-                <a:spcPts val="0"/>
-              </a:spcAft>
-            </a:pPr>
-            <a:r>
-              <a:rPr sz="1000" b="0" i="0">
-                <a:solidFill>
-                  <a:srgbClr val="9A9993"/>
-                </a:solidFill>
-                <a:latin typeface="Yu Gothic"/>
-                <a:ea typeface="Yu Gothic"/>
-                <a:cs typeface="Yu Gothic"/>
-              </a:rPr>
               <a:t>7</a:t>
-            </a:r>
-          </a:p>
-        </p:txBody>
-      </p:sp>
-      <p:sp>
-        <p:nvSpPr>
-          <p:cNvPr id="36" name="Section label"/>
-          <p:cNvSpPr/>
-          <p:nvPr/>
-        </p:nvSpPr>
-        <p:spPr>
-          <a:xfrm>
-            <a:off x="609600" y="76200"/>
-            <a:ext cx="1733550" cy="304800"/>
-          </a:xfrm>
-          <a:prstGeom prst="rect">
-            <a:avLst/>
-          </a:prstGeom>
-          <a:solidFill>
-            <a:srgbClr val="B7C97A"/>
-          </a:solidFill>
-          <a:ln>
-            <a:noFill/>
-          </a:ln>
-        </p:spPr>
-        <p:txBody>
-          <a:bodyPr wrap="none" lIns="133350" tIns="0" rIns="133350" bIns="0" rtlCol="0" anchor="ctr">
-            <a:noAutofit/>
-          </a:bodyPr>
-          <a:lstStyle/>
-          <a:p>
-            <a:pPr algn="l"/>
-            <a:r>
-              <a:rPr sz="1400" b="1">
-                <a:solidFill>
-                  <a:srgbClr val="161616"/>
-                </a:solidFill>
-                <a:latin typeface="Yu Gothic"/>
-                <a:ea typeface="Yu Gothic"/>
-                <a:cs typeface="Yu Gothic"/>
-              </a:rPr>
-              <a:t>今後の開発と展望</a:t>
-            </a:r>
-          </a:p>
-        </p:txBody>
-      </p:sp>
-    </p:spTree>
-  </p:cSld>
-  <p:clrMapOvr>
-    <a:masterClrMapping/>
-  </p:clrMapOvr>
-</p:sld>
-</file>
-
-<file path=ppt/slides/slide9.xml><?xml version="1.0" encoding="utf-8"?>
-<p:sld xmlns:a="http://schemas.openxmlformats.org/drawingml/2006/main" xmlns:p="http://schemas.openxmlformats.org/presentationml/2006/main" xmlns:r="http://schemas.openxmlformats.org/officeDocument/2006/relationships">
-  <p:cSld>
-    <p:bg>
-      <p:bgPr>
-        <a:solidFill>
-          <a:srgbClr val="0C0C0D"/>
-        </a:solidFill>
-        <a:effectLst/>
-      </p:bgPr>
-    </p:bg>
-    <p:spTree>
-      <p:nvGrpSpPr>
-        <p:cNvPr id="1" name=""/>
-        <p:cNvGrpSpPr/>
-        <p:nvPr/>
-      </p:nvGrpSpPr>
-      <p:grpSpPr/>
-      <p:pic>
-        <p:nvPicPr>
-          <p:cNvPr id="2" name="Picture 1" descr="img_1_1.png"/>
-          <p:cNvPicPr>
-            <a:picLocks noChangeAspect="1"/>
-          </p:cNvPicPr>
-          <p:nvPr/>
-        </p:nvPicPr>
-        <p:blipFill>
-          <a:blip r:embed="rId2"/>
-          <a:stretch>
-            <a:fillRect/>
-          </a:stretch>
-        </p:blipFill>
-        <p:spPr>
-          <a:xfrm>
-            <a:off x="10648950" y="209550"/>
-            <a:ext cx="1123950" cy="1123950"/>
-          </a:xfrm>
-          <a:prstGeom prst="rect">
-            <a:avLst/>
-          </a:prstGeom>
-        </p:spPr>
-      </p:pic>
-      <p:sp>
-        <p:nvSpPr>
-          <p:cNvPr id="3" name="Rectangle 2"/>
-          <p:cNvSpPr/>
-          <p:nvPr/>
-        </p:nvSpPr>
-        <p:spPr>
-          <a:xfrm>
-            <a:off x="8781901" y="533400"/>
-            <a:ext cx="1676549" cy="400050"/>
-          </a:xfrm>
-          <a:prstGeom prst="rect">
-            <a:avLst/>
-          </a:prstGeom>
-          <a:solidFill>
-            <a:srgbClr val="1C1C1E"/>
-          </a:solidFill>
-          <a:ln>
-            <a:noFill/>
-          </a:ln>
-        </p:spPr>
-        <p:txBody>
-          <a:bodyPr rtlCol="0" anchor="ctr"/>
-          <a:lstStyle/>
-          <a:p/>
-        </p:txBody>
-      </p:sp>
-      <p:sp>
-        <p:nvSpPr>
-          <p:cNvPr id="4" name="Rectangle 3"/>
-          <p:cNvSpPr/>
-          <p:nvPr/>
-        </p:nvSpPr>
-        <p:spPr>
-          <a:xfrm>
-            <a:off x="10458450" y="742950"/>
-            <a:ext cx="114300" cy="95250"/>
-          </a:xfrm>
-          <a:prstGeom prst="rect">
-            <a:avLst/>
-          </a:prstGeom>
-          <a:solidFill>
-            <a:srgbClr val="1C1C1E"/>
-          </a:solidFill>
-          <a:ln>
-            <a:noFill/>
-          </a:ln>
-        </p:spPr>
-        <p:txBody>
-          <a:bodyPr rtlCol="0" anchor="ctr"/>
-          <a:lstStyle/>
-          <a:p/>
-        </p:txBody>
-      </p:sp>
-      <p:sp>
-        <p:nvSpPr>
-          <p:cNvPr id="5" name="Rectangle 4"/>
-          <p:cNvSpPr/>
-          <p:nvPr/>
-        </p:nvSpPr>
-        <p:spPr>
-          <a:xfrm>
-            <a:off x="10572750" y="828675"/>
-            <a:ext cx="66675" cy="66675"/>
-          </a:xfrm>
-          <a:prstGeom prst="rect">
-            <a:avLst/>
-          </a:prstGeom>
-          <a:solidFill>
-            <a:srgbClr val="1C1C1E"/>
-          </a:solidFill>
-          <a:ln>
-            <a:noFill/>
-          </a:ln>
-        </p:spPr>
-        <p:txBody>
-          <a:bodyPr rtlCol="0" anchor="ctr"/>
-          <a:lstStyle/>
-          <a:p/>
-        </p:txBody>
-      </p:sp>
-      <p:sp>
-        <p:nvSpPr>
-          <p:cNvPr id="6" name="Rectangle 5"/>
-          <p:cNvSpPr/>
-          <p:nvPr/>
-        </p:nvSpPr>
-        <p:spPr>
-          <a:xfrm>
-            <a:off x="609600" y="438150"/>
-            <a:ext cx="1533674" cy="314325"/>
-          </a:xfrm>
-          <a:prstGeom prst="rect">
-            <a:avLst/>
-          </a:prstGeom>
-          <a:solidFill>
-            <a:srgbClr val="B7C97A"/>
-          </a:solidFill>
-          <a:ln>
-            <a:noFill/>
-          </a:ln>
-        </p:spPr>
-        <p:txBody>
-          <a:bodyPr rtlCol="0" anchor="ctr"/>
-          <a:lstStyle/>
-          <a:p/>
-        </p:txBody>
-      </p:sp>
-      <p:pic>
-        <p:nvPicPr>
-          <p:cNvPr id="7" name="Picture 6" descr="img_1_2.png"/>
-          <p:cNvPicPr>
-            <a:picLocks noChangeAspect="1"/>
-          </p:cNvPicPr>
-          <p:nvPr/>
-        </p:nvPicPr>
-        <p:blipFill>
-          <a:blip r:embed="rId3"/>
-          <a:stretch>
-            <a:fillRect/>
-          </a:stretch>
-        </p:blipFill>
-        <p:spPr>
-          <a:xfrm>
-            <a:off x="552450" y="962025"/>
-            <a:ext cx="2095500" cy="1329035"/>
-          </a:xfrm>
-          <a:prstGeom prst="rect">
-            <a:avLst/>
-          </a:prstGeom>
-        </p:spPr>
-      </p:pic>
-      <p:sp>
-        <p:nvSpPr>
-          <p:cNvPr id="8" name="Rectangle 7"/>
-          <p:cNvSpPr/>
-          <p:nvPr/>
-        </p:nvSpPr>
-        <p:spPr>
-          <a:xfrm>
-            <a:off x="609600" y="4498479"/>
-            <a:ext cx="2019300" cy="966788"/>
-          </a:xfrm>
-          <a:prstGeom prst="rect">
-            <a:avLst/>
-          </a:prstGeom>
-          <a:solidFill>
-            <a:srgbClr val="1C1C1E"/>
-          </a:solidFill>
-          <a:ln>
-            <a:noFill/>
-          </a:ln>
-        </p:spPr>
-        <p:txBody>
-          <a:bodyPr rtlCol="0" anchor="ctr"/>
-          <a:lstStyle/>
-          <a:p/>
-        </p:txBody>
-      </p:sp>
-      <p:sp>
-        <p:nvSpPr>
-          <p:cNvPr id="9" name="Rectangle 8"/>
-          <p:cNvSpPr/>
-          <p:nvPr/>
-        </p:nvSpPr>
-        <p:spPr>
-          <a:xfrm>
-            <a:off x="742950" y="4631829"/>
-            <a:ext cx="247650" cy="247650"/>
-          </a:xfrm>
-          <a:prstGeom prst="rect">
-            <a:avLst/>
-          </a:prstGeom>
-          <a:solidFill>
-            <a:srgbClr val="B7C97A"/>
-          </a:solidFill>
-          <a:ln>
-            <a:noFill/>
-          </a:ln>
-        </p:spPr>
-        <p:txBody>
-          <a:bodyPr rtlCol="0" anchor="ctr"/>
-          <a:lstStyle/>
-          <a:p/>
-        </p:txBody>
-      </p:sp>
-      <p:sp>
-        <p:nvSpPr>
-          <p:cNvPr id="10" name="Rectangle 9"/>
-          <p:cNvSpPr/>
-          <p:nvPr/>
-        </p:nvSpPr>
-        <p:spPr>
-          <a:xfrm>
-            <a:off x="2743200" y="4498479"/>
-            <a:ext cx="2019300" cy="966788"/>
-          </a:xfrm>
-          <a:prstGeom prst="rect">
-            <a:avLst/>
-          </a:prstGeom>
-          <a:solidFill>
-            <a:srgbClr val="1C1C1E"/>
-          </a:solidFill>
-          <a:ln>
-            <a:noFill/>
-          </a:ln>
-        </p:spPr>
-        <p:txBody>
-          <a:bodyPr rtlCol="0" anchor="ctr"/>
-          <a:lstStyle/>
-          <a:p/>
-        </p:txBody>
-      </p:sp>
-      <p:sp>
-        <p:nvSpPr>
-          <p:cNvPr id="11" name="Rectangle 10"/>
-          <p:cNvSpPr/>
-          <p:nvPr/>
-        </p:nvSpPr>
-        <p:spPr>
-          <a:xfrm>
-            <a:off x="2876550" y="4631829"/>
-            <a:ext cx="247650" cy="247650"/>
-          </a:xfrm>
-          <a:prstGeom prst="rect">
-            <a:avLst/>
-          </a:prstGeom>
-          <a:solidFill>
-            <a:srgbClr val="B7C97A"/>
-          </a:solidFill>
-          <a:ln>
-            <a:noFill/>
-          </a:ln>
-        </p:spPr>
-        <p:txBody>
-          <a:bodyPr rtlCol="0" anchor="ctr"/>
-          <a:lstStyle/>
-          <a:p/>
-        </p:txBody>
-      </p:sp>
-      <p:sp>
-        <p:nvSpPr>
-          <p:cNvPr id="12" name="Rectangle 11"/>
-          <p:cNvSpPr/>
-          <p:nvPr/>
-        </p:nvSpPr>
-        <p:spPr>
-          <a:xfrm>
-            <a:off x="4876800" y="4498479"/>
-            <a:ext cx="2019300" cy="966788"/>
-          </a:xfrm>
-          <a:prstGeom prst="rect">
-            <a:avLst/>
-          </a:prstGeom>
-          <a:solidFill>
-            <a:srgbClr val="1C1C1E"/>
-          </a:solidFill>
-          <a:ln>
-            <a:noFill/>
-          </a:ln>
-        </p:spPr>
-        <p:txBody>
-          <a:bodyPr rtlCol="0" anchor="ctr"/>
-          <a:lstStyle/>
-          <a:p/>
-        </p:txBody>
-      </p:sp>
-      <p:sp>
-        <p:nvSpPr>
-          <p:cNvPr id="13" name="Rectangle 12"/>
-          <p:cNvSpPr/>
-          <p:nvPr/>
-        </p:nvSpPr>
-        <p:spPr>
-          <a:xfrm>
-            <a:off x="5010150" y="4631829"/>
-            <a:ext cx="247650" cy="247650"/>
-          </a:xfrm>
-          <a:prstGeom prst="rect">
-            <a:avLst/>
-          </a:prstGeom>
-          <a:solidFill>
-            <a:srgbClr val="B7C97A"/>
-          </a:solidFill>
-          <a:ln>
-            <a:noFill/>
-          </a:ln>
-        </p:spPr>
-        <p:txBody>
-          <a:bodyPr rtlCol="0" anchor="ctr"/>
-          <a:lstStyle/>
-          <a:p/>
-        </p:txBody>
-      </p:sp>
-      <p:pic>
-        <p:nvPicPr>
-          <p:cNvPr id="14" name="Picture 13" descr="img_1_3.png"/>
-          <p:cNvPicPr>
-            <a:picLocks noChangeAspect="1"/>
-          </p:cNvPicPr>
-          <p:nvPr/>
-        </p:nvPicPr>
-        <p:blipFill>
-          <a:blip r:embed="rId4"/>
-          <a:stretch>
-            <a:fillRect/>
-          </a:stretch>
-        </p:blipFill>
-        <p:spPr>
-          <a:xfrm>
-            <a:off x="8286750" y="1047750"/>
-            <a:ext cx="2301627" cy="5219700"/>
-          </a:xfrm>
-          <a:prstGeom prst="rect">
-            <a:avLst/>
-          </a:prstGeom>
-        </p:spPr>
-      </p:pic>
-      <p:sp>
-        <p:nvSpPr>
-          <p:cNvPr id="15" name="TextBox 14"/>
-          <p:cNvSpPr txBox="1"/>
-          <p:nvPr/>
-        </p:nvSpPr>
-        <p:spPr>
-          <a:xfrm>
-            <a:off x="8934301" y="619125"/>
-            <a:ext cx="1445669" cy="228600"/>
-          </a:xfrm>
-          <a:prstGeom prst="rect">
-            <a:avLst/>
-          </a:prstGeom>
-          <a:noFill/>
-        </p:spPr>
-        <p:txBody>
-          <a:bodyPr wrap="none" lIns="0" rIns="0" tIns="0" bIns="0" anchor="t">
-            <a:noAutofit/>
-          </a:bodyPr>
-          <a:lstStyle/>
-          <a:p>
-            <a:pPr algn="l">
-              <a:lnSpc>
-                <a:spcPts val="1800"/>
-              </a:lnSpc>
-              <a:spcBef>
-                <a:spcPts val="0"/>
-              </a:spcBef>
-              <a:spcAft>
-                <a:spcPts val="0"/>
-              </a:spcAft>
-            </a:pPr>
-            <a:r>
-              <a:rPr sz="1200" b="1" i="0">
-                <a:solidFill>
-                  <a:srgbClr val="ECEBE6"/>
-                </a:solidFill>
-                <a:latin typeface="Yu Gothic"/>
-                <a:ea typeface="Yu Gothic"/>
-                <a:cs typeface="Yu Gothic"/>
-              </a:rPr>
-              <a:t>いっしょに探すわん</a:t>
-            </a:r>
-          </a:p>
-        </p:txBody>
-      </p:sp>
-      <p:sp>
-        <p:nvSpPr>
-          <p:cNvPr id="16" name="TextBox 15"/>
-          <p:cNvSpPr txBox="1"/>
-          <p:nvPr/>
-        </p:nvSpPr>
-        <p:spPr>
-          <a:xfrm>
-            <a:off x="742950" y="466725"/>
-            <a:ext cx="1336703" cy="257175"/>
-          </a:xfrm>
-          <a:prstGeom prst="rect">
-            <a:avLst/>
-          </a:prstGeom>
-          <a:noFill/>
-        </p:spPr>
-        <p:txBody>
-          <a:bodyPr wrap="none" lIns="0" rIns="0" tIns="0" bIns="0" anchor="t">
-            <a:noAutofit/>
-          </a:bodyPr>
-          <a:lstStyle/>
-          <a:p>
-            <a:pPr algn="l">
-              <a:lnSpc>
-                <a:spcPts val="2137"/>
-              </a:lnSpc>
-              <a:spcBef>
-                <a:spcPts val="0"/>
-              </a:spcBef>
-              <a:spcAft>
-                <a:spcPts val="0"/>
-              </a:spcAft>
-            </a:pPr>
-            <a:r>
-              <a:rPr sz="1400" b="1" i="0">
-                <a:solidFill>
-                  <a:srgbClr val="161616"/>
-                </a:solidFill>
-                <a:latin typeface="Yu Gothic"/>
-                <a:ea typeface="Yu Gothic"/>
-                <a:cs typeface="Yu Gothic"/>
-              </a:rPr>
-              <a:t>プロダクト紹介</a:t>
-            </a:r>
-          </a:p>
-        </p:txBody>
-      </p:sp>
-      <p:sp>
-        <p:nvSpPr>
-          <p:cNvPr id="17" name="Title"/>
-          <p:cNvSpPr txBox="1"/>
-          <p:nvPr/>
-        </p:nvSpPr>
-        <p:spPr>
-          <a:xfrm>
-            <a:off x="609600" y="2491085"/>
-            <a:ext cx="6557010" cy="1030486"/>
-          </a:xfrm>
-          <a:prstGeom prst="rect">
-            <a:avLst/>
-          </a:prstGeom>
-          <a:noFill/>
-        </p:spPr>
-        <p:txBody>
-          <a:bodyPr wrap="none" lIns="0" rIns="0" tIns="0" bIns="0" anchor="t">
-            <a:noAutofit/>
-          </a:bodyPr>
-          <a:lstStyle/>
-          <a:p>
-            <a:pPr algn="l">
-              <a:lnSpc>
-                <a:spcPts val="3990"/>
-              </a:lnSpc>
-              <a:spcBef>
-                <a:spcPts val="0"/>
-              </a:spcBef>
-              <a:spcAft>
-                <a:spcPts val="0"/>
-              </a:spcAft>
-            </a:pPr>
-            <a:r>
-              <a:rPr sz="2850" b="1" i="0">
-                <a:solidFill>
-                  <a:srgbClr val="ECEBE6"/>
-                </a:solidFill>
-                <a:latin typeface="Yu Gothic"/>
-                <a:ea typeface="Yu Gothic"/>
-                <a:cs typeface="Yu Gothic"/>
-              </a:rPr>
-              <a:t>大切な人との「次どこ行く？」を、</a:t>
-            </a:r>
-          </a:p>
-          <a:p>
-            <a:pPr algn="l">
-              <a:lnSpc>
-                <a:spcPts val="3990"/>
-              </a:lnSpc>
-              <a:spcBef>
-                <a:spcPts val="0"/>
-              </a:spcBef>
-              <a:spcAft>
-                <a:spcPts val="0"/>
-              </a:spcAft>
-            </a:pPr>
-            <a:r>
-              <a:rPr sz="2850" b="1" i="0">
-                <a:solidFill>
-                  <a:srgbClr val="ECEBE6"/>
-                </a:solidFill>
-                <a:latin typeface="Yu Gothic"/>
-                <a:ea typeface="Yu Gothic"/>
-                <a:cs typeface="Yu Gothic"/>
-              </a:rPr>
-              <a:t>ima に聞いて決める</a:t>
-            </a:r>
-          </a:p>
-        </p:txBody>
-      </p:sp>
-      <p:sp>
-        <p:nvSpPr>
-          <p:cNvPr id="18" name="TextBox 17"/>
-          <p:cNvSpPr txBox="1"/>
-          <p:nvPr/>
-        </p:nvSpPr>
-        <p:spPr>
-          <a:xfrm>
-            <a:off x="609600" y="3732907"/>
-            <a:ext cx="6557010" cy="530423"/>
-          </a:xfrm>
-          <a:prstGeom prst="rect">
-            <a:avLst/>
-          </a:prstGeom>
-          <a:noFill/>
-        </p:spPr>
-        <p:txBody>
-          <a:bodyPr wrap="none" lIns="0" rIns="0" tIns="0" bIns="0" anchor="t">
-            <a:noAutofit/>
-          </a:bodyPr>
-          <a:lstStyle/>
-          <a:p>
-            <a:pPr algn="l">
-              <a:lnSpc>
-                <a:spcPts val="2227"/>
-              </a:lnSpc>
-              <a:spcBef>
-                <a:spcPts val="0"/>
-              </a:spcBef>
-              <a:spcAft>
-                <a:spcPts val="0"/>
-              </a:spcAft>
-            </a:pPr>
-            <a:r>
-              <a:rPr sz="1350" b="0" i="0">
-                <a:solidFill>
-                  <a:srgbClr val="9A9993"/>
-                </a:solidFill>
-                <a:latin typeface="Yu Gothic"/>
-                <a:ea typeface="Yu Gothic"/>
-                <a:cs typeface="Yu Gothic"/>
-              </a:rPr>
-              <a:t>外出中に希望を伝えるだけで、AI エージェントが近くのお店を</a:t>
-            </a:r>
-          </a:p>
-          <a:p>
-            <a:pPr algn="l">
-              <a:lnSpc>
-                <a:spcPts val="2227"/>
-              </a:lnSpc>
-              <a:spcBef>
-                <a:spcPts val="0"/>
-              </a:spcBef>
-              <a:spcAft>
-                <a:spcPts val="0"/>
-              </a:spcAft>
-            </a:pPr>
-            <a:r>
-              <a:rPr sz="1350" b="0" i="0">
-                <a:solidFill>
-                  <a:srgbClr val="9A9993"/>
-                </a:solidFill>
-                <a:latin typeface="Yu Gothic"/>
-                <a:ea typeface="Yu Gothic"/>
-                <a:cs typeface="Yu Gothic"/>
-              </a:rPr>
-              <a:t>理由付きで3件以内に絞る iPhone アプリ</a:t>
-            </a:r>
-          </a:p>
-        </p:txBody>
-      </p:sp>
-      <p:sp>
-        <p:nvSpPr>
-          <p:cNvPr id="19" name="TextBox 18"/>
-          <p:cNvSpPr txBox="1"/>
-          <p:nvPr/>
-        </p:nvSpPr>
-        <p:spPr>
-          <a:xfrm>
-            <a:off x="1085850" y="4636591"/>
-            <a:ext cx="1361313" cy="238125"/>
-          </a:xfrm>
-          <a:prstGeom prst="rect">
-            <a:avLst/>
-          </a:prstGeom>
-          <a:noFill/>
-        </p:spPr>
-        <p:txBody>
-          <a:bodyPr wrap="none" lIns="0" rIns="0" tIns="0" bIns="0" anchor="t">
-            <a:noAutofit/>
-          </a:bodyPr>
-          <a:lstStyle/>
-          <a:p>
-            <a:pPr algn="l">
-              <a:lnSpc>
-                <a:spcPts val="1912"/>
-              </a:lnSpc>
-              <a:spcBef>
-                <a:spcPts val="0"/>
-              </a:spcBef>
-              <a:spcAft>
-                <a:spcPts val="0"/>
-              </a:spcAft>
-            </a:pPr>
-            <a:r>
-              <a:rPr sz="1300" b="1" i="0">
-                <a:solidFill>
-                  <a:srgbClr val="ECEBE6"/>
-                </a:solidFill>
-                <a:latin typeface="Yu Gothic"/>
-                <a:ea typeface="Yu Gothic"/>
-                <a:cs typeface="Yu Gothic"/>
-              </a:rPr>
-              <a:t>希望を伝えるだけ</a:t>
-            </a:r>
-          </a:p>
-        </p:txBody>
-      </p:sp>
-      <p:sp>
-        <p:nvSpPr>
-          <p:cNvPr id="20" name="TextBox 19"/>
-          <p:cNvSpPr txBox="1"/>
-          <p:nvPr/>
-        </p:nvSpPr>
-        <p:spPr>
-          <a:xfrm>
-            <a:off x="823168" y="4655641"/>
-            <a:ext cx="109597" cy="200025"/>
-          </a:xfrm>
-          <a:prstGeom prst="rect">
-            <a:avLst/>
-          </a:prstGeom>
-          <a:noFill/>
-        </p:spPr>
-        <p:txBody>
-          <a:bodyPr wrap="none" lIns="0" rIns="0" tIns="0" bIns="0" anchor="t">
-            <a:noAutofit/>
-          </a:bodyPr>
-          <a:lstStyle/>
-          <a:p>
-            <a:pPr algn="l">
-              <a:lnSpc>
-                <a:spcPts val="1125"/>
-              </a:lnSpc>
-              <a:spcBef>
-                <a:spcPts val="0"/>
-              </a:spcBef>
-              <a:spcAft>
-                <a:spcPts val="0"/>
-              </a:spcAft>
-            </a:pPr>
-            <a:r>
-              <a:rPr sz="1100" b="1" i="0">
-                <a:solidFill>
-                  <a:srgbClr val="161616"/>
-                </a:solidFill>
-                <a:latin typeface="Yu Gothic"/>
-                <a:ea typeface="Yu Gothic"/>
-                <a:cs typeface="Yu Gothic"/>
-              </a:rPr>
-              <a:t>1</a:t>
-            </a:r>
-          </a:p>
-        </p:txBody>
-      </p:sp>
-      <p:sp>
-        <p:nvSpPr>
-          <p:cNvPr id="21" name="TextBox 20"/>
-          <p:cNvSpPr txBox="1"/>
-          <p:nvPr/>
-        </p:nvSpPr>
-        <p:spPr>
-          <a:xfrm>
-            <a:off x="742950" y="4955679"/>
-            <a:ext cx="1841754" cy="383381"/>
-          </a:xfrm>
-          <a:prstGeom prst="rect">
-            <a:avLst/>
-          </a:prstGeom>
-          <a:noFill/>
-        </p:spPr>
-        <p:txBody>
-          <a:bodyPr wrap="none" lIns="0" rIns="0" tIns="0" bIns="0" anchor="t">
-            <a:noAutofit/>
-          </a:bodyPr>
-          <a:lstStyle/>
-          <a:p>
-            <a:pPr algn="l">
-              <a:lnSpc>
-                <a:spcPts val="1518"/>
-              </a:lnSpc>
-              <a:spcBef>
-                <a:spcPts val="0"/>
-              </a:spcBef>
-              <a:spcAft>
-                <a:spcPts val="0"/>
-              </a:spcAft>
-            </a:pPr>
-            <a:r>
-              <a:rPr sz="1000" b="0" i="0">
-                <a:solidFill>
-                  <a:srgbClr val="9A9993"/>
-                </a:solidFill>
-                <a:latin typeface="Yu Gothic"/>
-                <a:ea typeface="Yu Gothic"/>
-                <a:cs typeface="Yu Gothic"/>
-              </a:rPr>
-              <a:t>書くか、5つの質問に</a:t>
-            </a:r>
-          </a:p>
-          <a:p>
-            <a:pPr algn="l">
-              <a:lnSpc>
-                <a:spcPts val="1518"/>
-              </a:lnSpc>
-              <a:spcBef>
-                <a:spcPts val="0"/>
-              </a:spcBef>
-              <a:spcAft>
-                <a:spcPts val="0"/>
-              </a:spcAft>
-            </a:pPr>
-            <a:r>
-              <a:rPr sz="1000" b="0" i="0">
-                <a:solidFill>
-                  <a:srgbClr val="9A9993"/>
-                </a:solidFill>
-                <a:latin typeface="Yu Gothic"/>
-                <a:ea typeface="Yu Gothic"/>
-                <a:cs typeface="Yu Gothic"/>
-              </a:rPr>
-              <a:t>タップで答える</a:t>
-            </a:r>
-          </a:p>
-        </p:txBody>
-      </p:sp>
-      <p:sp>
-        <p:nvSpPr>
-          <p:cNvPr id="22" name="TextBox 21"/>
-          <p:cNvSpPr txBox="1"/>
-          <p:nvPr/>
-        </p:nvSpPr>
-        <p:spPr>
-          <a:xfrm>
-            <a:off x="3219450" y="4636591"/>
-            <a:ext cx="1128832" cy="238125"/>
-          </a:xfrm>
-          <a:prstGeom prst="rect">
-            <a:avLst/>
-          </a:prstGeom>
-          <a:noFill/>
-        </p:spPr>
-        <p:txBody>
-          <a:bodyPr wrap="none" lIns="0" rIns="0" tIns="0" bIns="0" anchor="t">
-            <a:noAutofit/>
-          </a:bodyPr>
-          <a:lstStyle/>
-          <a:p>
-            <a:pPr algn="l">
-              <a:lnSpc>
-                <a:spcPts val="1912"/>
-              </a:lnSpc>
-              <a:spcBef>
-                <a:spcPts val="0"/>
-              </a:spcBef>
-              <a:spcAft>
-                <a:spcPts val="0"/>
-              </a:spcAft>
-            </a:pPr>
-            <a:r>
-              <a:rPr sz="1300" b="1" i="0">
-                <a:solidFill>
-                  <a:srgbClr val="ECEBE6"/>
-                </a:solidFill>
-                <a:latin typeface="Yu Gothic"/>
-                <a:ea typeface="Yu Gothic"/>
-                <a:cs typeface="Yu Gothic"/>
-              </a:rPr>
-              <a:t>3件以内に絞る</a:t>
-            </a:r>
-          </a:p>
-        </p:txBody>
-      </p:sp>
-      <p:sp>
-        <p:nvSpPr>
-          <p:cNvPr id="23" name="TextBox 22"/>
-          <p:cNvSpPr txBox="1"/>
-          <p:nvPr/>
-        </p:nvSpPr>
-        <p:spPr>
-          <a:xfrm>
-            <a:off x="2956768" y="4655641"/>
-            <a:ext cx="109597" cy="200025"/>
-          </a:xfrm>
-          <a:prstGeom prst="rect">
-            <a:avLst/>
-          </a:prstGeom>
-          <a:noFill/>
-        </p:spPr>
-        <p:txBody>
-          <a:bodyPr wrap="none" lIns="0" rIns="0" tIns="0" bIns="0" anchor="t">
-            <a:noAutofit/>
-          </a:bodyPr>
-          <a:lstStyle/>
-          <a:p>
-            <a:pPr algn="l">
-              <a:lnSpc>
-                <a:spcPts val="1125"/>
-              </a:lnSpc>
-              <a:spcBef>
-                <a:spcPts val="0"/>
-              </a:spcBef>
-              <a:spcAft>
-                <a:spcPts val="0"/>
-              </a:spcAft>
-            </a:pPr>
-            <a:r>
-              <a:rPr sz="1100" b="1" i="0">
-                <a:solidFill>
-                  <a:srgbClr val="161616"/>
-                </a:solidFill>
-                <a:latin typeface="Yu Gothic"/>
-                <a:ea typeface="Yu Gothic"/>
-                <a:cs typeface="Yu Gothic"/>
-              </a:rPr>
-              <a:t>2</a:t>
-            </a:r>
-          </a:p>
-        </p:txBody>
-      </p:sp>
-      <p:sp>
-        <p:nvSpPr>
-          <p:cNvPr id="24" name="TextBox 23"/>
-          <p:cNvSpPr txBox="1"/>
-          <p:nvPr/>
-        </p:nvSpPr>
-        <p:spPr>
-          <a:xfrm>
-            <a:off x="2876550" y="4955679"/>
-            <a:ext cx="1841754" cy="383381"/>
-          </a:xfrm>
-          <a:prstGeom prst="rect">
-            <a:avLst/>
-          </a:prstGeom>
-          <a:noFill/>
-        </p:spPr>
-        <p:txBody>
-          <a:bodyPr wrap="none" lIns="0" rIns="0" tIns="0" bIns="0" anchor="t">
-            <a:noAutofit/>
-          </a:bodyPr>
-          <a:lstStyle/>
-          <a:p>
-            <a:pPr algn="l">
-              <a:lnSpc>
-                <a:spcPts val="1518"/>
-              </a:lnSpc>
-              <a:spcBef>
-                <a:spcPts val="0"/>
-              </a:spcBef>
-              <a:spcAft>
-                <a:spcPts val="0"/>
-              </a:spcAft>
-            </a:pPr>
-            <a:r>
-              <a:rPr sz="1000" b="0" i="0">
-                <a:solidFill>
-                  <a:srgbClr val="9A9993"/>
-                </a:solidFill>
-                <a:latin typeface="Yu Gothic"/>
-                <a:ea typeface="Yu Gothic"/>
-                <a:cs typeface="Yu Gothic"/>
-              </a:rPr>
-              <a:t>主提案1件と</a:t>
-            </a:r>
-          </a:p>
-          <a:p>
-            <a:pPr algn="l">
-              <a:lnSpc>
-                <a:spcPts val="1518"/>
-              </a:lnSpc>
-              <a:spcBef>
-                <a:spcPts val="0"/>
-              </a:spcBef>
-              <a:spcAft>
-                <a:spcPts val="0"/>
-              </a:spcAft>
-            </a:pPr>
-            <a:r>
-              <a:rPr sz="1000" b="0" i="0">
-                <a:solidFill>
-                  <a:srgbClr val="9A9993"/>
-                </a:solidFill>
-                <a:latin typeface="Yu Gothic"/>
-                <a:ea typeface="Yu Gothic"/>
-                <a:cs typeface="Yu Gothic"/>
-              </a:rPr>
-              <a:t>別案最大2件</a:t>
-            </a:r>
-          </a:p>
-        </p:txBody>
-      </p:sp>
-      <p:sp>
-        <p:nvSpPr>
-          <p:cNvPr id="25" name="TextBox 24"/>
-          <p:cNvSpPr txBox="1"/>
-          <p:nvPr/>
-        </p:nvSpPr>
-        <p:spPr>
-          <a:xfrm>
-            <a:off x="5353050" y="4636591"/>
-            <a:ext cx="1197864" cy="238125"/>
-          </a:xfrm>
-          <a:prstGeom prst="rect">
-            <a:avLst/>
-          </a:prstGeom>
-          <a:noFill/>
-        </p:spPr>
-        <p:txBody>
-          <a:bodyPr wrap="none" lIns="0" rIns="0" tIns="0" bIns="0" anchor="t">
-            <a:noAutofit/>
-          </a:bodyPr>
-          <a:lstStyle/>
-          <a:p>
-            <a:pPr algn="l">
-              <a:lnSpc>
-                <a:spcPts val="1912"/>
-              </a:lnSpc>
-              <a:spcBef>
-                <a:spcPts val="0"/>
-              </a:spcBef>
-              <a:spcAft>
-                <a:spcPts val="0"/>
-              </a:spcAft>
-            </a:pPr>
-            <a:r>
-              <a:rPr sz="1300" b="1" i="0">
-                <a:solidFill>
-                  <a:srgbClr val="ECEBE6"/>
-                </a:solidFill>
-                <a:latin typeface="Yu Gothic"/>
-                <a:ea typeface="Yu Gothic"/>
-                <a:cs typeface="Yu Gothic"/>
-              </a:rPr>
-              <a:t>理由つきで届く</a:t>
-            </a:r>
-          </a:p>
-        </p:txBody>
-      </p:sp>
-      <p:sp>
-        <p:nvSpPr>
-          <p:cNvPr id="26" name="TextBox 25"/>
-          <p:cNvSpPr txBox="1"/>
-          <p:nvPr/>
-        </p:nvSpPr>
-        <p:spPr>
-          <a:xfrm>
-            <a:off x="5090368" y="4655641"/>
-            <a:ext cx="109597" cy="200025"/>
-          </a:xfrm>
-          <a:prstGeom prst="rect">
-            <a:avLst/>
-          </a:prstGeom>
-          <a:noFill/>
-        </p:spPr>
-        <p:txBody>
-          <a:bodyPr wrap="none" lIns="0" rIns="0" tIns="0" bIns="0" anchor="t">
-            <a:noAutofit/>
-          </a:bodyPr>
-          <a:lstStyle/>
-          <a:p>
-            <a:pPr algn="l">
-              <a:lnSpc>
-                <a:spcPts val="1125"/>
-              </a:lnSpc>
-              <a:spcBef>
-                <a:spcPts val="0"/>
-              </a:spcBef>
-              <a:spcAft>
-                <a:spcPts val="0"/>
-              </a:spcAft>
-            </a:pPr>
-            <a:r>
-              <a:rPr sz="1100" b="1" i="0">
-                <a:solidFill>
-                  <a:srgbClr val="161616"/>
-                </a:solidFill>
-                <a:latin typeface="Yu Gothic"/>
-                <a:ea typeface="Yu Gothic"/>
-                <a:cs typeface="Yu Gothic"/>
-              </a:rPr>
-              <a:t>3</a:t>
-            </a:r>
-          </a:p>
-        </p:txBody>
-      </p:sp>
-      <p:sp>
-        <p:nvSpPr>
-          <p:cNvPr id="27" name="TextBox 26"/>
-          <p:cNvSpPr txBox="1"/>
-          <p:nvPr/>
-        </p:nvSpPr>
-        <p:spPr>
-          <a:xfrm>
-            <a:off x="5010150" y="4955679"/>
-            <a:ext cx="1841754" cy="383381"/>
-          </a:xfrm>
-          <a:prstGeom prst="rect">
-            <a:avLst/>
-          </a:prstGeom>
-          <a:noFill/>
-        </p:spPr>
-        <p:txBody>
-          <a:bodyPr wrap="none" lIns="0" rIns="0" tIns="0" bIns="0" anchor="t">
-            <a:noAutofit/>
-          </a:bodyPr>
-          <a:lstStyle/>
-          <a:p>
-            <a:pPr algn="l">
-              <a:lnSpc>
-                <a:spcPts val="1518"/>
-              </a:lnSpc>
-              <a:spcBef>
-                <a:spcPts val="0"/>
-              </a:spcBef>
-              <a:spcAft>
-                <a:spcPts val="0"/>
-              </a:spcAft>
-            </a:pPr>
-            <a:r>
-              <a:rPr sz="1000" b="0" i="0">
-                <a:solidFill>
-                  <a:srgbClr val="9A9993"/>
-                </a:solidFill>
-                <a:latin typeface="Yu Gothic"/>
-                <a:ea typeface="Yu Gothic"/>
-                <a:cs typeface="Yu Gothic"/>
-              </a:rPr>
-              <a:t>重視した希望と</a:t>
-            </a:r>
-          </a:p>
-          <a:p>
-            <a:pPr algn="l">
-              <a:lnSpc>
-                <a:spcPts val="1518"/>
-              </a:lnSpc>
-              <a:spcBef>
-                <a:spcPts val="0"/>
-              </a:spcBef>
-              <a:spcAft>
-                <a:spcPts val="0"/>
-              </a:spcAft>
-            </a:pPr>
-            <a:r>
-              <a:rPr sz="1000" b="0" i="0">
-                <a:solidFill>
-                  <a:srgbClr val="9A9993"/>
-                </a:solidFill>
-                <a:latin typeface="Yu Gothic"/>
-                <a:ea typeface="Yu Gothic"/>
-                <a:cs typeface="Yu Gothic"/>
-              </a:rPr>
-              <a:t>合う店舗情報を添える</a:t>
-            </a:r>
-          </a:p>
-        </p:txBody>
-      </p:sp>
-      <p:sp>
-        <p:nvSpPr>
-          <p:cNvPr id="28" name="TextBox 27"/>
-          <p:cNvSpPr txBox="1"/>
-          <p:nvPr/>
-        </p:nvSpPr>
-        <p:spPr>
-          <a:xfrm>
-            <a:off x="609600" y="5808166"/>
-            <a:ext cx="573786" cy="190500"/>
-          </a:xfrm>
-          <a:prstGeom prst="rect">
-            <a:avLst/>
-          </a:prstGeom>
-          <a:noFill/>
-        </p:spPr>
-        <p:txBody>
-          <a:bodyPr wrap="none" lIns="0" rIns="0" tIns="0" bIns="0" anchor="t">
-            <a:noAutofit/>
-          </a:bodyPr>
-          <a:lstStyle/>
-          <a:p>
-            <a:pPr algn="l">
-              <a:lnSpc>
-                <a:spcPts val="1575"/>
-              </a:lnSpc>
-              <a:spcBef>
-                <a:spcPts val="0"/>
-              </a:spcBef>
-              <a:spcAft>
-                <a:spcPts val="0"/>
-              </a:spcAft>
-            </a:pPr>
-            <a:r>
-              <a:rPr sz="1050" b="0" i="0">
-                <a:solidFill>
-                  <a:srgbClr val="9A9993"/>
-                </a:solidFill>
-                <a:latin typeface="Yu Gothic"/>
-                <a:ea typeface="Yu Gothic"/>
-                <a:cs typeface="Yu Gothic"/>
-              </a:rPr>
-              <a:t>対応端末</a:t>
-            </a:r>
-          </a:p>
-        </p:txBody>
-      </p:sp>
-      <p:sp>
-        <p:nvSpPr>
-          <p:cNvPr id="29" name="TextBox 28"/>
-          <p:cNvSpPr txBox="1"/>
-          <p:nvPr/>
-        </p:nvSpPr>
-        <p:spPr>
-          <a:xfrm>
-            <a:off x="1428750" y="5808166"/>
-            <a:ext cx="474726" cy="190500"/>
-          </a:xfrm>
-          <a:prstGeom prst="rect">
-            <a:avLst/>
-          </a:prstGeom>
-          <a:noFill/>
-        </p:spPr>
-        <p:txBody>
-          <a:bodyPr wrap="none" lIns="0" rIns="0" tIns="0" bIns="0" anchor="t">
-            <a:noAutofit/>
-          </a:bodyPr>
-          <a:lstStyle/>
-          <a:p>
-            <a:pPr algn="l">
-              <a:lnSpc>
-                <a:spcPts val="1575"/>
-              </a:lnSpc>
-              <a:spcBef>
-                <a:spcPts val="0"/>
-              </a:spcBef>
-              <a:spcAft>
-                <a:spcPts val="0"/>
-              </a:spcAft>
-            </a:pPr>
-            <a:r>
-              <a:rPr sz="1050" b="0" i="0">
-                <a:solidFill>
-                  <a:srgbClr val="ECEBE6"/>
-                </a:solidFill>
-                <a:latin typeface="Yu Gothic"/>
-                <a:ea typeface="Yu Gothic"/>
-                <a:cs typeface="Yu Gothic"/>
-              </a:rPr>
-              <a:t>iPhone</a:t>
-            </a:r>
-          </a:p>
-        </p:txBody>
-      </p:sp>
-      <p:sp>
-        <p:nvSpPr>
-          <p:cNvPr id="30" name="TextBox 29"/>
-          <p:cNvSpPr txBox="1"/>
-          <p:nvPr/>
-        </p:nvSpPr>
-        <p:spPr>
-          <a:xfrm>
-            <a:off x="609600" y="6055816"/>
-            <a:ext cx="712470" cy="190500"/>
-          </a:xfrm>
-          <a:prstGeom prst="rect">
-            <a:avLst/>
-          </a:prstGeom>
-          <a:noFill/>
-        </p:spPr>
-        <p:txBody>
-          <a:bodyPr wrap="none" lIns="0" rIns="0" tIns="0" bIns="0" anchor="t">
-            <a:noAutofit/>
-          </a:bodyPr>
-          <a:lstStyle/>
-          <a:p>
-            <a:pPr algn="l">
-              <a:lnSpc>
-                <a:spcPts val="1575"/>
-              </a:lnSpc>
-              <a:spcBef>
-                <a:spcPts val="0"/>
-              </a:spcBef>
-              <a:spcAft>
-                <a:spcPts val="0"/>
-              </a:spcAft>
-            </a:pPr>
-            <a:r>
-              <a:rPr sz="1050" b="0" i="0">
-                <a:solidFill>
-                  <a:srgbClr val="9A9993"/>
-                </a:solidFill>
-                <a:latin typeface="Yu Gothic"/>
-                <a:ea typeface="Yu Gothic"/>
-                <a:cs typeface="Yu Gothic"/>
-              </a:rPr>
-              <a:t>店舗データ</a:t>
-            </a:r>
-          </a:p>
-        </p:txBody>
-      </p:sp>
-      <p:sp>
-        <p:nvSpPr>
-          <p:cNvPr id="31" name="TextBox 30"/>
-          <p:cNvSpPr txBox="1"/>
-          <p:nvPr/>
-        </p:nvSpPr>
-        <p:spPr>
-          <a:xfrm>
-            <a:off x="1428750" y="6055816"/>
-            <a:ext cx="4727805" cy="190500"/>
-          </a:xfrm>
-          <a:prstGeom prst="rect">
-            <a:avLst/>
-          </a:prstGeom>
-          <a:noFill/>
-        </p:spPr>
-        <p:txBody>
-          <a:bodyPr wrap="none" lIns="0" rIns="0" tIns="0" bIns="0" anchor="t">
-            <a:noAutofit/>
-          </a:bodyPr>
-          <a:lstStyle/>
-          <a:p>
-            <a:pPr algn="l">
-              <a:lnSpc>
-                <a:spcPts val="1575"/>
-              </a:lnSpc>
-              <a:spcBef>
-                <a:spcPts val="0"/>
-              </a:spcBef>
-              <a:spcAft>
-                <a:spcPts val="0"/>
-              </a:spcAft>
-            </a:pPr>
-            <a:r>
-              <a:rPr sz="1050" b="0" i="0">
-                <a:solidFill>
-                  <a:srgbClr val="ECEBE6"/>
-                </a:solidFill>
-                <a:latin typeface="Yu Gothic"/>
-                <a:ea typeface="Yu Gothic"/>
-                <a:cs typeface="Yu Gothic"/>
-              </a:rPr>
-              <a:t>ホットペッパーグルメ（Powered by ホットペッパーグルメ Webサービス）</a:t>
-            </a:r>
-          </a:p>
-        </p:txBody>
-      </p:sp>
-      <p:sp>
-        <p:nvSpPr>
-          <p:cNvPr id="32" name="TextBox 31"/>
-          <p:cNvSpPr txBox="1"/>
-          <p:nvPr/>
-        </p:nvSpPr>
-        <p:spPr>
-          <a:xfrm>
-            <a:off x="609600" y="6303466"/>
-            <a:ext cx="296418" cy="190500"/>
-          </a:xfrm>
-          <a:prstGeom prst="rect">
-            <a:avLst/>
-          </a:prstGeom>
-          <a:noFill/>
-        </p:spPr>
-        <p:txBody>
-          <a:bodyPr wrap="none" lIns="0" rIns="0" tIns="0" bIns="0" anchor="t">
-            <a:noAutofit/>
-          </a:bodyPr>
-          <a:lstStyle/>
-          <a:p>
-            <a:pPr algn="l">
-              <a:lnSpc>
-                <a:spcPts val="1575"/>
-              </a:lnSpc>
-              <a:spcBef>
-                <a:spcPts val="0"/>
-              </a:spcBef>
-              <a:spcAft>
-                <a:spcPts val="0"/>
-              </a:spcAft>
-            </a:pPr>
-            <a:r>
-              <a:rPr sz="1050" b="0" i="0">
-                <a:solidFill>
-                  <a:srgbClr val="9A9993"/>
-                </a:solidFill>
-                <a:latin typeface="Yu Gothic"/>
-                <a:ea typeface="Yu Gothic"/>
-                <a:cs typeface="Yu Gothic"/>
-              </a:rPr>
-              <a:t>提案</a:t>
-            </a:r>
-          </a:p>
-        </p:txBody>
-      </p:sp>
-      <p:sp>
-        <p:nvSpPr>
-          <p:cNvPr id="33" name="TextBox 32"/>
-          <p:cNvSpPr txBox="1"/>
-          <p:nvPr/>
-        </p:nvSpPr>
-        <p:spPr>
-          <a:xfrm>
-            <a:off x="1428750" y="6303466"/>
-            <a:ext cx="1757089" cy="190500"/>
-          </a:xfrm>
-          <a:prstGeom prst="rect">
-            <a:avLst/>
-          </a:prstGeom>
-          <a:noFill/>
-        </p:spPr>
-        <p:txBody>
-          <a:bodyPr wrap="none" lIns="0" rIns="0" tIns="0" bIns="0" anchor="t">
-            <a:noAutofit/>
-          </a:bodyPr>
-          <a:lstStyle/>
-          <a:p>
-            <a:pPr algn="l">
-              <a:lnSpc>
-                <a:spcPts val="1575"/>
-              </a:lnSpc>
-              <a:spcBef>
-                <a:spcPts val="0"/>
-              </a:spcBef>
-              <a:spcAft>
-                <a:spcPts val="0"/>
-              </a:spcAft>
-            </a:pPr>
-            <a:r>
-              <a:rPr sz="1050" b="0" i="0">
-                <a:solidFill>
-                  <a:srgbClr val="ECEBE6"/>
-                </a:solidFill>
-                <a:latin typeface="Yu Gothic"/>
-                <a:ea typeface="Yu Gothic"/>
-                <a:cs typeface="Yu Gothic"/>
-              </a:rPr>
-              <a:t>AI エージェント（OpenAI）</a:t>
             </a:r>
           </a:p>
         </p:txBody>
